--- a/decks/02-github-pr-control-gradient-mesh.pptx
+++ b/decks/02-github-pr-control-gradient-mesh.pptx
@@ -2,24 +2,24 @@
 <file path=ppt/presentation.xml><?xml version="1.0" encoding="utf-8"?>
 <p:presentation xmlns:p="http://schemas.openxmlformats.org/presentationml/2006/main">
   <p:sldMasterIdLst>
-    <p:sldMasterId xmlns:r="http://schemas.openxmlformats.org/officeDocument/2006/relationships" id="2147483648" r:id="R0c7bc523e06e4689"/>
+    <p:sldMasterId xmlns:r="http://schemas.openxmlformats.org/officeDocument/2006/relationships" id="2147483648" r:id="Rd797f60468514422"/>
   </p:sldMasterIdLst>
   <p:notesMasterIdLst>
-    <p:notesMasterId xmlns:r="http://schemas.openxmlformats.org/officeDocument/2006/relationships" r:id="R1955c9d5cce94927"/>
+    <p:notesMasterId xmlns:r="http://schemas.openxmlformats.org/officeDocument/2006/relationships" r:id="R64f808aa1dbf4bae"/>
   </p:notesMasterIdLst>
   <p:sldIdLst>
-    <p:sldId xmlns:r="http://schemas.openxmlformats.org/officeDocument/2006/relationships" id="256" r:id="R99aae0129cd54958"/>
-    <p:sldId xmlns:r="http://schemas.openxmlformats.org/officeDocument/2006/relationships" id="257" r:id="R24bc316a15ef4950"/>
-    <p:sldId xmlns:r="http://schemas.openxmlformats.org/officeDocument/2006/relationships" id="258" r:id="Re0a6e03718c14aec"/>
-    <p:sldId xmlns:r="http://schemas.openxmlformats.org/officeDocument/2006/relationships" id="259" r:id="R58f1bc2bd528488d"/>
-    <p:sldId xmlns:r="http://schemas.openxmlformats.org/officeDocument/2006/relationships" id="260" r:id="Rc9aaac77e8ba4d88"/>
-    <p:sldId xmlns:r="http://schemas.openxmlformats.org/officeDocument/2006/relationships" id="261" r:id="Rbfa6cf310cac4ea2"/>
-    <p:sldId xmlns:r="http://schemas.openxmlformats.org/officeDocument/2006/relationships" id="262" r:id="R26fad56508cc410d"/>
-    <p:sldId xmlns:r="http://schemas.openxmlformats.org/officeDocument/2006/relationships" id="263" r:id="R4a0a1bf2741847b4"/>
-    <p:sldId xmlns:r="http://schemas.openxmlformats.org/officeDocument/2006/relationships" id="264" r:id="R7427d0e15af44224"/>
-    <p:sldId xmlns:r="http://schemas.openxmlformats.org/officeDocument/2006/relationships" id="265" r:id="Rc46d55a48de540c0"/>
-    <p:sldId xmlns:r="http://schemas.openxmlformats.org/officeDocument/2006/relationships" id="266" r:id="Rfc1b750740ed4bb4"/>
-    <p:sldId xmlns:r="http://schemas.openxmlformats.org/officeDocument/2006/relationships" id="267" r:id="R0da5d2f13b0d4448"/>
+    <p:sldId xmlns:r="http://schemas.openxmlformats.org/officeDocument/2006/relationships" id="256" r:id="R07b21ce3a9704c6d"/>
+    <p:sldId xmlns:r="http://schemas.openxmlformats.org/officeDocument/2006/relationships" id="257" r:id="R42fc23e72f9049d4"/>
+    <p:sldId xmlns:r="http://schemas.openxmlformats.org/officeDocument/2006/relationships" id="258" r:id="R61bda26e84c8463e"/>
+    <p:sldId xmlns:r="http://schemas.openxmlformats.org/officeDocument/2006/relationships" id="259" r:id="R612663f2cd7f4231"/>
+    <p:sldId xmlns:r="http://schemas.openxmlformats.org/officeDocument/2006/relationships" id="260" r:id="Rbf60856d25a44779"/>
+    <p:sldId xmlns:r="http://schemas.openxmlformats.org/officeDocument/2006/relationships" id="261" r:id="R183de95a666d4165"/>
+    <p:sldId xmlns:r="http://schemas.openxmlformats.org/officeDocument/2006/relationships" id="262" r:id="R9ef02ba1e0c24ec5"/>
+    <p:sldId xmlns:r="http://schemas.openxmlformats.org/officeDocument/2006/relationships" id="263" r:id="Re3c326d52f8246d7"/>
+    <p:sldId xmlns:r="http://schemas.openxmlformats.org/officeDocument/2006/relationships" id="264" r:id="Ra75eaa33add24fd7"/>
+    <p:sldId xmlns:r="http://schemas.openxmlformats.org/officeDocument/2006/relationships" id="265" r:id="R13591e2f95894550"/>
+    <p:sldId xmlns:r="http://schemas.openxmlformats.org/officeDocument/2006/relationships" id="266" r:id="R801ab96bd41f4ff2"/>
+    <p:sldId xmlns:r="http://schemas.openxmlformats.org/officeDocument/2006/relationships" id="267" r:id="R27206342158e4de1"/>
   </p:sldIdLst>
   <p:sldSz cx="12192000" cy="6858000"/>
   <p:notesSz cx="6858000" cy="9144000"/>
@@ -1292,7 +1292,7 @@
   </p:cSld>
   <p:clrMap bg1="lt1" tx1="dk1" bg2="lt2" tx2="dk2" accent1="accent1" accent2="accent2" accent3="accent3" accent4="accent4" accent5="accent5" accent6="accent6" hlink="hlink" folHlink="folHlink"/>
   <p:sldLayoutIdLst>
-    <p:sldLayoutId xmlns:r="http://schemas.openxmlformats.org/officeDocument/2006/relationships" id="2147483649" r:id="Rcdef4d4b3fb44a6d"/>
+    <p:sldLayoutId xmlns:r="http://schemas.openxmlformats.org/officeDocument/2006/relationships" id="2147483649" r:id="R31169c06da3843a5"/>
   </p:sldLayoutIdLst>
   <p:txStyles>
     <p:titleStyle>
@@ -1591,7 +1591,7 @@
           <p:cNvPr id="1" name="">
             <a:extLst xmlns:a="http://schemas.openxmlformats.org/drawingml/2006/main">
               <a:ext uri="{FF2B5EF4-FFF2-40B4-BE49-F238E27FC236}">
-                <a16:creationId xmlns:a16="http://schemas.microsoft.com/office/drawing/2014/main" id="{02C0CB7A-3A16-4FD3-B3AE-6AE0147136E4}"/>
+                <a16:creationId xmlns:a16="http://schemas.microsoft.com/office/drawing/2014/main" id="{26591760-B50F-43CB-A23B-5A7A2C4DFE0B}"/>
               </a:ext>
             </a:extLst>
           </p:cNvPr>
@@ -1640,7 +1640,7 @@
           <p:cNvPr id="2" name="">
             <a:extLst xmlns:a="http://schemas.openxmlformats.org/drawingml/2006/main">
               <a:ext uri="{FF2B5EF4-FFF2-40B4-BE49-F238E27FC236}">
-                <a16:creationId xmlns:a16="http://schemas.microsoft.com/office/drawing/2014/main" id="{581B97C8-45C7-4F55-8505-D4E035198768}"/>
+                <a16:creationId xmlns:a16="http://schemas.microsoft.com/office/drawing/2014/main" id="{D9F3697D-A9F6-4607-9F3D-769136D93720}"/>
               </a:ext>
             </a:extLst>
           </p:cNvPr>
@@ -1677,7 +1677,7 @@
           <p:cNvPr id="3" name="page-marker">
             <a:extLst xmlns:a="http://schemas.openxmlformats.org/drawingml/2006/main">
               <a:ext uri="{FF2B5EF4-FFF2-40B4-BE49-F238E27FC236}">
-                <a16:creationId xmlns:a16="http://schemas.microsoft.com/office/drawing/2014/main" id="{98A45449-AF47-4CE0-9599-B64B4A409866}"/>
+                <a16:creationId xmlns:a16="http://schemas.microsoft.com/office/drawing/2014/main" id="{E9E63B3A-68D9-45D6-BE90-B1C0A9D29EF5}"/>
               </a:ext>
             </a:extLst>
           </p:cNvPr>
@@ -1741,7 +1741,7 @@
           <p:cNvPr id="4" name="">
             <a:extLst xmlns:a="http://schemas.openxmlformats.org/drawingml/2006/main">
               <a:ext uri="{FF2B5EF4-FFF2-40B4-BE49-F238E27FC236}">
-                <a16:creationId xmlns:a16="http://schemas.microsoft.com/office/drawing/2014/main" id="{C47136CE-6457-442A-BCB7-0D067C69D5AF}"/>
+                <a16:creationId xmlns:a16="http://schemas.microsoft.com/office/drawing/2014/main" id="{194F4D48-1FCF-4B49-B271-59F8E72046B8}"/>
               </a:ext>
             </a:extLst>
           </p:cNvPr>
@@ -1805,7 +1805,7 @@
           <p:cNvPr id="5" name="">
             <a:extLst xmlns:a="http://schemas.openxmlformats.org/drawingml/2006/main">
               <a:ext uri="{FF2B5EF4-FFF2-40B4-BE49-F238E27FC236}">
-                <a16:creationId xmlns:a16="http://schemas.microsoft.com/office/drawing/2014/main" id="{AA02F19E-5E0A-4585-85B3-19A48BB49A41}"/>
+                <a16:creationId xmlns:a16="http://schemas.microsoft.com/office/drawing/2014/main" id="{112D726B-B2B8-4064-AEDA-93C86B87B85B}"/>
               </a:ext>
             </a:extLst>
           </p:cNvPr>
@@ -1859,7 +1859,7 @@
                 <a:ea typeface="Arial"/>
                 <a:cs typeface="Arial"/>
               </a:rPr>
-              <a:t>Agent 시대의 안전장치는 PR이다</a:t>
+              <a:t>PR로 agent 작업을 통제한다</a:t>
             </a:r>
           </a:p>
         </p:txBody>
@@ -1869,7 +1869,7 @@
           <p:cNvPr id="6" name="">
             <a:extLst xmlns:a="http://schemas.openxmlformats.org/drawingml/2006/main">
               <a:ext uri="{FF2B5EF4-FFF2-40B4-BE49-F238E27FC236}">
-                <a16:creationId xmlns:a16="http://schemas.microsoft.com/office/drawing/2014/main" id="{13795741-F838-4CFD-BDA9-25B4591247DE}"/>
+                <a16:creationId xmlns:a16="http://schemas.microsoft.com/office/drawing/2014/main" id="{93BC0251-25DC-4117-94FE-9DFB96CF4034}"/>
               </a:ext>
             </a:extLst>
           </p:cNvPr>
@@ -1933,7 +1933,7 @@
           <p:cNvPr id="7" name="">
             <a:extLst xmlns:a="http://schemas.openxmlformats.org/drawingml/2006/main">
               <a:ext uri="{FF2B5EF4-FFF2-40B4-BE49-F238E27FC236}">
-                <a16:creationId xmlns:a16="http://schemas.microsoft.com/office/drawing/2014/main" id="{6AE5DBA9-F938-4C0A-9AC5-0EE5AF41612F}"/>
+                <a16:creationId xmlns:a16="http://schemas.microsoft.com/office/drawing/2014/main" id="{AF200422-7E87-45A7-BB69-7C46D8EA28E0}"/>
               </a:ext>
             </a:extLst>
           </p:cNvPr>
@@ -1970,7 +1970,7 @@
           <p:cNvPr id="8" name="">
             <a:extLst xmlns:a="http://schemas.openxmlformats.org/drawingml/2006/main">
               <a:ext uri="{FF2B5EF4-FFF2-40B4-BE49-F238E27FC236}">
-                <a16:creationId xmlns:a16="http://schemas.microsoft.com/office/drawing/2014/main" id="{59958F21-9041-43ED-AD23-0FA94E46E447}"/>
+                <a16:creationId xmlns:a16="http://schemas.microsoft.com/office/drawing/2014/main" id="{AEC0C5E9-F45C-4483-B52A-ECCC785DF9B7}"/>
               </a:ext>
             </a:extLst>
           </p:cNvPr>
@@ -2034,7 +2034,7 @@
           <p:cNvPr id="9" name="">
             <a:extLst xmlns:a="http://schemas.openxmlformats.org/drawingml/2006/main">
               <a:ext uri="{FF2B5EF4-FFF2-40B4-BE49-F238E27FC236}">
-                <a16:creationId xmlns:a16="http://schemas.microsoft.com/office/drawing/2014/main" id="{1E9E89EA-80B3-469B-805B-97C453B3B303}"/>
+                <a16:creationId xmlns:a16="http://schemas.microsoft.com/office/drawing/2014/main" id="{5C271EF9-8538-4935-97C2-8E35AB3C40B6}"/>
               </a:ext>
             </a:extLst>
           </p:cNvPr>
@@ -2167,7 +2167,7 @@
           <p:cNvPr id="10" name="footer-note">
             <a:extLst xmlns:a="http://schemas.openxmlformats.org/drawingml/2006/main">
               <a:ext uri="{FF2B5EF4-FFF2-40B4-BE49-F238E27FC236}">
-                <a16:creationId xmlns:a16="http://schemas.microsoft.com/office/drawing/2014/main" id="{A3F76FB8-1D2C-45D5-8B0C-D9EB8B498D12}"/>
+                <a16:creationId xmlns:a16="http://schemas.microsoft.com/office/drawing/2014/main" id="{7FF47827-0E90-4C91-8789-5FEAD47300C0}"/>
               </a:ext>
             </a:extLst>
           </p:cNvPr>
@@ -2229,7 +2229,7 @@
     </p:spTree>
     <p:extLst>
       <p:ext uri="{BB962C8B-B14F-4D97-AF65-F5344CB8AC3E}">
-        <p14:creationId xmlns:p14="http://schemas.microsoft.com/office/powerpoint/2010/main" val="992607753"/>
+        <p14:creationId xmlns:p14="http://schemas.microsoft.com/office/powerpoint/2010/main" val="228197825"/>
       </p:ext>
     </p:extLst>
   </p:cSld>
@@ -2253,7 +2253,7 @@
           <p:cNvPr id="1" name="">
             <a:extLst xmlns:a="http://schemas.openxmlformats.org/drawingml/2006/main">
               <a:ext uri="{FF2B5EF4-FFF2-40B4-BE49-F238E27FC236}">
-                <a16:creationId xmlns:a16="http://schemas.microsoft.com/office/drawing/2014/main" id="{E1CCEA0D-184C-40EC-808B-942F3F26CF0F}"/>
+                <a16:creationId xmlns:a16="http://schemas.microsoft.com/office/drawing/2014/main" id="{7B59D278-B937-45C9-B584-E8FF430A93C6}"/>
               </a:ext>
             </a:extLst>
           </p:cNvPr>
@@ -2302,7 +2302,7 @@
           <p:cNvPr id="2" name="">
             <a:extLst xmlns:a="http://schemas.openxmlformats.org/drawingml/2006/main">
               <a:ext uri="{FF2B5EF4-FFF2-40B4-BE49-F238E27FC236}">
-                <a16:creationId xmlns:a16="http://schemas.microsoft.com/office/drawing/2014/main" id="{785D72FF-96D2-45DD-A595-FA415D639F48}"/>
+                <a16:creationId xmlns:a16="http://schemas.microsoft.com/office/drawing/2014/main" id="{C941FDB9-FCB9-42F6-8DD2-B2B3B9B1A5A5}"/>
               </a:ext>
             </a:extLst>
           </p:cNvPr>
@@ -2339,7 +2339,7 @@
           <p:cNvPr id="3" name="kicker-marker">
             <a:extLst xmlns:a="http://schemas.openxmlformats.org/drawingml/2006/main">
               <a:ext uri="{FF2B5EF4-FFF2-40B4-BE49-F238E27FC236}">
-                <a16:creationId xmlns:a16="http://schemas.microsoft.com/office/drawing/2014/main" id="{DF7A40AA-8DDF-408F-A43F-E53D6A3EBD39}"/>
+                <a16:creationId xmlns:a16="http://schemas.microsoft.com/office/drawing/2014/main" id="{644C08A2-1228-441C-A7EA-CB4228A017F0}"/>
               </a:ext>
             </a:extLst>
           </p:cNvPr>
@@ -2374,7 +2374,7 @@
           <p:cNvPr id="4" name="kicker-label">
             <a:extLst xmlns:a="http://schemas.openxmlformats.org/drawingml/2006/main">
               <a:ext uri="{FF2B5EF4-FFF2-40B4-BE49-F238E27FC236}">
-                <a16:creationId xmlns:a16="http://schemas.microsoft.com/office/drawing/2014/main" id="{7A2CB608-3073-4E38-B52A-A75B5E90F365}"/>
+                <a16:creationId xmlns:a16="http://schemas.microsoft.com/office/drawing/2014/main" id="{53E3D16B-1EE6-4B0D-A95C-740DDB12BD57}"/>
               </a:ext>
             </a:extLst>
           </p:cNvPr>
@@ -2438,7 +2438,7 @@
           <p:cNvPr id="5" name="">
             <a:extLst xmlns:a="http://schemas.openxmlformats.org/drawingml/2006/main">
               <a:ext uri="{FF2B5EF4-FFF2-40B4-BE49-F238E27FC236}">
-                <a16:creationId xmlns:a16="http://schemas.microsoft.com/office/drawing/2014/main" id="{D06647AE-E59E-4D78-9AC2-F9C2C3F4C068}"/>
+                <a16:creationId xmlns:a16="http://schemas.microsoft.com/office/drawing/2014/main" id="{7889AF79-99A6-40E9-8F74-F1324C458B64}"/>
               </a:ext>
             </a:extLst>
           </p:cNvPr>
@@ -2473,7 +2473,7 @@
           <p:cNvPr id="6" name="claim-title">
             <a:extLst xmlns:a="http://schemas.openxmlformats.org/drawingml/2006/main">
               <a:ext uri="{FF2B5EF4-FFF2-40B4-BE49-F238E27FC236}">
-                <a16:creationId xmlns:a16="http://schemas.microsoft.com/office/drawing/2014/main" id="{DE013EB9-A9AB-4C16-90A1-45340610EBB5}"/>
+                <a16:creationId xmlns:a16="http://schemas.microsoft.com/office/drawing/2014/main" id="{30296847-1A93-4B95-A5B0-73B4E6FCFFF0}"/>
               </a:ext>
             </a:extLst>
           </p:cNvPr>
@@ -2537,7 +2537,7 @@
           <p:cNvPr id="7" name="support-note">
             <a:extLst xmlns:a="http://schemas.openxmlformats.org/drawingml/2006/main">
               <a:ext uri="{FF2B5EF4-FFF2-40B4-BE49-F238E27FC236}">
-                <a16:creationId xmlns:a16="http://schemas.microsoft.com/office/drawing/2014/main" id="{95D26AF6-CBDF-4082-AEAC-456202349597}"/>
+                <a16:creationId xmlns:a16="http://schemas.microsoft.com/office/drawing/2014/main" id="{BD728E80-7578-4164-8A1C-069D7F7ACBC3}"/>
               </a:ext>
             </a:extLst>
           </p:cNvPr>
@@ -2601,7 +2601,7 @@
           <p:cNvPr id="8" name="page-marker">
             <a:extLst xmlns:a="http://schemas.openxmlformats.org/drawingml/2006/main">
               <a:ext uri="{FF2B5EF4-FFF2-40B4-BE49-F238E27FC236}">
-                <a16:creationId xmlns:a16="http://schemas.microsoft.com/office/drawing/2014/main" id="{2F4D11E4-2575-4162-BF70-CE3783B512F8}"/>
+                <a16:creationId xmlns:a16="http://schemas.microsoft.com/office/drawing/2014/main" id="{AF6EEAC7-6A3B-41CD-9A20-2EC2FD238BDB}"/>
               </a:ext>
             </a:extLst>
           </p:cNvPr>
@@ -2665,7 +2665,7 @@
           <p:cNvPr id="9" name="">
             <a:extLst xmlns:a="http://schemas.openxmlformats.org/drawingml/2006/main">
               <a:ext uri="{FF2B5EF4-FFF2-40B4-BE49-F238E27FC236}">
-                <a16:creationId xmlns:a16="http://schemas.microsoft.com/office/drawing/2014/main" id="{EC2FD947-1273-4AD9-BFB8-F8DCCEE9B32E}"/>
+                <a16:creationId xmlns:a16="http://schemas.microsoft.com/office/drawing/2014/main" id="{D27DCBD7-3DA6-4A1C-88D8-5F82DF63912A}"/>
               </a:ext>
             </a:extLst>
           </p:cNvPr>
@@ -2702,7 +2702,7 @@
           <p:cNvPr id="10" name="">
             <a:extLst xmlns:a="http://schemas.openxmlformats.org/drawingml/2006/main">
               <a:ext uri="{FF2B5EF4-FFF2-40B4-BE49-F238E27FC236}">
-                <a16:creationId xmlns:a16="http://schemas.microsoft.com/office/drawing/2014/main" id="{BF1DAD34-E41E-4FD0-AFA7-5FAAFF1DE98A}"/>
+                <a16:creationId xmlns:a16="http://schemas.microsoft.com/office/drawing/2014/main" id="{703129E0-134F-4DE9-8DD7-3620AD18A0BC}"/>
               </a:ext>
             </a:extLst>
           </p:cNvPr>
@@ -2766,7 +2766,7 @@
           <p:cNvPr id="11" name="">
             <a:extLst xmlns:a="http://schemas.openxmlformats.org/drawingml/2006/main">
               <a:ext uri="{FF2B5EF4-FFF2-40B4-BE49-F238E27FC236}">
-                <a16:creationId xmlns:a16="http://schemas.microsoft.com/office/drawing/2014/main" id="{575DCFF3-9DEA-4F05-9A90-DE46790154CD}"/>
+                <a16:creationId xmlns:a16="http://schemas.microsoft.com/office/drawing/2014/main" id="{64C10618-61A2-49B0-95E4-9D8E9DD4D36B}"/>
               </a:ext>
             </a:extLst>
           </p:cNvPr>
@@ -2876,7 +2876,7 @@
           <p:cNvPr id="12" name="">
             <a:extLst xmlns:a="http://schemas.openxmlformats.org/drawingml/2006/main">
               <a:ext uri="{FF2B5EF4-FFF2-40B4-BE49-F238E27FC236}">
-                <a16:creationId xmlns:a16="http://schemas.microsoft.com/office/drawing/2014/main" id="{B0CA0243-FAE2-423C-87EC-E1D29B3BAD64}"/>
+                <a16:creationId xmlns:a16="http://schemas.microsoft.com/office/drawing/2014/main" id="{C39CD1E5-9E18-4BF3-89C2-55D58F330FEF}"/>
               </a:ext>
             </a:extLst>
           </p:cNvPr>
@@ -2913,7 +2913,7 @@
           <p:cNvPr id="13" name="">
             <a:extLst xmlns:a="http://schemas.openxmlformats.org/drawingml/2006/main">
               <a:ext uri="{FF2B5EF4-FFF2-40B4-BE49-F238E27FC236}">
-                <a16:creationId xmlns:a16="http://schemas.microsoft.com/office/drawing/2014/main" id="{CC663522-D098-4A27-A8C8-E087770B7297}"/>
+                <a16:creationId xmlns:a16="http://schemas.microsoft.com/office/drawing/2014/main" id="{A0EED1F6-95E6-42D8-8A1F-3FE319D05A39}"/>
               </a:ext>
             </a:extLst>
           </p:cNvPr>
@@ -2977,7 +2977,7 @@
           <p:cNvPr id="14" name="">
             <a:extLst xmlns:a="http://schemas.openxmlformats.org/drawingml/2006/main">
               <a:ext uri="{FF2B5EF4-FFF2-40B4-BE49-F238E27FC236}">
-                <a16:creationId xmlns:a16="http://schemas.microsoft.com/office/drawing/2014/main" id="{942A3A0F-0E1F-4B8B-A385-4A57F770455E}"/>
+                <a16:creationId xmlns:a16="http://schemas.microsoft.com/office/drawing/2014/main" id="{46E93DFC-B7C1-41E9-93B8-8C9712F218E2}"/>
               </a:ext>
             </a:extLst>
           </p:cNvPr>
@@ -3064,7 +3064,7 @@
           <p:cNvPr id="15" name="">
             <a:extLst xmlns:a="http://schemas.openxmlformats.org/drawingml/2006/main">
               <a:ext uri="{FF2B5EF4-FFF2-40B4-BE49-F238E27FC236}">
-                <a16:creationId xmlns:a16="http://schemas.microsoft.com/office/drawing/2014/main" id="{FA8BB105-BFA3-40EA-B9BA-202EF58C1F2A}"/>
+                <a16:creationId xmlns:a16="http://schemas.microsoft.com/office/drawing/2014/main" id="{D7C76802-5904-492F-92A5-C01E962BBBB8}"/>
               </a:ext>
             </a:extLst>
           </p:cNvPr>
@@ -3101,7 +3101,7 @@
           <p:cNvPr id="16" name="">
             <a:extLst xmlns:a="http://schemas.openxmlformats.org/drawingml/2006/main">
               <a:ext uri="{FF2B5EF4-FFF2-40B4-BE49-F238E27FC236}">
-                <a16:creationId xmlns:a16="http://schemas.microsoft.com/office/drawing/2014/main" id="{88124D82-2D4F-4BAA-A6A7-AAE9957FE3CF}"/>
+                <a16:creationId xmlns:a16="http://schemas.microsoft.com/office/drawing/2014/main" id="{098168DC-A206-437F-853E-C0103EE1DCF0}"/>
               </a:ext>
             </a:extLst>
           </p:cNvPr>
@@ -3165,7 +3165,7 @@
           <p:cNvPr id="17" name="">
             <a:extLst xmlns:a="http://schemas.openxmlformats.org/drawingml/2006/main">
               <a:ext uri="{FF2B5EF4-FFF2-40B4-BE49-F238E27FC236}">
-                <a16:creationId xmlns:a16="http://schemas.microsoft.com/office/drawing/2014/main" id="{0FFFCD56-AA9B-4597-A292-53FE878E385A}"/>
+                <a16:creationId xmlns:a16="http://schemas.microsoft.com/office/drawing/2014/main" id="{4BE2CFF6-AA19-4BF7-9F84-F21D8077F5AF}"/>
               </a:ext>
             </a:extLst>
           </p:cNvPr>
@@ -3298,7 +3298,7 @@
           <p:cNvPr id="18" name="">
             <a:extLst xmlns:a="http://schemas.openxmlformats.org/drawingml/2006/main">
               <a:ext uri="{FF2B5EF4-FFF2-40B4-BE49-F238E27FC236}">
-                <a16:creationId xmlns:a16="http://schemas.microsoft.com/office/drawing/2014/main" id="{92EF45DE-132F-4628-AAD1-20164933569B}"/>
+                <a16:creationId xmlns:a16="http://schemas.microsoft.com/office/drawing/2014/main" id="{B793B149-2910-4B39-960C-133EDADA8230}"/>
               </a:ext>
             </a:extLst>
           </p:cNvPr>
@@ -3362,7 +3362,7 @@
           <p:cNvPr id="19" name="footer-note">
             <a:extLst xmlns:a="http://schemas.openxmlformats.org/drawingml/2006/main">
               <a:ext uri="{FF2B5EF4-FFF2-40B4-BE49-F238E27FC236}">
-                <a16:creationId xmlns:a16="http://schemas.microsoft.com/office/drawing/2014/main" id="{F48A187D-6EC9-4F3B-9A4C-8C8C2148C228}"/>
+                <a16:creationId xmlns:a16="http://schemas.microsoft.com/office/drawing/2014/main" id="{EAFABA81-723C-408F-AF16-68ADEBF507CB}"/>
               </a:ext>
             </a:extLst>
           </p:cNvPr>
@@ -3424,7 +3424,7 @@
     </p:spTree>
     <p:extLst>
       <p:ext uri="{BB962C8B-B14F-4D97-AF65-F5344CB8AC3E}">
-        <p14:creationId xmlns:p14="http://schemas.microsoft.com/office/powerpoint/2010/main" val="515366521"/>
+        <p14:creationId xmlns:p14="http://schemas.microsoft.com/office/powerpoint/2010/main" val="1685781203"/>
       </p:ext>
     </p:extLst>
   </p:cSld>
@@ -3448,7 +3448,7 @@
           <p:cNvPr id="1" name="">
             <a:extLst xmlns:a="http://schemas.openxmlformats.org/drawingml/2006/main">
               <a:ext uri="{FF2B5EF4-FFF2-40B4-BE49-F238E27FC236}">
-                <a16:creationId xmlns:a16="http://schemas.microsoft.com/office/drawing/2014/main" id="{CF8FC8AB-4B93-435A-A9E7-86C8024559F4}"/>
+                <a16:creationId xmlns:a16="http://schemas.microsoft.com/office/drawing/2014/main" id="{0F64189F-913C-441F-9CB7-73B8E371D636}"/>
               </a:ext>
             </a:extLst>
           </p:cNvPr>
@@ -3497,7 +3497,7 @@
           <p:cNvPr id="2" name="">
             <a:extLst xmlns:a="http://schemas.openxmlformats.org/drawingml/2006/main">
               <a:ext uri="{FF2B5EF4-FFF2-40B4-BE49-F238E27FC236}">
-                <a16:creationId xmlns:a16="http://schemas.microsoft.com/office/drawing/2014/main" id="{C8E0CF88-021B-497B-B9FB-1B77235B3BE5}"/>
+                <a16:creationId xmlns:a16="http://schemas.microsoft.com/office/drawing/2014/main" id="{C9BCA13D-6483-4B8E-9381-E8174301BC39}"/>
               </a:ext>
             </a:extLst>
           </p:cNvPr>
@@ -3534,7 +3534,7 @@
           <p:cNvPr id="3" name="kicker-marker">
             <a:extLst xmlns:a="http://schemas.openxmlformats.org/drawingml/2006/main">
               <a:ext uri="{FF2B5EF4-FFF2-40B4-BE49-F238E27FC236}">
-                <a16:creationId xmlns:a16="http://schemas.microsoft.com/office/drawing/2014/main" id="{CA663850-502F-4963-9D25-D5E64F1AA4DF}"/>
+                <a16:creationId xmlns:a16="http://schemas.microsoft.com/office/drawing/2014/main" id="{E1EC55FD-0395-43D9-A07A-ED856769BD06}"/>
               </a:ext>
             </a:extLst>
           </p:cNvPr>
@@ -3569,7 +3569,7 @@
           <p:cNvPr id="4" name="kicker-label">
             <a:extLst xmlns:a="http://schemas.openxmlformats.org/drawingml/2006/main">
               <a:ext uri="{FF2B5EF4-FFF2-40B4-BE49-F238E27FC236}">
-                <a16:creationId xmlns:a16="http://schemas.microsoft.com/office/drawing/2014/main" id="{3F09EC17-6D25-4444-B955-3AA3045E3367}"/>
+                <a16:creationId xmlns:a16="http://schemas.microsoft.com/office/drawing/2014/main" id="{84A92DA5-49F8-43AA-BD22-86814A2A673E}"/>
               </a:ext>
             </a:extLst>
           </p:cNvPr>
@@ -3633,7 +3633,7 @@
           <p:cNvPr id="5" name="">
             <a:extLst xmlns:a="http://schemas.openxmlformats.org/drawingml/2006/main">
               <a:ext uri="{FF2B5EF4-FFF2-40B4-BE49-F238E27FC236}">
-                <a16:creationId xmlns:a16="http://schemas.microsoft.com/office/drawing/2014/main" id="{4AC7CF04-C9E9-4D3C-A210-092E1A00DAC2}"/>
+                <a16:creationId xmlns:a16="http://schemas.microsoft.com/office/drawing/2014/main" id="{86F39CDC-19BB-4476-8262-BFB1982FB92B}"/>
               </a:ext>
             </a:extLst>
           </p:cNvPr>
@@ -3668,7 +3668,7 @@
           <p:cNvPr id="6" name="claim-title">
             <a:extLst xmlns:a="http://schemas.openxmlformats.org/drawingml/2006/main">
               <a:ext uri="{FF2B5EF4-FFF2-40B4-BE49-F238E27FC236}">
-                <a16:creationId xmlns:a16="http://schemas.microsoft.com/office/drawing/2014/main" id="{C81C989F-0BF6-463B-95F4-378D759D4056}"/>
+                <a16:creationId xmlns:a16="http://schemas.microsoft.com/office/drawing/2014/main" id="{F1610ED2-BC9D-40A4-B746-6DB40F80700C}"/>
               </a:ext>
             </a:extLst>
           </p:cNvPr>
@@ -3732,7 +3732,7 @@
           <p:cNvPr id="7" name="support-note">
             <a:extLst xmlns:a="http://schemas.openxmlformats.org/drawingml/2006/main">
               <a:ext uri="{FF2B5EF4-FFF2-40B4-BE49-F238E27FC236}">
-                <a16:creationId xmlns:a16="http://schemas.microsoft.com/office/drawing/2014/main" id="{A4959C09-3E5B-44D1-BBF9-22671FFADB9D}"/>
+                <a16:creationId xmlns:a16="http://schemas.microsoft.com/office/drawing/2014/main" id="{DC603DCE-F778-46F7-B3F3-F6069F49B11B}"/>
               </a:ext>
             </a:extLst>
           </p:cNvPr>
@@ -3796,7 +3796,7 @@
           <p:cNvPr id="8" name="page-marker">
             <a:extLst xmlns:a="http://schemas.openxmlformats.org/drawingml/2006/main">
               <a:ext uri="{FF2B5EF4-FFF2-40B4-BE49-F238E27FC236}">
-                <a16:creationId xmlns:a16="http://schemas.microsoft.com/office/drawing/2014/main" id="{D79E4275-B0C5-420E-A123-B626D865F27B}"/>
+                <a16:creationId xmlns:a16="http://schemas.microsoft.com/office/drawing/2014/main" id="{C780924C-8640-44EA-97A7-6D650A5A5679}"/>
               </a:ext>
             </a:extLst>
           </p:cNvPr>
@@ -3860,19 +3860,19 @@
           <p:cNvPr id="9" name="">
             <a:extLst xmlns:a="http://schemas.openxmlformats.org/drawingml/2006/main">
               <a:ext uri="{FF2B5EF4-FFF2-40B4-BE49-F238E27FC236}">
-                <a16:creationId xmlns:a16="http://schemas.microsoft.com/office/drawing/2014/main" id="{189F8294-F33D-48C9-A640-220578A411C2}"/>
-              </a:ext>
-            </a:extLst>
-          </p:cNvPr>
-          <p:cNvSpPr>
-            <a:spLocks xmlns:a="http://schemas.openxmlformats.org/drawingml/2006/main" noGrp="1"/>
-          </p:cNvSpPr>
-          <p:nvPr/>
-        </p:nvSpPr>
-        <p:spPr>
-          <a:xfrm xmlns:a="http://schemas.openxmlformats.org/drawingml/2006/main">
-            <a:off x="6267450" y="1143000"/>
-            <a:ext cx="1504950" cy="1162050"/>
+                <a16:creationId xmlns:a16="http://schemas.microsoft.com/office/drawing/2014/main" id="{AA8217B8-B062-46B6-9BFB-3C04837D4A5B}"/>
+              </a:ext>
+            </a:extLst>
+          </p:cNvPr>
+          <p:cNvSpPr>
+            <a:spLocks xmlns:a="http://schemas.openxmlformats.org/drawingml/2006/main" noGrp="1"/>
+          </p:cNvSpPr>
+          <p:nvPr/>
+        </p:nvSpPr>
+        <p:spPr>
+          <a:xfrm xmlns:a="http://schemas.openxmlformats.org/drawingml/2006/main">
+            <a:off x="6572250" y="876300"/>
+            <a:ext cx="2266950" cy="1352550"/>
           </a:xfrm>
           <a:prstGeom xmlns:a="http://schemas.openxmlformats.org/drawingml/2006/main" prst="rect">
             <a:avLst/>
@@ -3897,19 +3897,19 @@
           <p:cNvPr id="10" name="">
             <a:extLst xmlns:a="http://schemas.openxmlformats.org/drawingml/2006/main">
               <a:ext uri="{FF2B5EF4-FFF2-40B4-BE49-F238E27FC236}">
-                <a16:creationId xmlns:a16="http://schemas.microsoft.com/office/drawing/2014/main" id="{7D25AADB-4818-4153-8CC2-DE9013D5725F}"/>
-              </a:ext>
-            </a:extLst>
-          </p:cNvPr>
-          <p:cNvSpPr>
-            <a:spLocks xmlns:a="http://schemas.openxmlformats.org/drawingml/2006/main" noGrp="1"/>
-          </p:cNvSpPr>
-          <p:nvPr/>
-        </p:nvSpPr>
-        <p:spPr>
-          <a:xfrm xmlns:a="http://schemas.openxmlformats.org/drawingml/2006/main">
-            <a:off x="6457950" y="1314450"/>
-            <a:ext cx="1123950" cy="323850"/>
+                <a16:creationId xmlns:a16="http://schemas.microsoft.com/office/drawing/2014/main" id="{C207CB2F-288C-44D1-9A72-0C17CD4F666C}"/>
+              </a:ext>
+            </a:extLst>
+          </p:cNvPr>
+          <p:cNvSpPr>
+            <a:spLocks xmlns:a="http://schemas.openxmlformats.org/drawingml/2006/main" noGrp="1"/>
+          </p:cNvSpPr>
+          <p:nvPr/>
+        </p:nvSpPr>
+        <p:spPr>
+          <a:xfrm xmlns:a="http://schemas.openxmlformats.org/drawingml/2006/main">
+            <a:off x="6762750" y="1047750"/>
+            <a:ext cx="1885950" cy="323850"/>
           </a:xfrm>
           <a:prstGeom xmlns:a="http://schemas.openxmlformats.org/drawingml/2006/main" prst="rect">
             <a:avLst/>
@@ -3951,7 +3951,7 @@
                 <a:ea typeface="Arial"/>
                 <a:cs typeface="Arial"/>
               </a:rPr>
-              <a:t>실패 로그</a:t>
+              <a:t>나쁜 comment</a:t>
             </a:r>
           </a:p>
         </p:txBody>
@@ -3961,19 +3961,19 @@
           <p:cNvPr id="11" name="">
             <a:extLst xmlns:a="http://schemas.openxmlformats.org/drawingml/2006/main">
               <a:ext uri="{FF2B5EF4-FFF2-40B4-BE49-F238E27FC236}">
-                <a16:creationId xmlns:a16="http://schemas.microsoft.com/office/drawing/2014/main" id="{7C82FB17-497C-4BF3-B59C-2BE4ADA90294}"/>
-              </a:ext>
-            </a:extLst>
-          </p:cNvPr>
-          <p:cNvSpPr>
-            <a:spLocks xmlns:a="http://schemas.openxmlformats.org/drawingml/2006/main" noGrp="1"/>
-          </p:cNvSpPr>
-          <p:nvPr/>
-        </p:nvSpPr>
-        <p:spPr>
-          <a:xfrm xmlns:a="http://schemas.openxmlformats.org/drawingml/2006/main">
-            <a:off x="6457950" y="1752600"/>
-            <a:ext cx="1123950" cy="381000"/>
+                <a16:creationId xmlns:a16="http://schemas.microsoft.com/office/drawing/2014/main" id="{48922706-BA21-4787-8E8B-D6CAC0750F68}"/>
+              </a:ext>
+            </a:extLst>
+          </p:cNvPr>
+          <p:cNvSpPr>
+            <a:spLocks xmlns:a="http://schemas.openxmlformats.org/drawingml/2006/main" noGrp="1"/>
+          </p:cNvSpPr>
+          <p:nvPr/>
+        </p:nvSpPr>
+        <p:spPr>
+          <a:xfrm xmlns:a="http://schemas.openxmlformats.org/drawingml/2006/main">
+            <a:off x="6762750" y="1485900"/>
+            <a:ext cx="1885950" cy="571500"/>
           </a:xfrm>
           <a:prstGeom xmlns:a="http://schemas.openxmlformats.org/drawingml/2006/main" prst="rect">
             <a:avLst/>
@@ -3997,25 +3997,25 @@
           <a:lstStyle xmlns:a="http://schemas.openxmlformats.org/drawingml/2006/main"/>
           <a:p xmlns:a="http://schemas.openxmlformats.org/drawingml/2006/main">
             <a:pPr algn="l">
-              <a:defRPr sz="1650" b="0">
-                <a:solidFill>
-                  <a:srgbClr val="F4F0FF"/>
-                </a:solidFill>
-                <a:latin typeface="Arial"/>
-                <a:ea typeface="Arial"/>
-                <a:cs typeface="Arial"/>
-              </a:defRPr>
-            </a:pPr>
-            <a:r>
-              <a:rPr sz="1650" b="0">
-                <a:solidFill>
-                  <a:srgbClr val="F4F0FF"/>
-                </a:solidFill>
-                <a:latin typeface="Arial"/>
-                <a:ea typeface="Arial"/>
-                <a:cs typeface="Arial"/>
-              </a:rPr>
-              <a:t>원인</a:t>
+              <a:defRPr sz="1800" b="0">
+                <a:solidFill>
+                  <a:srgbClr val="F4F0FF"/>
+                </a:solidFill>
+                <a:latin typeface="Arial"/>
+                <a:ea typeface="Arial"/>
+                <a:cs typeface="Arial"/>
+              </a:defRPr>
+            </a:pPr>
+            <a:r>
+              <a:rPr sz="1800" b="0">
+                <a:solidFill>
+                  <a:srgbClr val="F4F0FF"/>
+                </a:solidFill>
+                <a:latin typeface="Arial"/>
+                <a:ea typeface="Arial"/>
+                <a:cs typeface="Arial"/>
+              </a:rPr>
+              <a:t>수정해 주세요</a:t>
             </a:r>
           </a:p>
         </p:txBody>
@@ -4025,19 +4025,19 @@
           <p:cNvPr id="12" name="">
             <a:extLst xmlns:a="http://schemas.openxmlformats.org/drawingml/2006/main">
               <a:ext uri="{FF2B5EF4-FFF2-40B4-BE49-F238E27FC236}">
-                <a16:creationId xmlns:a16="http://schemas.microsoft.com/office/drawing/2014/main" id="{34B9E151-4AEA-4A2A-90FF-12880751240F}"/>
-              </a:ext>
-            </a:extLst>
-          </p:cNvPr>
-          <p:cNvSpPr>
-            <a:spLocks xmlns:a="http://schemas.openxmlformats.org/drawingml/2006/main" noGrp="1"/>
-          </p:cNvSpPr>
-          <p:nvPr/>
-        </p:nvSpPr>
-        <p:spPr>
-          <a:xfrm xmlns:a="http://schemas.openxmlformats.org/drawingml/2006/main">
-            <a:off x="8020050" y="1143000"/>
-            <a:ext cx="1504950" cy="1162050"/>
+                <a16:creationId xmlns:a16="http://schemas.microsoft.com/office/drawing/2014/main" id="{4BDA3BF9-F005-400C-BA2D-F60A7F802A27}"/>
+              </a:ext>
+            </a:extLst>
+          </p:cNvPr>
+          <p:cNvSpPr>
+            <a:spLocks xmlns:a="http://schemas.openxmlformats.org/drawingml/2006/main" noGrp="1"/>
+          </p:cNvSpPr>
+          <p:nvPr/>
+        </p:nvSpPr>
+        <p:spPr>
+          <a:xfrm xmlns:a="http://schemas.openxmlformats.org/drawingml/2006/main">
+            <a:off x="9201150" y="876300"/>
+            <a:ext cx="2457450" cy="1352550"/>
           </a:xfrm>
           <a:prstGeom xmlns:a="http://schemas.openxmlformats.org/drawingml/2006/main" prst="rect">
             <a:avLst/>
@@ -4062,19 +4062,19 @@
           <p:cNvPr id="13" name="">
             <a:extLst xmlns:a="http://schemas.openxmlformats.org/drawingml/2006/main">
               <a:ext uri="{FF2B5EF4-FFF2-40B4-BE49-F238E27FC236}">
-                <a16:creationId xmlns:a16="http://schemas.microsoft.com/office/drawing/2014/main" id="{2487D437-CAE7-45F7-B7E3-421F63D7EDB6}"/>
-              </a:ext>
-            </a:extLst>
-          </p:cNvPr>
-          <p:cNvSpPr>
-            <a:spLocks xmlns:a="http://schemas.openxmlformats.org/drawingml/2006/main" noGrp="1"/>
-          </p:cNvSpPr>
-          <p:nvPr/>
-        </p:nvSpPr>
-        <p:spPr>
-          <a:xfrm xmlns:a="http://schemas.openxmlformats.org/drawingml/2006/main">
-            <a:off x="8210550" y="1314450"/>
-            <a:ext cx="1123950" cy="323850"/>
+                <a16:creationId xmlns:a16="http://schemas.microsoft.com/office/drawing/2014/main" id="{1B80AA21-3D75-4823-8F0C-3763EBAF7A4B}"/>
+              </a:ext>
+            </a:extLst>
+          </p:cNvPr>
+          <p:cNvSpPr>
+            <a:spLocks xmlns:a="http://schemas.openxmlformats.org/drawingml/2006/main" noGrp="1"/>
+          </p:cNvSpPr>
+          <p:nvPr/>
+        </p:nvSpPr>
+        <p:spPr>
+          <a:xfrm xmlns:a="http://schemas.openxmlformats.org/drawingml/2006/main">
+            <a:off x="9391650" y="1047750"/>
+            <a:ext cx="2076450" cy="323850"/>
           </a:xfrm>
           <a:prstGeom xmlns:a="http://schemas.openxmlformats.org/drawingml/2006/main" prst="rect">
             <a:avLst/>
@@ -4116,7 +4116,7 @@
                 <a:ea typeface="Arial"/>
                 <a:cs typeface="Arial"/>
               </a:rPr>
-              <a:t>Diff 근거</a:t>
+              <a:t>좋은 comment</a:t>
             </a:r>
           </a:p>
         </p:txBody>
@@ -4126,19 +4126,19 @@
           <p:cNvPr id="14" name="">
             <a:extLst xmlns:a="http://schemas.openxmlformats.org/drawingml/2006/main">
               <a:ext uri="{FF2B5EF4-FFF2-40B4-BE49-F238E27FC236}">
-                <a16:creationId xmlns:a16="http://schemas.microsoft.com/office/drawing/2014/main" id="{892CA91A-7C8D-4CBE-84ED-E50F90C12500}"/>
-              </a:ext>
-            </a:extLst>
-          </p:cNvPr>
-          <p:cNvSpPr>
-            <a:spLocks xmlns:a="http://schemas.openxmlformats.org/drawingml/2006/main" noGrp="1"/>
-          </p:cNvSpPr>
-          <p:nvPr/>
-        </p:nvSpPr>
-        <p:spPr>
-          <a:xfrm xmlns:a="http://schemas.openxmlformats.org/drawingml/2006/main">
-            <a:off x="8210550" y="1752600"/>
-            <a:ext cx="1123950" cy="381000"/>
+                <a16:creationId xmlns:a16="http://schemas.microsoft.com/office/drawing/2014/main" id="{2F23096B-D79F-4926-9D48-A982A94A9976}"/>
+              </a:ext>
+            </a:extLst>
+          </p:cNvPr>
+          <p:cNvSpPr>
+            <a:spLocks xmlns:a="http://schemas.openxmlformats.org/drawingml/2006/main" noGrp="1"/>
+          </p:cNvSpPr>
+          <p:nvPr/>
+        </p:nvSpPr>
+        <p:spPr>
+          <a:xfrm xmlns:a="http://schemas.openxmlformats.org/drawingml/2006/main">
+            <a:off x="9391650" y="1485900"/>
+            <a:ext cx="2076450" cy="571500"/>
           </a:xfrm>
           <a:prstGeom xmlns:a="http://schemas.openxmlformats.org/drawingml/2006/main" prst="rect">
             <a:avLst/>
@@ -4162,17 +4162,40 @@
           <a:lstStyle xmlns:a="http://schemas.openxmlformats.org/drawingml/2006/main"/>
           <a:p xmlns:a="http://schemas.openxmlformats.org/drawingml/2006/main">
             <a:pPr algn="l">
-              <a:defRPr sz="1650" b="0">
-                <a:solidFill>
-                  <a:srgbClr val="F4F0FF"/>
-                </a:solidFill>
-                <a:latin typeface="Arial"/>
-                <a:ea typeface="Arial"/>
-                <a:cs typeface="Arial"/>
-              </a:defRPr>
-            </a:pPr>
-            <a:r>
-              <a:rPr sz="1650" b="0">
+              <a:defRPr sz="1275" b="0">
+                <a:solidFill>
+                  <a:srgbClr val="F4F0FF"/>
+                </a:solidFill>
+                <a:latin typeface="Arial"/>
+                <a:ea typeface="Arial"/>
+                <a:cs typeface="Arial"/>
+              </a:defRPr>
+            </a:pPr>
+            <a:r>
+              <a:rPr sz="1275" b="0">
+                <a:solidFill>
+                  <a:srgbClr val="F4F0FF"/>
+                </a:solidFill>
+                <a:latin typeface="Arial"/>
+                <a:ea typeface="Arial"/>
+                <a:cs typeface="Arial"/>
+              </a:rPr>
+              <a:t>로그</a:t>
+            </a:r>
+          </a:p>
+          <a:p xmlns:a="http://schemas.openxmlformats.org/drawingml/2006/main">
+            <a:pPr algn="l">
+              <a:defRPr sz="1275" b="0">
+                <a:solidFill>
+                  <a:srgbClr val="F4F0FF"/>
+                </a:solidFill>
+                <a:latin typeface="Arial"/>
+                <a:ea typeface="Arial"/>
+                <a:cs typeface="Arial"/>
+              </a:defRPr>
+            </a:pPr>
+            <a:r>
+              <a:rPr sz="1275" b="0">
                 <a:solidFill>
                   <a:srgbClr val="F4F0FF"/>
                 </a:solidFill>
@@ -4183,6 +4206,29 @@
               <a:t>파일</a:t>
             </a:r>
           </a:p>
+          <a:p xmlns:a="http://schemas.openxmlformats.org/drawingml/2006/main">
+            <a:pPr algn="l">
+              <a:defRPr sz="1275" b="0">
+                <a:solidFill>
+                  <a:srgbClr val="F4F0FF"/>
+                </a:solidFill>
+                <a:latin typeface="Arial"/>
+                <a:ea typeface="Arial"/>
+                <a:cs typeface="Arial"/>
+              </a:defRPr>
+            </a:pPr>
+            <a:r>
+              <a:rPr sz="1275" b="0">
+                <a:solidFill>
+                  <a:srgbClr val="F4F0FF"/>
+                </a:solidFill>
+                <a:latin typeface="Arial"/>
+                <a:ea typeface="Arial"/>
+                <a:cs typeface="Arial"/>
+              </a:rPr>
+              <a:t>기대 행동</a:t>
+            </a:r>
+          </a:p>
         </p:txBody>
       </p:sp>
       <p:sp>
@@ -4190,19 +4236,19 @@
           <p:cNvPr id="15" name="">
             <a:extLst xmlns:a="http://schemas.openxmlformats.org/drawingml/2006/main">
               <a:ext uri="{FF2B5EF4-FFF2-40B4-BE49-F238E27FC236}">
-                <a16:creationId xmlns:a16="http://schemas.microsoft.com/office/drawing/2014/main" id="{BB3C75C1-B335-44A5-9855-42DC5AFBBCBF}"/>
-              </a:ext>
-            </a:extLst>
-          </p:cNvPr>
-          <p:cNvSpPr>
-            <a:spLocks xmlns:a="http://schemas.openxmlformats.org/drawingml/2006/main" noGrp="1"/>
-          </p:cNvSpPr>
-          <p:nvPr/>
-        </p:nvSpPr>
-        <p:spPr>
-          <a:xfrm xmlns:a="http://schemas.openxmlformats.org/drawingml/2006/main">
-            <a:off x="9772650" y="1143000"/>
-            <a:ext cx="1504950" cy="1162050"/>
+                <a16:creationId xmlns:a16="http://schemas.microsoft.com/office/drawing/2014/main" id="{1DF57593-11D8-4668-9CCD-71CEB442B3DD}"/>
+              </a:ext>
+            </a:extLst>
+          </p:cNvPr>
+          <p:cNvSpPr>
+            <a:spLocks xmlns:a="http://schemas.openxmlformats.org/drawingml/2006/main" noGrp="1"/>
+          </p:cNvSpPr>
+          <p:nvPr/>
+        </p:nvSpPr>
+        <p:spPr>
+          <a:xfrm xmlns:a="http://schemas.openxmlformats.org/drawingml/2006/main">
+            <a:off x="6572250" y="2781300"/>
+            <a:ext cx="5086350" cy="1790700"/>
           </a:xfrm>
           <a:prstGeom xmlns:a="http://schemas.openxmlformats.org/drawingml/2006/main" prst="rect">
             <a:avLst/>
@@ -4227,19 +4273,19 @@
           <p:cNvPr id="16" name="">
             <a:extLst xmlns:a="http://schemas.openxmlformats.org/drawingml/2006/main">
               <a:ext uri="{FF2B5EF4-FFF2-40B4-BE49-F238E27FC236}">
-                <a16:creationId xmlns:a16="http://schemas.microsoft.com/office/drawing/2014/main" id="{ED1B34E7-F1BF-4F25-ABFC-A60C49285221}"/>
-              </a:ext>
-            </a:extLst>
-          </p:cNvPr>
-          <p:cNvSpPr>
-            <a:spLocks xmlns:a="http://schemas.openxmlformats.org/drawingml/2006/main" noGrp="1"/>
-          </p:cNvSpPr>
-          <p:nvPr/>
-        </p:nvSpPr>
-        <p:spPr>
-          <a:xfrm xmlns:a="http://schemas.openxmlformats.org/drawingml/2006/main">
-            <a:off x="9963150" y="1314450"/>
-            <a:ext cx="1123950" cy="323850"/>
+                <a16:creationId xmlns:a16="http://schemas.microsoft.com/office/drawing/2014/main" id="{0475A17B-3F02-42FE-BE7F-E85BE39163D9}"/>
+              </a:ext>
+            </a:extLst>
+          </p:cNvPr>
+          <p:cNvSpPr>
+            <a:spLocks xmlns:a="http://schemas.openxmlformats.org/drawingml/2006/main" noGrp="1"/>
+          </p:cNvSpPr>
+          <p:nvPr/>
+        </p:nvSpPr>
+        <p:spPr>
+          <a:xfrm xmlns:a="http://schemas.openxmlformats.org/drawingml/2006/main">
+            <a:off x="6762750" y="2952750"/>
+            <a:ext cx="4705350" cy="323850"/>
           </a:xfrm>
           <a:prstGeom xmlns:a="http://schemas.openxmlformats.org/drawingml/2006/main" prst="rect">
             <a:avLst/>
@@ -4281,7 +4327,7 @@
                 <a:ea typeface="Arial"/>
                 <a:cs typeface="Arial"/>
               </a:rPr>
-              <a:t>Comment</a:t>
+              <a:t>Comment template</a:t>
             </a:r>
           </a:p>
         </p:txBody>
@@ -4291,19 +4337,19 @@
           <p:cNvPr id="17" name="">
             <a:extLst xmlns:a="http://schemas.openxmlformats.org/drawingml/2006/main">
               <a:ext uri="{FF2B5EF4-FFF2-40B4-BE49-F238E27FC236}">
-                <a16:creationId xmlns:a16="http://schemas.microsoft.com/office/drawing/2014/main" id="{3BBEF2BB-9D02-494E-B935-6EAB41DB9C23}"/>
-              </a:ext>
-            </a:extLst>
-          </p:cNvPr>
-          <p:cNvSpPr>
-            <a:spLocks xmlns:a="http://schemas.openxmlformats.org/drawingml/2006/main" noGrp="1"/>
-          </p:cNvSpPr>
-          <p:nvPr/>
-        </p:nvSpPr>
-        <p:spPr>
-          <a:xfrm xmlns:a="http://schemas.openxmlformats.org/drawingml/2006/main">
-            <a:off x="9963150" y="1752600"/>
-            <a:ext cx="1123950" cy="381000"/>
+                <a16:creationId xmlns:a16="http://schemas.microsoft.com/office/drawing/2014/main" id="{D35E5C5C-CE64-46EB-9AF3-485D7AD82EC3}"/>
+              </a:ext>
+            </a:extLst>
+          </p:cNvPr>
+          <p:cNvSpPr>
+            <a:spLocks xmlns:a="http://schemas.openxmlformats.org/drawingml/2006/main" noGrp="1"/>
+          </p:cNvSpPr>
+          <p:nvPr/>
+        </p:nvSpPr>
+        <p:spPr>
+          <a:xfrm xmlns:a="http://schemas.openxmlformats.org/drawingml/2006/main">
+            <a:off x="6762750" y="3390900"/>
+            <a:ext cx="4705350" cy="1009650"/>
           </a:xfrm>
           <a:prstGeom xmlns:a="http://schemas.openxmlformats.org/drawingml/2006/main" prst="rect">
             <a:avLst/>
@@ -4327,25 +4373,71 @@
           <a:lstStyle xmlns:a="http://schemas.openxmlformats.org/drawingml/2006/main"/>
           <a:p xmlns:a="http://schemas.openxmlformats.org/drawingml/2006/main">
             <a:pPr algn="l">
-              <a:defRPr sz="1650" b="0">
-                <a:solidFill>
-                  <a:srgbClr val="F4F0FF"/>
-                </a:solidFill>
-                <a:latin typeface="Arial"/>
-                <a:ea typeface="Arial"/>
-                <a:cs typeface="Arial"/>
-              </a:defRPr>
-            </a:pPr>
-            <a:r>
-              <a:rPr sz="1650" b="0">
-                <a:solidFill>
-                  <a:srgbClr val="F4F0FF"/>
-                </a:solidFill>
-                <a:latin typeface="Arial"/>
-                <a:ea typeface="Arial"/>
-                <a:cs typeface="Arial"/>
-              </a:rPr>
-              <a:t>요청</a:t>
+              <a:defRPr sz="1500" b="0">
+                <a:solidFill>
+                  <a:srgbClr val="F4F0FF"/>
+                </a:solidFill>
+                <a:latin typeface="Arial"/>
+                <a:ea typeface="Arial"/>
+                <a:cs typeface="Arial"/>
+              </a:defRPr>
+            </a:pPr>
+            <a:r>
+              <a:rPr sz="1500" b="0">
+                <a:solidFill>
+                  <a:srgbClr val="F4F0FF"/>
+                </a:solidFill>
+                <a:latin typeface="Arial"/>
+                <a:ea typeface="Arial"/>
+                <a:cs typeface="Arial"/>
+              </a:rPr>
+              <a:t>Checks에서 marker check가 실패했습니다.</a:t>
+            </a:r>
+          </a:p>
+          <a:p xmlns:a="http://schemas.openxmlformats.org/drawingml/2006/main">
+            <a:pPr algn="l">
+              <a:defRPr sz="1500" b="0">
+                <a:solidFill>
+                  <a:srgbClr val="F4F0FF"/>
+                </a:solidFill>
+                <a:latin typeface="Arial"/>
+                <a:ea typeface="Arial"/>
+                <a:cs typeface="Arial"/>
+              </a:defRPr>
+            </a:pPr>
+            <a:r>
+              <a:rPr sz="1500" b="0">
+                <a:solidFill>
+                  <a:srgbClr val="F4F0FF"/>
+                </a:solidFill>
+                <a:latin typeface="Arial"/>
+                <a:ea typeface="Arial"/>
+                <a:cs typeface="Arial"/>
+              </a:rPr>
+              <a:t>index.html의 required marker를 복구하고</a:t>
+            </a:r>
+          </a:p>
+          <a:p xmlns:a="http://schemas.openxmlformats.org/drawingml/2006/main">
+            <a:pPr algn="l">
+              <a:defRPr sz="1500" b="0">
+                <a:solidFill>
+                  <a:srgbClr val="F4F0FF"/>
+                </a:solidFill>
+                <a:latin typeface="Arial"/>
+                <a:ea typeface="Arial"/>
+                <a:cs typeface="Arial"/>
+              </a:defRPr>
+            </a:pPr>
+            <a:r>
+              <a:rPr sz="1500" b="0">
+                <a:solidFill>
+                  <a:srgbClr val="F4F0FF"/>
+                </a:solidFill>
+                <a:latin typeface="Arial"/>
+                <a:ea typeface="Arial"/>
+                <a:cs typeface="Arial"/>
+              </a:rPr>
+              <a:t>PR 범위를 다시 줄여 주세요.</a:t>
             </a:r>
           </a:p>
         </p:txBody>
@@ -4355,56 +4447,19 @@
           <p:cNvPr id="18" name="">
             <a:extLst xmlns:a="http://schemas.openxmlformats.org/drawingml/2006/main">
               <a:ext uri="{FF2B5EF4-FFF2-40B4-BE49-F238E27FC236}">
-                <a16:creationId xmlns:a16="http://schemas.microsoft.com/office/drawing/2014/main" id="{8A6B25DB-9170-4618-97E3-85CD2AA1C583}"/>
-              </a:ext>
-            </a:extLst>
-          </p:cNvPr>
-          <p:cNvSpPr>
-            <a:spLocks xmlns:a="http://schemas.openxmlformats.org/drawingml/2006/main" noGrp="1"/>
-          </p:cNvSpPr>
-          <p:nvPr/>
-        </p:nvSpPr>
-        <p:spPr>
-          <a:xfrm xmlns:a="http://schemas.openxmlformats.org/drawingml/2006/main">
-            <a:off x="6267450" y="3524250"/>
-            <a:ext cx="1504950" cy="1162050"/>
-          </a:xfrm>
-          <a:prstGeom xmlns:a="http://schemas.openxmlformats.org/drawingml/2006/main" prst="rect">
-            <a:avLst/>
-          </a:prstGeom>
-          <a:solidFill xmlns:a="http://schemas.openxmlformats.org/drawingml/2006/main">
-            <a:srgbClr val="111111">
-              <a:alpha val="80000"/>
-            </a:srgbClr>
-          </a:solidFill>
-          <a:ln xmlns:a="http://schemas.openxmlformats.org/drawingml/2006/main" w="9525">
-            <a:solidFill>
-              <a:srgbClr val="FFFFFF">
-                <a:alpha val="20000"/>
-              </a:srgbClr>
-            </a:solidFill>
-            <a:prstDash val="solid"/>
-          </a:ln>
-        </p:spPr>
-      </p:sp>
-      <p:sp>
-        <p:nvSpPr>
-          <p:cNvPr id="19" name="">
-            <a:extLst xmlns:a="http://schemas.openxmlformats.org/drawingml/2006/main">
-              <a:ext uri="{FF2B5EF4-FFF2-40B4-BE49-F238E27FC236}">
-                <a16:creationId xmlns:a16="http://schemas.microsoft.com/office/drawing/2014/main" id="{13185779-A5CB-4775-9E1C-08BEFA582013}"/>
-              </a:ext>
-            </a:extLst>
-          </p:cNvPr>
-          <p:cNvSpPr>
-            <a:spLocks xmlns:a="http://schemas.openxmlformats.org/drawingml/2006/main" noGrp="1"/>
-          </p:cNvSpPr>
-          <p:nvPr/>
-        </p:nvSpPr>
-        <p:spPr>
-          <a:xfrm xmlns:a="http://schemas.openxmlformats.org/drawingml/2006/main">
-            <a:off x="6457950" y="3695700"/>
-            <a:ext cx="1123950" cy="323850"/>
+                <a16:creationId xmlns:a16="http://schemas.microsoft.com/office/drawing/2014/main" id="{B893288C-6DF6-4670-9457-5406AB994244}"/>
+              </a:ext>
+            </a:extLst>
+          </p:cNvPr>
+          <p:cNvSpPr>
+            <a:spLocks xmlns:a="http://schemas.openxmlformats.org/drawingml/2006/main" noGrp="1"/>
+          </p:cNvSpPr>
+          <p:nvPr/>
+        </p:nvSpPr>
+        <p:spPr>
+          <a:xfrm xmlns:a="http://schemas.openxmlformats.org/drawingml/2006/main">
+            <a:off x="6705600" y="5105400"/>
+            <a:ext cx="4762500" cy="438150"/>
           </a:xfrm>
           <a:prstGeom xmlns:a="http://schemas.openxmlformats.org/drawingml/2006/main" prst="rect">
             <a:avLst/>
@@ -4427,412 +4482,36 @@
           <a:bodyPr xmlns:a="http://schemas.openxmlformats.org/drawingml/2006/main" lIns="0" tIns="0" rIns="0" bIns="0" anchor="t"/>
           <a:lstStyle xmlns:a="http://schemas.openxmlformats.org/drawingml/2006/main"/>
           <a:p xmlns:a="http://schemas.openxmlformats.org/drawingml/2006/main">
-            <a:pPr algn="l">
-              <a:defRPr sz="1500" b="1">
-                <a:solidFill>
-                  <a:srgbClr val="FFFFFF"/>
-                </a:solidFill>
-                <a:latin typeface="Arial"/>
-                <a:ea typeface="Arial"/>
-                <a:cs typeface="Arial"/>
-              </a:defRPr>
-            </a:pPr>
-            <a:r>
-              <a:rPr sz="1500" b="1">
-                <a:solidFill>
-                  <a:srgbClr val="FFFFFF"/>
-                </a:solidFill>
-                <a:latin typeface="Arial"/>
-                <a:ea typeface="Arial"/>
-                <a:cs typeface="Arial"/>
-              </a:rPr>
-              <a:t>Agent fix</a:t>
-            </a:r>
-          </a:p>
-        </p:txBody>
-      </p:sp>
-      <p:sp>
-        <p:nvSpPr>
-          <p:cNvPr id="20" name="">
-            <a:extLst xmlns:a="http://schemas.openxmlformats.org/drawingml/2006/main">
-              <a:ext uri="{FF2B5EF4-FFF2-40B4-BE49-F238E27FC236}">
-                <a16:creationId xmlns:a16="http://schemas.microsoft.com/office/drawing/2014/main" id="{950B5A4B-DB22-4D6A-BA7E-EBEBE09B68AB}"/>
-              </a:ext>
-            </a:extLst>
-          </p:cNvPr>
-          <p:cNvSpPr>
-            <a:spLocks xmlns:a="http://schemas.openxmlformats.org/drawingml/2006/main" noGrp="1"/>
-          </p:cNvSpPr>
-          <p:nvPr/>
-        </p:nvSpPr>
-        <p:spPr>
-          <a:xfrm xmlns:a="http://schemas.openxmlformats.org/drawingml/2006/main">
-            <a:off x="6457950" y="4133850"/>
-            <a:ext cx="1123950" cy="381000"/>
-          </a:xfrm>
-          <a:prstGeom xmlns:a="http://schemas.openxmlformats.org/drawingml/2006/main" prst="rect">
-            <a:avLst/>
-          </a:prstGeom>
-          <a:solidFill xmlns:a="http://schemas.openxmlformats.org/drawingml/2006/main">
-            <a:srgbClr val="000000">
-              <a:alpha val="0"/>
-            </a:srgbClr>
-          </a:solidFill>
-          <a:ln xmlns:a="http://schemas.openxmlformats.org/drawingml/2006/main" w="0">
-            <a:solidFill>
-              <a:srgbClr val="000000">
-                <a:alpha val="0"/>
-              </a:srgbClr>
-            </a:solidFill>
-            <a:prstDash val="solid"/>
-          </a:ln>
-        </p:spPr>
-        <p:txBody>
-          <a:bodyPr xmlns:a="http://schemas.openxmlformats.org/drawingml/2006/main" lIns="0" tIns="0" rIns="76200" bIns="0" anchor="t"/>
-          <a:lstStyle xmlns:a="http://schemas.openxmlformats.org/drawingml/2006/main"/>
-          <a:p xmlns:a="http://schemas.openxmlformats.org/drawingml/2006/main">
-            <a:pPr algn="l">
-              <a:defRPr sz="1650" b="0">
-                <a:solidFill>
-                  <a:srgbClr val="F4F0FF"/>
-                </a:solidFill>
-                <a:latin typeface="Arial"/>
-                <a:ea typeface="Arial"/>
-                <a:cs typeface="Arial"/>
-              </a:defRPr>
-            </a:pPr>
-            <a:r>
-              <a:rPr sz="1650" b="0">
-                <a:solidFill>
-                  <a:srgbClr val="F4F0FF"/>
-                </a:solidFill>
-                <a:latin typeface="Arial"/>
-                <a:ea typeface="Arial"/>
-                <a:cs typeface="Arial"/>
-              </a:rPr>
-              <a:t>수정</a:t>
-            </a:r>
-          </a:p>
-        </p:txBody>
-      </p:sp>
-      <p:sp>
-        <p:nvSpPr>
-          <p:cNvPr id="21" name="">
-            <a:extLst xmlns:a="http://schemas.openxmlformats.org/drawingml/2006/main">
-              <a:ext uri="{FF2B5EF4-FFF2-40B4-BE49-F238E27FC236}">
-                <a16:creationId xmlns:a16="http://schemas.microsoft.com/office/drawing/2014/main" id="{34CDBBA3-A192-4BFE-A570-67BA8D7526E1}"/>
-              </a:ext>
-            </a:extLst>
-          </p:cNvPr>
-          <p:cNvSpPr>
-            <a:spLocks xmlns:a="http://schemas.openxmlformats.org/drawingml/2006/main" noGrp="1"/>
-          </p:cNvSpPr>
-          <p:nvPr/>
-        </p:nvSpPr>
-        <p:spPr>
-          <a:xfrm xmlns:a="http://schemas.openxmlformats.org/drawingml/2006/main">
-            <a:off x="8020050" y="3524250"/>
-            <a:ext cx="1504950" cy="1162050"/>
-          </a:xfrm>
-          <a:prstGeom xmlns:a="http://schemas.openxmlformats.org/drawingml/2006/main" prst="rect">
-            <a:avLst/>
-          </a:prstGeom>
-          <a:solidFill xmlns:a="http://schemas.openxmlformats.org/drawingml/2006/main">
-            <a:srgbClr val="111111">
-              <a:alpha val="80000"/>
-            </a:srgbClr>
-          </a:solidFill>
-          <a:ln xmlns:a="http://schemas.openxmlformats.org/drawingml/2006/main" w="9525">
-            <a:solidFill>
-              <a:srgbClr val="FFFFFF">
-                <a:alpha val="20000"/>
-              </a:srgbClr>
-            </a:solidFill>
-            <a:prstDash val="solid"/>
-          </a:ln>
-        </p:spPr>
-      </p:sp>
-      <p:sp>
-        <p:nvSpPr>
-          <p:cNvPr id="22" name="">
-            <a:extLst xmlns:a="http://schemas.openxmlformats.org/drawingml/2006/main">
-              <a:ext uri="{FF2B5EF4-FFF2-40B4-BE49-F238E27FC236}">
-                <a16:creationId xmlns:a16="http://schemas.microsoft.com/office/drawing/2014/main" id="{7D7C5C08-F165-4F9E-8361-3AA473BA3FAE}"/>
-              </a:ext>
-            </a:extLst>
-          </p:cNvPr>
-          <p:cNvSpPr>
-            <a:spLocks xmlns:a="http://schemas.openxmlformats.org/drawingml/2006/main" noGrp="1"/>
-          </p:cNvSpPr>
-          <p:nvPr/>
-        </p:nvSpPr>
-        <p:spPr>
-          <a:xfrm xmlns:a="http://schemas.openxmlformats.org/drawingml/2006/main">
-            <a:off x="8210550" y="3695700"/>
-            <a:ext cx="1123950" cy="323850"/>
-          </a:xfrm>
-          <a:prstGeom xmlns:a="http://schemas.openxmlformats.org/drawingml/2006/main" prst="rect">
-            <a:avLst/>
-          </a:prstGeom>
-          <a:solidFill xmlns:a="http://schemas.openxmlformats.org/drawingml/2006/main">
-            <a:srgbClr val="000000">
-              <a:alpha val="0"/>
-            </a:srgbClr>
-          </a:solidFill>
-          <a:ln xmlns:a="http://schemas.openxmlformats.org/drawingml/2006/main" w="0">
-            <a:solidFill>
-              <a:srgbClr val="000000">
-                <a:alpha val="0"/>
-              </a:srgbClr>
-            </a:solidFill>
-            <a:prstDash val="solid"/>
-          </a:ln>
-        </p:spPr>
-        <p:txBody>
-          <a:bodyPr xmlns:a="http://schemas.openxmlformats.org/drawingml/2006/main" lIns="0" tIns="0" rIns="0" bIns="0" anchor="t"/>
-          <a:lstStyle xmlns:a="http://schemas.openxmlformats.org/drawingml/2006/main"/>
-          <a:p xmlns:a="http://schemas.openxmlformats.org/drawingml/2006/main">
-            <a:pPr algn="l">
-              <a:defRPr sz="1500" b="1">
-                <a:solidFill>
-                  <a:srgbClr val="FFFFFF"/>
-                </a:solidFill>
-                <a:latin typeface="Arial"/>
-                <a:ea typeface="Arial"/>
-                <a:cs typeface="Arial"/>
-              </a:defRPr>
-            </a:pPr>
-            <a:r>
-              <a:rPr sz="1500" b="1">
-                <a:solidFill>
-                  <a:srgbClr val="FFFFFF"/>
-                </a:solidFill>
-                <a:latin typeface="Arial"/>
-                <a:ea typeface="Arial"/>
-                <a:cs typeface="Arial"/>
-              </a:rPr>
-              <a:t>Checks</a:t>
-            </a:r>
-          </a:p>
-        </p:txBody>
-      </p:sp>
-      <p:sp>
-        <p:nvSpPr>
-          <p:cNvPr id="23" name="">
-            <a:extLst xmlns:a="http://schemas.openxmlformats.org/drawingml/2006/main">
-              <a:ext uri="{FF2B5EF4-FFF2-40B4-BE49-F238E27FC236}">
-                <a16:creationId xmlns:a16="http://schemas.microsoft.com/office/drawing/2014/main" id="{AA315B0F-8479-47BE-98E4-E0862722EE30}"/>
-              </a:ext>
-            </a:extLst>
-          </p:cNvPr>
-          <p:cNvSpPr>
-            <a:spLocks xmlns:a="http://schemas.openxmlformats.org/drawingml/2006/main" noGrp="1"/>
-          </p:cNvSpPr>
-          <p:nvPr/>
-        </p:nvSpPr>
-        <p:spPr>
-          <a:xfrm xmlns:a="http://schemas.openxmlformats.org/drawingml/2006/main">
-            <a:off x="8210550" y="4133850"/>
-            <a:ext cx="1123950" cy="381000"/>
-          </a:xfrm>
-          <a:prstGeom xmlns:a="http://schemas.openxmlformats.org/drawingml/2006/main" prst="rect">
-            <a:avLst/>
-          </a:prstGeom>
-          <a:solidFill xmlns:a="http://schemas.openxmlformats.org/drawingml/2006/main">
-            <a:srgbClr val="000000">
-              <a:alpha val="0"/>
-            </a:srgbClr>
-          </a:solidFill>
-          <a:ln xmlns:a="http://schemas.openxmlformats.org/drawingml/2006/main" w="0">
-            <a:solidFill>
-              <a:srgbClr val="000000">
-                <a:alpha val="0"/>
-              </a:srgbClr>
-            </a:solidFill>
-            <a:prstDash val="solid"/>
-          </a:ln>
-        </p:spPr>
-        <p:txBody>
-          <a:bodyPr xmlns:a="http://schemas.openxmlformats.org/drawingml/2006/main" lIns="0" tIns="0" rIns="76200" bIns="0" anchor="t"/>
-          <a:lstStyle xmlns:a="http://schemas.openxmlformats.org/drawingml/2006/main"/>
-          <a:p xmlns:a="http://schemas.openxmlformats.org/drawingml/2006/main">
-            <a:pPr algn="l">
-              <a:defRPr sz="1650" b="0">
-                <a:solidFill>
-                  <a:srgbClr val="F4F0FF"/>
-                </a:solidFill>
-                <a:latin typeface="Arial"/>
-                <a:ea typeface="Arial"/>
-                <a:cs typeface="Arial"/>
-              </a:defRPr>
-            </a:pPr>
-            <a:r>
-              <a:rPr sz="1650" b="0">
-                <a:solidFill>
-                  <a:srgbClr val="F4F0FF"/>
-                </a:solidFill>
-                <a:latin typeface="Arial"/>
-                <a:ea typeface="Arial"/>
-                <a:cs typeface="Arial"/>
-              </a:rPr>
-              <a:t>재검증</a:t>
-            </a:r>
-          </a:p>
-        </p:txBody>
-      </p:sp>
-      <p:sp>
-        <p:nvSpPr>
-          <p:cNvPr id="24" name="">
-            <a:extLst xmlns:a="http://schemas.openxmlformats.org/drawingml/2006/main">
-              <a:ext uri="{FF2B5EF4-FFF2-40B4-BE49-F238E27FC236}">
-                <a16:creationId xmlns:a16="http://schemas.microsoft.com/office/drawing/2014/main" id="{FA7917D1-A6B2-4573-BC54-084B172B8018}"/>
-              </a:ext>
-            </a:extLst>
-          </p:cNvPr>
-          <p:cNvSpPr>
-            <a:spLocks xmlns:a="http://schemas.openxmlformats.org/drawingml/2006/main" noGrp="1"/>
-          </p:cNvSpPr>
-          <p:nvPr/>
-        </p:nvSpPr>
-        <p:spPr>
-          <a:xfrm xmlns:a="http://schemas.openxmlformats.org/drawingml/2006/main">
-            <a:off x="6858000" y="5067300"/>
-            <a:ext cx="4286250" cy="819150"/>
-          </a:xfrm>
-          <a:prstGeom xmlns:a="http://schemas.openxmlformats.org/drawingml/2006/main" prst="rect">
-            <a:avLst/>
-          </a:prstGeom>
-          <a:solidFill xmlns:a="http://schemas.openxmlformats.org/drawingml/2006/main">
-            <a:srgbClr val="111111">
-              <a:alpha val="80000"/>
-            </a:srgbClr>
-          </a:solidFill>
-          <a:ln xmlns:a="http://schemas.openxmlformats.org/drawingml/2006/main" w="9525">
-            <a:solidFill>
-              <a:srgbClr val="FFFFFF">
-                <a:alpha val="20000"/>
-              </a:srgbClr>
-            </a:solidFill>
-            <a:prstDash val="solid"/>
-          </a:ln>
-        </p:spPr>
-      </p:sp>
-      <p:sp>
-        <p:nvSpPr>
-          <p:cNvPr id="25" name="">
-            <a:extLst xmlns:a="http://schemas.openxmlformats.org/drawingml/2006/main">
-              <a:ext uri="{FF2B5EF4-FFF2-40B4-BE49-F238E27FC236}">
-                <a16:creationId xmlns:a16="http://schemas.microsoft.com/office/drawing/2014/main" id="{B7286D59-A1A9-421F-A229-D48AC5075C06}"/>
-              </a:ext>
-            </a:extLst>
-          </p:cNvPr>
-          <p:cNvSpPr>
-            <a:spLocks xmlns:a="http://schemas.openxmlformats.org/drawingml/2006/main" noGrp="1"/>
-          </p:cNvSpPr>
-          <p:nvPr/>
-        </p:nvSpPr>
-        <p:spPr>
-          <a:xfrm xmlns:a="http://schemas.openxmlformats.org/drawingml/2006/main">
-            <a:off x="7048500" y="5238750"/>
-            <a:ext cx="3905250" cy="323850"/>
-          </a:xfrm>
-          <a:prstGeom xmlns:a="http://schemas.openxmlformats.org/drawingml/2006/main" prst="rect">
-            <a:avLst/>
-          </a:prstGeom>
-          <a:solidFill xmlns:a="http://schemas.openxmlformats.org/drawingml/2006/main">
-            <a:srgbClr val="000000">
-              <a:alpha val="0"/>
-            </a:srgbClr>
-          </a:solidFill>
-          <a:ln xmlns:a="http://schemas.openxmlformats.org/drawingml/2006/main" w="0">
-            <a:solidFill>
-              <a:srgbClr val="000000">
-                <a:alpha val="0"/>
-              </a:srgbClr>
-            </a:solidFill>
-            <a:prstDash val="solid"/>
-          </a:ln>
-        </p:spPr>
-        <p:txBody>
-          <a:bodyPr xmlns:a="http://schemas.openxmlformats.org/drawingml/2006/main" lIns="0" tIns="0" rIns="0" bIns="0" anchor="t"/>
-          <a:lstStyle xmlns:a="http://schemas.openxmlformats.org/drawingml/2006/main"/>
-          <a:p xmlns:a="http://schemas.openxmlformats.org/drawingml/2006/main">
-            <a:pPr algn="l">
-              <a:defRPr sz="1500" b="1">
-                <a:solidFill>
-                  <a:srgbClr val="FFFFFF"/>
-                </a:solidFill>
-                <a:latin typeface="Arial"/>
-                <a:ea typeface="Arial"/>
-                <a:cs typeface="Arial"/>
-              </a:defRPr>
-            </a:pPr>
-            <a:r>
-              <a:rPr sz="1500" b="1">
-                <a:solidFill>
-                  <a:srgbClr val="FFFFFF"/>
-                </a:solidFill>
-                <a:latin typeface="Arial"/>
-                <a:ea typeface="Arial"/>
-                <a:cs typeface="Arial"/>
-              </a:rPr>
-              <a:t>로그와 diff 위치를 함께 준다.</a:t>
-            </a:r>
-          </a:p>
-        </p:txBody>
-      </p:sp>
-      <p:sp>
-        <p:nvSpPr>
-          <p:cNvPr id="26" name="">
-            <a:extLst xmlns:a="http://schemas.openxmlformats.org/drawingml/2006/main">
-              <a:ext uri="{FF2B5EF4-FFF2-40B4-BE49-F238E27FC236}">
-                <a16:creationId xmlns:a16="http://schemas.microsoft.com/office/drawing/2014/main" id="{2D3CA4A3-FC0E-44BC-8B29-E2E65F9BE16D}"/>
-              </a:ext>
-            </a:extLst>
-          </p:cNvPr>
-          <p:cNvSpPr>
-            <a:spLocks xmlns:a="http://schemas.openxmlformats.org/drawingml/2006/main" noGrp="1"/>
-          </p:cNvSpPr>
-          <p:nvPr/>
-        </p:nvSpPr>
-        <p:spPr>
-          <a:xfrm xmlns:a="http://schemas.openxmlformats.org/drawingml/2006/main">
-            <a:off x="7048500" y="5676900"/>
-            <a:ext cx="3905250" cy="228600"/>
-          </a:xfrm>
-          <a:prstGeom xmlns:a="http://schemas.openxmlformats.org/drawingml/2006/main" prst="rect">
-            <a:avLst/>
-          </a:prstGeom>
-          <a:solidFill xmlns:a="http://schemas.openxmlformats.org/drawingml/2006/main">
-            <a:srgbClr val="000000">
-              <a:alpha val="0"/>
-            </a:srgbClr>
-          </a:solidFill>
-          <a:ln xmlns:a="http://schemas.openxmlformats.org/drawingml/2006/main" w="0">
-            <a:solidFill>
-              <a:srgbClr val="000000">
-                <a:alpha val="0"/>
-              </a:srgbClr>
-            </a:solidFill>
-            <a:prstDash val="solid"/>
-          </a:ln>
-        </p:spPr>
-        <p:txBody>
-          <a:bodyPr xmlns:a="http://schemas.openxmlformats.org/drawingml/2006/main" lIns="0" tIns="0" rIns="76200" bIns="0" anchor="t"/>
-          <a:lstStyle xmlns:a="http://schemas.openxmlformats.org/drawingml/2006/main"/>
-          <a:p xmlns:a="http://schemas.openxmlformats.org/drawingml/2006/main">
-            <a:r>
-              <a:t/>
-            </a:r>
-          </a:p>
-        </p:txBody>
-      </p:sp>
-      <p:sp>
-        <p:nvSpPr>
-          <p:cNvPr id="27" name="footer-note">
-            <a:extLst xmlns:a="http://schemas.openxmlformats.org/drawingml/2006/main">
-              <a:ext uri="{FF2B5EF4-FFF2-40B4-BE49-F238E27FC236}">
-                <a16:creationId xmlns:a16="http://schemas.microsoft.com/office/drawing/2014/main" id="{9864A6A0-48BC-46A7-A3E7-774C517F8B60}"/>
+            <a:pPr algn="ctr">
+              <a:defRPr sz="2400" b="1">
+                <a:solidFill>
+                  <a:srgbClr val="FFFFFF"/>
+                </a:solidFill>
+                <a:latin typeface="Arial"/>
+                <a:ea typeface="Arial"/>
+                <a:cs typeface="Arial"/>
+              </a:defRPr>
+            </a:pPr>
+            <a:r>
+              <a:rPr sz="2400" b="1">
+                <a:solidFill>
+                  <a:srgbClr val="FFFFFF"/>
+                </a:solidFill>
+                <a:latin typeface="Arial"/>
+                <a:ea typeface="Arial"/>
+                <a:cs typeface="Arial"/>
+              </a:rPr>
+              <a:t>agent가 바로 수정할 수 있게 쓴다</a:t>
+            </a:r>
+          </a:p>
+        </p:txBody>
+      </p:sp>
+      <p:sp>
+        <p:nvSpPr>
+          <p:cNvPr id="19" name="footer-note">
+            <a:extLst xmlns:a="http://schemas.openxmlformats.org/drawingml/2006/main">
+              <a:ext uri="{FF2B5EF4-FFF2-40B4-BE49-F238E27FC236}">
+                <a16:creationId xmlns:a16="http://schemas.microsoft.com/office/drawing/2014/main" id="{0BD4DC0B-AFF1-43C2-BFC1-D5ACE8A46852}"/>
               </a:ext>
             </a:extLst>
           </p:cNvPr>
@@ -4894,7 +4573,7 @@
     </p:spTree>
     <p:extLst>
       <p:ext uri="{BB962C8B-B14F-4D97-AF65-F5344CB8AC3E}">
-        <p14:creationId xmlns:p14="http://schemas.microsoft.com/office/powerpoint/2010/main" val="1605111644"/>
+        <p14:creationId xmlns:p14="http://schemas.microsoft.com/office/powerpoint/2010/main" val="548504060"/>
       </p:ext>
     </p:extLst>
   </p:cSld>
@@ -4918,7 +4597,7 @@
           <p:cNvPr id="1" name="">
             <a:extLst xmlns:a="http://schemas.openxmlformats.org/drawingml/2006/main">
               <a:ext uri="{FF2B5EF4-FFF2-40B4-BE49-F238E27FC236}">
-                <a16:creationId xmlns:a16="http://schemas.microsoft.com/office/drawing/2014/main" id="{9BE905CC-9523-49C2-9F96-59EC33329DF8}"/>
+                <a16:creationId xmlns:a16="http://schemas.microsoft.com/office/drawing/2014/main" id="{B19B3628-1833-4932-97BD-E3EE540BC57C}"/>
               </a:ext>
             </a:extLst>
           </p:cNvPr>
@@ -4967,7 +4646,7 @@
           <p:cNvPr id="2" name="">
             <a:extLst xmlns:a="http://schemas.openxmlformats.org/drawingml/2006/main">
               <a:ext uri="{FF2B5EF4-FFF2-40B4-BE49-F238E27FC236}">
-                <a16:creationId xmlns:a16="http://schemas.microsoft.com/office/drawing/2014/main" id="{9DEF90F8-965F-4262-9627-480C537436F4}"/>
+                <a16:creationId xmlns:a16="http://schemas.microsoft.com/office/drawing/2014/main" id="{83197386-691C-40A1-907B-57A9546BC891}"/>
               </a:ext>
             </a:extLst>
           </p:cNvPr>
@@ -5004,7 +4683,7 @@
           <p:cNvPr id="3" name="kicker-marker">
             <a:extLst xmlns:a="http://schemas.openxmlformats.org/drawingml/2006/main">
               <a:ext uri="{FF2B5EF4-FFF2-40B4-BE49-F238E27FC236}">
-                <a16:creationId xmlns:a16="http://schemas.microsoft.com/office/drawing/2014/main" id="{E56D2389-9F77-4572-AF4B-42FAE715BB68}"/>
+                <a16:creationId xmlns:a16="http://schemas.microsoft.com/office/drawing/2014/main" id="{B8E6B9C8-C35C-4DE6-AF4F-3C0C36483493}"/>
               </a:ext>
             </a:extLst>
           </p:cNvPr>
@@ -5039,7 +4718,7 @@
           <p:cNvPr id="4" name="kicker-label">
             <a:extLst xmlns:a="http://schemas.openxmlformats.org/drawingml/2006/main">
               <a:ext uri="{FF2B5EF4-FFF2-40B4-BE49-F238E27FC236}">
-                <a16:creationId xmlns:a16="http://schemas.microsoft.com/office/drawing/2014/main" id="{F623C2F5-176B-45E5-B0FE-D657215DBA53}"/>
+                <a16:creationId xmlns:a16="http://schemas.microsoft.com/office/drawing/2014/main" id="{C1AF42C7-8F83-4DBE-8012-48245B1A148F}"/>
               </a:ext>
             </a:extLst>
           </p:cNvPr>
@@ -5103,7 +4782,7 @@
           <p:cNvPr id="5" name="">
             <a:extLst xmlns:a="http://schemas.openxmlformats.org/drawingml/2006/main">
               <a:ext uri="{FF2B5EF4-FFF2-40B4-BE49-F238E27FC236}">
-                <a16:creationId xmlns:a16="http://schemas.microsoft.com/office/drawing/2014/main" id="{718F62CC-5BA3-4CC8-B00C-CF491997AA18}"/>
+                <a16:creationId xmlns:a16="http://schemas.microsoft.com/office/drawing/2014/main" id="{D4770847-4902-45E2-8AC1-FDFFDA2BB574}"/>
               </a:ext>
             </a:extLst>
           </p:cNvPr>
@@ -5138,7 +4817,7 @@
           <p:cNvPr id="6" name="claim-title">
             <a:extLst xmlns:a="http://schemas.openxmlformats.org/drawingml/2006/main">
               <a:ext uri="{FF2B5EF4-FFF2-40B4-BE49-F238E27FC236}">
-                <a16:creationId xmlns:a16="http://schemas.microsoft.com/office/drawing/2014/main" id="{C38C5DEE-FCE9-4E25-86D6-FBC97B7A45D3}"/>
+                <a16:creationId xmlns:a16="http://schemas.microsoft.com/office/drawing/2014/main" id="{429A4413-393E-43CC-A2F6-5EB64A5F2C17}"/>
               </a:ext>
             </a:extLst>
           </p:cNvPr>
@@ -5192,7 +4871,7 @@
                 <a:ea typeface="Arial"/>
                 <a:cs typeface="Arial"/>
               </a:rPr>
-              <a:t>PR 하나를 골라 판단 근거를 제출한다</a:t>
+              <a:t>Exit ticket은 판단, 근거, agent comment로 끝낸다</a:t>
             </a:r>
           </a:p>
         </p:txBody>
@@ -5202,7 +4881,7 @@
           <p:cNvPr id="7" name="support-note">
             <a:extLst xmlns:a="http://schemas.openxmlformats.org/drawingml/2006/main">
               <a:ext uri="{FF2B5EF4-FFF2-40B4-BE49-F238E27FC236}">
-                <a16:creationId xmlns:a16="http://schemas.microsoft.com/office/drawing/2014/main" id="{FED9112D-AA2E-4B72-9B6F-326BE70B4D0D}"/>
+                <a16:creationId xmlns:a16="http://schemas.microsoft.com/office/drawing/2014/main" id="{863B2284-496E-4144-A463-C9FA3CE41981}"/>
               </a:ext>
             </a:extLst>
           </p:cNvPr>
@@ -5256,7 +4935,7 @@
                 <a:ea typeface="Arial"/>
                 <a:cs typeface="Arial"/>
               </a:rPr>
-              <a:t>판단, 근거 2개, agent에게 남길 comment를 한 묶음으로 제출한다.</a:t>
+              <a:t>정답 암기보다 근거를 말로 남기는 습관을 만든다.</a:t>
             </a:r>
           </a:p>
         </p:txBody>
@@ -5266,7 +4945,7 @@
           <p:cNvPr id="8" name="page-marker">
             <a:extLst xmlns:a="http://schemas.openxmlformats.org/drawingml/2006/main">
               <a:ext uri="{FF2B5EF4-FFF2-40B4-BE49-F238E27FC236}">
-                <a16:creationId xmlns:a16="http://schemas.microsoft.com/office/drawing/2014/main" id="{AE1ED07F-8113-431C-B448-AE354EE0D914}"/>
+                <a16:creationId xmlns:a16="http://schemas.microsoft.com/office/drawing/2014/main" id="{24E47F2A-DE44-49C1-84D4-2A8D23215128}"/>
               </a:ext>
             </a:extLst>
           </p:cNvPr>
@@ -5330,7 +5009,7 @@
           <p:cNvPr id="9" name="">
             <a:extLst xmlns:a="http://schemas.openxmlformats.org/drawingml/2006/main">
               <a:ext uri="{FF2B5EF4-FFF2-40B4-BE49-F238E27FC236}">
-                <a16:creationId xmlns:a16="http://schemas.microsoft.com/office/drawing/2014/main" id="{457B18E4-2A3F-44AB-81C3-18A58DA43A68}"/>
+                <a16:creationId xmlns:a16="http://schemas.microsoft.com/office/drawing/2014/main" id="{903A0B53-FD94-460E-93B5-460941221499}"/>
               </a:ext>
             </a:extLst>
           </p:cNvPr>
@@ -5367,7 +5046,7 @@
           <p:cNvPr id="10" name="">
             <a:extLst xmlns:a="http://schemas.openxmlformats.org/drawingml/2006/main">
               <a:ext uri="{FF2B5EF4-FFF2-40B4-BE49-F238E27FC236}">
-                <a16:creationId xmlns:a16="http://schemas.microsoft.com/office/drawing/2014/main" id="{030FF60F-8A6C-4FB5-AA71-5E5BD32DC1D4}"/>
+                <a16:creationId xmlns:a16="http://schemas.microsoft.com/office/drawing/2014/main" id="{DD2D24A4-6EFF-4170-91C9-2B5C2DDB93DE}"/>
               </a:ext>
             </a:extLst>
           </p:cNvPr>
@@ -5421,7 +5100,7 @@
                 <a:ea typeface="Arial"/>
                 <a:cs typeface="Arial"/>
               </a:rPr>
-              <a:t>제출 형식</a:t>
+              <a:t>Exit ticket</a:t>
             </a:r>
           </a:p>
         </p:txBody>
@@ -5431,7 +5110,7 @@
           <p:cNvPr id="11" name="">
             <a:extLst xmlns:a="http://schemas.openxmlformats.org/drawingml/2006/main">
               <a:ext uri="{FF2B5EF4-FFF2-40B4-BE49-F238E27FC236}">
-                <a16:creationId xmlns:a16="http://schemas.microsoft.com/office/drawing/2014/main" id="{B5B766CD-E6B3-4983-988A-3935CB9AAF3A}"/>
+                <a16:creationId xmlns:a16="http://schemas.microsoft.com/office/drawing/2014/main" id="{0C67CA84-A9F9-403A-87E5-ED2E53B0BCE0}"/>
               </a:ext>
             </a:extLst>
           </p:cNvPr>
@@ -5587,7 +5266,7 @@
           <p:cNvPr id="12" name="">
             <a:extLst xmlns:a="http://schemas.openxmlformats.org/drawingml/2006/main">
               <a:ext uri="{FF2B5EF4-FFF2-40B4-BE49-F238E27FC236}">
-                <a16:creationId xmlns:a16="http://schemas.microsoft.com/office/drawing/2014/main" id="{7B9CAAC1-CE51-4567-B746-AD216013F13B}"/>
+                <a16:creationId xmlns:a16="http://schemas.microsoft.com/office/drawing/2014/main" id="{6C743BF3-65FF-459B-9F88-4CEF8EB69352}"/>
               </a:ext>
             </a:extLst>
           </p:cNvPr>
@@ -5624,7 +5303,7 @@
           <p:cNvPr id="13" name="">
             <a:extLst xmlns:a="http://schemas.openxmlformats.org/drawingml/2006/main">
               <a:ext uri="{FF2B5EF4-FFF2-40B4-BE49-F238E27FC236}">
-                <a16:creationId xmlns:a16="http://schemas.microsoft.com/office/drawing/2014/main" id="{CFE1E662-F480-4D41-951A-90C8AC92454B}"/>
+                <a16:creationId xmlns:a16="http://schemas.microsoft.com/office/drawing/2014/main" id="{10957BAA-5AF8-4144-9AFF-97C190DC902A}"/>
               </a:ext>
             </a:extLst>
           </p:cNvPr>
@@ -5688,7 +5367,7 @@
           <p:cNvPr id="14" name="">
             <a:extLst xmlns:a="http://schemas.openxmlformats.org/drawingml/2006/main">
               <a:ext uri="{FF2B5EF4-FFF2-40B4-BE49-F238E27FC236}">
-                <a16:creationId xmlns:a16="http://schemas.microsoft.com/office/drawing/2014/main" id="{F6C36D6E-243A-4A55-BBED-D345B926FD79}"/>
+                <a16:creationId xmlns:a16="http://schemas.microsoft.com/office/drawing/2014/main" id="{FCF92A3A-5B3F-4F1D-BFFD-7029C01DFA81}"/>
               </a:ext>
             </a:extLst>
           </p:cNvPr>
@@ -5798,7 +5477,7 @@
           <p:cNvPr id="15" name="">
             <a:extLst xmlns:a="http://schemas.openxmlformats.org/drawingml/2006/main">
               <a:ext uri="{FF2B5EF4-FFF2-40B4-BE49-F238E27FC236}">
-                <a16:creationId xmlns:a16="http://schemas.microsoft.com/office/drawing/2014/main" id="{799B5B51-7A21-4128-AAC3-21CB018A5A7F}"/>
+                <a16:creationId xmlns:a16="http://schemas.microsoft.com/office/drawing/2014/main" id="{500935EB-EC1B-4812-B26F-57FFE37613A2}"/>
               </a:ext>
             </a:extLst>
           </p:cNvPr>
@@ -5862,7 +5541,7 @@
           <p:cNvPr id="16" name="footer-note">
             <a:extLst xmlns:a="http://schemas.openxmlformats.org/drawingml/2006/main">
               <a:ext uri="{FF2B5EF4-FFF2-40B4-BE49-F238E27FC236}">
-                <a16:creationId xmlns:a16="http://schemas.microsoft.com/office/drawing/2014/main" id="{2E2C794B-2D18-4A6D-9C6C-4F0F9BDEC899}"/>
+                <a16:creationId xmlns:a16="http://schemas.microsoft.com/office/drawing/2014/main" id="{317F30A3-C83B-4EB8-A7EA-E675450CA559}"/>
               </a:ext>
             </a:extLst>
           </p:cNvPr>
@@ -5924,7 +5603,7 @@
     </p:spTree>
     <p:extLst>
       <p:ext uri="{BB962C8B-B14F-4D97-AF65-F5344CB8AC3E}">
-        <p14:creationId xmlns:p14="http://schemas.microsoft.com/office/powerpoint/2010/main" val="1740735564"/>
+        <p14:creationId xmlns:p14="http://schemas.microsoft.com/office/powerpoint/2010/main" val="1250206492"/>
       </p:ext>
     </p:extLst>
   </p:cSld>
@@ -5948,7 +5627,7 @@
           <p:cNvPr id="1" name="">
             <a:extLst xmlns:a="http://schemas.openxmlformats.org/drawingml/2006/main">
               <a:ext uri="{FF2B5EF4-FFF2-40B4-BE49-F238E27FC236}">
-                <a16:creationId xmlns:a16="http://schemas.microsoft.com/office/drawing/2014/main" id="{C56AC39E-4990-49D8-954F-F69A70D2F9AB}"/>
+                <a16:creationId xmlns:a16="http://schemas.microsoft.com/office/drawing/2014/main" id="{3A23A14D-7907-4CA4-94E1-486C2A79B830}"/>
               </a:ext>
             </a:extLst>
           </p:cNvPr>
@@ -5997,7 +5676,7 @@
           <p:cNvPr id="2" name="">
             <a:extLst xmlns:a="http://schemas.openxmlformats.org/drawingml/2006/main">
               <a:ext uri="{FF2B5EF4-FFF2-40B4-BE49-F238E27FC236}">
-                <a16:creationId xmlns:a16="http://schemas.microsoft.com/office/drawing/2014/main" id="{0CA1A6F0-B4E5-4EA2-B4B7-4C196ECD7D79}"/>
+                <a16:creationId xmlns:a16="http://schemas.microsoft.com/office/drawing/2014/main" id="{D894390A-D942-4571-9B26-3ED88F55C360}"/>
               </a:ext>
             </a:extLst>
           </p:cNvPr>
@@ -6034,7 +5713,7 @@
           <p:cNvPr id="3" name="kicker-marker">
             <a:extLst xmlns:a="http://schemas.openxmlformats.org/drawingml/2006/main">
               <a:ext uri="{FF2B5EF4-FFF2-40B4-BE49-F238E27FC236}">
-                <a16:creationId xmlns:a16="http://schemas.microsoft.com/office/drawing/2014/main" id="{D3DF00E2-F4E1-40DF-BDCD-B26588FC02A0}"/>
+                <a16:creationId xmlns:a16="http://schemas.microsoft.com/office/drawing/2014/main" id="{EF553378-3656-420F-8A70-CB7E29B8EE52}"/>
               </a:ext>
             </a:extLst>
           </p:cNvPr>
@@ -6069,7 +5748,7 @@
           <p:cNvPr id="4" name="kicker-label">
             <a:extLst xmlns:a="http://schemas.openxmlformats.org/drawingml/2006/main">
               <a:ext uri="{FF2B5EF4-FFF2-40B4-BE49-F238E27FC236}">
-                <a16:creationId xmlns:a16="http://schemas.microsoft.com/office/drawing/2014/main" id="{4F395F13-CE1B-4914-A8BF-82934835E94A}"/>
+                <a16:creationId xmlns:a16="http://schemas.microsoft.com/office/drawing/2014/main" id="{A771BC93-993A-49C0-8B69-45D47F664F82}"/>
               </a:ext>
             </a:extLst>
           </p:cNvPr>
@@ -6123,7 +5802,7 @@
                 <a:ea typeface="Courier New"/>
                 <a:cs typeface="Courier New"/>
               </a:rPr>
-              <a:t>WHY</a:t>
+              <a:t>PROBLEM</a:t>
             </a:r>
           </a:p>
         </p:txBody>
@@ -6133,7 +5812,7 @@
           <p:cNvPr id="5" name="">
             <a:extLst xmlns:a="http://schemas.openxmlformats.org/drawingml/2006/main">
               <a:ext uri="{FF2B5EF4-FFF2-40B4-BE49-F238E27FC236}">
-                <a16:creationId xmlns:a16="http://schemas.microsoft.com/office/drawing/2014/main" id="{5F9D8CAE-12D3-4BAF-AEBD-3B6274BF06D5}"/>
+                <a16:creationId xmlns:a16="http://schemas.microsoft.com/office/drawing/2014/main" id="{F0C52322-B5BD-4DBE-B0F0-DF7BBED32A09}"/>
               </a:ext>
             </a:extLst>
           </p:cNvPr>
@@ -6168,7 +5847,7 @@
           <p:cNvPr id="6" name="claim-title">
             <a:extLst xmlns:a="http://schemas.openxmlformats.org/drawingml/2006/main">
               <a:ext uri="{FF2B5EF4-FFF2-40B4-BE49-F238E27FC236}">
-                <a16:creationId xmlns:a16="http://schemas.microsoft.com/office/drawing/2014/main" id="{75092A66-1501-4A61-944F-80A029982AE2}"/>
+                <a16:creationId xmlns:a16="http://schemas.microsoft.com/office/drawing/2014/main" id="{BE90B762-2383-4B49-855C-821B80711BA3}"/>
               </a:ext>
             </a:extLst>
           </p:cNvPr>
@@ -6232,7 +5911,7 @@
           <p:cNvPr id="7" name="support-note">
             <a:extLst xmlns:a="http://schemas.openxmlformats.org/drawingml/2006/main">
               <a:ext uri="{FF2B5EF4-FFF2-40B4-BE49-F238E27FC236}">
-                <a16:creationId xmlns:a16="http://schemas.microsoft.com/office/drawing/2014/main" id="{66635EF2-E6D8-4FC2-A282-A2459FF2092C}"/>
+                <a16:creationId xmlns:a16="http://schemas.microsoft.com/office/drawing/2014/main" id="{E3046518-32EA-4796-AA65-25E06C254ACB}"/>
               </a:ext>
             </a:extLst>
           </p:cNvPr>
@@ -6296,7 +5975,7 @@
           <p:cNvPr id="8" name="page-marker">
             <a:extLst xmlns:a="http://schemas.openxmlformats.org/drawingml/2006/main">
               <a:ext uri="{FF2B5EF4-FFF2-40B4-BE49-F238E27FC236}">
-                <a16:creationId xmlns:a16="http://schemas.microsoft.com/office/drawing/2014/main" id="{5FB3D92E-9219-49E8-A9BC-CBA00A7C488E}"/>
+                <a16:creationId xmlns:a16="http://schemas.microsoft.com/office/drawing/2014/main" id="{8F04221B-A10E-4F0E-8AAD-5213ABA00351}"/>
               </a:ext>
             </a:extLst>
           </p:cNvPr>
@@ -6360,7 +6039,7 @@
           <p:cNvPr id="9" name="">
             <a:extLst xmlns:a="http://schemas.openxmlformats.org/drawingml/2006/main">
               <a:ext uri="{FF2B5EF4-FFF2-40B4-BE49-F238E27FC236}">
-                <a16:creationId xmlns:a16="http://schemas.microsoft.com/office/drawing/2014/main" id="{BDD51524-4E32-4F2F-B40A-B096D2F7D1FB}"/>
+                <a16:creationId xmlns:a16="http://schemas.microsoft.com/office/drawing/2014/main" id="{6F42DC30-A74B-4133-8CCE-99A8866FB278}"/>
               </a:ext>
             </a:extLst>
           </p:cNvPr>
@@ -6397,7 +6076,7 @@
           <p:cNvPr id="10" name="">
             <a:extLst xmlns:a="http://schemas.openxmlformats.org/drawingml/2006/main">
               <a:ext uri="{FF2B5EF4-FFF2-40B4-BE49-F238E27FC236}">
-                <a16:creationId xmlns:a16="http://schemas.microsoft.com/office/drawing/2014/main" id="{82432514-3722-4426-A729-C4E92BF2AFE3}"/>
+                <a16:creationId xmlns:a16="http://schemas.microsoft.com/office/drawing/2014/main" id="{03BF2649-9140-469B-B82E-40A982F7DACD}"/>
               </a:ext>
             </a:extLst>
           </p:cNvPr>
@@ -6461,7 +6140,7 @@
           <p:cNvPr id="11" name="">
             <a:extLst xmlns:a="http://schemas.openxmlformats.org/drawingml/2006/main">
               <a:ext uri="{FF2B5EF4-FFF2-40B4-BE49-F238E27FC236}">
-                <a16:creationId xmlns:a16="http://schemas.microsoft.com/office/drawing/2014/main" id="{CEC5D92D-AEE5-411B-ADFB-9A0650F32CD2}"/>
+                <a16:creationId xmlns:a16="http://schemas.microsoft.com/office/drawing/2014/main" id="{28E5ED34-199E-475A-843A-602824753532}"/>
               </a:ext>
             </a:extLst>
           </p:cNvPr>
@@ -6571,7 +6250,7 @@
           <p:cNvPr id="12" name="">
             <a:extLst xmlns:a="http://schemas.openxmlformats.org/drawingml/2006/main">
               <a:ext uri="{FF2B5EF4-FFF2-40B4-BE49-F238E27FC236}">
-                <a16:creationId xmlns:a16="http://schemas.microsoft.com/office/drawing/2014/main" id="{CE394751-DC29-403F-A3E2-D5339903159C}"/>
+                <a16:creationId xmlns:a16="http://schemas.microsoft.com/office/drawing/2014/main" id="{B8AA1C5B-3540-4EAE-8936-7CEAE180323B}"/>
               </a:ext>
             </a:extLst>
           </p:cNvPr>
@@ -6608,7 +6287,7 @@
           <p:cNvPr id="13" name="">
             <a:extLst xmlns:a="http://schemas.openxmlformats.org/drawingml/2006/main">
               <a:ext uri="{FF2B5EF4-FFF2-40B4-BE49-F238E27FC236}">
-                <a16:creationId xmlns:a16="http://schemas.microsoft.com/office/drawing/2014/main" id="{E3DC988A-0655-44D1-9948-57DC1C3F06F6}"/>
+                <a16:creationId xmlns:a16="http://schemas.microsoft.com/office/drawing/2014/main" id="{7BA81374-D2D7-486E-A853-1CEC04FDD0DC}"/>
               </a:ext>
             </a:extLst>
           </p:cNvPr>
@@ -6672,7 +6351,7 @@
           <p:cNvPr id="14" name="">
             <a:extLst xmlns:a="http://schemas.openxmlformats.org/drawingml/2006/main">
               <a:ext uri="{FF2B5EF4-FFF2-40B4-BE49-F238E27FC236}">
-                <a16:creationId xmlns:a16="http://schemas.microsoft.com/office/drawing/2014/main" id="{0197153F-CB3B-40D3-9482-80715F06BF4A}"/>
+                <a16:creationId xmlns:a16="http://schemas.microsoft.com/office/drawing/2014/main" id="{A4FD71C7-945E-4DBB-BACD-B4B7766FE6D8}"/>
               </a:ext>
             </a:extLst>
           </p:cNvPr>
@@ -6782,7 +6461,7 @@
           <p:cNvPr id="15" name="">
             <a:extLst xmlns:a="http://schemas.openxmlformats.org/drawingml/2006/main">
               <a:ext uri="{FF2B5EF4-FFF2-40B4-BE49-F238E27FC236}">
-                <a16:creationId xmlns:a16="http://schemas.microsoft.com/office/drawing/2014/main" id="{BEB3DA33-1A80-41DC-8E32-1D13AAFD39F6}"/>
+                <a16:creationId xmlns:a16="http://schemas.microsoft.com/office/drawing/2014/main" id="{6B7684DD-C9F2-44F3-8D2C-C92EF1AE090A}"/>
               </a:ext>
             </a:extLst>
           </p:cNvPr>
@@ -6846,7 +6525,7 @@
           <p:cNvPr id="16" name="">
             <a:extLst xmlns:a="http://schemas.openxmlformats.org/drawingml/2006/main">
               <a:ext uri="{FF2B5EF4-FFF2-40B4-BE49-F238E27FC236}">
-                <a16:creationId xmlns:a16="http://schemas.microsoft.com/office/drawing/2014/main" id="{950F3ABC-ABBF-456C-B28C-8C49E341B9BD}"/>
+                <a16:creationId xmlns:a16="http://schemas.microsoft.com/office/drawing/2014/main" id="{7D9B262A-8170-44DB-A324-8951899C9CD3}"/>
               </a:ext>
             </a:extLst>
           </p:cNvPr>
@@ -6910,7 +6589,7 @@
           <p:cNvPr id="17" name="footer-note">
             <a:extLst xmlns:a="http://schemas.openxmlformats.org/drawingml/2006/main">
               <a:ext uri="{FF2B5EF4-FFF2-40B4-BE49-F238E27FC236}">
-                <a16:creationId xmlns:a16="http://schemas.microsoft.com/office/drawing/2014/main" id="{DC76C640-F0D3-480E-BC46-4B41BA8089FB}"/>
+                <a16:creationId xmlns:a16="http://schemas.microsoft.com/office/drawing/2014/main" id="{489369E4-0597-4F76-8E29-AEC20D0C6329}"/>
               </a:ext>
             </a:extLst>
           </p:cNvPr>
@@ -6972,7 +6651,7 @@
     </p:spTree>
     <p:extLst>
       <p:ext uri="{BB962C8B-B14F-4D97-AF65-F5344CB8AC3E}">
-        <p14:creationId xmlns:p14="http://schemas.microsoft.com/office/powerpoint/2010/main" val="299915273"/>
+        <p14:creationId xmlns:p14="http://schemas.microsoft.com/office/powerpoint/2010/main" val="424518710"/>
       </p:ext>
     </p:extLst>
   </p:cSld>
@@ -6996,7 +6675,7 @@
           <p:cNvPr id="1" name="">
             <a:extLst xmlns:a="http://schemas.openxmlformats.org/drawingml/2006/main">
               <a:ext uri="{FF2B5EF4-FFF2-40B4-BE49-F238E27FC236}">
-                <a16:creationId xmlns:a16="http://schemas.microsoft.com/office/drawing/2014/main" id="{DE1C700B-CF80-4873-B33A-020C5BB4061B}"/>
+                <a16:creationId xmlns:a16="http://schemas.microsoft.com/office/drawing/2014/main" id="{7551E198-82C3-4FFA-9325-AA58614D2E96}"/>
               </a:ext>
             </a:extLst>
           </p:cNvPr>
@@ -7045,7 +6724,7 @@
           <p:cNvPr id="2" name="">
             <a:extLst xmlns:a="http://schemas.openxmlformats.org/drawingml/2006/main">
               <a:ext uri="{FF2B5EF4-FFF2-40B4-BE49-F238E27FC236}">
-                <a16:creationId xmlns:a16="http://schemas.microsoft.com/office/drawing/2014/main" id="{49622FC0-615D-47A2-9E41-FAE1AC482DF1}"/>
+                <a16:creationId xmlns:a16="http://schemas.microsoft.com/office/drawing/2014/main" id="{6CED1040-B131-416A-A146-AA83829F3E3F}"/>
               </a:ext>
             </a:extLst>
           </p:cNvPr>
@@ -7082,7 +6761,7 @@
           <p:cNvPr id="3" name="kicker-marker">
             <a:extLst xmlns:a="http://schemas.openxmlformats.org/drawingml/2006/main">
               <a:ext uri="{FF2B5EF4-FFF2-40B4-BE49-F238E27FC236}">
-                <a16:creationId xmlns:a16="http://schemas.microsoft.com/office/drawing/2014/main" id="{7920F73A-F562-4275-A8C2-0E94858579FD}"/>
+                <a16:creationId xmlns:a16="http://schemas.microsoft.com/office/drawing/2014/main" id="{F728A114-D183-4BCF-86BF-A7C3920630BB}"/>
               </a:ext>
             </a:extLst>
           </p:cNvPr>
@@ -7117,7 +6796,7 @@
           <p:cNvPr id="4" name="kicker-label">
             <a:extLst xmlns:a="http://schemas.openxmlformats.org/drawingml/2006/main">
               <a:ext uri="{FF2B5EF4-FFF2-40B4-BE49-F238E27FC236}">
-                <a16:creationId xmlns:a16="http://schemas.microsoft.com/office/drawing/2014/main" id="{4C1610D8-2ED0-4AEE-B6BD-C188FCFEB902}"/>
+                <a16:creationId xmlns:a16="http://schemas.microsoft.com/office/drawing/2014/main" id="{C3BBF39E-09B9-4793-9A1E-C10187013D41}"/>
               </a:ext>
             </a:extLst>
           </p:cNvPr>
@@ -7171,7 +6850,7 @@
                 <a:ea typeface="Courier New"/>
                 <a:cs typeface="Courier New"/>
               </a:rPr>
-              <a:t>MENTAL MODEL</a:t>
+              <a:t>CLASS MAP</a:t>
             </a:r>
           </a:p>
         </p:txBody>
@@ -7181,7 +6860,7 @@
           <p:cNvPr id="5" name="">
             <a:extLst xmlns:a="http://schemas.openxmlformats.org/drawingml/2006/main">
               <a:ext uri="{FF2B5EF4-FFF2-40B4-BE49-F238E27FC236}">
-                <a16:creationId xmlns:a16="http://schemas.microsoft.com/office/drawing/2014/main" id="{DB254A11-A4B3-4366-AB43-9C6B3D1E3634}"/>
+                <a16:creationId xmlns:a16="http://schemas.microsoft.com/office/drawing/2014/main" id="{9E59FE9E-A5C6-43FA-AE9F-117166776BE5}"/>
               </a:ext>
             </a:extLst>
           </p:cNvPr>
@@ -7216,7 +6895,7 @@
           <p:cNvPr id="6" name="claim-title">
             <a:extLst xmlns:a="http://schemas.openxmlformats.org/drawingml/2006/main">
               <a:ext uri="{FF2B5EF4-FFF2-40B4-BE49-F238E27FC236}">
-                <a16:creationId xmlns:a16="http://schemas.microsoft.com/office/drawing/2014/main" id="{3AF66D6F-332C-46A5-9C31-1D450D773778}"/>
+                <a16:creationId xmlns:a16="http://schemas.microsoft.com/office/drawing/2014/main" id="{685419A5-04CA-4810-9908-868610249635}"/>
               </a:ext>
             </a:extLst>
           </p:cNvPr>
@@ -7270,7 +6949,7 @@
                 <a:ea typeface="Arial"/>
                 <a:cs typeface="Arial"/>
               </a:rPr>
-              <a:t>GitHub는 작업대장이자 검문소다</a:t>
+              <a:t>2시간 안에 세 개 PR을 직접 판정한다</a:t>
             </a:r>
           </a:p>
         </p:txBody>
@@ -7280,7 +6959,7 @@
           <p:cNvPr id="7" name="support-note">
             <a:extLst xmlns:a="http://schemas.openxmlformats.org/drawingml/2006/main">
               <a:ext uri="{FF2B5EF4-FFF2-40B4-BE49-F238E27FC236}">
-                <a16:creationId xmlns:a16="http://schemas.microsoft.com/office/drawing/2014/main" id="{0652A76A-6D47-4C57-81AC-81C604D4407E}"/>
+                <a16:creationId xmlns:a16="http://schemas.microsoft.com/office/drawing/2014/main" id="{C436CFE5-769B-4D90-AF23-54E69A780294}"/>
               </a:ext>
             </a:extLst>
           </p:cNvPr>
@@ -7334,7 +7013,7 @@
                 <a:ea typeface="Arial"/>
                 <a:cs typeface="Arial"/>
               </a:rPr>
-              <a:t>Issue가 일을 정의하고, PR이 합칠 수 있는지 검사한다.</a:t>
+              <a:t>개념 설명은 짧게 두고, 실제 PR 화면에서 근거를 찾는 시간을 늘린다.</a:t>
             </a:r>
           </a:p>
         </p:txBody>
@@ -7344,7 +7023,7 @@
           <p:cNvPr id="8" name="page-marker">
             <a:extLst xmlns:a="http://schemas.openxmlformats.org/drawingml/2006/main">
               <a:ext uri="{FF2B5EF4-FFF2-40B4-BE49-F238E27FC236}">
-                <a16:creationId xmlns:a16="http://schemas.microsoft.com/office/drawing/2014/main" id="{2EE6D303-4CBB-47D4-9DF8-443CE2E243A2}"/>
+                <a16:creationId xmlns:a16="http://schemas.microsoft.com/office/drawing/2014/main" id="{CF365161-AD2C-4BD8-BEEA-425BDA837132}"/>
               </a:ext>
             </a:extLst>
           </p:cNvPr>
@@ -7408,19 +7087,19 @@
           <p:cNvPr id="9" name="">
             <a:extLst xmlns:a="http://schemas.openxmlformats.org/drawingml/2006/main">
               <a:ext uri="{FF2B5EF4-FFF2-40B4-BE49-F238E27FC236}">
-                <a16:creationId xmlns:a16="http://schemas.microsoft.com/office/drawing/2014/main" id="{72CCA73D-C96B-4896-80E4-1F44F3003C61}"/>
-              </a:ext>
-            </a:extLst>
-          </p:cNvPr>
-          <p:cNvSpPr>
-            <a:spLocks xmlns:a="http://schemas.openxmlformats.org/drawingml/2006/main" noGrp="1"/>
-          </p:cNvSpPr>
-          <p:nvPr/>
-        </p:nvSpPr>
-        <p:spPr>
-          <a:xfrm xmlns:a="http://schemas.openxmlformats.org/drawingml/2006/main">
-            <a:off x="5715000" y="2952750"/>
-            <a:ext cx="1200150" cy="1123950"/>
+                <a16:creationId xmlns:a16="http://schemas.microsoft.com/office/drawing/2014/main" id="{6C340EC4-C2B5-435B-A620-8FA47FA9DDAF}"/>
+              </a:ext>
+            </a:extLst>
+          </p:cNvPr>
+          <p:cNvSpPr>
+            <a:spLocks xmlns:a="http://schemas.openxmlformats.org/drawingml/2006/main" noGrp="1"/>
+          </p:cNvSpPr>
+          <p:nvPr/>
+        </p:nvSpPr>
+        <p:spPr>
+          <a:xfrm xmlns:a="http://schemas.openxmlformats.org/drawingml/2006/main">
+            <a:off x="6477000" y="876300"/>
+            <a:ext cx="2381250" cy="1562100"/>
           </a:xfrm>
           <a:prstGeom xmlns:a="http://schemas.openxmlformats.org/drawingml/2006/main" prst="rect">
             <a:avLst/>
@@ -7445,19 +7124,19 @@
           <p:cNvPr id="10" name="">
             <a:extLst xmlns:a="http://schemas.openxmlformats.org/drawingml/2006/main">
               <a:ext uri="{FF2B5EF4-FFF2-40B4-BE49-F238E27FC236}">
-                <a16:creationId xmlns:a16="http://schemas.microsoft.com/office/drawing/2014/main" id="{574C3C73-437E-4FA0-8D20-C8BC13CFD148}"/>
-              </a:ext>
-            </a:extLst>
-          </p:cNvPr>
-          <p:cNvSpPr>
-            <a:spLocks xmlns:a="http://schemas.openxmlformats.org/drawingml/2006/main" noGrp="1"/>
-          </p:cNvSpPr>
-          <p:nvPr/>
-        </p:nvSpPr>
-        <p:spPr>
-          <a:xfrm xmlns:a="http://schemas.openxmlformats.org/drawingml/2006/main">
-            <a:off x="5905500" y="3124200"/>
-            <a:ext cx="819150" cy="323850"/>
+                <a16:creationId xmlns:a16="http://schemas.microsoft.com/office/drawing/2014/main" id="{DCE1A167-5EAD-4430-98B5-859A8060176F}"/>
+              </a:ext>
+            </a:extLst>
+          </p:cNvPr>
+          <p:cNvSpPr>
+            <a:spLocks xmlns:a="http://schemas.openxmlformats.org/drawingml/2006/main" noGrp="1"/>
+          </p:cNvSpPr>
+          <p:nvPr/>
+        </p:nvSpPr>
+        <p:spPr>
+          <a:xfrm xmlns:a="http://schemas.openxmlformats.org/drawingml/2006/main">
+            <a:off x="6667500" y="1047750"/>
+            <a:ext cx="2000250" cy="323850"/>
           </a:xfrm>
           <a:prstGeom xmlns:a="http://schemas.openxmlformats.org/drawingml/2006/main" prst="rect">
             <a:avLst/>
@@ -7499,7 +7178,7 @@
                 <a:ea typeface="Arial"/>
                 <a:cs typeface="Arial"/>
               </a:rPr>
-              <a:t>Issue</a:t>
+              <a:t>1막</a:t>
             </a:r>
           </a:p>
         </p:txBody>
@@ -7509,19 +7188,19 @@
           <p:cNvPr id="11" name="">
             <a:extLst xmlns:a="http://schemas.openxmlformats.org/drawingml/2006/main">
               <a:ext uri="{FF2B5EF4-FFF2-40B4-BE49-F238E27FC236}">
-                <a16:creationId xmlns:a16="http://schemas.microsoft.com/office/drawing/2014/main" id="{BA74C3F8-6781-4E78-84F0-261BE4614CFC}"/>
-              </a:ext>
-            </a:extLst>
-          </p:cNvPr>
-          <p:cNvSpPr>
-            <a:spLocks xmlns:a="http://schemas.openxmlformats.org/drawingml/2006/main" noGrp="1"/>
-          </p:cNvSpPr>
-          <p:nvPr/>
-        </p:nvSpPr>
-        <p:spPr>
-          <a:xfrm xmlns:a="http://schemas.openxmlformats.org/drawingml/2006/main">
-            <a:off x="5905500" y="3562350"/>
-            <a:ext cx="819150" cy="342900"/>
+                <a16:creationId xmlns:a16="http://schemas.microsoft.com/office/drawing/2014/main" id="{184C1C18-ADE5-41C1-B5EC-D27494E16E4D}"/>
+              </a:ext>
+            </a:extLst>
+          </p:cNvPr>
+          <p:cNvSpPr>
+            <a:spLocks xmlns:a="http://schemas.openxmlformats.org/drawingml/2006/main" noGrp="1"/>
+          </p:cNvSpPr>
+          <p:nvPr/>
+        </p:nvSpPr>
+        <p:spPr>
+          <a:xfrm xmlns:a="http://schemas.openxmlformats.org/drawingml/2006/main">
+            <a:off x="6667500" y="1485900"/>
+            <a:ext cx="2000250" cy="781050"/>
           </a:xfrm>
           <a:prstGeom xmlns:a="http://schemas.openxmlformats.org/drawingml/2006/main" prst="rect">
             <a:avLst/>
@@ -7545,25 +7224,48 @@
           <a:lstStyle xmlns:a="http://schemas.openxmlformats.org/drawingml/2006/main"/>
           <a:p xmlns:a="http://schemas.openxmlformats.org/drawingml/2006/main">
             <a:pPr algn="l">
-              <a:defRPr sz="1350" b="0">
-                <a:solidFill>
-                  <a:srgbClr val="F4F0FF"/>
-                </a:solidFill>
-                <a:latin typeface="Arial"/>
-                <a:ea typeface="Arial"/>
-                <a:cs typeface="Arial"/>
-              </a:defRPr>
-            </a:pPr>
-            <a:r>
-              <a:rPr sz="1350" b="0">
-                <a:solidFill>
-                  <a:srgbClr val="F4F0FF"/>
-                </a:solidFill>
-                <a:latin typeface="Arial"/>
-                <a:ea typeface="Arial"/>
-                <a:cs typeface="Arial"/>
-              </a:rPr>
-              <a:t>요청</a:t>
+              <a:defRPr sz="1650" b="0">
+                <a:solidFill>
+                  <a:srgbClr val="F4F0FF"/>
+                </a:solidFill>
+                <a:latin typeface="Arial"/>
+                <a:ea typeface="Arial"/>
+                <a:cs typeface="Arial"/>
+              </a:defRPr>
+            </a:pPr>
+            <a:r>
+              <a:rPr sz="1650" b="0">
+                <a:solidFill>
+                  <a:srgbClr val="F4F0FF"/>
+                </a:solidFill>
+                <a:latin typeface="Arial"/>
+                <a:ea typeface="Arial"/>
+                <a:cs typeface="Arial"/>
+              </a:rPr>
+              <a:t>문제 제기</a:t>
+            </a:r>
+          </a:p>
+          <a:p xmlns:a="http://schemas.openxmlformats.org/drawingml/2006/main">
+            <a:pPr algn="l">
+              <a:defRPr sz="1650" b="0">
+                <a:solidFill>
+                  <a:srgbClr val="F4F0FF"/>
+                </a:solidFill>
+                <a:latin typeface="Arial"/>
+                <a:ea typeface="Arial"/>
+                <a:cs typeface="Arial"/>
+              </a:defRPr>
+            </a:pPr>
+            <a:r>
+              <a:rPr sz="1650" b="0">
+                <a:solidFill>
+                  <a:srgbClr val="F4F0FF"/>
+                </a:solidFill>
+                <a:latin typeface="Arial"/>
+                <a:ea typeface="Arial"/>
+                <a:cs typeface="Arial"/>
+              </a:rPr>
+              <a:t>GitHub 모델</a:t>
             </a:r>
           </a:p>
         </p:txBody>
@@ -7573,54 +7275,19 @@
           <p:cNvPr id="12" name="">
             <a:extLst xmlns:a="http://schemas.openxmlformats.org/drawingml/2006/main">
               <a:ext uri="{FF2B5EF4-FFF2-40B4-BE49-F238E27FC236}">
-                <a16:creationId xmlns:a16="http://schemas.microsoft.com/office/drawing/2014/main" id="{85D80474-F8F9-4DFF-A828-23582CCBE767}"/>
-              </a:ext>
-            </a:extLst>
-          </p:cNvPr>
-          <p:cNvSpPr>
-            <a:spLocks xmlns:a="http://schemas.openxmlformats.org/drawingml/2006/main" noGrp="1"/>
-          </p:cNvSpPr>
-          <p:nvPr/>
-        </p:nvSpPr>
-        <p:spPr>
-          <a:xfrm xmlns:a="http://schemas.openxmlformats.org/drawingml/2006/main">
-            <a:off x="6915150" y="3486150"/>
-            <a:ext cx="342900" cy="28575"/>
-          </a:xfrm>
-          <a:prstGeom xmlns:a="http://schemas.openxmlformats.org/drawingml/2006/main" prst="rect">
-            <a:avLst/>
-          </a:prstGeom>
-          <a:solidFill xmlns:a="http://schemas.openxmlformats.org/drawingml/2006/main">
-            <a:srgbClr val="FFFFFF"/>
-          </a:solidFill>
-          <a:ln xmlns:a="http://schemas.openxmlformats.org/drawingml/2006/main" w="0">
-            <a:solidFill>
-              <a:srgbClr val="000000">
-                <a:alpha val="0"/>
-              </a:srgbClr>
-            </a:solidFill>
-            <a:prstDash val="solid"/>
-          </a:ln>
-        </p:spPr>
-      </p:sp>
-      <p:sp>
-        <p:nvSpPr>
-          <p:cNvPr id="13" name="">
-            <a:extLst xmlns:a="http://schemas.openxmlformats.org/drawingml/2006/main">
-              <a:ext uri="{FF2B5EF4-FFF2-40B4-BE49-F238E27FC236}">
-                <a16:creationId xmlns:a16="http://schemas.microsoft.com/office/drawing/2014/main" id="{FFE40CE7-9F42-4F81-8EED-33876E5A2424}"/>
-              </a:ext>
-            </a:extLst>
-          </p:cNvPr>
-          <p:cNvSpPr>
-            <a:spLocks xmlns:a="http://schemas.openxmlformats.org/drawingml/2006/main" noGrp="1"/>
-          </p:cNvSpPr>
-          <p:nvPr/>
-        </p:nvSpPr>
-        <p:spPr>
-          <a:xfrm xmlns:a="http://schemas.openxmlformats.org/drawingml/2006/main">
-            <a:off x="6896100" y="3467100"/>
-            <a:ext cx="1200150" cy="1123950"/>
+                <a16:creationId xmlns:a16="http://schemas.microsoft.com/office/drawing/2014/main" id="{E821397F-F482-4B30-BF55-E7939D924577}"/>
+              </a:ext>
+            </a:extLst>
+          </p:cNvPr>
+          <p:cNvSpPr>
+            <a:spLocks xmlns:a="http://schemas.openxmlformats.org/drawingml/2006/main" noGrp="1"/>
+          </p:cNvSpPr>
+          <p:nvPr/>
+        </p:nvSpPr>
+        <p:spPr>
+          <a:xfrm xmlns:a="http://schemas.openxmlformats.org/drawingml/2006/main">
+            <a:off x="9163050" y="876300"/>
+            <a:ext cx="2381250" cy="1562100"/>
           </a:xfrm>
           <a:prstGeom xmlns:a="http://schemas.openxmlformats.org/drawingml/2006/main" prst="rect">
             <a:avLst/>
@@ -7642,22 +7309,22 @@
       </p:sp>
       <p:sp>
         <p:nvSpPr>
-          <p:cNvPr id="14" name="">
-            <a:extLst xmlns:a="http://schemas.openxmlformats.org/drawingml/2006/main">
-              <a:ext uri="{FF2B5EF4-FFF2-40B4-BE49-F238E27FC236}">
-                <a16:creationId xmlns:a16="http://schemas.microsoft.com/office/drawing/2014/main" id="{B8AAF700-4FCE-4EAF-B89B-49F17D3DF0BE}"/>
-              </a:ext>
-            </a:extLst>
-          </p:cNvPr>
-          <p:cNvSpPr>
-            <a:spLocks xmlns:a="http://schemas.openxmlformats.org/drawingml/2006/main" noGrp="1"/>
-          </p:cNvSpPr>
-          <p:nvPr/>
-        </p:nvSpPr>
-        <p:spPr>
-          <a:xfrm xmlns:a="http://schemas.openxmlformats.org/drawingml/2006/main">
-            <a:off x="7086600" y="3638550"/>
-            <a:ext cx="819150" cy="323850"/>
+          <p:cNvPr id="13" name="">
+            <a:extLst xmlns:a="http://schemas.openxmlformats.org/drawingml/2006/main">
+              <a:ext uri="{FF2B5EF4-FFF2-40B4-BE49-F238E27FC236}">
+                <a16:creationId xmlns:a16="http://schemas.microsoft.com/office/drawing/2014/main" id="{7EC8D98F-A8D6-4118-87C5-3F25FB1C0E15}"/>
+              </a:ext>
+            </a:extLst>
+          </p:cNvPr>
+          <p:cNvSpPr>
+            <a:spLocks xmlns:a="http://schemas.openxmlformats.org/drawingml/2006/main" noGrp="1"/>
+          </p:cNvSpPr>
+          <p:nvPr/>
+        </p:nvSpPr>
+        <p:spPr>
+          <a:xfrm xmlns:a="http://schemas.openxmlformats.org/drawingml/2006/main">
+            <a:off x="9353550" y="1047750"/>
+            <a:ext cx="2000250" cy="323850"/>
           </a:xfrm>
           <a:prstGeom xmlns:a="http://schemas.openxmlformats.org/drawingml/2006/main" prst="rect">
             <a:avLst/>
@@ -7699,29 +7366,29 @@
                 <a:ea typeface="Arial"/>
                 <a:cs typeface="Arial"/>
               </a:rPr>
-              <a:t>Branch</a:t>
-            </a:r>
-          </a:p>
-        </p:txBody>
-      </p:sp>
-      <p:sp>
-        <p:nvSpPr>
-          <p:cNvPr id="15" name="">
-            <a:extLst xmlns:a="http://schemas.openxmlformats.org/drawingml/2006/main">
-              <a:ext uri="{FF2B5EF4-FFF2-40B4-BE49-F238E27FC236}">
-                <a16:creationId xmlns:a16="http://schemas.microsoft.com/office/drawing/2014/main" id="{027BBC23-3FD3-4B69-BE7D-265F273DAEAA}"/>
-              </a:ext>
-            </a:extLst>
-          </p:cNvPr>
-          <p:cNvSpPr>
-            <a:spLocks xmlns:a="http://schemas.openxmlformats.org/drawingml/2006/main" noGrp="1"/>
-          </p:cNvSpPr>
-          <p:nvPr/>
-        </p:nvSpPr>
-        <p:spPr>
-          <a:xfrm xmlns:a="http://schemas.openxmlformats.org/drawingml/2006/main">
-            <a:off x="7086600" y="4076700"/>
-            <a:ext cx="819150" cy="342900"/>
+              <a:t>2막</a:t>
+            </a:r>
+          </a:p>
+        </p:txBody>
+      </p:sp>
+      <p:sp>
+        <p:nvSpPr>
+          <p:cNvPr id="14" name="">
+            <a:extLst xmlns:a="http://schemas.openxmlformats.org/drawingml/2006/main">
+              <a:ext uri="{FF2B5EF4-FFF2-40B4-BE49-F238E27FC236}">
+                <a16:creationId xmlns:a16="http://schemas.microsoft.com/office/drawing/2014/main" id="{0B1256E5-F19F-4D44-A67C-3F32CD23C2DB}"/>
+              </a:ext>
+            </a:extLst>
+          </p:cNvPr>
+          <p:cNvSpPr>
+            <a:spLocks xmlns:a="http://schemas.openxmlformats.org/drawingml/2006/main" noGrp="1"/>
+          </p:cNvSpPr>
+          <p:nvPr/>
+        </p:nvSpPr>
+        <p:spPr>
+          <a:xfrm xmlns:a="http://schemas.openxmlformats.org/drawingml/2006/main">
+            <a:off x="9353550" y="1485900"/>
+            <a:ext cx="2000250" cy="781050"/>
           </a:xfrm>
           <a:prstGeom xmlns:a="http://schemas.openxmlformats.org/drawingml/2006/main" prst="rect">
             <a:avLst/>
@@ -7745,82 +7412,70 @@
           <a:lstStyle xmlns:a="http://schemas.openxmlformats.org/drawingml/2006/main"/>
           <a:p xmlns:a="http://schemas.openxmlformats.org/drawingml/2006/main">
             <a:pPr algn="l">
-              <a:defRPr sz="1350" b="0">
-                <a:solidFill>
-                  <a:srgbClr val="F4F0FF"/>
-                </a:solidFill>
-                <a:latin typeface="Arial"/>
-                <a:ea typeface="Arial"/>
-                <a:cs typeface="Arial"/>
-              </a:defRPr>
-            </a:pPr>
-            <a:r>
-              <a:rPr sz="1350" b="0">
-                <a:solidFill>
-                  <a:srgbClr val="F4F0FF"/>
-                </a:solidFill>
-                <a:latin typeface="Arial"/>
-                <a:ea typeface="Arial"/>
-                <a:cs typeface="Arial"/>
-              </a:rPr>
-              <a:t>작업</a:t>
-            </a:r>
-          </a:p>
-        </p:txBody>
-      </p:sp>
-      <p:sp>
-        <p:nvSpPr>
-          <p:cNvPr id="16" name="">
-            <a:extLst xmlns:a="http://schemas.openxmlformats.org/drawingml/2006/main">
-              <a:ext uri="{FF2B5EF4-FFF2-40B4-BE49-F238E27FC236}">
-                <a16:creationId xmlns:a16="http://schemas.microsoft.com/office/drawing/2014/main" id="{C25BF157-0A65-446B-A942-AC99FC713B2E}"/>
-              </a:ext>
-            </a:extLst>
-          </p:cNvPr>
-          <p:cNvSpPr>
-            <a:spLocks xmlns:a="http://schemas.openxmlformats.org/drawingml/2006/main" noGrp="1"/>
-          </p:cNvSpPr>
-          <p:nvPr/>
-        </p:nvSpPr>
-        <p:spPr>
-          <a:xfrm xmlns:a="http://schemas.openxmlformats.org/drawingml/2006/main">
-            <a:off x="8096250" y="4000500"/>
-            <a:ext cx="342900" cy="28575"/>
-          </a:xfrm>
-          <a:prstGeom xmlns:a="http://schemas.openxmlformats.org/drawingml/2006/main" prst="rect">
-            <a:avLst/>
-          </a:prstGeom>
-          <a:solidFill xmlns:a="http://schemas.openxmlformats.org/drawingml/2006/main">
-            <a:srgbClr val="FFFFFF"/>
-          </a:solidFill>
-          <a:ln xmlns:a="http://schemas.openxmlformats.org/drawingml/2006/main" w="0">
-            <a:solidFill>
-              <a:srgbClr val="000000">
-                <a:alpha val="0"/>
-              </a:srgbClr>
-            </a:solidFill>
-            <a:prstDash val="solid"/>
-          </a:ln>
-        </p:spPr>
-      </p:sp>
-      <p:sp>
-        <p:nvSpPr>
-          <p:cNvPr id="17" name="">
-            <a:extLst xmlns:a="http://schemas.openxmlformats.org/drawingml/2006/main">
-              <a:ext uri="{FF2B5EF4-FFF2-40B4-BE49-F238E27FC236}">
-                <a16:creationId xmlns:a16="http://schemas.microsoft.com/office/drawing/2014/main" id="{1E943DA2-F289-41F0-8A38-6D257B00280F}"/>
-              </a:ext>
-            </a:extLst>
-          </p:cNvPr>
-          <p:cNvSpPr>
-            <a:spLocks xmlns:a="http://schemas.openxmlformats.org/drawingml/2006/main" noGrp="1"/>
-          </p:cNvSpPr>
-          <p:nvPr/>
-        </p:nvSpPr>
-        <p:spPr>
-          <a:xfrm xmlns:a="http://schemas.openxmlformats.org/drawingml/2006/main">
-            <a:off x="8077200" y="2952750"/>
-            <a:ext cx="1200150" cy="1123950"/>
+              <a:defRPr sz="1650" b="0">
+                <a:solidFill>
+                  <a:srgbClr val="F4F0FF"/>
+                </a:solidFill>
+                <a:latin typeface="Arial"/>
+                <a:ea typeface="Arial"/>
+                <a:cs typeface="Arial"/>
+              </a:defRPr>
+            </a:pPr>
+            <a:r>
+              <a:rPr sz="1650" b="0">
+                <a:solidFill>
+                  <a:srgbClr val="F4F0FF"/>
+                </a:solidFill>
+                <a:latin typeface="Arial"/>
+                <a:ea typeface="Arial"/>
+                <a:cs typeface="Arial"/>
+              </a:rPr>
+              <a:t>PR 읽는 순서</a:t>
+            </a:r>
+          </a:p>
+          <a:p xmlns:a="http://schemas.openxmlformats.org/drawingml/2006/main">
+            <a:pPr algn="l">
+              <a:defRPr sz="1650" b="0">
+                <a:solidFill>
+                  <a:srgbClr val="F4F0FF"/>
+                </a:solidFill>
+                <a:latin typeface="Arial"/>
+                <a:ea typeface="Arial"/>
+                <a:cs typeface="Arial"/>
+              </a:defRPr>
+            </a:pPr>
+            <a:r>
+              <a:rPr sz="1650" b="0">
+                <a:solidFill>
+                  <a:srgbClr val="F4F0FF"/>
+                </a:solidFill>
+                <a:latin typeface="Arial"/>
+                <a:ea typeface="Arial"/>
+                <a:cs typeface="Arial"/>
+              </a:rPr>
+              <a:t>강사 데모</a:t>
+            </a:r>
+          </a:p>
+        </p:txBody>
+      </p:sp>
+      <p:sp>
+        <p:nvSpPr>
+          <p:cNvPr id="15" name="">
+            <a:extLst xmlns:a="http://schemas.openxmlformats.org/drawingml/2006/main">
+              <a:ext uri="{FF2B5EF4-FFF2-40B4-BE49-F238E27FC236}">
+                <a16:creationId xmlns:a16="http://schemas.microsoft.com/office/drawing/2014/main" id="{CCD917F1-27F7-48FA-AC9B-E93575C16FF6}"/>
+              </a:ext>
+            </a:extLst>
+          </p:cNvPr>
+          <p:cNvSpPr>
+            <a:spLocks xmlns:a="http://schemas.openxmlformats.org/drawingml/2006/main" noGrp="1"/>
+          </p:cNvSpPr>
+          <p:nvPr/>
+        </p:nvSpPr>
+        <p:spPr>
+          <a:xfrm xmlns:a="http://schemas.openxmlformats.org/drawingml/2006/main">
+            <a:off x="6477000" y="2971800"/>
+            <a:ext cx="2381250" cy="1562100"/>
           </a:xfrm>
           <a:prstGeom xmlns:a="http://schemas.openxmlformats.org/drawingml/2006/main" prst="rect">
             <a:avLst/>
@@ -7842,22 +7497,22 @@
       </p:sp>
       <p:sp>
         <p:nvSpPr>
-          <p:cNvPr id="18" name="">
-            <a:extLst xmlns:a="http://schemas.openxmlformats.org/drawingml/2006/main">
-              <a:ext uri="{FF2B5EF4-FFF2-40B4-BE49-F238E27FC236}">
-                <a16:creationId xmlns:a16="http://schemas.microsoft.com/office/drawing/2014/main" id="{0251B1D1-CA5B-4210-BA72-DF784E833AA2}"/>
-              </a:ext>
-            </a:extLst>
-          </p:cNvPr>
-          <p:cNvSpPr>
-            <a:spLocks xmlns:a="http://schemas.openxmlformats.org/drawingml/2006/main" noGrp="1"/>
-          </p:cNvSpPr>
-          <p:nvPr/>
-        </p:nvSpPr>
-        <p:spPr>
-          <a:xfrm xmlns:a="http://schemas.openxmlformats.org/drawingml/2006/main">
-            <a:off x="8267700" y="3124200"/>
-            <a:ext cx="819150" cy="323850"/>
+          <p:cNvPr id="16" name="">
+            <a:extLst xmlns:a="http://schemas.openxmlformats.org/drawingml/2006/main">
+              <a:ext uri="{FF2B5EF4-FFF2-40B4-BE49-F238E27FC236}">
+                <a16:creationId xmlns:a16="http://schemas.microsoft.com/office/drawing/2014/main" id="{CD0DB6B9-137E-4FF8-9DB1-4A061F656097}"/>
+              </a:ext>
+            </a:extLst>
+          </p:cNvPr>
+          <p:cNvSpPr>
+            <a:spLocks xmlns:a="http://schemas.openxmlformats.org/drawingml/2006/main" noGrp="1"/>
+          </p:cNvSpPr>
+          <p:nvPr/>
+        </p:nvSpPr>
+        <p:spPr>
+          <a:xfrm xmlns:a="http://schemas.openxmlformats.org/drawingml/2006/main">
+            <a:off x="6667500" y="3143250"/>
+            <a:ext cx="2000250" cy="323850"/>
           </a:xfrm>
           <a:prstGeom xmlns:a="http://schemas.openxmlformats.org/drawingml/2006/main" prst="rect">
             <a:avLst/>
@@ -7899,29 +7554,29 @@
                 <a:ea typeface="Arial"/>
                 <a:cs typeface="Arial"/>
               </a:rPr>
-              <a:t>PR</a:t>
-            </a:r>
-          </a:p>
-        </p:txBody>
-      </p:sp>
-      <p:sp>
-        <p:nvSpPr>
-          <p:cNvPr id="19" name="">
-            <a:extLst xmlns:a="http://schemas.openxmlformats.org/drawingml/2006/main">
-              <a:ext uri="{FF2B5EF4-FFF2-40B4-BE49-F238E27FC236}">
-                <a16:creationId xmlns:a16="http://schemas.microsoft.com/office/drawing/2014/main" id="{D53BCDFA-D55C-47F3-8031-450D4BF020EB}"/>
-              </a:ext>
-            </a:extLst>
-          </p:cNvPr>
-          <p:cNvSpPr>
-            <a:spLocks xmlns:a="http://schemas.openxmlformats.org/drawingml/2006/main" noGrp="1"/>
-          </p:cNvSpPr>
-          <p:nvPr/>
-        </p:nvSpPr>
-        <p:spPr>
-          <a:xfrm xmlns:a="http://schemas.openxmlformats.org/drawingml/2006/main">
-            <a:off x="8267700" y="3562350"/>
-            <a:ext cx="819150" cy="342900"/>
+              <a:t>3막</a:t>
+            </a:r>
+          </a:p>
+        </p:txBody>
+      </p:sp>
+      <p:sp>
+        <p:nvSpPr>
+          <p:cNvPr id="17" name="">
+            <a:extLst xmlns:a="http://schemas.openxmlformats.org/drawingml/2006/main">
+              <a:ext uri="{FF2B5EF4-FFF2-40B4-BE49-F238E27FC236}">
+                <a16:creationId xmlns:a16="http://schemas.microsoft.com/office/drawing/2014/main" id="{04A2FB33-C2F3-4F7F-98A3-DD1FEA087723}"/>
+              </a:ext>
+            </a:extLst>
+          </p:cNvPr>
+          <p:cNvSpPr>
+            <a:spLocks xmlns:a="http://schemas.openxmlformats.org/drawingml/2006/main" noGrp="1"/>
+          </p:cNvSpPr>
+          <p:nvPr/>
+        </p:nvSpPr>
+        <p:spPr>
+          <a:xfrm xmlns:a="http://schemas.openxmlformats.org/drawingml/2006/main">
+            <a:off x="6667500" y="3581400"/>
+            <a:ext cx="2000250" cy="781050"/>
           </a:xfrm>
           <a:prstGeom xmlns:a="http://schemas.openxmlformats.org/drawingml/2006/main" prst="rect">
             <a:avLst/>
@@ -7945,82 +7600,70 @@
           <a:lstStyle xmlns:a="http://schemas.openxmlformats.org/drawingml/2006/main"/>
           <a:p xmlns:a="http://schemas.openxmlformats.org/drawingml/2006/main">
             <a:pPr algn="l">
-              <a:defRPr sz="1350" b="0">
-                <a:solidFill>
-                  <a:srgbClr val="F4F0FF"/>
-                </a:solidFill>
-                <a:latin typeface="Arial"/>
-                <a:ea typeface="Arial"/>
-                <a:cs typeface="Arial"/>
-              </a:defRPr>
-            </a:pPr>
-            <a:r>
-              <a:rPr sz="1350" b="0">
-                <a:solidFill>
-                  <a:srgbClr val="F4F0FF"/>
-                </a:solidFill>
-                <a:latin typeface="Arial"/>
-                <a:ea typeface="Arial"/>
-                <a:cs typeface="Arial"/>
-              </a:rPr>
-              <a:t>검문소</a:t>
-            </a:r>
-          </a:p>
-        </p:txBody>
-      </p:sp>
-      <p:sp>
-        <p:nvSpPr>
-          <p:cNvPr id="20" name="">
-            <a:extLst xmlns:a="http://schemas.openxmlformats.org/drawingml/2006/main">
-              <a:ext uri="{FF2B5EF4-FFF2-40B4-BE49-F238E27FC236}">
-                <a16:creationId xmlns:a16="http://schemas.microsoft.com/office/drawing/2014/main" id="{033BE5FC-4327-4C47-A9D2-89BD45DB5DD8}"/>
-              </a:ext>
-            </a:extLst>
-          </p:cNvPr>
-          <p:cNvSpPr>
-            <a:spLocks xmlns:a="http://schemas.openxmlformats.org/drawingml/2006/main" noGrp="1"/>
-          </p:cNvSpPr>
-          <p:nvPr/>
-        </p:nvSpPr>
-        <p:spPr>
-          <a:xfrm xmlns:a="http://schemas.openxmlformats.org/drawingml/2006/main">
-            <a:off x="9277350" y="3486150"/>
-            <a:ext cx="342900" cy="28575"/>
-          </a:xfrm>
-          <a:prstGeom xmlns:a="http://schemas.openxmlformats.org/drawingml/2006/main" prst="rect">
-            <a:avLst/>
-          </a:prstGeom>
-          <a:solidFill xmlns:a="http://schemas.openxmlformats.org/drawingml/2006/main">
-            <a:srgbClr val="FFFFFF"/>
-          </a:solidFill>
-          <a:ln xmlns:a="http://schemas.openxmlformats.org/drawingml/2006/main" w="0">
-            <a:solidFill>
-              <a:srgbClr val="000000">
-                <a:alpha val="0"/>
-              </a:srgbClr>
-            </a:solidFill>
-            <a:prstDash val="solid"/>
-          </a:ln>
-        </p:spPr>
-      </p:sp>
-      <p:sp>
-        <p:nvSpPr>
-          <p:cNvPr id="21" name="">
-            <a:extLst xmlns:a="http://schemas.openxmlformats.org/drawingml/2006/main">
-              <a:ext uri="{FF2B5EF4-FFF2-40B4-BE49-F238E27FC236}">
-                <a16:creationId xmlns:a16="http://schemas.microsoft.com/office/drawing/2014/main" id="{587C6641-BCFA-4039-A912-6AB69084EE5E}"/>
-              </a:ext>
-            </a:extLst>
-          </p:cNvPr>
-          <p:cNvSpPr>
-            <a:spLocks xmlns:a="http://schemas.openxmlformats.org/drawingml/2006/main" noGrp="1"/>
-          </p:cNvSpPr>
-          <p:nvPr/>
-        </p:nvSpPr>
-        <p:spPr>
-          <a:xfrm xmlns:a="http://schemas.openxmlformats.org/drawingml/2006/main">
-            <a:off x="9258300" y="3467100"/>
-            <a:ext cx="1200150" cy="1123950"/>
+              <a:defRPr sz="1650" b="0">
+                <a:solidFill>
+                  <a:srgbClr val="F4F0FF"/>
+                </a:solidFill>
+                <a:latin typeface="Arial"/>
+                <a:ea typeface="Arial"/>
+                <a:cs typeface="Arial"/>
+              </a:defRPr>
+            </a:pPr>
+            <a:r>
+              <a:rPr sz="1650" b="0">
+                <a:solidFill>
+                  <a:srgbClr val="F4F0FF"/>
+                </a:solidFill>
+                <a:latin typeface="Arial"/>
+                <a:ea typeface="Arial"/>
+                <a:cs typeface="Arial"/>
+              </a:rPr>
+              <a:t>좋은 PR</a:t>
+            </a:r>
+          </a:p>
+          <a:p xmlns:a="http://schemas.openxmlformats.org/drawingml/2006/main">
+            <a:pPr algn="l">
+              <a:defRPr sz="1650" b="0">
+                <a:solidFill>
+                  <a:srgbClr val="F4F0FF"/>
+                </a:solidFill>
+                <a:latin typeface="Arial"/>
+                <a:ea typeface="Arial"/>
+                <a:cs typeface="Arial"/>
+              </a:defRPr>
+            </a:pPr>
+            <a:r>
+              <a:rPr sz="1650" b="0">
+                <a:solidFill>
+                  <a:srgbClr val="F4F0FF"/>
+                </a:solidFill>
+                <a:latin typeface="Arial"/>
+                <a:ea typeface="Arial"/>
+                <a:cs typeface="Arial"/>
+              </a:rPr>
+              <a:t>문제 PR 2개</a:t>
+            </a:r>
+          </a:p>
+        </p:txBody>
+      </p:sp>
+      <p:sp>
+        <p:nvSpPr>
+          <p:cNvPr id="18" name="">
+            <a:extLst xmlns:a="http://schemas.openxmlformats.org/drawingml/2006/main">
+              <a:ext uri="{FF2B5EF4-FFF2-40B4-BE49-F238E27FC236}">
+                <a16:creationId xmlns:a16="http://schemas.microsoft.com/office/drawing/2014/main" id="{869992E9-91C6-46EA-AB3A-D17A0B4A7AF0}"/>
+              </a:ext>
+            </a:extLst>
+          </p:cNvPr>
+          <p:cNvSpPr>
+            <a:spLocks xmlns:a="http://schemas.openxmlformats.org/drawingml/2006/main" noGrp="1"/>
+          </p:cNvSpPr>
+          <p:nvPr/>
+        </p:nvSpPr>
+        <p:spPr>
+          <a:xfrm xmlns:a="http://schemas.openxmlformats.org/drawingml/2006/main">
+            <a:off x="9163050" y="2971800"/>
+            <a:ext cx="2381250" cy="1562100"/>
           </a:xfrm>
           <a:prstGeom xmlns:a="http://schemas.openxmlformats.org/drawingml/2006/main" prst="rect">
             <a:avLst/>
@@ -8042,22 +7685,22 @@
       </p:sp>
       <p:sp>
         <p:nvSpPr>
-          <p:cNvPr id="22" name="">
-            <a:extLst xmlns:a="http://schemas.openxmlformats.org/drawingml/2006/main">
-              <a:ext uri="{FF2B5EF4-FFF2-40B4-BE49-F238E27FC236}">
-                <a16:creationId xmlns:a16="http://schemas.microsoft.com/office/drawing/2014/main" id="{31253A4C-DCD8-4E42-A0E8-3E7CFD5C9534}"/>
-              </a:ext>
-            </a:extLst>
-          </p:cNvPr>
-          <p:cNvSpPr>
-            <a:spLocks xmlns:a="http://schemas.openxmlformats.org/drawingml/2006/main" noGrp="1"/>
-          </p:cNvSpPr>
-          <p:nvPr/>
-        </p:nvSpPr>
-        <p:spPr>
-          <a:xfrm xmlns:a="http://schemas.openxmlformats.org/drawingml/2006/main">
-            <a:off x="9448800" y="3638550"/>
-            <a:ext cx="819150" cy="323850"/>
+          <p:cNvPr id="19" name="">
+            <a:extLst xmlns:a="http://schemas.openxmlformats.org/drawingml/2006/main">
+              <a:ext uri="{FF2B5EF4-FFF2-40B4-BE49-F238E27FC236}">
+                <a16:creationId xmlns:a16="http://schemas.microsoft.com/office/drawing/2014/main" id="{3477F43D-A156-4A35-8927-C821730B074B}"/>
+              </a:ext>
+            </a:extLst>
+          </p:cNvPr>
+          <p:cNvSpPr>
+            <a:spLocks xmlns:a="http://schemas.openxmlformats.org/drawingml/2006/main" noGrp="1"/>
+          </p:cNvSpPr>
+          <p:nvPr/>
+        </p:nvSpPr>
+        <p:spPr>
+          <a:xfrm xmlns:a="http://schemas.openxmlformats.org/drawingml/2006/main">
+            <a:off x="9353550" y="3143250"/>
+            <a:ext cx="2000250" cy="323850"/>
           </a:xfrm>
           <a:prstGeom xmlns:a="http://schemas.openxmlformats.org/drawingml/2006/main" prst="rect">
             <a:avLst/>
@@ -8099,29 +7742,29 @@
                 <a:ea typeface="Arial"/>
                 <a:cs typeface="Arial"/>
               </a:rPr>
-              <a:t>Review</a:t>
-            </a:r>
-          </a:p>
-        </p:txBody>
-      </p:sp>
-      <p:sp>
-        <p:nvSpPr>
-          <p:cNvPr id="23" name="">
-            <a:extLst xmlns:a="http://schemas.openxmlformats.org/drawingml/2006/main">
-              <a:ext uri="{FF2B5EF4-FFF2-40B4-BE49-F238E27FC236}">
-                <a16:creationId xmlns:a16="http://schemas.microsoft.com/office/drawing/2014/main" id="{6AE79B23-4433-4CFE-AEBB-DBD20854ECED}"/>
-              </a:ext>
-            </a:extLst>
-          </p:cNvPr>
-          <p:cNvSpPr>
-            <a:spLocks xmlns:a="http://schemas.openxmlformats.org/drawingml/2006/main" noGrp="1"/>
-          </p:cNvSpPr>
-          <p:nvPr/>
-        </p:nvSpPr>
-        <p:spPr>
-          <a:xfrm xmlns:a="http://schemas.openxmlformats.org/drawingml/2006/main">
-            <a:off x="9448800" y="4076700"/>
-            <a:ext cx="819150" cy="342900"/>
+              <a:t>Exit</a:t>
+            </a:r>
+          </a:p>
+        </p:txBody>
+      </p:sp>
+      <p:sp>
+        <p:nvSpPr>
+          <p:cNvPr id="20" name="">
+            <a:extLst xmlns:a="http://schemas.openxmlformats.org/drawingml/2006/main">
+              <a:ext uri="{FF2B5EF4-FFF2-40B4-BE49-F238E27FC236}">
+                <a16:creationId xmlns:a16="http://schemas.microsoft.com/office/drawing/2014/main" id="{2EA6B62C-622E-4CF8-9A94-DF1AD15B05AB}"/>
+              </a:ext>
+            </a:extLst>
+          </p:cNvPr>
+          <p:cNvSpPr>
+            <a:spLocks xmlns:a="http://schemas.openxmlformats.org/drawingml/2006/main" noGrp="1"/>
+          </p:cNvSpPr>
+          <p:nvPr/>
+        </p:nvSpPr>
+        <p:spPr>
+          <a:xfrm xmlns:a="http://schemas.openxmlformats.org/drawingml/2006/main">
+            <a:off x="9353550" y="3581400"/>
+            <a:ext cx="2000250" cy="781050"/>
           </a:xfrm>
           <a:prstGeom xmlns:a="http://schemas.openxmlformats.org/drawingml/2006/main" prst="rect">
             <a:avLst/>
@@ -8145,17 +7788,17 @@
           <a:lstStyle xmlns:a="http://schemas.openxmlformats.org/drawingml/2006/main"/>
           <a:p xmlns:a="http://schemas.openxmlformats.org/drawingml/2006/main">
             <a:pPr algn="l">
-              <a:defRPr sz="1350" b="0">
-                <a:solidFill>
-                  <a:srgbClr val="F4F0FF"/>
-                </a:solidFill>
-                <a:latin typeface="Arial"/>
-                <a:ea typeface="Arial"/>
-                <a:cs typeface="Arial"/>
-              </a:defRPr>
-            </a:pPr>
-            <a:r>
-              <a:rPr sz="1350" b="0">
+              <a:defRPr sz="1650" b="0">
+                <a:solidFill>
+                  <a:srgbClr val="F4F0FF"/>
+                </a:solidFill>
+                <a:latin typeface="Arial"/>
+                <a:ea typeface="Arial"/>
+                <a:cs typeface="Arial"/>
+              </a:defRPr>
+            </a:pPr>
+            <a:r>
+              <a:rPr sz="1650" b="0">
                 <a:solidFill>
                   <a:srgbClr val="F4F0FF"/>
                 </a:solidFill>
@@ -8166,98 +7809,72 @@
               <a:t>판단</a:t>
             </a:r>
           </a:p>
-        </p:txBody>
-      </p:sp>
-      <p:sp>
-        <p:nvSpPr>
-          <p:cNvPr id="24" name="">
-            <a:extLst xmlns:a="http://schemas.openxmlformats.org/drawingml/2006/main">
-              <a:ext uri="{FF2B5EF4-FFF2-40B4-BE49-F238E27FC236}">
-                <a16:creationId xmlns:a16="http://schemas.microsoft.com/office/drawing/2014/main" id="{C21D6B9A-626F-4F38-995F-154EB4085BFE}"/>
-              </a:ext>
-            </a:extLst>
-          </p:cNvPr>
-          <p:cNvSpPr>
-            <a:spLocks xmlns:a="http://schemas.openxmlformats.org/drawingml/2006/main" noGrp="1"/>
-          </p:cNvSpPr>
-          <p:nvPr/>
-        </p:nvSpPr>
-        <p:spPr>
-          <a:xfrm xmlns:a="http://schemas.openxmlformats.org/drawingml/2006/main">
-            <a:off x="10458450" y="4000500"/>
-            <a:ext cx="342900" cy="28575"/>
-          </a:xfrm>
-          <a:prstGeom xmlns:a="http://schemas.openxmlformats.org/drawingml/2006/main" prst="rect">
-            <a:avLst/>
-          </a:prstGeom>
-          <a:solidFill xmlns:a="http://schemas.openxmlformats.org/drawingml/2006/main">
-            <a:srgbClr val="FFFFFF"/>
-          </a:solidFill>
-          <a:ln xmlns:a="http://schemas.openxmlformats.org/drawingml/2006/main" w="0">
-            <a:solidFill>
-              <a:srgbClr val="000000">
-                <a:alpha val="0"/>
-              </a:srgbClr>
-            </a:solidFill>
-            <a:prstDash val="solid"/>
-          </a:ln>
-        </p:spPr>
-      </p:sp>
-      <p:sp>
-        <p:nvSpPr>
-          <p:cNvPr id="25" name="">
-            <a:extLst xmlns:a="http://schemas.openxmlformats.org/drawingml/2006/main">
-              <a:ext uri="{FF2B5EF4-FFF2-40B4-BE49-F238E27FC236}">
-                <a16:creationId xmlns:a16="http://schemas.microsoft.com/office/drawing/2014/main" id="{2BBD2DED-B4FA-4B3F-85DD-06AC47C7D444}"/>
-              </a:ext>
-            </a:extLst>
-          </p:cNvPr>
-          <p:cNvSpPr>
-            <a:spLocks xmlns:a="http://schemas.openxmlformats.org/drawingml/2006/main" noGrp="1"/>
-          </p:cNvSpPr>
-          <p:nvPr/>
-        </p:nvSpPr>
-        <p:spPr>
-          <a:xfrm xmlns:a="http://schemas.openxmlformats.org/drawingml/2006/main">
-            <a:off x="10439400" y="2952750"/>
-            <a:ext cx="1200150" cy="1123950"/>
-          </a:xfrm>
-          <a:prstGeom xmlns:a="http://schemas.openxmlformats.org/drawingml/2006/main" prst="rect">
-            <a:avLst/>
-          </a:prstGeom>
-          <a:solidFill xmlns:a="http://schemas.openxmlformats.org/drawingml/2006/main">
-            <a:srgbClr val="111111">
-              <a:alpha val="80000"/>
-            </a:srgbClr>
-          </a:solidFill>
-          <a:ln xmlns:a="http://schemas.openxmlformats.org/drawingml/2006/main" w="9525">
-            <a:solidFill>
-              <a:srgbClr val="FFFFFF">
-                <a:alpha val="20000"/>
-              </a:srgbClr>
-            </a:solidFill>
-            <a:prstDash val="solid"/>
-          </a:ln>
-        </p:spPr>
-      </p:sp>
-      <p:sp>
-        <p:nvSpPr>
-          <p:cNvPr id="26" name="">
-            <a:extLst xmlns:a="http://schemas.openxmlformats.org/drawingml/2006/main">
-              <a:ext uri="{FF2B5EF4-FFF2-40B4-BE49-F238E27FC236}">
-                <a16:creationId xmlns:a16="http://schemas.microsoft.com/office/drawing/2014/main" id="{1ED059B1-1A79-4217-873D-394422BE2C4B}"/>
-              </a:ext>
-            </a:extLst>
-          </p:cNvPr>
-          <p:cNvSpPr>
-            <a:spLocks xmlns:a="http://schemas.openxmlformats.org/drawingml/2006/main" noGrp="1"/>
-          </p:cNvSpPr>
-          <p:nvPr/>
-        </p:nvSpPr>
-        <p:spPr>
-          <a:xfrm xmlns:a="http://schemas.openxmlformats.org/drawingml/2006/main">
-            <a:off x="10629900" y="3124200"/>
-            <a:ext cx="819150" cy="323850"/>
+          <a:p xmlns:a="http://schemas.openxmlformats.org/drawingml/2006/main">
+            <a:pPr algn="l">
+              <a:defRPr sz="1650" b="0">
+                <a:solidFill>
+                  <a:srgbClr val="F4F0FF"/>
+                </a:solidFill>
+                <a:latin typeface="Arial"/>
+                <a:ea typeface="Arial"/>
+                <a:cs typeface="Arial"/>
+              </a:defRPr>
+            </a:pPr>
+            <a:r>
+              <a:rPr sz="1650" b="0">
+                <a:solidFill>
+                  <a:srgbClr val="F4F0FF"/>
+                </a:solidFill>
+                <a:latin typeface="Arial"/>
+                <a:ea typeface="Arial"/>
+                <a:cs typeface="Arial"/>
+              </a:rPr>
+              <a:t>근거</a:t>
+            </a:r>
+          </a:p>
+          <a:p xmlns:a="http://schemas.openxmlformats.org/drawingml/2006/main">
+            <a:pPr algn="l">
+              <a:defRPr sz="1650" b="0">
+                <a:solidFill>
+                  <a:srgbClr val="F4F0FF"/>
+                </a:solidFill>
+                <a:latin typeface="Arial"/>
+                <a:ea typeface="Arial"/>
+                <a:cs typeface="Arial"/>
+              </a:defRPr>
+            </a:pPr>
+            <a:r>
+              <a:rPr sz="1650" b="0">
+                <a:solidFill>
+                  <a:srgbClr val="F4F0FF"/>
+                </a:solidFill>
+                <a:latin typeface="Arial"/>
+                <a:ea typeface="Arial"/>
+                <a:cs typeface="Arial"/>
+              </a:rPr>
+              <a:t>agent comment</a:t>
+            </a:r>
+          </a:p>
+        </p:txBody>
+      </p:sp>
+      <p:sp>
+        <p:nvSpPr>
+          <p:cNvPr id="21" name="">
+            <a:extLst xmlns:a="http://schemas.openxmlformats.org/drawingml/2006/main">
+              <a:ext uri="{FF2B5EF4-FFF2-40B4-BE49-F238E27FC236}">
+                <a16:creationId xmlns:a16="http://schemas.microsoft.com/office/drawing/2014/main" id="{2609CC9D-1ADE-4E04-B037-F68967002ACC}"/>
+              </a:ext>
+            </a:extLst>
+          </p:cNvPr>
+          <p:cNvSpPr>
+            <a:spLocks xmlns:a="http://schemas.openxmlformats.org/drawingml/2006/main" noGrp="1"/>
+          </p:cNvSpPr>
+          <p:nvPr/>
+        </p:nvSpPr>
+        <p:spPr>
+          <a:xfrm xmlns:a="http://schemas.openxmlformats.org/drawingml/2006/main">
+            <a:off x="6705600" y="5143500"/>
+            <a:ext cx="4572000" cy="400050"/>
           </a:xfrm>
           <a:prstGeom xmlns:a="http://schemas.openxmlformats.org/drawingml/2006/main" prst="rect">
             <a:avLst/>
@@ -8280,265 +7897,36 @@
           <a:bodyPr xmlns:a="http://schemas.openxmlformats.org/drawingml/2006/main" lIns="0" tIns="0" rIns="0" bIns="0" anchor="t"/>
           <a:lstStyle xmlns:a="http://schemas.openxmlformats.org/drawingml/2006/main"/>
           <a:p xmlns:a="http://schemas.openxmlformats.org/drawingml/2006/main">
-            <a:pPr algn="l">
-              <a:defRPr sz="1500" b="1">
-                <a:solidFill>
-                  <a:srgbClr val="FFFFFF"/>
-                </a:solidFill>
-                <a:latin typeface="Arial"/>
-                <a:ea typeface="Arial"/>
-                <a:cs typeface="Arial"/>
-              </a:defRPr>
-            </a:pPr>
-            <a:r>
-              <a:rPr sz="1500" b="1">
-                <a:solidFill>
-                  <a:srgbClr val="FFFFFF"/>
-                </a:solidFill>
-                <a:latin typeface="Arial"/>
-                <a:ea typeface="Arial"/>
-                <a:cs typeface="Arial"/>
-              </a:rPr>
-              <a:t>Main</a:t>
-            </a:r>
-          </a:p>
-        </p:txBody>
-      </p:sp>
-      <p:sp>
-        <p:nvSpPr>
-          <p:cNvPr id="27" name="">
-            <a:extLst xmlns:a="http://schemas.openxmlformats.org/drawingml/2006/main">
-              <a:ext uri="{FF2B5EF4-FFF2-40B4-BE49-F238E27FC236}">
-                <a16:creationId xmlns:a16="http://schemas.microsoft.com/office/drawing/2014/main" id="{14136989-5563-42F2-8E6B-3B7A0A15FA10}"/>
-              </a:ext>
-            </a:extLst>
-          </p:cNvPr>
-          <p:cNvSpPr>
-            <a:spLocks xmlns:a="http://schemas.openxmlformats.org/drawingml/2006/main" noGrp="1"/>
-          </p:cNvSpPr>
-          <p:nvPr/>
-        </p:nvSpPr>
-        <p:spPr>
-          <a:xfrm xmlns:a="http://schemas.openxmlformats.org/drawingml/2006/main">
-            <a:off x="10629900" y="3562350"/>
-            <a:ext cx="819150" cy="342900"/>
-          </a:xfrm>
-          <a:prstGeom xmlns:a="http://schemas.openxmlformats.org/drawingml/2006/main" prst="rect">
-            <a:avLst/>
-          </a:prstGeom>
-          <a:solidFill xmlns:a="http://schemas.openxmlformats.org/drawingml/2006/main">
-            <a:srgbClr val="000000">
-              <a:alpha val="0"/>
-            </a:srgbClr>
-          </a:solidFill>
-          <a:ln xmlns:a="http://schemas.openxmlformats.org/drawingml/2006/main" w="0">
-            <a:solidFill>
-              <a:srgbClr val="000000">
-                <a:alpha val="0"/>
-              </a:srgbClr>
-            </a:solidFill>
-            <a:prstDash val="solid"/>
-          </a:ln>
-        </p:spPr>
-        <p:txBody>
-          <a:bodyPr xmlns:a="http://schemas.openxmlformats.org/drawingml/2006/main" lIns="0" tIns="0" rIns="76200" bIns="0" anchor="t"/>
-          <a:lstStyle xmlns:a="http://schemas.openxmlformats.org/drawingml/2006/main"/>
-          <a:p xmlns:a="http://schemas.openxmlformats.org/drawingml/2006/main">
-            <a:pPr algn="l">
-              <a:defRPr sz="1350" b="0">
-                <a:solidFill>
-                  <a:srgbClr val="F4F0FF"/>
-                </a:solidFill>
-                <a:latin typeface="Arial"/>
-                <a:ea typeface="Arial"/>
-                <a:cs typeface="Arial"/>
-              </a:defRPr>
-            </a:pPr>
-            <a:r>
-              <a:rPr sz="1350" b="0">
-                <a:solidFill>
-                  <a:srgbClr val="F4F0FF"/>
-                </a:solidFill>
-                <a:latin typeface="Arial"/>
-                <a:ea typeface="Arial"/>
-                <a:cs typeface="Arial"/>
-              </a:rPr>
-              <a:t>결과</a:t>
-            </a:r>
-          </a:p>
-        </p:txBody>
-      </p:sp>
-      <p:sp>
-        <p:nvSpPr>
-          <p:cNvPr id="28" name="">
-            <a:extLst xmlns:a="http://schemas.openxmlformats.org/drawingml/2006/main">
-              <a:ext uri="{FF2B5EF4-FFF2-40B4-BE49-F238E27FC236}">
-                <a16:creationId xmlns:a16="http://schemas.microsoft.com/office/drawing/2014/main" id="{08D3A65B-B3A4-40FF-A323-F6B5CB5B8FCB}"/>
-              </a:ext>
-            </a:extLst>
-          </p:cNvPr>
-          <p:cNvSpPr>
-            <a:spLocks xmlns:a="http://schemas.openxmlformats.org/drawingml/2006/main" noGrp="1"/>
-          </p:cNvSpPr>
-          <p:nvPr/>
-        </p:nvSpPr>
-        <p:spPr>
-          <a:xfrm xmlns:a="http://schemas.openxmlformats.org/drawingml/2006/main">
-            <a:off x="6953250" y="1123950"/>
-            <a:ext cx="4000500" cy="1333500"/>
-          </a:xfrm>
-          <a:prstGeom xmlns:a="http://schemas.openxmlformats.org/drawingml/2006/main" prst="rect">
-            <a:avLst/>
-          </a:prstGeom>
-          <a:solidFill xmlns:a="http://schemas.openxmlformats.org/drawingml/2006/main">
-            <a:srgbClr val="111111">
-              <a:alpha val="80000"/>
-            </a:srgbClr>
-          </a:solidFill>
-          <a:ln xmlns:a="http://schemas.openxmlformats.org/drawingml/2006/main" w="9525">
-            <a:solidFill>
-              <a:srgbClr val="FFFFFF">
-                <a:alpha val="20000"/>
-              </a:srgbClr>
-            </a:solidFill>
-            <a:prstDash val="solid"/>
-          </a:ln>
-        </p:spPr>
-      </p:sp>
-      <p:sp>
-        <p:nvSpPr>
-          <p:cNvPr id="29" name="">
-            <a:extLst xmlns:a="http://schemas.openxmlformats.org/drawingml/2006/main">
-              <a:ext uri="{FF2B5EF4-FFF2-40B4-BE49-F238E27FC236}">
-                <a16:creationId xmlns:a16="http://schemas.microsoft.com/office/drawing/2014/main" id="{15F43AC6-2AF5-4D1C-833E-B86B536A3960}"/>
-              </a:ext>
-            </a:extLst>
-          </p:cNvPr>
-          <p:cNvSpPr>
-            <a:spLocks xmlns:a="http://schemas.openxmlformats.org/drawingml/2006/main" noGrp="1"/>
-          </p:cNvSpPr>
-          <p:nvPr/>
-        </p:nvSpPr>
-        <p:spPr>
-          <a:xfrm xmlns:a="http://schemas.openxmlformats.org/drawingml/2006/main">
-            <a:off x="7143750" y="1295400"/>
-            <a:ext cx="3619500" cy="323850"/>
-          </a:xfrm>
-          <a:prstGeom xmlns:a="http://schemas.openxmlformats.org/drawingml/2006/main" prst="rect">
-            <a:avLst/>
-          </a:prstGeom>
-          <a:solidFill xmlns:a="http://schemas.openxmlformats.org/drawingml/2006/main">
-            <a:srgbClr val="000000">
-              <a:alpha val="0"/>
-            </a:srgbClr>
-          </a:solidFill>
-          <a:ln xmlns:a="http://schemas.openxmlformats.org/drawingml/2006/main" w="0">
-            <a:solidFill>
-              <a:srgbClr val="000000">
-                <a:alpha val="0"/>
-              </a:srgbClr>
-            </a:solidFill>
-            <a:prstDash val="solid"/>
-          </a:ln>
-        </p:spPr>
-        <p:txBody>
-          <a:bodyPr xmlns:a="http://schemas.openxmlformats.org/drawingml/2006/main" lIns="0" tIns="0" rIns="0" bIns="0" anchor="t"/>
-          <a:lstStyle xmlns:a="http://schemas.openxmlformats.org/drawingml/2006/main"/>
-          <a:p xmlns:a="http://schemas.openxmlformats.org/drawingml/2006/main">
-            <a:pPr algn="l">
-              <a:defRPr sz="1500" b="1">
-                <a:solidFill>
-                  <a:srgbClr val="FFFFFF"/>
-                </a:solidFill>
-                <a:latin typeface="Arial"/>
-                <a:ea typeface="Arial"/>
-                <a:cs typeface="Arial"/>
-              </a:defRPr>
-            </a:pPr>
-            <a:r>
-              <a:rPr sz="1500" b="1">
-                <a:solidFill>
-                  <a:srgbClr val="FFFFFF"/>
-                </a:solidFill>
-                <a:latin typeface="Arial"/>
-                <a:ea typeface="Arial"/>
-                <a:cs typeface="Arial"/>
-              </a:rPr>
-              <a:t>PR = 검문소</a:t>
-            </a:r>
-          </a:p>
-        </p:txBody>
-      </p:sp>
-      <p:sp>
-        <p:nvSpPr>
-          <p:cNvPr id="30" name="">
-            <a:extLst xmlns:a="http://schemas.openxmlformats.org/drawingml/2006/main">
-              <a:ext uri="{FF2B5EF4-FFF2-40B4-BE49-F238E27FC236}">
-                <a16:creationId xmlns:a16="http://schemas.microsoft.com/office/drawing/2014/main" id="{BAAD0B5F-B374-4B44-8557-D4EFEF0EBBAE}"/>
-              </a:ext>
-            </a:extLst>
-          </p:cNvPr>
-          <p:cNvSpPr>
-            <a:spLocks xmlns:a="http://schemas.openxmlformats.org/drawingml/2006/main" noGrp="1"/>
-          </p:cNvSpPr>
-          <p:nvPr/>
-        </p:nvSpPr>
-        <p:spPr>
-          <a:xfrm xmlns:a="http://schemas.openxmlformats.org/drawingml/2006/main">
-            <a:off x="7143750" y="1733550"/>
-            <a:ext cx="3619500" cy="552450"/>
-          </a:xfrm>
-          <a:prstGeom xmlns:a="http://schemas.openxmlformats.org/drawingml/2006/main" prst="rect">
-            <a:avLst/>
-          </a:prstGeom>
-          <a:solidFill xmlns:a="http://schemas.openxmlformats.org/drawingml/2006/main">
-            <a:srgbClr val="000000">
-              <a:alpha val="0"/>
-            </a:srgbClr>
-          </a:solidFill>
-          <a:ln xmlns:a="http://schemas.openxmlformats.org/drawingml/2006/main" w="0">
-            <a:solidFill>
-              <a:srgbClr val="000000">
-                <a:alpha val="0"/>
-              </a:srgbClr>
-            </a:solidFill>
-            <a:prstDash val="solid"/>
-          </a:ln>
-        </p:spPr>
-        <p:txBody>
-          <a:bodyPr xmlns:a="http://schemas.openxmlformats.org/drawingml/2006/main" lIns="0" tIns="0" rIns="76200" bIns="0" anchor="t"/>
-          <a:lstStyle xmlns:a="http://schemas.openxmlformats.org/drawingml/2006/main"/>
-          <a:p xmlns:a="http://schemas.openxmlformats.org/drawingml/2006/main">
-            <a:pPr algn="l">
-              <a:defRPr sz="1425" b="0">
-                <a:solidFill>
-                  <a:srgbClr val="F4F0FF"/>
-                </a:solidFill>
-                <a:latin typeface="Arial"/>
-                <a:ea typeface="Arial"/>
-                <a:cs typeface="Arial"/>
-              </a:defRPr>
-            </a:pPr>
-            <a:r>
-              <a:rPr sz="1425" b="0">
-                <a:solidFill>
-                  <a:srgbClr val="F4F0FF"/>
-                </a:solidFill>
-                <a:latin typeface="Arial"/>
-                <a:ea typeface="Arial"/>
-                <a:cs typeface="Arial"/>
-              </a:rPr>
-              <a:t>설명보다 Files changed, Diff, Checks가 기준이다.</a:t>
-            </a:r>
-          </a:p>
-        </p:txBody>
-      </p:sp>
-      <p:sp>
-        <p:nvSpPr>
-          <p:cNvPr id="31" name="footer-note">
-            <a:extLst xmlns:a="http://schemas.openxmlformats.org/drawingml/2006/main">
-              <a:ext uri="{FF2B5EF4-FFF2-40B4-BE49-F238E27FC236}">
-                <a16:creationId xmlns:a16="http://schemas.microsoft.com/office/drawing/2014/main" id="{01E198EE-96F9-484D-A510-1E128EDE02D9}"/>
+            <a:pPr algn="ctr">
+              <a:defRPr sz="2250" b="1">
+                <a:solidFill>
+                  <a:srgbClr val="FFFFFF"/>
+                </a:solidFill>
+                <a:latin typeface="Arial"/>
+                <a:ea typeface="Arial"/>
+                <a:cs typeface="Arial"/>
+              </a:defRPr>
+            </a:pPr>
+            <a:r>
+              <a:rPr sz="2250" b="1">
+                <a:solidFill>
+                  <a:srgbClr val="FFFFFF"/>
+                </a:solidFill>
+                <a:latin typeface="Arial"/>
+                <a:ea typeface="Arial"/>
+                <a:cs typeface="Arial"/>
+              </a:rPr>
+              <a:t>개념은 짧게, 판정은 직접 한다</a:t>
+            </a:r>
+          </a:p>
+        </p:txBody>
+      </p:sp>
+      <p:sp>
+        <p:nvSpPr>
+          <p:cNvPr id="22" name="footer-note">
+            <a:extLst xmlns:a="http://schemas.openxmlformats.org/drawingml/2006/main">
+              <a:ext uri="{FF2B5EF4-FFF2-40B4-BE49-F238E27FC236}">
+                <a16:creationId xmlns:a16="http://schemas.microsoft.com/office/drawing/2014/main" id="{1A9FEB45-ED0E-4B7F-8D7D-C720AE788308}"/>
               </a:ext>
             </a:extLst>
           </p:cNvPr>
@@ -8600,7 +7988,7 @@
     </p:spTree>
     <p:extLst>
       <p:ext uri="{BB962C8B-B14F-4D97-AF65-F5344CB8AC3E}">
-        <p14:creationId xmlns:p14="http://schemas.microsoft.com/office/powerpoint/2010/main" val="1456449015"/>
+        <p14:creationId xmlns:p14="http://schemas.microsoft.com/office/powerpoint/2010/main" val="2080042205"/>
       </p:ext>
     </p:extLst>
   </p:cSld>
@@ -8624,7 +8012,7 @@
           <p:cNvPr id="1" name="">
             <a:extLst xmlns:a="http://schemas.openxmlformats.org/drawingml/2006/main">
               <a:ext uri="{FF2B5EF4-FFF2-40B4-BE49-F238E27FC236}">
-                <a16:creationId xmlns:a16="http://schemas.microsoft.com/office/drawing/2014/main" id="{F10204EA-B4BE-4C58-9D91-C7C6EFD80BCD}"/>
+                <a16:creationId xmlns:a16="http://schemas.microsoft.com/office/drawing/2014/main" id="{FC5A4FD7-DEF0-4103-92B0-6E50EECE7037}"/>
               </a:ext>
             </a:extLst>
           </p:cNvPr>
@@ -8673,7 +8061,7 @@
           <p:cNvPr id="2" name="">
             <a:extLst xmlns:a="http://schemas.openxmlformats.org/drawingml/2006/main">
               <a:ext uri="{FF2B5EF4-FFF2-40B4-BE49-F238E27FC236}">
-                <a16:creationId xmlns:a16="http://schemas.microsoft.com/office/drawing/2014/main" id="{8E2F0D15-03BD-4BEF-853C-2777109AF5DB}"/>
+                <a16:creationId xmlns:a16="http://schemas.microsoft.com/office/drawing/2014/main" id="{F676B365-8F34-4A98-9E50-6D8A031B5702}"/>
               </a:ext>
             </a:extLst>
           </p:cNvPr>
@@ -8710,7 +8098,7 @@
           <p:cNvPr id="3" name="kicker-marker">
             <a:extLst xmlns:a="http://schemas.openxmlformats.org/drawingml/2006/main">
               <a:ext uri="{FF2B5EF4-FFF2-40B4-BE49-F238E27FC236}">
-                <a16:creationId xmlns:a16="http://schemas.microsoft.com/office/drawing/2014/main" id="{17771DEE-311C-4720-B88F-2EF487986F44}"/>
+                <a16:creationId xmlns:a16="http://schemas.microsoft.com/office/drawing/2014/main" id="{4690B7AE-EB60-4809-A681-D084443C6587}"/>
               </a:ext>
             </a:extLst>
           </p:cNvPr>
@@ -8745,7 +8133,7 @@
           <p:cNvPr id="4" name="kicker-label">
             <a:extLst xmlns:a="http://schemas.openxmlformats.org/drawingml/2006/main">
               <a:ext uri="{FF2B5EF4-FFF2-40B4-BE49-F238E27FC236}">
-                <a16:creationId xmlns:a16="http://schemas.microsoft.com/office/drawing/2014/main" id="{0A609D1A-8429-4948-A949-C908417119B6}"/>
+                <a16:creationId xmlns:a16="http://schemas.microsoft.com/office/drawing/2014/main" id="{33F94200-704E-48B1-89CE-E1D50ECAB715}"/>
               </a:ext>
             </a:extLst>
           </p:cNvPr>
@@ -8799,7 +8187,7 @@
                 <a:ea typeface="Courier New"/>
                 <a:cs typeface="Courier New"/>
               </a:rPr>
-              <a:t>VOCABULARY</a:t>
+              <a:t>MENTAL MODEL</a:t>
             </a:r>
           </a:p>
         </p:txBody>
@@ -8809,7 +8197,7 @@
           <p:cNvPr id="5" name="">
             <a:extLst xmlns:a="http://schemas.openxmlformats.org/drawingml/2006/main">
               <a:ext uri="{FF2B5EF4-FFF2-40B4-BE49-F238E27FC236}">
-                <a16:creationId xmlns:a16="http://schemas.microsoft.com/office/drawing/2014/main" id="{0409D872-2275-4E19-8ED0-6667AC23B254}"/>
+                <a16:creationId xmlns:a16="http://schemas.microsoft.com/office/drawing/2014/main" id="{CB6FA501-9598-4230-BE77-E27331964A99}"/>
               </a:ext>
             </a:extLst>
           </p:cNvPr>
@@ -8844,7 +8232,7 @@
           <p:cNvPr id="6" name="claim-title">
             <a:extLst xmlns:a="http://schemas.openxmlformats.org/drawingml/2006/main">
               <a:ext uri="{FF2B5EF4-FFF2-40B4-BE49-F238E27FC236}">
-                <a16:creationId xmlns:a16="http://schemas.microsoft.com/office/drawing/2014/main" id="{467BAF0F-9AFF-4AC7-9C06-751DE51CF12B}"/>
+                <a16:creationId xmlns:a16="http://schemas.microsoft.com/office/drawing/2014/main" id="{CF1170E7-9612-4CDE-BD1E-C1591515B465}"/>
               </a:ext>
             </a:extLst>
           </p:cNvPr>
@@ -8898,7 +8286,7 @@
                 <a:ea typeface="Arial"/>
                 <a:cs typeface="Arial"/>
               </a:rPr>
-              <a:t>commit, branch, PR, merge, CI를 한 문장으로 이해한다</a:t>
+              <a:t>issue는 요청, PR은 검문소, main은 결과선이다</a:t>
             </a:r>
           </a:p>
         </p:txBody>
@@ -8908,7 +8296,7 @@
           <p:cNvPr id="7" name="support-note">
             <a:extLst xmlns:a="http://schemas.openxmlformats.org/drawingml/2006/main">
               <a:ext uri="{FF2B5EF4-FFF2-40B4-BE49-F238E27FC236}">
-                <a16:creationId xmlns:a16="http://schemas.microsoft.com/office/drawing/2014/main" id="{5ADDBC93-EA23-48EB-9C7C-6B3A3DA8579E}"/>
+                <a16:creationId xmlns:a16="http://schemas.microsoft.com/office/drawing/2014/main" id="{B81830C3-750F-4BF3-AE28-5CB383D63BBC}"/>
               </a:ext>
             </a:extLst>
           </p:cNvPr>
@@ -8962,7 +8350,7 @@
                 <a:ea typeface="Arial"/>
                 <a:cs typeface="Arial"/>
               </a:rPr>
-              <a:t>용어 암기가 아니라 PR 화면에서 판단할 최소 언어를 만든다.</a:t>
+              <a:t>GitHub 용어는 전체 흐름 안에서만 필요한 만큼 설명한다.</a:t>
             </a:r>
           </a:p>
         </p:txBody>
@@ -8972,7 +8360,7 @@
           <p:cNvPr id="8" name="page-marker">
             <a:extLst xmlns:a="http://schemas.openxmlformats.org/drawingml/2006/main">
               <a:ext uri="{FF2B5EF4-FFF2-40B4-BE49-F238E27FC236}">
-                <a16:creationId xmlns:a16="http://schemas.microsoft.com/office/drawing/2014/main" id="{D69ADE74-E8FA-4B2C-8B53-98026B01D8D8}"/>
+                <a16:creationId xmlns:a16="http://schemas.microsoft.com/office/drawing/2014/main" id="{9888B80A-7AF0-4CCD-A52A-D522CA88A37E}"/>
               </a:ext>
             </a:extLst>
           </p:cNvPr>
@@ -9036,19 +8424,19 @@
           <p:cNvPr id="9" name="">
             <a:extLst xmlns:a="http://schemas.openxmlformats.org/drawingml/2006/main">
               <a:ext uri="{FF2B5EF4-FFF2-40B4-BE49-F238E27FC236}">
-                <a16:creationId xmlns:a16="http://schemas.microsoft.com/office/drawing/2014/main" id="{23CC1434-B74F-41F1-B0EC-DC6F516A4F84}"/>
-              </a:ext>
-            </a:extLst>
-          </p:cNvPr>
-          <p:cNvSpPr>
-            <a:spLocks xmlns:a="http://schemas.openxmlformats.org/drawingml/2006/main" noGrp="1"/>
-          </p:cNvSpPr>
-          <p:nvPr/>
-        </p:nvSpPr>
-        <p:spPr>
-          <a:xfrm xmlns:a="http://schemas.openxmlformats.org/drawingml/2006/main">
-            <a:off x="6572250" y="819150"/>
-            <a:ext cx="5029200" cy="4171950"/>
+                <a16:creationId xmlns:a16="http://schemas.microsoft.com/office/drawing/2014/main" id="{781538B6-7CE6-4030-AA1F-B364178E33A4}"/>
+              </a:ext>
+            </a:extLst>
+          </p:cNvPr>
+          <p:cNvSpPr>
+            <a:spLocks xmlns:a="http://schemas.openxmlformats.org/drawingml/2006/main" noGrp="1"/>
+          </p:cNvSpPr>
+          <p:nvPr/>
+        </p:nvSpPr>
+        <p:spPr>
+          <a:xfrm xmlns:a="http://schemas.openxmlformats.org/drawingml/2006/main">
+            <a:off x="5715000" y="2952750"/>
+            <a:ext cx="1200150" cy="1123950"/>
           </a:xfrm>
           <a:prstGeom xmlns:a="http://schemas.openxmlformats.org/drawingml/2006/main" prst="rect">
             <a:avLst/>
@@ -9073,19 +8461,19 @@
           <p:cNvPr id="10" name="">
             <a:extLst xmlns:a="http://schemas.openxmlformats.org/drawingml/2006/main">
               <a:ext uri="{FF2B5EF4-FFF2-40B4-BE49-F238E27FC236}">
-                <a16:creationId xmlns:a16="http://schemas.microsoft.com/office/drawing/2014/main" id="{8D110B9E-A8EF-402F-87F1-35C41A98A3FA}"/>
-              </a:ext>
-            </a:extLst>
-          </p:cNvPr>
-          <p:cNvSpPr>
-            <a:spLocks xmlns:a="http://schemas.openxmlformats.org/drawingml/2006/main" noGrp="1"/>
-          </p:cNvSpPr>
-          <p:nvPr/>
-        </p:nvSpPr>
-        <p:spPr>
-          <a:xfrm xmlns:a="http://schemas.openxmlformats.org/drawingml/2006/main">
-            <a:off x="6762750" y="990600"/>
-            <a:ext cx="4648200" cy="323850"/>
+                <a16:creationId xmlns:a16="http://schemas.microsoft.com/office/drawing/2014/main" id="{B84659DA-2F9D-4DBF-8B24-59F605D3A9B4}"/>
+              </a:ext>
+            </a:extLst>
+          </p:cNvPr>
+          <p:cNvSpPr>
+            <a:spLocks xmlns:a="http://schemas.openxmlformats.org/drawingml/2006/main" noGrp="1"/>
+          </p:cNvSpPr>
+          <p:nvPr/>
+        </p:nvSpPr>
+        <p:spPr>
+          <a:xfrm xmlns:a="http://schemas.openxmlformats.org/drawingml/2006/main">
+            <a:off x="5905500" y="3124200"/>
+            <a:ext cx="819150" cy="323850"/>
           </a:xfrm>
           <a:prstGeom xmlns:a="http://schemas.openxmlformats.org/drawingml/2006/main" prst="rect">
             <a:avLst/>
@@ -9127,7 +8515,7 @@
                 <a:ea typeface="Arial"/>
                 <a:cs typeface="Arial"/>
               </a:rPr>
-              <a:t>최소 용어 5개</a:t>
+              <a:t>Issue</a:t>
             </a:r>
           </a:p>
         </p:txBody>
@@ -9137,19 +8525,19 @@
           <p:cNvPr id="11" name="">
             <a:extLst xmlns:a="http://schemas.openxmlformats.org/drawingml/2006/main">
               <a:ext uri="{FF2B5EF4-FFF2-40B4-BE49-F238E27FC236}">
-                <a16:creationId xmlns:a16="http://schemas.microsoft.com/office/drawing/2014/main" id="{6025F10D-21F3-47A6-B731-50E27C8FD6C0}"/>
-              </a:ext>
-            </a:extLst>
-          </p:cNvPr>
-          <p:cNvSpPr>
-            <a:spLocks xmlns:a="http://schemas.openxmlformats.org/drawingml/2006/main" noGrp="1"/>
-          </p:cNvSpPr>
-          <p:nvPr/>
-        </p:nvSpPr>
-        <p:spPr>
-          <a:xfrm xmlns:a="http://schemas.openxmlformats.org/drawingml/2006/main">
-            <a:off x="6762750" y="1428750"/>
-            <a:ext cx="4648200" cy="3390900"/>
+                <a16:creationId xmlns:a16="http://schemas.microsoft.com/office/drawing/2014/main" id="{2670A23C-9B13-48B4-9B1D-7EC33C42B2A3}"/>
+              </a:ext>
+            </a:extLst>
+          </p:cNvPr>
+          <p:cNvSpPr>
+            <a:spLocks xmlns:a="http://schemas.openxmlformats.org/drawingml/2006/main" noGrp="1"/>
+          </p:cNvSpPr>
+          <p:nvPr/>
+        </p:nvSpPr>
+        <p:spPr>
+          <a:xfrm xmlns:a="http://schemas.openxmlformats.org/drawingml/2006/main">
+            <a:off x="5905500" y="3562350"/>
+            <a:ext cx="819150" cy="342900"/>
           </a:xfrm>
           <a:prstGeom xmlns:a="http://schemas.openxmlformats.org/drawingml/2006/main" prst="rect">
             <a:avLst/>
@@ -9173,127 +8561,1000 @@
           <a:lstStyle xmlns:a="http://schemas.openxmlformats.org/drawingml/2006/main"/>
           <a:p xmlns:a="http://schemas.openxmlformats.org/drawingml/2006/main">
             <a:pPr algn="l">
-              <a:defRPr sz="1650" b="0">
-                <a:solidFill>
-                  <a:srgbClr val="F4F0FF"/>
-                </a:solidFill>
-                <a:latin typeface="Arial"/>
-                <a:ea typeface="Arial"/>
-                <a:cs typeface="Arial"/>
-              </a:defRPr>
-            </a:pPr>
-            <a:r>
-              <a:rPr sz="1650" b="0">
-                <a:solidFill>
-                  <a:srgbClr val="F4F0FF"/>
-                </a:solidFill>
-                <a:latin typeface="Arial"/>
-                <a:ea typeface="Arial"/>
-                <a:cs typeface="Arial"/>
-              </a:rPr>
-              <a:t>commit = 저장된 변경 스냅샷</a:t>
-            </a:r>
-          </a:p>
-          <a:p xmlns:a="http://schemas.openxmlformats.org/drawingml/2006/main">
-            <a:pPr algn="l">
-              <a:defRPr sz="1650" b="0">
-                <a:solidFill>
-                  <a:srgbClr val="F4F0FF"/>
-                </a:solidFill>
-                <a:latin typeface="Arial"/>
-                <a:ea typeface="Arial"/>
-                <a:cs typeface="Arial"/>
-              </a:defRPr>
-            </a:pPr>
-            <a:r>
-              <a:rPr sz="1650" b="0">
-                <a:solidFill>
-                  <a:srgbClr val="F4F0FF"/>
-                </a:solidFill>
-                <a:latin typeface="Arial"/>
-                <a:ea typeface="Arial"/>
-                <a:cs typeface="Arial"/>
-              </a:rPr>
-              <a:t>branch = main과 분리된 작업 줄기</a:t>
-            </a:r>
-          </a:p>
-          <a:p xmlns:a="http://schemas.openxmlformats.org/drawingml/2006/main">
-            <a:pPr algn="l">
-              <a:defRPr sz="1650" b="0">
-                <a:solidFill>
-                  <a:srgbClr val="F4F0FF"/>
-                </a:solidFill>
-                <a:latin typeface="Arial"/>
-                <a:ea typeface="Arial"/>
-                <a:cs typeface="Arial"/>
-              </a:defRPr>
-            </a:pPr>
-            <a:r>
-              <a:rPr sz="1650" b="0">
-                <a:solidFill>
-                  <a:srgbClr val="F4F0FF"/>
-                </a:solidFill>
-                <a:latin typeface="Arial"/>
-                <a:ea typeface="Arial"/>
-                <a:cs typeface="Arial"/>
-              </a:rPr>
-              <a:t>PR = 검토하는 제안서</a:t>
-            </a:r>
-          </a:p>
-          <a:p xmlns:a="http://schemas.openxmlformats.org/drawingml/2006/main">
-            <a:pPr algn="l">
-              <a:defRPr sz="1650" b="0">
-                <a:solidFill>
-                  <a:srgbClr val="F4F0FF"/>
-                </a:solidFill>
-                <a:latin typeface="Arial"/>
-                <a:ea typeface="Arial"/>
-                <a:cs typeface="Arial"/>
-              </a:defRPr>
-            </a:pPr>
-            <a:r>
-              <a:rPr sz="1650" b="0">
-                <a:solidFill>
-                  <a:srgbClr val="F4F0FF"/>
-                </a:solidFill>
-                <a:latin typeface="Arial"/>
-                <a:ea typeface="Arial"/>
-                <a:cs typeface="Arial"/>
-              </a:rPr>
-              <a:t>merge = main에 합치는 행동</a:t>
-            </a:r>
-          </a:p>
-          <a:p xmlns:a="http://schemas.openxmlformats.org/drawingml/2006/main">
-            <a:pPr algn="l">
-              <a:defRPr sz="1650" b="0">
-                <a:solidFill>
-                  <a:srgbClr val="F4F0FF"/>
-                </a:solidFill>
-                <a:latin typeface="Arial"/>
-                <a:ea typeface="Arial"/>
-                <a:cs typeface="Arial"/>
-              </a:defRPr>
-            </a:pPr>
-            <a:r>
-              <a:rPr sz="1650" b="0">
-                <a:solidFill>
-                  <a:srgbClr val="F4F0FF"/>
-                </a:solidFill>
-                <a:latin typeface="Arial"/>
-                <a:ea typeface="Arial"/>
-                <a:cs typeface="Arial"/>
-              </a:rPr>
-              <a:t>CI = 자동 기계 검사</a:t>
-            </a:r>
-          </a:p>
-        </p:txBody>
-      </p:sp>
-      <p:sp>
-        <p:nvSpPr>
-          <p:cNvPr id="12" name="footer-note">
-            <a:extLst xmlns:a="http://schemas.openxmlformats.org/drawingml/2006/main">
-              <a:ext uri="{FF2B5EF4-FFF2-40B4-BE49-F238E27FC236}">
-                <a16:creationId xmlns:a16="http://schemas.microsoft.com/office/drawing/2014/main" id="{97711EFB-5D3D-4F29-9049-163A9E84271A}"/>
+              <a:defRPr sz="1350" b="0">
+                <a:solidFill>
+                  <a:srgbClr val="F4F0FF"/>
+                </a:solidFill>
+                <a:latin typeface="Arial"/>
+                <a:ea typeface="Arial"/>
+                <a:cs typeface="Arial"/>
+              </a:defRPr>
+            </a:pPr>
+            <a:r>
+              <a:rPr sz="1350" b="0">
+                <a:solidFill>
+                  <a:srgbClr val="F4F0FF"/>
+                </a:solidFill>
+                <a:latin typeface="Arial"/>
+                <a:ea typeface="Arial"/>
+                <a:cs typeface="Arial"/>
+              </a:rPr>
+              <a:t>요청</a:t>
+            </a:r>
+          </a:p>
+        </p:txBody>
+      </p:sp>
+      <p:sp>
+        <p:nvSpPr>
+          <p:cNvPr id="12" name="">
+            <a:extLst xmlns:a="http://schemas.openxmlformats.org/drawingml/2006/main">
+              <a:ext uri="{FF2B5EF4-FFF2-40B4-BE49-F238E27FC236}">
+                <a16:creationId xmlns:a16="http://schemas.microsoft.com/office/drawing/2014/main" id="{F213D5B1-0EEE-49A0-A0ED-DF66ADFFF5C9}"/>
+              </a:ext>
+            </a:extLst>
+          </p:cNvPr>
+          <p:cNvSpPr>
+            <a:spLocks xmlns:a="http://schemas.openxmlformats.org/drawingml/2006/main" noGrp="1"/>
+          </p:cNvSpPr>
+          <p:nvPr/>
+        </p:nvSpPr>
+        <p:spPr>
+          <a:xfrm xmlns:a="http://schemas.openxmlformats.org/drawingml/2006/main">
+            <a:off x="6915150" y="3486150"/>
+            <a:ext cx="342900" cy="28575"/>
+          </a:xfrm>
+          <a:prstGeom xmlns:a="http://schemas.openxmlformats.org/drawingml/2006/main" prst="rect">
+            <a:avLst/>
+          </a:prstGeom>
+          <a:solidFill xmlns:a="http://schemas.openxmlformats.org/drawingml/2006/main">
+            <a:srgbClr val="FFFFFF"/>
+          </a:solidFill>
+          <a:ln xmlns:a="http://schemas.openxmlformats.org/drawingml/2006/main" w="0">
+            <a:solidFill>
+              <a:srgbClr val="000000">
+                <a:alpha val="0"/>
+              </a:srgbClr>
+            </a:solidFill>
+            <a:prstDash val="solid"/>
+          </a:ln>
+        </p:spPr>
+      </p:sp>
+      <p:sp>
+        <p:nvSpPr>
+          <p:cNvPr id="13" name="">
+            <a:extLst xmlns:a="http://schemas.openxmlformats.org/drawingml/2006/main">
+              <a:ext uri="{FF2B5EF4-FFF2-40B4-BE49-F238E27FC236}">
+                <a16:creationId xmlns:a16="http://schemas.microsoft.com/office/drawing/2014/main" id="{DF2F9C30-FC78-445E-8E20-CC118D8557BA}"/>
+              </a:ext>
+            </a:extLst>
+          </p:cNvPr>
+          <p:cNvSpPr>
+            <a:spLocks xmlns:a="http://schemas.openxmlformats.org/drawingml/2006/main" noGrp="1"/>
+          </p:cNvSpPr>
+          <p:nvPr/>
+        </p:nvSpPr>
+        <p:spPr>
+          <a:xfrm xmlns:a="http://schemas.openxmlformats.org/drawingml/2006/main">
+            <a:off x="6896100" y="3467100"/>
+            <a:ext cx="1200150" cy="1123950"/>
+          </a:xfrm>
+          <a:prstGeom xmlns:a="http://schemas.openxmlformats.org/drawingml/2006/main" prst="rect">
+            <a:avLst/>
+          </a:prstGeom>
+          <a:solidFill xmlns:a="http://schemas.openxmlformats.org/drawingml/2006/main">
+            <a:srgbClr val="111111">
+              <a:alpha val="80000"/>
+            </a:srgbClr>
+          </a:solidFill>
+          <a:ln xmlns:a="http://schemas.openxmlformats.org/drawingml/2006/main" w="9525">
+            <a:solidFill>
+              <a:srgbClr val="FFFFFF">
+                <a:alpha val="20000"/>
+              </a:srgbClr>
+            </a:solidFill>
+            <a:prstDash val="solid"/>
+          </a:ln>
+        </p:spPr>
+      </p:sp>
+      <p:sp>
+        <p:nvSpPr>
+          <p:cNvPr id="14" name="">
+            <a:extLst xmlns:a="http://schemas.openxmlformats.org/drawingml/2006/main">
+              <a:ext uri="{FF2B5EF4-FFF2-40B4-BE49-F238E27FC236}">
+                <a16:creationId xmlns:a16="http://schemas.microsoft.com/office/drawing/2014/main" id="{DE196AEC-CC4E-4BE6-B8E9-F6900D9B61F0}"/>
+              </a:ext>
+            </a:extLst>
+          </p:cNvPr>
+          <p:cNvSpPr>
+            <a:spLocks xmlns:a="http://schemas.openxmlformats.org/drawingml/2006/main" noGrp="1"/>
+          </p:cNvSpPr>
+          <p:nvPr/>
+        </p:nvSpPr>
+        <p:spPr>
+          <a:xfrm xmlns:a="http://schemas.openxmlformats.org/drawingml/2006/main">
+            <a:off x="7086600" y="3638550"/>
+            <a:ext cx="819150" cy="323850"/>
+          </a:xfrm>
+          <a:prstGeom xmlns:a="http://schemas.openxmlformats.org/drawingml/2006/main" prst="rect">
+            <a:avLst/>
+          </a:prstGeom>
+          <a:solidFill xmlns:a="http://schemas.openxmlformats.org/drawingml/2006/main">
+            <a:srgbClr val="000000">
+              <a:alpha val="0"/>
+            </a:srgbClr>
+          </a:solidFill>
+          <a:ln xmlns:a="http://schemas.openxmlformats.org/drawingml/2006/main" w="0">
+            <a:solidFill>
+              <a:srgbClr val="000000">
+                <a:alpha val="0"/>
+              </a:srgbClr>
+            </a:solidFill>
+            <a:prstDash val="solid"/>
+          </a:ln>
+        </p:spPr>
+        <p:txBody>
+          <a:bodyPr xmlns:a="http://schemas.openxmlformats.org/drawingml/2006/main" lIns="0" tIns="0" rIns="0" bIns="0" anchor="t"/>
+          <a:lstStyle xmlns:a="http://schemas.openxmlformats.org/drawingml/2006/main"/>
+          <a:p xmlns:a="http://schemas.openxmlformats.org/drawingml/2006/main">
+            <a:pPr algn="l">
+              <a:defRPr sz="1500" b="1">
+                <a:solidFill>
+                  <a:srgbClr val="FFFFFF"/>
+                </a:solidFill>
+                <a:latin typeface="Arial"/>
+                <a:ea typeface="Arial"/>
+                <a:cs typeface="Arial"/>
+              </a:defRPr>
+            </a:pPr>
+            <a:r>
+              <a:rPr sz="1500" b="1">
+                <a:solidFill>
+                  <a:srgbClr val="FFFFFF"/>
+                </a:solidFill>
+                <a:latin typeface="Arial"/>
+                <a:ea typeface="Arial"/>
+                <a:cs typeface="Arial"/>
+              </a:rPr>
+              <a:t>Branch</a:t>
+            </a:r>
+          </a:p>
+        </p:txBody>
+      </p:sp>
+      <p:sp>
+        <p:nvSpPr>
+          <p:cNvPr id="15" name="">
+            <a:extLst xmlns:a="http://schemas.openxmlformats.org/drawingml/2006/main">
+              <a:ext uri="{FF2B5EF4-FFF2-40B4-BE49-F238E27FC236}">
+                <a16:creationId xmlns:a16="http://schemas.microsoft.com/office/drawing/2014/main" id="{70D546A6-A120-467C-AC2B-14243A719739}"/>
+              </a:ext>
+            </a:extLst>
+          </p:cNvPr>
+          <p:cNvSpPr>
+            <a:spLocks xmlns:a="http://schemas.openxmlformats.org/drawingml/2006/main" noGrp="1"/>
+          </p:cNvSpPr>
+          <p:nvPr/>
+        </p:nvSpPr>
+        <p:spPr>
+          <a:xfrm xmlns:a="http://schemas.openxmlformats.org/drawingml/2006/main">
+            <a:off x="7086600" y="4076700"/>
+            <a:ext cx="819150" cy="342900"/>
+          </a:xfrm>
+          <a:prstGeom xmlns:a="http://schemas.openxmlformats.org/drawingml/2006/main" prst="rect">
+            <a:avLst/>
+          </a:prstGeom>
+          <a:solidFill xmlns:a="http://schemas.openxmlformats.org/drawingml/2006/main">
+            <a:srgbClr val="000000">
+              <a:alpha val="0"/>
+            </a:srgbClr>
+          </a:solidFill>
+          <a:ln xmlns:a="http://schemas.openxmlformats.org/drawingml/2006/main" w="0">
+            <a:solidFill>
+              <a:srgbClr val="000000">
+                <a:alpha val="0"/>
+              </a:srgbClr>
+            </a:solidFill>
+            <a:prstDash val="solid"/>
+          </a:ln>
+        </p:spPr>
+        <p:txBody>
+          <a:bodyPr xmlns:a="http://schemas.openxmlformats.org/drawingml/2006/main" lIns="0" tIns="0" rIns="76200" bIns="0" anchor="t"/>
+          <a:lstStyle xmlns:a="http://schemas.openxmlformats.org/drawingml/2006/main"/>
+          <a:p xmlns:a="http://schemas.openxmlformats.org/drawingml/2006/main">
+            <a:pPr algn="l">
+              <a:defRPr sz="1350" b="0">
+                <a:solidFill>
+                  <a:srgbClr val="F4F0FF"/>
+                </a:solidFill>
+                <a:latin typeface="Arial"/>
+                <a:ea typeface="Arial"/>
+                <a:cs typeface="Arial"/>
+              </a:defRPr>
+            </a:pPr>
+            <a:r>
+              <a:rPr sz="1350" b="0">
+                <a:solidFill>
+                  <a:srgbClr val="F4F0FF"/>
+                </a:solidFill>
+                <a:latin typeface="Arial"/>
+                <a:ea typeface="Arial"/>
+                <a:cs typeface="Arial"/>
+              </a:rPr>
+              <a:t>작업</a:t>
+            </a:r>
+          </a:p>
+        </p:txBody>
+      </p:sp>
+      <p:sp>
+        <p:nvSpPr>
+          <p:cNvPr id="16" name="">
+            <a:extLst xmlns:a="http://schemas.openxmlformats.org/drawingml/2006/main">
+              <a:ext uri="{FF2B5EF4-FFF2-40B4-BE49-F238E27FC236}">
+                <a16:creationId xmlns:a16="http://schemas.microsoft.com/office/drawing/2014/main" id="{945B2FBC-2D5C-410F-8AA9-DFD81E7609C0}"/>
+              </a:ext>
+            </a:extLst>
+          </p:cNvPr>
+          <p:cNvSpPr>
+            <a:spLocks xmlns:a="http://schemas.openxmlformats.org/drawingml/2006/main" noGrp="1"/>
+          </p:cNvSpPr>
+          <p:nvPr/>
+        </p:nvSpPr>
+        <p:spPr>
+          <a:xfrm xmlns:a="http://schemas.openxmlformats.org/drawingml/2006/main">
+            <a:off x="8096250" y="4000500"/>
+            <a:ext cx="342900" cy="28575"/>
+          </a:xfrm>
+          <a:prstGeom xmlns:a="http://schemas.openxmlformats.org/drawingml/2006/main" prst="rect">
+            <a:avLst/>
+          </a:prstGeom>
+          <a:solidFill xmlns:a="http://schemas.openxmlformats.org/drawingml/2006/main">
+            <a:srgbClr val="FFFFFF"/>
+          </a:solidFill>
+          <a:ln xmlns:a="http://schemas.openxmlformats.org/drawingml/2006/main" w="0">
+            <a:solidFill>
+              <a:srgbClr val="000000">
+                <a:alpha val="0"/>
+              </a:srgbClr>
+            </a:solidFill>
+            <a:prstDash val="solid"/>
+          </a:ln>
+        </p:spPr>
+      </p:sp>
+      <p:sp>
+        <p:nvSpPr>
+          <p:cNvPr id="17" name="">
+            <a:extLst xmlns:a="http://schemas.openxmlformats.org/drawingml/2006/main">
+              <a:ext uri="{FF2B5EF4-FFF2-40B4-BE49-F238E27FC236}">
+                <a16:creationId xmlns:a16="http://schemas.microsoft.com/office/drawing/2014/main" id="{CF06A685-6F05-476A-B7E3-E0484D27D950}"/>
+              </a:ext>
+            </a:extLst>
+          </p:cNvPr>
+          <p:cNvSpPr>
+            <a:spLocks xmlns:a="http://schemas.openxmlformats.org/drawingml/2006/main" noGrp="1"/>
+          </p:cNvSpPr>
+          <p:nvPr/>
+        </p:nvSpPr>
+        <p:spPr>
+          <a:xfrm xmlns:a="http://schemas.openxmlformats.org/drawingml/2006/main">
+            <a:off x="8077200" y="2952750"/>
+            <a:ext cx="1200150" cy="1123950"/>
+          </a:xfrm>
+          <a:prstGeom xmlns:a="http://schemas.openxmlformats.org/drawingml/2006/main" prst="rect">
+            <a:avLst/>
+          </a:prstGeom>
+          <a:solidFill xmlns:a="http://schemas.openxmlformats.org/drawingml/2006/main">
+            <a:srgbClr val="111111">
+              <a:alpha val="80000"/>
+            </a:srgbClr>
+          </a:solidFill>
+          <a:ln xmlns:a="http://schemas.openxmlformats.org/drawingml/2006/main" w="9525">
+            <a:solidFill>
+              <a:srgbClr val="FFFFFF">
+                <a:alpha val="20000"/>
+              </a:srgbClr>
+            </a:solidFill>
+            <a:prstDash val="solid"/>
+          </a:ln>
+        </p:spPr>
+      </p:sp>
+      <p:sp>
+        <p:nvSpPr>
+          <p:cNvPr id="18" name="">
+            <a:extLst xmlns:a="http://schemas.openxmlformats.org/drawingml/2006/main">
+              <a:ext uri="{FF2B5EF4-FFF2-40B4-BE49-F238E27FC236}">
+                <a16:creationId xmlns:a16="http://schemas.microsoft.com/office/drawing/2014/main" id="{FFE1158A-8265-4320-8DA8-29F271B5CB96}"/>
+              </a:ext>
+            </a:extLst>
+          </p:cNvPr>
+          <p:cNvSpPr>
+            <a:spLocks xmlns:a="http://schemas.openxmlformats.org/drawingml/2006/main" noGrp="1"/>
+          </p:cNvSpPr>
+          <p:nvPr/>
+        </p:nvSpPr>
+        <p:spPr>
+          <a:xfrm xmlns:a="http://schemas.openxmlformats.org/drawingml/2006/main">
+            <a:off x="8267700" y="3124200"/>
+            <a:ext cx="819150" cy="323850"/>
+          </a:xfrm>
+          <a:prstGeom xmlns:a="http://schemas.openxmlformats.org/drawingml/2006/main" prst="rect">
+            <a:avLst/>
+          </a:prstGeom>
+          <a:solidFill xmlns:a="http://schemas.openxmlformats.org/drawingml/2006/main">
+            <a:srgbClr val="000000">
+              <a:alpha val="0"/>
+            </a:srgbClr>
+          </a:solidFill>
+          <a:ln xmlns:a="http://schemas.openxmlformats.org/drawingml/2006/main" w="0">
+            <a:solidFill>
+              <a:srgbClr val="000000">
+                <a:alpha val="0"/>
+              </a:srgbClr>
+            </a:solidFill>
+            <a:prstDash val="solid"/>
+          </a:ln>
+        </p:spPr>
+        <p:txBody>
+          <a:bodyPr xmlns:a="http://schemas.openxmlformats.org/drawingml/2006/main" lIns="0" tIns="0" rIns="0" bIns="0" anchor="t"/>
+          <a:lstStyle xmlns:a="http://schemas.openxmlformats.org/drawingml/2006/main"/>
+          <a:p xmlns:a="http://schemas.openxmlformats.org/drawingml/2006/main">
+            <a:pPr algn="l">
+              <a:defRPr sz="1500" b="1">
+                <a:solidFill>
+                  <a:srgbClr val="FFFFFF"/>
+                </a:solidFill>
+                <a:latin typeface="Arial"/>
+                <a:ea typeface="Arial"/>
+                <a:cs typeface="Arial"/>
+              </a:defRPr>
+            </a:pPr>
+            <a:r>
+              <a:rPr sz="1500" b="1">
+                <a:solidFill>
+                  <a:srgbClr val="FFFFFF"/>
+                </a:solidFill>
+                <a:latin typeface="Arial"/>
+                <a:ea typeface="Arial"/>
+                <a:cs typeface="Arial"/>
+              </a:rPr>
+              <a:t>PR</a:t>
+            </a:r>
+          </a:p>
+        </p:txBody>
+      </p:sp>
+      <p:sp>
+        <p:nvSpPr>
+          <p:cNvPr id="19" name="">
+            <a:extLst xmlns:a="http://schemas.openxmlformats.org/drawingml/2006/main">
+              <a:ext uri="{FF2B5EF4-FFF2-40B4-BE49-F238E27FC236}">
+                <a16:creationId xmlns:a16="http://schemas.microsoft.com/office/drawing/2014/main" id="{155A44B6-87DB-4D71-8986-8918D0295361}"/>
+              </a:ext>
+            </a:extLst>
+          </p:cNvPr>
+          <p:cNvSpPr>
+            <a:spLocks xmlns:a="http://schemas.openxmlformats.org/drawingml/2006/main" noGrp="1"/>
+          </p:cNvSpPr>
+          <p:nvPr/>
+        </p:nvSpPr>
+        <p:spPr>
+          <a:xfrm xmlns:a="http://schemas.openxmlformats.org/drawingml/2006/main">
+            <a:off x="8267700" y="3562350"/>
+            <a:ext cx="819150" cy="342900"/>
+          </a:xfrm>
+          <a:prstGeom xmlns:a="http://schemas.openxmlformats.org/drawingml/2006/main" prst="rect">
+            <a:avLst/>
+          </a:prstGeom>
+          <a:solidFill xmlns:a="http://schemas.openxmlformats.org/drawingml/2006/main">
+            <a:srgbClr val="000000">
+              <a:alpha val="0"/>
+            </a:srgbClr>
+          </a:solidFill>
+          <a:ln xmlns:a="http://schemas.openxmlformats.org/drawingml/2006/main" w="0">
+            <a:solidFill>
+              <a:srgbClr val="000000">
+                <a:alpha val="0"/>
+              </a:srgbClr>
+            </a:solidFill>
+            <a:prstDash val="solid"/>
+          </a:ln>
+        </p:spPr>
+        <p:txBody>
+          <a:bodyPr xmlns:a="http://schemas.openxmlformats.org/drawingml/2006/main" lIns="0" tIns="0" rIns="76200" bIns="0" anchor="t"/>
+          <a:lstStyle xmlns:a="http://schemas.openxmlformats.org/drawingml/2006/main"/>
+          <a:p xmlns:a="http://schemas.openxmlformats.org/drawingml/2006/main">
+            <a:pPr algn="l">
+              <a:defRPr sz="1350" b="0">
+                <a:solidFill>
+                  <a:srgbClr val="F4F0FF"/>
+                </a:solidFill>
+                <a:latin typeface="Arial"/>
+                <a:ea typeface="Arial"/>
+                <a:cs typeface="Arial"/>
+              </a:defRPr>
+            </a:pPr>
+            <a:r>
+              <a:rPr sz="1350" b="0">
+                <a:solidFill>
+                  <a:srgbClr val="F4F0FF"/>
+                </a:solidFill>
+                <a:latin typeface="Arial"/>
+                <a:ea typeface="Arial"/>
+                <a:cs typeface="Arial"/>
+              </a:rPr>
+              <a:t>검문소</a:t>
+            </a:r>
+          </a:p>
+        </p:txBody>
+      </p:sp>
+      <p:sp>
+        <p:nvSpPr>
+          <p:cNvPr id="20" name="">
+            <a:extLst xmlns:a="http://schemas.openxmlformats.org/drawingml/2006/main">
+              <a:ext uri="{FF2B5EF4-FFF2-40B4-BE49-F238E27FC236}">
+                <a16:creationId xmlns:a16="http://schemas.microsoft.com/office/drawing/2014/main" id="{AB5107C6-139C-43E4-847E-22AE42E4A051}"/>
+              </a:ext>
+            </a:extLst>
+          </p:cNvPr>
+          <p:cNvSpPr>
+            <a:spLocks xmlns:a="http://schemas.openxmlformats.org/drawingml/2006/main" noGrp="1"/>
+          </p:cNvSpPr>
+          <p:nvPr/>
+        </p:nvSpPr>
+        <p:spPr>
+          <a:xfrm xmlns:a="http://schemas.openxmlformats.org/drawingml/2006/main">
+            <a:off x="9277350" y="3486150"/>
+            <a:ext cx="342900" cy="28575"/>
+          </a:xfrm>
+          <a:prstGeom xmlns:a="http://schemas.openxmlformats.org/drawingml/2006/main" prst="rect">
+            <a:avLst/>
+          </a:prstGeom>
+          <a:solidFill xmlns:a="http://schemas.openxmlformats.org/drawingml/2006/main">
+            <a:srgbClr val="FFFFFF"/>
+          </a:solidFill>
+          <a:ln xmlns:a="http://schemas.openxmlformats.org/drawingml/2006/main" w="0">
+            <a:solidFill>
+              <a:srgbClr val="000000">
+                <a:alpha val="0"/>
+              </a:srgbClr>
+            </a:solidFill>
+            <a:prstDash val="solid"/>
+          </a:ln>
+        </p:spPr>
+      </p:sp>
+      <p:sp>
+        <p:nvSpPr>
+          <p:cNvPr id="21" name="">
+            <a:extLst xmlns:a="http://schemas.openxmlformats.org/drawingml/2006/main">
+              <a:ext uri="{FF2B5EF4-FFF2-40B4-BE49-F238E27FC236}">
+                <a16:creationId xmlns:a16="http://schemas.microsoft.com/office/drawing/2014/main" id="{F6F4157B-EEC4-4062-9C9B-1B4D2E582FD6}"/>
+              </a:ext>
+            </a:extLst>
+          </p:cNvPr>
+          <p:cNvSpPr>
+            <a:spLocks xmlns:a="http://schemas.openxmlformats.org/drawingml/2006/main" noGrp="1"/>
+          </p:cNvSpPr>
+          <p:nvPr/>
+        </p:nvSpPr>
+        <p:spPr>
+          <a:xfrm xmlns:a="http://schemas.openxmlformats.org/drawingml/2006/main">
+            <a:off x="9258300" y="3467100"/>
+            <a:ext cx="1200150" cy="1123950"/>
+          </a:xfrm>
+          <a:prstGeom xmlns:a="http://schemas.openxmlformats.org/drawingml/2006/main" prst="rect">
+            <a:avLst/>
+          </a:prstGeom>
+          <a:solidFill xmlns:a="http://schemas.openxmlformats.org/drawingml/2006/main">
+            <a:srgbClr val="111111">
+              <a:alpha val="80000"/>
+            </a:srgbClr>
+          </a:solidFill>
+          <a:ln xmlns:a="http://schemas.openxmlformats.org/drawingml/2006/main" w="9525">
+            <a:solidFill>
+              <a:srgbClr val="FFFFFF">
+                <a:alpha val="20000"/>
+              </a:srgbClr>
+            </a:solidFill>
+            <a:prstDash val="solid"/>
+          </a:ln>
+        </p:spPr>
+      </p:sp>
+      <p:sp>
+        <p:nvSpPr>
+          <p:cNvPr id="22" name="">
+            <a:extLst xmlns:a="http://schemas.openxmlformats.org/drawingml/2006/main">
+              <a:ext uri="{FF2B5EF4-FFF2-40B4-BE49-F238E27FC236}">
+                <a16:creationId xmlns:a16="http://schemas.microsoft.com/office/drawing/2014/main" id="{D47CAA77-606D-4D37-ADF7-25CCF862FAB6}"/>
+              </a:ext>
+            </a:extLst>
+          </p:cNvPr>
+          <p:cNvSpPr>
+            <a:spLocks xmlns:a="http://schemas.openxmlformats.org/drawingml/2006/main" noGrp="1"/>
+          </p:cNvSpPr>
+          <p:nvPr/>
+        </p:nvSpPr>
+        <p:spPr>
+          <a:xfrm xmlns:a="http://schemas.openxmlformats.org/drawingml/2006/main">
+            <a:off x="9448800" y="3638550"/>
+            <a:ext cx="819150" cy="323850"/>
+          </a:xfrm>
+          <a:prstGeom xmlns:a="http://schemas.openxmlformats.org/drawingml/2006/main" prst="rect">
+            <a:avLst/>
+          </a:prstGeom>
+          <a:solidFill xmlns:a="http://schemas.openxmlformats.org/drawingml/2006/main">
+            <a:srgbClr val="000000">
+              <a:alpha val="0"/>
+            </a:srgbClr>
+          </a:solidFill>
+          <a:ln xmlns:a="http://schemas.openxmlformats.org/drawingml/2006/main" w="0">
+            <a:solidFill>
+              <a:srgbClr val="000000">
+                <a:alpha val="0"/>
+              </a:srgbClr>
+            </a:solidFill>
+            <a:prstDash val="solid"/>
+          </a:ln>
+        </p:spPr>
+        <p:txBody>
+          <a:bodyPr xmlns:a="http://schemas.openxmlformats.org/drawingml/2006/main" lIns="0" tIns="0" rIns="0" bIns="0" anchor="t"/>
+          <a:lstStyle xmlns:a="http://schemas.openxmlformats.org/drawingml/2006/main"/>
+          <a:p xmlns:a="http://schemas.openxmlformats.org/drawingml/2006/main">
+            <a:pPr algn="l">
+              <a:defRPr sz="1500" b="1">
+                <a:solidFill>
+                  <a:srgbClr val="FFFFFF"/>
+                </a:solidFill>
+                <a:latin typeface="Arial"/>
+                <a:ea typeface="Arial"/>
+                <a:cs typeface="Arial"/>
+              </a:defRPr>
+            </a:pPr>
+            <a:r>
+              <a:rPr sz="1500" b="1">
+                <a:solidFill>
+                  <a:srgbClr val="FFFFFF"/>
+                </a:solidFill>
+                <a:latin typeface="Arial"/>
+                <a:ea typeface="Arial"/>
+                <a:cs typeface="Arial"/>
+              </a:rPr>
+              <a:t>Checks</a:t>
+            </a:r>
+          </a:p>
+        </p:txBody>
+      </p:sp>
+      <p:sp>
+        <p:nvSpPr>
+          <p:cNvPr id="23" name="">
+            <a:extLst xmlns:a="http://schemas.openxmlformats.org/drawingml/2006/main">
+              <a:ext uri="{FF2B5EF4-FFF2-40B4-BE49-F238E27FC236}">
+                <a16:creationId xmlns:a16="http://schemas.microsoft.com/office/drawing/2014/main" id="{64675B82-5E11-4E25-A59F-CA1E4444B40A}"/>
+              </a:ext>
+            </a:extLst>
+          </p:cNvPr>
+          <p:cNvSpPr>
+            <a:spLocks xmlns:a="http://schemas.openxmlformats.org/drawingml/2006/main" noGrp="1"/>
+          </p:cNvSpPr>
+          <p:nvPr/>
+        </p:nvSpPr>
+        <p:spPr>
+          <a:xfrm xmlns:a="http://schemas.openxmlformats.org/drawingml/2006/main">
+            <a:off x="9448800" y="4076700"/>
+            <a:ext cx="819150" cy="342900"/>
+          </a:xfrm>
+          <a:prstGeom xmlns:a="http://schemas.openxmlformats.org/drawingml/2006/main" prst="rect">
+            <a:avLst/>
+          </a:prstGeom>
+          <a:solidFill xmlns:a="http://schemas.openxmlformats.org/drawingml/2006/main">
+            <a:srgbClr val="000000">
+              <a:alpha val="0"/>
+            </a:srgbClr>
+          </a:solidFill>
+          <a:ln xmlns:a="http://schemas.openxmlformats.org/drawingml/2006/main" w="0">
+            <a:solidFill>
+              <a:srgbClr val="000000">
+                <a:alpha val="0"/>
+              </a:srgbClr>
+            </a:solidFill>
+            <a:prstDash val="solid"/>
+          </a:ln>
+        </p:spPr>
+        <p:txBody>
+          <a:bodyPr xmlns:a="http://schemas.openxmlformats.org/drawingml/2006/main" lIns="0" tIns="0" rIns="76200" bIns="0" anchor="t"/>
+          <a:lstStyle xmlns:a="http://schemas.openxmlformats.org/drawingml/2006/main"/>
+          <a:p xmlns:a="http://schemas.openxmlformats.org/drawingml/2006/main">
+            <a:pPr algn="l">
+              <a:defRPr sz="1350" b="0">
+                <a:solidFill>
+                  <a:srgbClr val="F4F0FF"/>
+                </a:solidFill>
+                <a:latin typeface="Arial"/>
+                <a:ea typeface="Arial"/>
+                <a:cs typeface="Arial"/>
+              </a:defRPr>
+            </a:pPr>
+            <a:r>
+              <a:rPr sz="1350" b="0">
+                <a:solidFill>
+                  <a:srgbClr val="F4F0FF"/>
+                </a:solidFill>
+                <a:latin typeface="Arial"/>
+                <a:ea typeface="Arial"/>
+                <a:cs typeface="Arial"/>
+              </a:rPr>
+              <a:t>검사</a:t>
+            </a:r>
+          </a:p>
+        </p:txBody>
+      </p:sp>
+      <p:sp>
+        <p:nvSpPr>
+          <p:cNvPr id="24" name="">
+            <a:extLst xmlns:a="http://schemas.openxmlformats.org/drawingml/2006/main">
+              <a:ext uri="{FF2B5EF4-FFF2-40B4-BE49-F238E27FC236}">
+                <a16:creationId xmlns:a16="http://schemas.microsoft.com/office/drawing/2014/main" id="{CDD0DAB0-0FF2-46D9-A38E-06DF85503BAD}"/>
+              </a:ext>
+            </a:extLst>
+          </p:cNvPr>
+          <p:cNvSpPr>
+            <a:spLocks xmlns:a="http://schemas.openxmlformats.org/drawingml/2006/main" noGrp="1"/>
+          </p:cNvSpPr>
+          <p:nvPr/>
+        </p:nvSpPr>
+        <p:spPr>
+          <a:xfrm xmlns:a="http://schemas.openxmlformats.org/drawingml/2006/main">
+            <a:off x="10458450" y="4000500"/>
+            <a:ext cx="342900" cy="28575"/>
+          </a:xfrm>
+          <a:prstGeom xmlns:a="http://schemas.openxmlformats.org/drawingml/2006/main" prst="rect">
+            <a:avLst/>
+          </a:prstGeom>
+          <a:solidFill xmlns:a="http://schemas.openxmlformats.org/drawingml/2006/main">
+            <a:srgbClr val="FFFFFF"/>
+          </a:solidFill>
+          <a:ln xmlns:a="http://schemas.openxmlformats.org/drawingml/2006/main" w="0">
+            <a:solidFill>
+              <a:srgbClr val="000000">
+                <a:alpha val="0"/>
+              </a:srgbClr>
+            </a:solidFill>
+            <a:prstDash val="solid"/>
+          </a:ln>
+        </p:spPr>
+      </p:sp>
+      <p:sp>
+        <p:nvSpPr>
+          <p:cNvPr id="25" name="">
+            <a:extLst xmlns:a="http://schemas.openxmlformats.org/drawingml/2006/main">
+              <a:ext uri="{FF2B5EF4-FFF2-40B4-BE49-F238E27FC236}">
+                <a16:creationId xmlns:a16="http://schemas.microsoft.com/office/drawing/2014/main" id="{815F80A6-B020-4EF8-BF28-33F472F817C9}"/>
+              </a:ext>
+            </a:extLst>
+          </p:cNvPr>
+          <p:cNvSpPr>
+            <a:spLocks xmlns:a="http://schemas.openxmlformats.org/drawingml/2006/main" noGrp="1"/>
+          </p:cNvSpPr>
+          <p:nvPr/>
+        </p:nvSpPr>
+        <p:spPr>
+          <a:xfrm xmlns:a="http://schemas.openxmlformats.org/drawingml/2006/main">
+            <a:off x="10439400" y="2952750"/>
+            <a:ext cx="1200150" cy="1123950"/>
+          </a:xfrm>
+          <a:prstGeom xmlns:a="http://schemas.openxmlformats.org/drawingml/2006/main" prst="rect">
+            <a:avLst/>
+          </a:prstGeom>
+          <a:solidFill xmlns:a="http://schemas.openxmlformats.org/drawingml/2006/main">
+            <a:srgbClr val="111111">
+              <a:alpha val="80000"/>
+            </a:srgbClr>
+          </a:solidFill>
+          <a:ln xmlns:a="http://schemas.openxmlformats.org/drawingml/2006/main" w="9525">
+            <a:solidFill>
+              <a:srgbClr val="FFFFFF">
+                <a:alpha val="20000"/>
+              </a:srgbClr>
+            </a:solidFill>
+            <a:prstDash val="solid"/>
+          </a:ln>
+        </p:spPr>
+      </p:sp>
+      <p:sp>
+        <p:nvSpPr>
+          <p:cNvPr id="26" name="">
+            <a:extLst xmlns:a="http://schemas.openxmlformats.org/drawingml/2006/main">
+              <a:ext uri="{FF2B5EF4-FFF2-40B4-BE49-F238E27FC236}">
+                <a16:creationId xmlns:a16="http://schemas.microsoft.com/office/drawing/2014/main" id="{8FD12A7E-BEAA-4953-8157-223162790826}"/>
+              </a:ext>
+            </a:extLst>
+          </p:cNvPr>
+          <p:cNvSpPr>
+            <a:spLocks xmlns:a="http://schemas.openxmlformats.org/drawingml/2006/main" noGrp="1"/>
+          </p:cNvSpPr>
+          <p:nvPr/>
+        </p:nvSpPr>
+        <p:spPr>
+          <a:xfrm xmlns:a="http://schemas.openxmlformats.org/drawingml/2006/main">
+            <a:off x="10629900" y="3124200"/>
+            <a:ext cx="819150" cy="323850"/>
+          </a:xfrm>
+          <a:prstGeom xmlns:a="http://schemas.openxmlformats.org/drawingml/2006/main" prst="rect">
+            <a:avLst/>
+          </a:prstGeom>
+          <a:solidFill xmlns:a="http://schemas.openxmlformats.org/drawingml/2006/main">
+            <a:srgbClr val="000000">
+              <a:alpha val="0"/>
+            </a:srgbClr>
+          </a:solidFill>
+          <a:ln xmlns:a="http://schemas.openxmlformats.org/drawingml/2006/main" w="0">
+            <a:solidFill>
+              <a:srgbClr val="000000">
+                <a:alpha val="0"/>
+              </a:srgbClr>
+            </a:solidFill>
+            <a:prstDash val="solid"/>
+          </a:ln>
+        </p:spPr>
+        <p:txBody>
+          <a:bodyPr xmlns:a="http://schemas.openxmlformats.org/drawingml/2006/main" lIns="0" tIns="0" rIns="0" bIns="0" anchor="t"/>
+          <a:lstStyle xmlns:a="http://schemas.openxmlformats.org/drawingml/2006/main"/>
+          <a:p xmlns:a="http://schemas.openxmlformats.org/drawingml/2006/main">
+            <a:pPr algn="l">
+              <a:defRPr sz="1500" b="1">
+                <a:solidFill>
+                  <a:srgbClr val="FFFFFF"/>
+                </a:solidFill>
+                <a:latin typeface="Arial"/>
+                <a:ea typeface="Arial"/>
+                <a:cs typeface="Arial"/>
+              </a:defRPr>
+            </a:pPr>
+            <a:r>
+              <a:rPr sz="1500" b="1">
+                <a:solidFill>
+                  <a:srgbClr val="FFFFFF"/>
+                </a:solidFill>
+                <a:latin typeface="Arial"/>
+                <a:ea typeface="Arial"/>
+                <a:cs typeface="Arial"/>
+              </a:rPr>
+              <a:t>Main</a:t>
+            </a:r>
+          </a:p>
+        </p:txBody>
+      </p:sp>
+      <p:sp>
+        <p:nvSpPr>
+          <p:cNvPr id="27" name="">
+            <a:extLst xmlns:a="http://schemas.openxmlformats.org/drawingml/2006/main">
+              <a:ext uri="{FF2B5EF4-FFF2-40B4-BE49-F238E27FC236}">
+                <a16:creationId xmlns:a16="http://schemas.microsoft.com/office/drawing/2014/main" id="{2A28105E-DF65-4087-963C-2C63C3894553}"/>
+              </a:ext>
+            </a:extLst>
+          </p:cNvPr>
+          <p:cNvSpPr>
+            <a:spLocks xmlns:a="http://schemas.openxmlformats.org/drawingml/2006/main" noGrp="1"/>
+          </p:cNvSpPr>
+          <p:nvPr/>
+        </p:nvSpPr>
+        <p:spPr>
+          <a:xfrm xmlns:a="http://schemas.openxmlformats.org/drawingml/2006/main">
+            <a:off x="10629900" y="3562350"/>
+            <a:ext cx="819150" cy="342900"/>
+          </a:xfrm>
+          <a:prstGeom xmlns:a="http://schemas.openxmlformats.org/drawingml/2006/main" prst="rect">
+            <a:avLst/>
+          </a:prstGeom>
+          <a:solidFill xmlns:a="http://schemas.openxmlformats.org/drawingml/2006/main">
+            <a:srgbClr val="000000">
+              <a:alpha val="0"/>
+            </a:srgbClr>
+          </a:solidFill>
+          <a:ln xmlns:a="http://schemas.openxmlformats.org/drawingml/2006/main" w="0">
+            <a:solidFill>
+              <a:srgbClr val="000000">
+                <a:alpha val="0"/>
+              </a:srgbClr>
+            </a:solidFill>
+            <a:prstDash val="solid"/>
+          </a:ln>
+        </p:spPr>
+        <p:txBody>
+          <a:bodyPr xmlns:a="http://schemas.openxmlformats.org/drawingml/2006/main" lIns="0" tIns="0" rIns="76200" bIns="0" anchor="t"/>
+          <a:lstStyle xmlns:a="http://schemas.openxmlformats.org/drawingml/2006/main"/>
+          <a:p xmlns:a="http://schemas.openxmlformats.org/drawingml/2006/main">
+            <a:pPr algn="l">
+              <a:defRPr sz="1350" b="0">
+                <a:solidFill>
+                  <a:srgbClr val="F4F0FF"/>
+                </a:solidFill>
+                <a:latin typeface="Arial"/>
+                <a:ea typeface="Arial"/>
+                <a:cs typeface="Arial"/>
+              </a:defRPr>
+            </a:pPr>
+            <a:r>
+              <a:rPr sz="1350" b="0">
+                <a:solidFill>
+                  <a:srgbClr val="F4F0FF"/>
+                </a:solidFill>
+                <a:latin typeface="Arial"/>
+                <a:ea typeface="Arial"/>
+                <a:cs typeface="Arial"/>
+              </a:rPr>
+              <a:t>결과</a:t>
+            </a:r>
+          </a:p>
+        </p:txBody>
+      </p:sp>
+      <p:sp>
+        <p:nvSpPr>
+          <p:cNvPr id="28" name="">
+            <a:extLst xmlns:a="http://schemas.openxmlformats.org/drawingml/2006/main">
+              <a:ext uri="{FF2B5EF4-FFF2-40B4-BE49-F238E27FC236}">
+                <a16:creationId xmlns:a16="http://schemas.microsoft.com/office/drawing/2014/main" id="{A579C35D-9EC4-4FEC-83A3-DBB037440778}"/>
+              </a:ext>
+            </a:extLst>
+          </p:cNvPr>
+          <p:cNvSpPr>
+            <a:spLocks xmlns:a="http://schemas.openxmlformats.org/drawingml/2006/main" noGrp="1"/>
+          </p:cNvSpPr>
+          <p:nvPr/>
+        </p:nvSpPr>
+        <p:spPr>
+          <a:xfrm xmlns:a="http://schemas.openxmlformats.org/drawingml/2006/main">
+            <a:off x="6953250" y="1123950"/>
+            <a:ext cx="4000500" cy="1333500"/>
+          </a:xfrm>
+          <a:prstGeom xmlns:a="http://schemas.openxmlformats.org/drawingml/2006/main" prst="rect">
+            <a:avLst/>
+          </a:prstGeom>
+          <a:solidFill xmlns:a="http://schemas.openxmlformats.org/drawingml/2006/main">
+            <a:srgbClr val="111111">
+              <a:alpha val="80000"/>
+            </a:srgbClr>
+          </a:solidFill>
+          <a:ln xmlns:a="http://schemas.openxmlformats.org/drawingml/2006/main" w="9525">
+            <a:solidFill>
+              <a:srgbClr val="FFFFFF">
+                <a:alpha val="20000"/>
+              </a:srgbClr>
+            </a:solidFill>
+            <a:prstDash val="solid"/>
+          </a:ln>
+        </p:spPr>
+      </p:sp>
+      <p:sp>
+        <p:nvSpPr>
+          <p:cNvPr id="29" name="">
+            <a:extLst xmlns:a="http://schemas.openxmlformats.org/drawingml/2006/main">
+              <a:ext uri="{FF2B5EF4-FFF2-40B4-BE49-F238E27FC236}">
+                <a16:creationId xmlns:a16="http://schemas.microsoft.com/office/drawing/2014/main" id="{B7932D5E-5FCB-403F-9FB1-A01EAEA131DE}"/>
+              </a:ext>
+            </a:extLst>
+          </p:cNvPr>
+          <p:cNvSpPr>
+            <a:spLocks xmlns:a="http://schemas.openxmlformats.org/drawingml/2006/main" noGrp="1"/>
+          </p:cNvSpPr>
+          <p:nvPr/>
+        </p:nvSpPr>
+        <p:spPr>
+          <a:xfrm xmlns:a="http://schemas.openxmlformats.org/drawingml/2006/main">
+            <a:off x="7143750" y="1295400"/>
+            <a:ext cx="3619500" cy="323850"/>
+          </a:xfrm>
+          <a:prstGeom xmlns:a="http://schemas.openxmlformats.org/drawingml/2006/main" prst="rect">
+            <a:avLst/>
+          </a:prstGeom>
+          <a:solidFill xmlns:a="http://schemas.openxmlformats.org/drawingml/2006/main">
+            <a:srgbClr val="000000">
+              <a:alpha val="0"/>
+            </a:srgbClr>
+          </a:solidFill>
+          <a:ln xmlns:a="http://schemas.openxmlformats.org/drawingml/2006/main" w="0">
+            <a:solidFill>
+              <a:srgbClr val="000000">
+                <a:alpha val="0"/>
+              </a:srgbClr>
+            </a:solidFill>
+            <a:prstDash val="solid"/>
+          </a:ln>
+        </p:spPr>
+        <p:txBody>
+          <a:bodyPr xmlns:a="http://schemas.openxmlformats.org/drawingml/2006/main" lIns="0" tIns="0" rIns="0" bIns="0" anchor="t"/>
+          <a:lstStyle xmlns:a="http://schemas.openxmlformats.org/drawingml/2006/main"/>
+          <a:p xmlns:a="http://schemas.openxmlformats.org/drawingml/2006/main">
+            <a:pPr algn="l">
+              <a:defRPr sz="1500" b="1">
+                <a:solidFill>
+                  <a:srgbClr val="FFFFFF"/>
+                </a:solidFill>
+                <a:latin typeface="Arial"/>
+                <a:ea typeface="Arial"/>
+                <a:cs typeface="Arial"/>
+              </a:defRPr>
+            </a:pPr>
+            <a:r>
+              <a:rPr sz="1500" b="1">
+                <a:solidFill>
+                  <a:srgbClr val="FFFFFF"/>
+                </a:solidFill>
+                <a:latin typeface="Arial"/>
+                <a:ea typeface="Arial"/>
+                <a:cs typeface="Arial"/>
+              </a:rPr>
+              <a:t>PR = 검문소</a:t>
+            </a:r>
+          </a:p>
+        </p:txBody>
+      </p:sp>
+      <p:sp>
+        <p:nvSpPr>
+          <p:cNvPr id="30" name="">
+            <a:extLst xmlns:a="http://schemas.openxmlformats.org/drawingml/2006/main">
+              <a:ext uri="{FF2B5EF4-FFF2-40B4-BE49-F238E27FC236}">
+                <a16:creationId xmlns:a16="http://schemas.microsoft.com/office/drawing/2014/main" id="{BD6FB9B4-5990-4221-BF66-5400361658C7}"/>
+              </a:ext>
+            </a:extLst>
+          </p:cNvPr>
+          <p:cNvSpPr>
+            <a:spLocks xmlns:a="http://schemas.openxmlformats.org/drawingml/2006/main" noGrp="1"/>
+          </p:cNvSpPr>
+          <p:nvPr/>
+        </p:nvSpPr>
+        <p:spPr>
+          <a:xfrm xmlns:a="http://schemas.openxmlformats.org/drawingml/2006/main">
+            <a:off x="7143750" y="1733550"/>
+            <a:ext cx="3619500" cy="552450"/>
+          </a:xfrm>
+          <a:prstGeom xmlns:a="http://schemas.openxmlformats.org/drawingml/2006/main" prst="rect">
+            <a:avLst/>
+          </a:prstGeom>
+          <a:solidFill xmlns:a="http://schemas.openxmlformats.org/drawingml/2006/main">
+            <a:srgbClr val="000000">
+              <a:alpha val="0"/>
+            </a:srgbClr>
+          </a:solidFill>
+          <a:ln xmlns:a="http://schemas.openxmlformats.org/drawingml/2006/main" w="0">
+            <a:solidFill>
+              <a:srgbClr val="000000">
+                <a:alpha val="0"/>
+              </a:srgbClr>
+            </a:solidFill>
+            <a:prstDash val="solid"/>
+          </a:ln>
+        </p:spPr>
+        <p:txBody>
+          <a:bodyPr xmlns:a="http://schemas.openxmlformats.org/drawingml/2006/main" lIns="0" tIns="0" rIns="76200" bIns="0" anchor="t"/>
+          <a:lstStyle xmlns:a="http://schemas.openxmlformats.org/drawingml/2006/main"/>
+          <a:p xmlns:a="http://schemas.openxmlformats.org/drawingml/2006/main">
+            <a:pPr algn="l">
+              <a:defRPr sz="1500" b="0">
+                <a:solidFill>
+                  <a:srgbClr val="F4F0FF"/>
+                </a:solidFill>
+                <a:latin typeface="Arial"/>
+                <a:ea typeface="Arial"/>
+                <a:cs typeface="Arial"/>
+              </a:defRPr>
+            </a:pPr>
+            <a:r>
+              <a:rPr sz="1500" b="0">
+                <a:solidFill>
+                  <a:srgbClr val="F4F0FF"/>
+                </a:solidFill>
+                <a:latin typeface="Arial"/>
+                <a:ea typeface="Arial"/>
+                <a:cs typeface="Arial"/>
+              </a:rPr>
+              <a:t>main에 합치기 전 사람이 보는 제안서</a:t>
+            </a:r>
+          </a:p>
+        </p:txBody>
+      </p:sp>
+      <p:sp>
+        <p:nvSpPr>
+          <p:cNvPr id="31" name="footer-note">
+            <a:extLst xmlns:a="http://schemas.openxmlformats.org/drawingml/2006/main">
+              <a:ext uri="{FF2B5EF4-FFF2-40B4-BE49-F238E27FC236}">
+                <a16:creationId xmlns:a16="http://schemas.microsoft.com/office/drawing/2014/main" id="{71154D4D-AFD7-4752-94A8-85B020409C49}"/>
               </a:ext>
             </a:extLst>
           </p:cNvPr>
@@ -9355,7 +9616,7 @@
     </p:spTree>
     <p:extLst>
       <p:ext uri="{BB962C8B-B14F-4D97-AF65-F5344CB8AC3E}">
-        <p14:creationId xmlns:p14="http://schemas.microsoft.com/office/powerpoint/2010/main" val="1288366103"/>
+        <p14:creationId xmlns:p14="http://schemas.microsoft.com/office/powerpoint/2010/main" val="1872615705"/>
       </p:ext>
     </p:extLst>
   </p:cSld>
@@ -9379,7 +9640,7 @@
           <p:cNvPr id="1" name="">
             <a:extLst xmlns:a="http://schemas.openxmlformats.org/drawingml/2006/main">
               <a:ext uri="{FF2B5EF4-FFF2-40B4-BE49-F238E27FC236}">
-                <a16:creationId xmlns:a16="http://schemas.microsoft.com/office/drawing/2014/main" id="{ADAB2729-E1BD-481D-8754-CE22FE417E15}"/>
+                <a16:creationId xmlns:a16="http://schemas.microsoft.com/office/drawing/2014/main" id="{79E2EF6B-5878-4463-931E-C58D659A013B}"/>
               </a:ext>
             </a:extLst>
           </p:cNvPr>
@@ -9428,7 +9689,7 @@
           <p:cNvPr id="2" name="">
             <a:extLst xmlns:a="http://schemas.openxmlformats.org/drawingml/2006/main">
               <a:ext uri="{FF2B5EF4-FFF2-40B4-BE49-F238E27FC236}">
-                <a16:creationId xmlns:a16="http://schemas.microsoft.com/office/drawing/2014/main" id="{D664FCB2-9309-4F64-BEC3-9CD7F6743463}"/>
+                <a16:creationId xmlns:a16="http://schemas.microsoft.com/office/drawing/2014/main" id="{9596A538-2A89-4651-AB32-6D657908B7EE}"/>
               </a:ext>
             </a:extLst>
           </p:cNvPr>
@@ -9465,7 +9726,7 @@
           <p:cNvPr id="3" name="kicker-marker">
             <a:extLst xmlns:a="http://schemas.openxmlformats.org/drawingml/2006/main">
               <a:ext uri="{FF2B5EF4-FFF2-40B4-BE49-F238E27FC236}">
-                <a16:creationId xmlns:a16="http://schemas.microsoft.com/office/drawing/2014/main" id="{1AAD5979-5634-43D8-878B-B28254104515}"/>
+                <a16:creationId xmlns:a16="http://schemas.microsoft.com/office/drawing/2014/main" id="{225CD0A1-EE71-4EA3-A98B-B946386EFFD9}"/>
               </a:ext>
             </a:extLst>
           </p:cNvPr>
@@ -9500,7 +9761,7 @@
           <p:cNvPr id="4" name="kicker-label">
             <a:extLst xmlns:a="http://schemas.openxmlformats.org/drawingml/2006/main">
               <a:ext uri="{FF2B5EF4-FFF2-40B4-BE49-F238E27FC236}">
-                <a16:creationId xmlns:a16="http://schemas.microsoft.com/office/drawing/2014/main" id="{A5770A44-5F80-4901-83B2-AE9933261FBD}"/>
+                <a16:creationId xmlns:a16="http://schemas.microsoft.com/office/drawing/2014/main" id="{6EA40BDB-BFCE-4ACB-BFEC-D31880AFCFEC}"/>
               </a:ext>
             </a:extLst>
           </p:cNvPr>
@@ -9554,7 +9815,7 @@
                 <a:ea typeface="Courier New"/>
                 <a:cs typeface="Courier New"/>
               </a:rPr>
-              <a:t>WORKFLOW</a:t>
+              <a:t>PROTOCOL</a:t>
             </a:r>
           </a:p>
         </p:txBody>
@@ -9564,7 +9825,7 @@
           <p:cNvPr id="5" name="">
             <a:extLst xmlns:a="http://schemas.openxmlformats.org/drawingml/2006/main">
               <a:ext uri="{FF2B5EF4-FFF2-40B4-BE49-F238E27FC236}">
-                <a16:creationId xmlns:a16="http://schemas.microsoft.com/office/drawing/2014/main" id="{35A1EB26-AEA4-41A5-8FF2-DA3383CB7A70}"/>
+                <a16:creationId xmlns:a16="http://schemas.microsoft.com/office/drawing/2014/main" id="{B388B091-75DA-4E9B-94F5-F12C2251FA7D}"/>
               </a:ext>
             </a:extLst>
           </p:cNvPr>
@@ -9599,7 +9860,7 @@
           <p:cNvPr id="6" name="claim-title">
             <a:extLst xmlns:a="http://schemas.openxmlformats.org/drawingml/2006/main">
               <a:ext uri="{FF2B5EF4-FFF2-40B4-BE49-F238E27FC236}">
-                <a16:creationId xmlns:a16="http://schemas.microsoft.com/office/drawing/2014/main" id="{5B013412-446F-491E-A577-C4683370655A}"/>
+                <a16:creationId xmlns:a16="http://schemas.microsoft.com/office/drawing/2014/main" id="{07D38ABB-A597-4F16-9706-C59228AD9629}"/>
               </a:ext>
             </a:extLst>
           </p:cNvPr>
@@ -9653,7 +9914,7 @@
                 <a:ea typeface="Arial"/>
                 <a:cs typeface="Arial"/>
               </a:rPr>
-              <a:t>issue에서 PR 검토까지의 전체 흐름</a:t>
+              <a:t>PR은 네 단계로 읽는다</a:t>
             </a:r>
           </a:p>
         </p:txBody>
@@ -9663,7 +9924,7 @@
           <p:cNvPr id="7" name="support-note">
             <a:extLst xmlns:a="http://schemas.openxmlformats.org/drawingml/2006/main">
               <a:ext uri="{FF2B5EF4-FFF2-40B4-BE49-F238E27FC236}">
-                <a16:creationId xmlns:a16="http://schemas.microsoft.com/office/drawing/2014/main" id="{2C12ABE0-692F-4B9F-9902-34AEC4ADA84E}"/>
+                <a16:creationId xmlns:a16="http://schemas.microsoft.com/office/drawing/2014/main" id="{0D27624F-41B1-4F91-BA21-DEFE3603F132}"/>
               </a:ext>
             </a:extLst>
           </p:cNvPr>
@@ -9717,7 +9978,7 @@
                 <a:ea typeface="Arial"/>
                 <a:cs typeface="Arial"/>
               </a:rPr>
-              <a:t>요청, 변경, 검증, 판단이 한 줄로 연결되어야 한다.</a:t>
+              <a:t>Files changed -&gt; Diff -&gt; Checks -&gt; Decision 순서로 판단한다.</a:t>
             </a:r>
           </a:p>
         </p:txBody>
@@ -9727,7 +9988,7 @@
           <p:cNvPr id="8" name="page-marker">
             <a:extLst xmlns:a="http://schemas.openxmlformats.org/drawingml/2006/main">
               <a:ext uri="{FF2B5EF4-FFF2-40B4-BE49-F238E27FC236}">
-                <a16:creationId xmlns:a16="http://schemas.microsoft.com/office/drawing/2014/main" id="{68E5A7E2-7E86-45CD-8933-0817E0024757}"/>
+                <a16:creationId xmlns:a16="http://schemas.microsoft.com/office/drawing/2014/main" id="{BEA97FB7-A67F-494B-8696-18DBD9489111}"/>
               </a:ext>
             </a:extLst>
           </p:cNvPr>
@@ -9791,19 +10052,19 @@
           <p:cNvPr id="9" name="">
             <a:extLst xmlns:a="http://schemas.openxmlformats.org/drawingml/2006/main">
               <a:ext uri="{FF2B5EF4-FFF2-40B4-BE49-F238E27FC236}">
-                <a16:creationId xmlns:a16="http://schemas.microsoft.com/office/drawing/2014/main" id="{F2DDA2E2-ADC3-4AAC-B83A-C415AF91585A}"/>
-              </a:ext>
-            </a:extLst>
-          </p:cNvPr>
-          <p:cNvSpPr>
-            <a:spLocks xmlns:a="http://schemas.openxmlformats.org/drawingml/2006/main" noGrp="1"/>
-          </p:cNvSpPr>
-          <p:nvPr/>
-        </p:nvSpPr>
-        <p:spPr>
-          <a:xfrm xmlns:a="http://schemas.openxmlformats.org/drawingml/2006/main">
-            <a:off x="6191250" y="2857500"/>
-            <a:ext cx="971550" cy="1219200"/>
+                <a16:creationId xmlns:a16="http://schemas.microsoft.com/office/drawing/2014/main" id="{E6895BA3-61C8-4E12-84B0-F78898AC4A0A}"/>
+              </a:ext>
+            </a:extLst>
+          </p:cNvPr>
+          <p:cNvSpPr>
+            <a:spLocks xmlns:a="http://schemas.openxmlformats.org/drawingml/2006/main" noGrp="1"/>
+          </p:cNvSpPr>
+          <p:nvPr/>
+        </p:nvSpPr>
+        <p:spPr>
+          <a:xfrm xmlns:a="http://schemas.openxmlformats.org/drawingml/2006/main">
+            <a:off x="6477000" y="838200"/>
+            <a:ext cx="2381250" cy="1676400"/>
           </a:xfrm>
           <a:prstGeom xmlns:a="http://schemas.openxmlformats.org/drawingml/2006/main" prst="rect">
             <a:avLst/>
@@ -9828,19 +10089,19 @@
           <p:cNvPr id="10" name="">
             <a:extLst xmlns:a="http://schemas.openxmlformats.org/drawingml/2006/main">
               <a:ext uri="{FF2B5EF4-FFF2-40B4-BE49-F238E27FC236}">
-                <a16:creationId xmlns:a16="http://schemas.microsoft.com/office/drawing/2014/main" id="{B931CA36-D0FB-4E4F-828A-9D7277DEEC21}"/>
-              </a:ext>
-            </a:extLst>
-          </p:cNvPr>
-          <p:cNvSpPr>
-            <a:spLocks xmlns:a="http://schemas.openxmlformats.org/drawingml/2006/main" noGrp="1"/>
-          </p:cNvSpPr>
-          <p:nvPr/>
-        </p:nvSpPr>
-        <p:spPr>
-          <a:xfrm xmlns:a="http://schemas.openxmlformats.org/drawingml/2006/main">
-            <a:off x="6381750" y="3028950"/>
-            <a:ext cx="590550" cy="323850"/>
+                <a16:creationId xmlns:a16="http://schemas.microsoft.com/office/drawing/2014/main" id="{2BAA5D7B-D12B-4B85-9858-28E5177F8102}"/>
+              </a:ext>
+            </a:extLst>
+          </p:cNvPr>
+          <p:cNvSpPr>
+            <a:spLocks xmlns:a="http://schemas.openxmlformats.org/drawingml/2006/main" noGrp="1"/>
+          </p:cNvSpPr>
+          <p:nvPr/>
+        </p:nvSpPr>
+        <p:spPr>
+          <a:xfrm xmlns:a="http://schemas.openxmlformats.org/drawingml/2006/main">
+            <a:off x="6667500" y="1009650"/>
+            <a:ext cx="2000250" cy="323850"/>
           </a:xfrm>
           <a:prstGeom xmlns:a="http://schemas.openxmlformats.org/drawingml/2006/main" prst="rect">
             <a:avLst/>
@@ -9882,7 +10143,7 @@
                 <a:ea typeface="Arial"/>
                 <a:cs typeface="Arial"/>
               </a:rPr>
-              <a:t>Issue</a:t>
+              <a:t>01 Files changed</a:t>
             </a:r>
           </a:p>
         </p:txBody>
@@ -9892,19 +10153,19 @@
           <p:cNvPr id="11" name="">
             <a:extLst xmlns:a="http://schemas.openxmlformats.org/drawingml/2006/main">
               <a:ext uri="{FF2B5EF4-FFF2-40B4-BE49-F238E27FC236}">
-                <a16:creationId xmlns:a16="http://schemas.microsoft.com/office/drawing/2014/main" id="{92046E40-742B-48A2-8653-352192AC012F}"/>
-              </a:ext>
-            </a:extLst>
-          </p:cNvPr>
-          <p:cNvSpPr>
-            <a:spLocks xmlns:a="http://schemas.openxmlformats.org/drawingml/2006/main" noGrp="1"/>
-          </p:cNvSpPr>
-          <p:nvPr/>
-        </p:nvSpPr>
-        <p:spPr>
-          <a:xfrm xmlns:a="http://schemas.openxmlformats.org/drawingml/2006/main">
-            <a:off x="6381750" y="3467100"/>
-            <a:ext cx="590550" cy="438150"/>
+                <a16:creationId xmlns:a16="http://schemas.microsoft.com/office/drawing/2014/main" id="{B7593995-4B55-4F86-AC03-073CF00CA321}"/>
+              </a:ext>
+            </a:extLst>
+          </p:cNvPr>
+          <p:cNvSpPr>
+            <a:spLocks xmlns:a="http://schemas.openxmlformats.org/drawingml/2006/main" noGrp="1"/>
+          </p:cNvSpPr>
+          <p:nvPr/>
+        </p:nvSpPr>
+        <p:spPr>
+          <a:xfrm xmlns:a="http://schemas.openxmlformats.org/drawingml/2006/main">
+            <a:off x="6667500" y="1447800"/>
+            <a:ext cx="2000250" cy="895350"/>
           </a:xfrm>
           <a:prstGeom xmlns:a="http://schemas.openxmlformats.org/drawingml/2006/main" prst="rect">
             <a:avLst/>
@@ -9928,25 +10189,48 @@
           <a:lstStyle xmlns:a="http://schemas.openxmlformats.org/drawingml/2006/main"/>
           <a:p xmlns:a="http://schemas.openxmlformats.org/drawingml/2006/main">
             <a:pPr algn="l">
-              <a:defRPr sz="2400" b="0">
-                <a:solidFill>
-                  <a:srgbClr val="F4F0FF"/>
-                </a:solidFill>
-                <a:latin typeface="Arial"/>
-                <a:ea typeface="Arial"/>
-                <a:cs typeface="Arial"/>
-              </a:defRPr>
-            </a:pPr>
-            <a:r>
-              <a:rPr sz="2400" b="0">
-                <a:solidFill>
-                  <a:srgbClr val="F4F0FF"/>
-                </a:solidFill>
-                <a:latin typeface="Arial"/>
-                <a:ea typeface="Arial"/>
-                <a:cs typeface="Arial"/>
-              </a:rPr>
-              <a:t>01</a:t>
+              <a:defRPr sz="1575" b="0">
+                <a:solidFill>
+                  <a:srgbClr val="F4F0FF"/>
+                </a:solidFill>
+                <a:latin typeface="Arial"/>
+                <a:ea typeface="Arial"/>
+                <a:cs typeface="Arial"/>
+              </a:defRPr>
+            </a:pPr>
+            <a:r>
+              <a:rPr sz="1575" b="0">
+                <a:solidFill>
+                  <a:srgbClr val="F4F0FF"/>
+                </a:solidFill>
+                <a:latin typeface="Arial"/>
+                <a:ea typeface="Arial"/>
+                <a:cs typeface="Arial"/>
+              </a:rPr>
+              <a:t>파일 수</a:t>
+            </a:r>
+          </a:p>
+          <a:p xmlns:a="http://schemas.openxmlformats.org/drawingml/2006/main">
+            <a:pPr algn="l">
+              <a:defRPr sz="1575" b="0">
+                <a:solidFill>
+                  <a:srgbClr val="F4F0FF"/>
+                </a:solidFill>
+                <a:latin typeface="Arial"/>
+                <a:ea typeface="Arial"/>
+                <a:cs typeface="Arial"/>
+              </a:defRPr>
+            </a:pPr>
+            <a:r>
+              <a:rPr sz="1575" b="0">
+                <a:solidFill>
+                  <a:srgbClr val="F4F0FF"/>
+                </a:solidFill>
+                <a:latin typeface="Arial"/>
+                <a:ea typeface="Arial"/>
+                <a:cs typeface="Arial"/>
+              </a:rPr>
+              <a:t>관련 없는 파일</a:t>
             </a:r>
           </a:p>
         </p:txBody>
@@ -9956,54 +10240,19 @@
           <p:cNvPr id="12" name="">
             <a:extLst xmlns:a="http://schemas.openxmlformats.org/drawingml/2006/main">
               <a:ext uri="{FF2B5EF4-FFF2-40B4-BE49-F238E27FC236}">
-                <a16:creationId xmlns:a16="http://schemas.microsoft.com/office/drawing/2014/main" id="{C5290438-A865-454C-BA0A-09910E07F41D}"/>
-              </a:ext>
-            </a:extLst>
-          </p:cNvPr>
-          <p:cNvSpPr>
-            <a:spLocks xmlns:a="http://schemas.openxmlformats.org/drawingml/2006/main" noGrp="1"/>
-          </p:cNvSpPr>
-          <p:nvPr/>
-        </p:nvSpPr>
-        <p:spPr>
-          <a:xfrm xmlns:a="http://schemas.openxmlformats.org/drawingml/2006/main">
-            <a:off x="7162800" y="3457575"/>
-            <a:ext cx="323850" cy="28575"/>
-          </a:xfrm>
-          <a:prstGeom xmlns:a="http://schemas.openxmlformats.org/drawingml/2006/main" prst="rect">
-            <a:avLst/>
-          </a:prstGeom>
-          <a:solidFill xmlns:a="http://schemas.openxmlformats.org/drawingml/2006/main">
-            <a:srgbClr val="FFFFFF"/>
-          </a:solidFill>
-          <a:ln xmlns:a="http://schemas.openxmlformats.org/drawingml/2006/main" w="0">
-            <a:solidFill>
-              <a:srgbClr val="000000">
-                <a:alpha val="0"/>
-              </a:srgbClr>
-            </a:solidFill>
-            <a:prstDash val="solid"/>
-          </a:ln>
-        </p:spPr>
-      </p:sp>
-      <p:sp>
-        <p:nvSpPr>
-          <p:cNvPr id="13" name="">
-            <a:extLst xmlns:a="http://schemas.openxmlformats.org/drawingml/2006/main">
-              <a:ext uri="{FF2B5EF4-FFF2-40B4-BE49-F238E27FC236}">
-                <a16:creationId xmlns:a16="http://schemas.microsoft.com/office/drawing/2014/main" id="{A17182D3-20CE-4FFA-81B5-1F12851C2968}"/>
-              </a:ext>
-            </a:extLst>
-          </p:cNvPr>
-          <p:cNvSpPr>
-            <a:spLocks xmlns:a="http://schemas.openxmlformats.org/drawingml/2006/main" noGrp="1"/>
-          </p:cNvSpPr>
-          <p:nvPr/>
-        </p:nvSpPr>
-        <p:spPr>
-          <a:xfrm xmlns:a="http://schemas.openxmlformats.org/drawingml/2006/main">
-            <a:off x="7296150" y="2857500"/>
-            <a:ext cx="971550" cy="1219200"/>
+                <a16:creationId xmlns:a16="http://schemas.microsoft.com/office/drawing/2014/main" id="{B06E5CFB-1C9D-4D3D-A0EF-964C5A40744B}"/>
+              </a:ext>
+            </a:extLst>
+          </p:cNvPr>
+          <p:cNvSpPr>
+            <a:spLocks xmlns:a="http://schemas.openxmlformats.org/drawingml/2006/main" noGrp="1"/>
+          </p:cNvSpPr>
+          <p:nvPr/>
+        </p:nvSpPr>
+        <p:spPr>
+          <a:xfrm xmlns:a="http://schemas.openxmlformats.org/drawingml/2006/main">
+            <a:off x="9163050" y="838200"/>
+            <a:ext cx="2381250" cy="1676400"/>
           </a:xfrm>
           <a:prstGeom xmlns:a="http://schemas.openxmlformats.org/drawingml/2006/main" prst="rect">
             <a:avLst/>
@@ -10025,22 +10274,22 @@
       </p:sp>
       <p:sp>
         <p:nvSpPr>
-          <p:cNvPr id="14" name="">
-            <a:extLst xmlns:a="http://schemas.openxmlformats.org/drawingml/2006/main">
-              <a:ext uri="{FF2B5EF4-FFF2-40B4-BE49-F238E27FC236}">
-                <a16:creationId xmlns:a16="http://schemas.microsoft.com/office/drawing/2014/main" id="{B57B7A9F-CB4A-40C6-A2CB-ED65C83E5D30}"/>
-              </a:ext>
-            </a:extLst>
-          </p:cNvPr>
-          <p:cNvSpPr>
-            <a:spLocks xmlns:a="http://schemas.openxmlformats.org/drawingml/2006/main" noGrp="1"/>
-          </p:cNvSpPr>
-          <p:nvPr/>
-        </p:nvSpPr>
-        <p:spPr>
-          <a:xfrm xmlns:a="http://schemas.openxmlformats.org/drawingml/2006/main">
-            <a:off x="7486650" y="3028950"/>
-            <a:ext cx="590550" cy="323850"/>
+          <p:cNvPr id="13" name="">
+            <a:extLst xmlns:a="http://schemas.openxmlformats.org/drawingml/2006/main">
+              <a:ext uri="{FF2B5EF4-FFF2-40B4-BE49-F238E27FC236}">
+                <a16:creationId xmlns:a16="http://schemas.microsoft.com/office/drawing/2014/main" id="{FBA1B433-5B54-4A9D-8381-02768A20BA63}"/>
+              </a:ext>
+            </a:extLst>
+          </p:cNvPr>
+          <p:cNvSpPr>
+            <a:spLocks xmlns:a="http://schemas.openxmlformats.org/drawingml/2006/main" noGrp="1"/>
+          </p:cNvSpPr>
+          <p:nvPr/>
+        </p:nvSpPr>
+        <p:spPr>
+          <a:xfrm xmlns:a="http://schemas.openxmlformats.org/drawingml/2006/main">
+            <a:off x="9353550" y="1009650"/>
+            <a:ext cx="2000250" cy="323850"/>
           </a:xfrm>
           <a:prstGeom xmlns:a="http://schemas.openxmlformats.org/drawingml/2006/main" prst="rect">
             <a:avLst/>
@@ -10082,29 +10331,29 @@
                 <a:ea typeface="Arial"/>
                 <a:cs typeface="Arial"/>
               </a:rPr>
-              <a:t>Agent</a:t>
-            </a:r>
-          </a:p>
-        </p:txBody>
-      </p:sp>
-      <p:sp>
-        <p:nvSpPr>
-          <p:cNvPr id="15" name="">
-            <a:extLst xmlns:a="http://schemas.openxmlformats.org/drawingml/2006/main">
-              <a:ext uri="{FF2B5EF4-FFF2-40B4-BE49-F238E27FC236}">
-                <a16:creationId xmlns:a16="http://schemas.microsoft.com/office/drawing/2014/main" id="{2A0E3379-B650-461B-9EF3-398DF3FF17BD}"/>
-              </a:ext>
-            </a:extLst>
-          </p:cNvPr>
-          <p:cNvSpPr>
-            <a:spLocks xmlns:a="http://schemas.openxmlformats.org/drawingml/2006/main" noGrp="1"/>
-          </p:cNvSpPr>
-          <p:nvPr/>
-        </p:nvSpPr>
-        <p:spPr>
-          <a:xfrm xmlns:a="http://schemas.openxmlformats.org/drawingml/2006/main">
-            <a:off x="7486650" y="3467100"/>
-            <a:ext cx="590550" cy="438150"/>
+              <a:t>02 Diff</a:t>
+            </a:r>
+          </a:p>
+        </p:txBody>
+      </p:sp>
+      <p:sp>
+        <p:nvSpPr>
+          <p:cNvPr id="14" name="">
+            <a:extLst xmlns:a="http://schemas.openxmlformats.org/drawingml/2006/main">
+              <a:ext uri="{FF2B5EF4-FFF2-40B4-BE49-F238E27FC236}">
+                <a16:creationId xmlns:a16="http://schemas.microsoft.com/office/drawing/2014/main" id="{905BA9A7-0DAB-453B-A203-1530DF11390D}"/>
+              </a:ext>
+            </a:extLst>
+          </p:cNvPr>
+          <p:cNvSpPr>
+            <a:spLocks xmlns:a="http://schemas.openxmlformats.org/drawingml/2006/main" noGrp="1"/>
+          </p:cNvSpPr>
+          <p:nvPr/>
+        </p:nvSpPr>
+        <p:spPr>
+          <a:xfrm xmlns:a="http://schemas.openxmlformats.org/drawingml/2006/main">
+            <a:off x="9353550" y="1447800"/>
+            <a:ext cx="2000250" cy="895350"/>
           </a:xfrm>
           <a:prstGeom xmlns:a="http://schemas.openxmlformats.org/drawingml/2006/main" prst="rect">
             <a:avLst/>
@@ -10128,82 +10377,70 @@
           <a:lstStyle xmlns:a="http://schemas.openxmlformats.org/drawingml/2006/main"/>
           <a:p xmlns:a="http://schemas.openxmlformats.org/drawingml/2006/main">
             <a:pPr algn="l">
-              <a:defRPr sz="2400" b="0">
-                <a:solidFill>
-                  <a:srgbClr val="F4F0FF"/>
-                </a:solidFill>
-                <a:latin typeface="Arial"/>
-                <a:ea typeface="Arial"/>
-                <a:cs typeface="Arial"/>
-              </a:defRPr>
-            </a:pPr>
-            <a:r>
-              <a:rPr sz="2400" b="0">
-                <a:solidFill>
-                  <a:srgbClr val="F4F0FF"/>
-                </a:solidFill>
-                <a:latin typeface="Arial"/>
-                <a:ea typeface="Arial"/>
-                <a:cs typeface="Arial"/>
-              </a:rPr>
-              <a:t>02</a:t>
-            </a:r>
-          </a:p>
-        </p:txBody>
-      </p:sp>
-      <p:sp>
-        <p:nvSpPr>
-          <p:cNvPr id="16" name="">
-            <a:extLst xmlns:a="http://schemas.openxmlformats.org/drawingml/2006/main">
-              <a:ext uri="{FF2B5EF4-FFF2-40B4-BE49-F238E27FC236}">
-                <a16:creationId xmlns:a16="http://schemas.microsoft.com/office/drawing/2014/main" id="{FF2530C4-7F2B-49A3-8341-CCE5A260CB32}"/>
-              </a:ext>
-            </a:extLst>
-          </p:cNvPr>
-          <p:cNvSpPr>
-            <a:spLocks xmlns:a="http://schemas.openxmlformats.org/drawingml/2006/main" noGrp="1"/>
-          </p:cNvSpPr>
-          <p:nvPr/>
-        </p:nvSpPr>
-        <p:spPr>
-          <a:xfrm xmlns:a="http://schemas.openxmlformats.org/drawingml/2006/main">
-            <a:off x="8267700" y="3457575"/>
-            <a:ext cx="323850" cy="28575"/>
-          </a:xfrm>
-          <a:prstGeom xmlns:a="http://schemas.openxmlformats.org/drawingml/2006/main" prst="rect">
-            <a:avLst/>
-          </a:prstGeom>
-          <a:solidFill xmlns:a="http://schemas.openxmlformats.org/drawingml/2006/main">
-            <a:srgbClr val="FFFFFF"/>
-          </a:solidFill>
-          <a:ln xmlns:a="http://schemas.openxmlformats.org/drawingml/2006/main" w="0">
-            <a:solidFill>
-              <a:srgbClr val="000000">
-                <a:alpha val="0"/>
-              </a:srgbClr>
-            </a:solidFill>
-            <a:prstDash val="solid"/>
-          </a:ln>
-        </p:spPr>
-      </p:sp>
-      <p:sp>
-        <p:nvSpPr>
-          <p:cNvPr id="17" name="">
-            <a:extLst xmlns:a="http://schemas.openxmlformats.org/drawingml/2006/main">
-              <a:ext uri="{FF2B5EF4-FFF2-40B4-BE49-F238E27FC236}">
-                <a16:creationId xmlns:a16="http://schemas.microsoft.com/office/drawing/2014/main" id="{0A992389-2BEF-4482-ACAF-CB9361615E6B}"/>
-              </a:ext>
-            </a:extLst>
-          </p:cNvPr>
-          <p:cNvSpPr>
-            <a:spLocks xmlns:a="http://schemas.openxmlformats.org/drawingml/2006/main" noGrp="1"/>
-          </p:cNvSpPr>
-          <p:nvPr/>
-        </p:nvSpPr>
-        <p:spPr>
-          <a:xfrm xmlns:a="http://schemas.openxmlformats.org/drawingml/2006/main">
-            <a:off x="8401050" y="2857500"/>
-            <a:ext cx="971550" cy="1219200"/>
+              <a:defRPr sz="1575" b="0">
+                <a:solidFill>
+                  <a:srgbClr val="F4F0FF"/>
+                </a:solidFill>
+                <a:latin typeface="Arial"/>
+                <a:ea typeface="Arial"/>
+                <a:cs typeface="Arial"/>
+              </a:defRPr>
+            </a:pPr>
+            <a:r>
+              <a:rPr sz="1575" b="0">
+                <a:solidFill>
+                  <a:srgbClr val="F4F0FF"/>
+                </a:solidFill>
+                <a:latin typeface="Arial"/>
+                <a:ea typeface="Arial"/>
+                <a:cs typeface="Arial"/>
+              </a:rPr>
+              <a:t>요청과 일치</a:t>
+            </a:r>
+          </a:p>
+          <a:p xmlns:a="http://schemas.openxmlformats.org/drawingml/2006/main">
+            <a:pPr algn="l">
+              <a:defRPr sz="1575" b="0">
+                <a:solidFill>
+                  <a:srgbClr val="F4F0FF"/>
+                </a:solidFill>
+                <a:latin typeface="Arial"/>
+                <a:ea typeface="Arial"/>
+                <a:cs typeface="Arial"/>
+              </a:defRPr>
+            </a:pPr>
+            <a:r>
+              <a:rPr sz="1575" b="0">
+                <a:solidFill>
+                  <a:srgbClr val="F4F0FF"/>
+                </a:solidFill>
+                <a:latin typeface="Arial"/>
+                <a:ea typeface="Arial"/>
+                <a:cs typeface="Arial"/>
+              </a:rPr>
+              <a:t>삭제/대량 변경</a:t>
+            </a:r>
+          </a:p>
+        </p:txBody>
+      </p:sp>
+      <p:sp>
+        <p:nvSpPr>
+          <p:cNvPr id="15" name="">
+            <a:extLst xmlns:a="http://schemas.openxmlformats.org/drawingml/2006/main">
+              <a:ext uri="{FF2B5EF4-FFF2-40B4-BE49-F238E27FC236}">
+                <a16:creationId xmlns:a16="http://schemas.microsoft.com/office/drawing/2014/main" id="{FD526D9E-D874-4C3B-9DAB-27CC1715110B}"/>
+              </a:ext>
+            </a:extLst>
+          </p:cNvPr>
+          <p:cNvSpPr>
+            <a:spLocks xmlns:a="http://schemas.openxmlformats.org/drawingml/2006/main" noGrp="1"/>
+          </p:cNvSpPr>
+          <p:nvPr/>
+        </p:nvSpPr>
+        <p:spPr>
+          <a:xfrm xmlns:a="http://schemas.openxmlformats.org/drawingml/2006/main">
+            <a:off x="6477000" y="2990850"/>
+            <a:ext cx="2381250" cy="1676400"/>
           </a:xfrm>
           <a:prstGeom xmlns:a="http://schemas.openxmlformats.org/drawingml/2006/main" prst="rect">
             <a:avLst/>
@@ -10225,22 +10462,22 @@
       </p:sp>
       <p:sp>
         <p:nvSpPr>
-          <p:cNvPr id="18" name="">
-            <a:extLst xmlns:a="http://schemas.openxmlformats.org/drawingml/2006/main">
-              <a:ext uri="{FF2B5EF4-FFF2-40B4-BE49-F238E27FC236}">
-                <a16:creationId xmlns:a16="http://schemas.microsoft.com/office/drawing/2014/main" id="{E2B640CA-F4A9-4666-82B8-2A0286252A7F}"/>
-              </a:ext>
-            </a:extLst>
-          </p:cNvPr>
-          <p:cNvSpPr>
-            <a:spLocks xmlns:a="http://schemas.openxmlformats.org/drawingml/2006/main" noGrp="1"/>
-          </p:cNvSpPr>
-          <p:nvPr/>
-        </p:nvSpPr>
-        <p:spPr>
-          <a:xfrm xmlns:a="http://schemas.openxmlformats.org/drawingml/2006/main">
-            <a:off x="8591550" y="3028950"/>
-            <a:ext cx="590550" cy="323850"/>
+          <p:cNvPr id="16" name="">
+            <a:extLst xmlns:a="http://schemas.openxmlformats.org/drawingml/2006/main">
+              <a:ext uri="{FF2B5EF4-FFF2-40B4-BE49-F238E27FC236}">
+                <a16:creationId xmlns:a16="http://schemas.microsoft.com/office/drawing/2014/main" id="{A062DA66-2D7A-40E1-A744-5DADE86178DB}"/>
+              </a:ext>
+            </a:extLst>
+          </p:cNvPr>
+          <p:cNvSpPr>
+            <a:spLocks xmlns:a="http://schemas.openxmlformats.org/drawingml/2006/main" noGrp="1"/>
+          </p:cNvSpPr>
+          <p:nvPr/>
+        </p:nvSpPr>
+        <p:spPr>
+          <a:xfrm xmlns:a="http://schemas.openxmlformats.org/drawingml/2006/main">
+            <a:off x="6667500" y="3162300"/>
+            <a:ext cx="2000250" cy="323850"/>
           </a:xfrm>
           <a:prstGeom xmlns:a="http://schemas.openxmlformats.org/drawingml/2006/main" prst="rect">
             <a:avLst/>
@@ -10282,29 +10519,29 @@
                 <a:ea typeface="Arial"/>
                 <a:cs typeface="Arial"/>
               </a:rPr>
-              <a:t>PR</a:t>
-            </a:r>
-          </a:p>
-        </p:txBody>
-      </p:sp>
-      <p:sp>
-        <p:nvSpPr>
-          <p:cNvPr id="19" name="">
-            <a:extLst xmlns:a="http://schemas.openxmlformats.org/drawingml/2006/main">
-              <a:ext uri="{FF2B5EF4-FFF2-40B4-BE49-F238E27FC236}">
-                <a16:creationId xmlns:a16="http://schemas.microsoft.com/office/drawing/2014/main" id="{51A2C4D2-E1BE-48DD-9D53-A276830EBFBE}"/>
-              </a:ext>
-            </a:extLst>
-          </p:cNvPr>
-          <p:cNvSpPr>
-            <a:spLocks xmlns:a="http://schemas.openxmlformats.org/drawingml/2006/main" noGrp="1"/>
-          </p:cNvSpPr>
-          <p:nvPr/>
-        </p:nvSpPr>
-        <p:spPr>
-          <a:xfrm xmlns:a="http://schemas.openxmlformats.org/drawingml/2006/main">
-            <a:off x="8591550" y="3467100"/>
-            <a:ext cx="590550" cy="438150"/>
+              <a:t>03 Checks</a:t>
+            </a:r>
+          </a:p>
+        </p:txBody>
+      </p:sp>
+      <p:sp>
+        <p:nvSpPr>
+          <p:cNvPr id="17" name="">
+            <a:extLst xmlns:a="http://schemas.openxmlformats.org/drawingml/2006/main">
+              <a:ext uri="{FF2B5EF4-FFF2-40B4-BE49-F238E27FC236}">
+                <a16:creationId xmlns:a16="http://schemas.microsoft.com/office/drawing/2014/main" id="{70B4DC5D-7376-4EE1-B828-83CA9E240797}"/>
+              </a:ext>
+            </a:extLst>
+          </p:cNvPr>
+          <p:cNvSpPr>
+            <a:spLocks xmlns:a="http://schemas.openxmlformats.org/drawingml/2006/main" noGrp="1"/>
+          </p:cNvSpPr>
+          <p:nvPr/>
+        </p:nvSpPr>
+        <p:spPr>
+          <a:xfrm xmlns:a="http://schemas.openxmlformats.org/drawingml/2006/main">
+            <a:off x="6667500" y="3600450"/>
+            <a:ext cx="2000250" cy="895350"/>
           </a:xfrm>
           <a:prstGeom xmlns:a="http://schemas.openxmlformats.org/drawingml/2006/main" prst="rect">
             <a:avLst/>
@@ -10328,82 +10565,70 @@
           <a:lstStyle xmlns:a="http://schemas.openxmlformats.org/drawingml/2006/main"/>
           <a:p xmlns:a="http://schemas.openxmlformats.org/drawingml/2006/main">
             <a:pPr algn="l">
-              <a:defRPr sz="2400" b="0">
-                <a:solidFill>
-                  <a:srgbClr val="F4F0FF"/>
-                </a:solidFill>
-                <a:latin typeface="Arial"/>
-                <a:ea typeface="Arial"/>
-                <a:cs typeface="Arial"/>
-              </a:defRPr>
-            </a:pPr>
-            <a:r>
-              <a:rPr sz="2400" b="0">
-                <a:solidFill>
-                  <a:srgbClr val="F4F0FF"/>
-                </a:solidFill>
-                <a:latin typeface="Arial"/>
-                <a:ea typeface="Arial"/>
-                <a:cs typeface="Arial"/>
-              </a:rPr>
-              <a:t>03</a:t>
-            </a:r>
-          </a:p>
-        </p:txBody>
-      </p:sp>
-      <p:sp>
-        <p:nvSpPr>
-          <p:cNvPr id="20" name="">
-            <a:extLst xmlns:a="http://schemas.openxmlformats.org/drawingml/2006/main">
-              <a:ext uri="{FF2B5EF4-FFF2-40B4-BE49-F238E27FC236}">
-                <a16:creationId xmlns:a16="http://schemas.microsoft.com/office/drawing/2014/main" id="{35B7C05D-3CC7-46D5-A667-81A0E9FC80A5}"/>
-              </a:ext>
-            </a:extLst>
-          </p:cNvPr>
-          <p:cNvSpPr>
-            <a:spLocks xmlns:a="http://schemas.openxmlformats.org/drawingml/2006/main" noGrp="1"/>
-          </p:cNvSpPr>
-          <p:nvPr/>
-        </p:nvSpPr>
-        <p:spPr>
-          <a:xfrm xmlns:a="http://schemas.openxmlformats.org/drawingml/2006/main">
-            <a:off x="9372600" y="3457575"/>
-            <a:ext cx="323850" cy="28575"/>
-          </a:xfrm>
-          <a:prstGeom xmlns:a="http://schemas.openxmlformats.org/drawingml/2006/main" prst="rect">
-            <a:avLst/>
-          </a:prstGeom>
-          <a:solidFill xmlns:a="http://schemas.openxmlformats.org/drawingml/2006/main">
-            <a:srgbClr val="FFFFFF"/>
-          </a:solidFill>
-          <a:ln xmlns:a="http://schemas.openxmlformats.org/drawingml/2006/main" w="0">
-            <a:solidFill>
-              <a:srgbClr val="000000">
-                <a:alpha val="0"/>
-              </a:srgbClr>
-            </a:solidFill>
-            <a:prstDash val="solid"/>
-          </a:ln>
-        </p:spPr>
-      </p:sp>
-      <p:sp>
-        <p:nvSpPr>
-          <p:cNvPr id="21" name="">
-            <a:extLst xmlns:a="http://schemas.openxmlformats.org/drawingml/2006/main">
-              <a:ext uri="{FF2B5EF4-FFF2-40B4-BE49-F238E27FC236}">
-                <a16:creationId xmlns:a16="http://schemas.microsoft.com/office/drawing/2014/main" id="{AAC9D236-AD35-49A9-AE21-F54E71F38E75}"/>
-              </a:ext>
-            </a:extLst>
-          </p:cNvPr>
-          <p:cNvSpPr>
-            <a:spLocks xmlns:a="http://schemas.openxmlformats.org/drawingml/2006/main" noGrp="1"/>
-          </p:cNvSpPr>
-          <p:nvPr/>
-        </p:nvSpPr>
-        <p:spPr>
-          <a:xfrm xmlns:a="http://schemas.openxmlformats.org/drawingml/2006/main">
-            <a:off x="9505950" y="2857500"/>
-            <a:ext cx="971550" cy="1219200"/>
+              <a:defRPr sz="1575" b="0">
+                <a:solidFill>
+                  <a:srgbClr val="F4F0FF"/>
+                </a:solidFill>
+                <a:latin typeface="Arial"/>
+                <a:ea typeface="Arial"/>
+                <a:cs typeface="Arial"/>
+              </a:defRPr>
+            </a:pPr>
+            <a:r>
+              <a:rPr sz="1575" b="0">
+                <a:solidFill>
+                  <a:srgbClr val="F4F0FF"/>
+                </a:solidFill>
+                <a:latin typeface="Arial"/>
+                <a:ea typeface="Arial"/>
+                <a:cs typeface="Arial"/>
+              </a:rPr>
+              <a:t>CI 결과</a:t>
+            </a:r>
+          </a:p>
+          <a:p xmlns:a="http://schemas.openxmlformats.org/drawingml/2006/main">
+            <a:pPr algn="l">
+              <a:defRPr sz="1575" b="0">
+                <a:solidFill>
+                  <a:srgbClr val="F4F0FF"/>
+                </a:solidFill>
+                <a:latin typeface="Arial"/>
+                <a:ea typeface="Arial"/>
+                <a:cs typeface="Arial"/>
+              </a:defRPr>
+            </a:pPr>
+            <a:r>
+              <a:rPr sz="1575" b="0">
+                <a:solidFill>
+                  <a:srgbClr val="F4F0FF"/>
+                </a:solidFill>
+                <a:latin typeface="Arial"/>
+                <a:ea typeface="Arial"/>
+                <a:cs typeface="Arial"/>
+              </a:rPr>
+              <a:t>실패 로그</a:t>
+            </a:r>
+          </a:p>
+        </p:txBody>
+      </p:sp>
+      <p:sp>
+        <p:nvSpPr>
+          <p:cNvPr id="18" name="">
+            <a:extLst xmlns:a="http://schemas.openxmlformats.org/drawingml/2006/main">
+              <a:ext uri="{FF2B5EF4-FFF2-40B4-BE49-F238E27FC236}">
+                <a16:creationId xmlns:a16="http://schemas.microsoft.com/office/drawing/2014/main" id="{1FB38DA3-80DF-4725-B3E2-17520F783318}"/>
+              </a:ext>
+            </a:extLst>
+          </p:cNvPr>
+          <p:cNvSpPr>
+            <a:spLocks xmlns:a="http://schemas.openxmlformats.org/drawingml/2006/main" noGrp="1"/>
+          </p:cNvSpPr>
+          <p:nvPr/>
+        </p:nvSpPr>
+        <p:spPr>
+          <a:xfrm xmlns:a="http://schemas.openxmlformats.org/drawingml/2006/main">
+            <a:off x="9163050" y="2990850"/>
+            <a:ext cx="2381250" cy="1676400"/>
           </a:xfrm>
           <a:prstGeom xmlns:a="http://schemas.openxmlformats.org/drawingml/2006/main" prst="rect">
             <a:avLst/>
@@ -10425,22 +10650,22 @@
       </p:sp>
       <p:sp>
         <p:nvSpPr>
-          <p:cNvPr id="22" name="">
-            <a:extLst xmlns:a="http://schemas.openxmlformats.org/drawingml/2006/main">
-              <a:ext uri="{FF2B5EF4-FFF2-40B4-BE49-F238E27FC236}">
-                <a16:creationId xmlns:a16="http://schemas.microsoft.com/office/drawing/2014/main" id="{E03F07F1-1F37-45D6-8B8E-D745FB4234A1}"/>
-              </a:ext>
-            </a:extLst>
-          </p:cNvPr>
-          <p:cNvSpPr>
-            <a:spLocks xmlns:a="http://schemas.openxmlformats.org/drawingml/2006/main" noGrp="1"/>
-          </p:cNvSpPr>
-          <p:nvPr/>
-        </p:nvSpPr>
-        <p:spPr>
-          <a:xfrm xmlns:a="http://schemas.openxmlformats.org/drawingml/2006/main">
-            <a:off x="9696450" y="3028950"/>
-            <a:ext cx="590550" cy="323850"/>
+          <p:cNvPr id="19" name="">
+            <a:extLst xmlns:a="http://schemas.openxmlformats.org/drawingml/2006/main">
+              <a:ext uri="{FF2B5EF4-FFF2-40B4-BE49-F238E27FC236}">
+                <a16:creationId xmlns:a16="http://schemas.microsoft.com/office/drawing/2014/main" id="{EC5FAA89-3FE9-430D-A969-235E79BCA995}"/>
+              </a:ext>
+            </a:extLst>
+          </p:cNvPr>
+          <p:cNvSpPr>
+            <a:spLocks xmlns:a="http://schemas.openxmlformats.org/drawingml/2006/main" noGrp="1"/>
+          </p:cNvSpPr>
+          <p:nvPr/>
+        </p:nvSpPr>
+        <p:spPr>
+          <a:xfrm xmlns:a="http://schemas.openxmlformats.org/drawingml/2006/main">
+            <a:off x="9353550" y="3162300"/>
+            <a:ext cx="2000250" cy="323850"/>
           </a:xfrm>
           <a:prstGeom xmlns:a="http://schemas.openxmlformats.org/drawingml/2006/main" prst="rect">
             <a:avLst/>
@@ -10482,29 +10707,29 @@
                 <a:ea typeface="Arial"/>
                 <a:cs typeface="Arial"/>
               </a:rPr>
-              <a:t>Check</a:t>
-            </a:r>
-          </a:p>
-        </p:txBody>
-      </p:sp>
-      <p:sp>
-        <p:nvSpPr>
-          <p:cNvPr id="23" name="">
-            <a:extLst xmlns:a="http://schemas.openxmlformats.org/drawingml/2006/main">
-              <a:ext uri="{FF2B5EF4-FFF2-40B4-BE49-F238E27FC236}">
-                <a16:creationId xmlns:a16="http://schemas.microsoft.com/office/drawing/2014/main" id="{AD259220-00B4-4A3F-B641-2A3C92C0801D}"/>
-              </a:ext>
-            </a:extLst>
-          </p:cNvPr>
-          <p:cNvSpPr>
-            <a:spLocks xmlns:a="http://schemas.openxmlformats.org/drawingml/2006/main" noGrp="1"/>
-          </p:cNvSpPr>
-          <p:nvPr/>
-        </p:nvSpPr>
-        <p:spPr>
-          <a:xfrm xmlns:a="http://schemas.openxmlformats.org/drawingml/2006/main">
-            <a:off x="9696450" y="3467100"/>
-            <a:ext cx="590550" cy="438150"/>
+              <a:t>04 Decision</a:t>
+            </a:r>
+          </a:p>
+        </p:txBody>
+      </p:sp>
+      <p:sp>
+        <p:nvSpPr>
+          <p:cNvPr id="20" name="">
+            <a:extLst xmlns:a="http://schemas.openxmlformats.org/drawingml/2006/main">
+              <a:ext uri="{FF2B5EF4-FFF2-40B4-BE49-F238E27FC236}">
+                <a16:creationId xmlns:a16="http://schemas.microsoft.com/office/drawing/2014/main" id="{9C739B3F-0F3B-426C-9247-4DB48C90218B}"/>
+              </a:ext>
+            </a:extLst>
+          </p:cNvPr>
+          <p:cNvSpPr>
+            <a:spLocks xmlns:a="http://schemas.openxmlformats.org/drawingml/2006/main" noGrp="1"/>
+          </p:cNvSpPr>
+          <p:nvPr/>
+        </p:nvSpPr>
+        <p:spPr>
+          <a:xfrm xmlns:a="http://schemas.openxmlformats.org/drawingml/2006/main">
+            <a:off x="9353550" y="3600450"/>
+            <a:ext cx="2000250" cy="895350"/>
           </a:xfrm>
           <a:prstGeom xmlns:a="http://schemas.openxmlformats.org/drawingml/2006/main" prst="rect">
             <a:avLst/>
@@ -10528,119 +10753,93 @@
           <a:lstStyle xmlns:a="http://schemas.openxmlformats.org/drawingml/2006/main"/>
           <a:p xmlns:a="http://schemas.openxmlformats.org/drawingml/2006/main">
             <a:pPr algn="l">
-              <a:defRPr sz="2400" b="0">
-                <a:solidFill>
-                  <a:srgbClr val="F4F0FF"/>
-                </a:solidFill>
-                <a:latin typeface="Arial"/>
-                <a:ea typeface="Arial"/>
-                <a:cs typeface="Arial"/>
-              </a:defRPr>
-            </a:pPr>
-            <a:r>
-              <a:rPr sz="2400" b="0">
-                <a:solidFill>
-                  <a:srgbClr val="F4F0FF"/>
-                </a:solidFill>
-                <a:latin typeface="Arial"/>
-                <a:ea typeface="Arial"/>
-                <a:cs typeface="Arial"/>
-              </a:rPr>
-              <a:t>04</a:t>
-            </a:r>
-          </a:p>
-        </p:txBody>
-      </p:sp>
-      <p:sp>
-        <p:nvSpPr>
-          <p:cNvPr id="24" name="">
-            <a:extLst xmlns:a="http://schemas.openxmlformats.org/drawingml/2006/main">
-              <a:ext uri="{FF2B5EF4-FFF2-40B4-BE49-F238E27FC236}">
-                <a16:creationId xmlns:a16="http://schemas.microsoft.com/office/drawing/2014/main" id="{80E5288C-6A1B-44B2-AA51-9E4F5232A069}"/>
-              </a:ext>
-            </a:extLst>
-          </p:cNvPr>
-          <p:cNvSpPr>
-            <a:spLocks xmlns:a="http://schemas.openxmlformats.org/drawingml/2006/main" noGrp="1"/>
-          </p:cNvSpPr>
-          <p:nvPr/>
-        </p:nvSpPr>
-        <p:spPr>
-          <a:xfrm xmlns:a="http://schemas.openxmlformats.org/drawingml/2006/main">
-            <a:off x="10477500" y="3457575"/>
-            <a:ext cx="323850" cy="28575"/>
-          </a:xfrm>
-          <a:prstGeom xmlns:a="http://schemas.openxmlformats.org/drawingml/2006/main" prst="rect">
-            <a:avLst/>
-          </a:prstGeom>
-          <a:solidFill xmlns:a="http://schemas.openxmlformats.org/drawingml/2006/main">
-            <a:srgbClr val="FFFFFF"/>
-          </a:solidFill>
-          <a:ln xmlns:a="http://schemas.openxmlformats.org/drawingml/2006/main" w="0">
-            <a:solidFill>
-              <a:srgbClr val="000000">
-                <a:alpha val="0"/>
-              </a:srgbClr>
-            </a:solidFill>
-            <a:prstDash val="solid"/>
-          </a:ln>
-        </p:spPr>
-      </p:sp>
-      <p:sp>
-        <p:nvSpPr>
-          <p:cNvPr id="25" name="">
-            <a:extLst xmlns:a="http://schemas.openxmlformats.org/drawingml/2006/main">
-              <a:ext uri="{FF2B5EF4-FFF2-40B4-BE49-F238E27FC236}">
-                <a16:creationId xmlns:a16="http://schemas.microsoft.com/office/drawing/2014/main" id="{18D96F7A-901B-4CF2-AFBC-779E2FF90AD8}"/>
-              </a:ext>
-            </a:extLst>
-          </p:cNvPr>
-          <p:cNvSpPr>
-            <a:spLocks xmlns:a="http://schemas.openxmlformats.org/drawingml/2006/main" noGrp="1"/>
-          </p:cNvSpPr>
-          <p:nvPr/>
-        </p:nvSpPr>
-        <p:spPr>
-          <a:xfrm xmlns:a="http://schemas.openxmlformats.org/drawingml/2006/main">
-            <a:off x="10610850" y="2857500"/>
-            <a:ext cx="971550" cy="1219200"/>
-          </a:xfrm>
-          <a:prstGeom xmlns:a="http://schemas.openxmlformats.org/drawingml/2006/main" prst="rect">
-            <a:avLst/>
-          </a:prstGeom>
-          <a:solidFill xmlns:a="http://schemas.openxmlformats.org/drawingml/2006/main">
-            <a:srgbClr val="111111">
-              <a:alpha val="80000"/>
-            </a:srgbClr>
-          </a:solidFill>
-          <a:ln xmlns:a="http://schemas.openxmlformats.org/drawingml/2006/main" w="9525">
-            <a:solidFill>
-              <a:srgbClr val="FFFFFF">
-                <a:alpha val="20000"/>
-              </a:srgbClr>
-            </a:solidFill>
-            <a:prstDash val="solid"/>
-          </a:ln>
-        </p:spPr>
-      </p:sp>
-      <p:sp>
-        <p:nvSpPr>
-          <p:cNvPr id="26" name="">
-            <a:extLst xmlns:a="http://schemas.openxmlformats.org/drawingml/2006/main">
-              <a:ext uri="{FF2B5EF4-FFF2-40B4-BE49-F238E27FC236}">
-                <a16:creationId xmlns:a16="http://schemas.microsoft.com/office/drawing/2014/main" id="{9F0B0604-8953-41E0-B9C2-CBC1D18803B6}"/>
-              </a:ext>
-            </a:extLst>
-          </p:cNvPr>
-          <p:cNvSpPr>
-            <a:spLocks xmlns:a="http://schemas.openxmlformats.org/drawingml/2006/main" noGrp="1"/>
-          </p:cNvSpPr>
-          <p:nvPr/>
-        </p:nvSpPr>
-        <p:spPr>
-          <a:xfrm xmlns:a="http://schemas.openxmlformats.org/drawingml/2006/main">
-            <a:off x="10801350" y="3028950"/>
-            <a:ext cx="590550" cy="323850"/>
+              <a:defRPr sz="1575" b="0">
+                <a:solidFill>
+                  <a:srgbClr val="F4F0FF"/>
+                </a:solidFill>
+                <a:latin typeface="Arial"/>
+                <a:ea typeface="Arial"/>
+                <a:cs typeface="Arial"/>
+              </a:defRPr>
+            </a:pPr>
+            <a:r>
+              <a:rPr sz="1575" b="0">
+                <a:solidFill>
+                  <a:srgbClr val="F4F0FF"/>
+                </a:solidFill>
+                <a:latin typeface="Arial"/>
+                <a:ea typeface="Arial"/>
+                <a:cs typeface="Arial"/>
+              </a:rPr>
+              <a:t>Merge</a:t>
+            </a:r>
+          </a:p>
+          <a:p xmlns:a="http://schemas.openxmlformats.org/drawingml/2006/main">
+            <a:pPr algn="l">
+              <a:defRPr sz="1575" b="0">
+                <a:solidFill>
+                  <a:srgbClr val="F4F0FF"/>
+                </a:solidFill>
+                <a:latin typeface="Arial"/>
+                <a:ea typeface="Arial"/>
+                <a:cs typeface="Arial"/>
+              </a:defRPr>
+            </a:pPr>
+            <a:r>
+              <a:rPr sz="1575" b="0">
+                <a:solidFill>
+                  <a:srgbClr val="F4F0FF"/>
+                </a:solidFill>
+                <a:latin typeface="Arial"/>
+                <a:ea typeface="Arial"/>
+                <a:cs typeface="Arial"/>
+              </a:rPr>
+              <a:t>Request</a:t>
+            </a:r>
+          </a:p>
+          <a:p xmlns:a="http://schemas.openxmlformats.org/drawingml/2006/main">
+            <a:pPr algn="l">
+              <a:defRPr sz="1575" b="0">
+                <a:solidFill>
+                  <a:srgbClr val="F4F0FF"/>
+                </a:solidFill>
+                <a:latin typeface="Arial"/>
+                <a:ea typeface="Arial"/>
+                <a:cs typeface="Arial"/>
+              </a:defRPr>
+            </a:pPr>
+            <a:r>
+              <a:rPr sz="1575" b="0">
+                <a:solidFill>
+                  <a:srgbClr val="F4F0FF"/>
+                </a:solidFill>
+                <a:latin typeface="Arial"/>
+                <a:ea typeface="Arial"/>
+                <a:cs typeface="Arial"/>
+              </a:rPr>
+              <a:t>Hold</a:t>
+            </a:r>
+          </a:p>
+        </p:txBody>
+      </p:sp>
+      <p:sp>
+        <p:nvSpPr>
+          <p:cNvPr id="21" name="">
+            <a:extLst xmlns:a="http://schemas.openxmlformats.org/drawingml/2006/main">
+              <a:ext uri="{FF2B5EF4-FFF2-40B4-BE49-F238E27FC236}">
+                <a16:creationId xmlns:a16="http://schemas.microsoft.com/office/drawing/2014/main" id="{A3E847D2-16AE-4ECC-909B-15353E58D523}"/>
+              </a:ext>
+            </a:extLst>
+          </p:cNvPr>
+          <p:cNvSpPr>
+            <a:spLocks xmlns:a="http://schemas.openxmlformats.org/drawingml/2006/main" noGrp="1"/>
+          </p:cNvSpPr>
+          <p:nvPr/>
+        </p:nvSpPr>
+        <p:spPr>
+          <a:xfrm xmlns:a="http://schemas.openxmlformats.org/drawingml/2006/main">
+            <a:off x="6705600" y="5162550"/>
+            <a:ext cx="4572000" cy="400050"/>
           </a:xfrm>
           <a:prstGeom xmlns:a="http://schemas.openxmlformats.org/drawingml/2006/main" prst="rect">
             <a:avLst/>
@@ -10663,265 +10862,36 @@
           <a:bodyPr xmlns:a="http://schemas.openxmlformats.org/drawingml/2006/main" lIns="0" tIns="0" rIns="0" bIns="0" anchor="t"/>
           <a:lstStyle xmlns:a="http://schemas.openxmlformats.org/drawingml/2006/main"/>
           <a:p xmlns:a="http://schemas.openxmlformats.org/drawingml/2006/main">
-            <a:pPr algn="l">
-              <a:defRPr sz="1500" b="1">
-                <a:solidFill>
-                  <a:srgbClr val="FFFFFF"/>
-                </a:solidFill>
-                <a:latin typeface="Arial"/>
-                <a:ea typeface="Arial"/>
-                <a:cs typeface="Arial"/>
-              </a:defRPr>
-            </a:pPr>
-            <a:r>
-              <a:rPr sz="1500" b="1">
-                <a:solidFill>
-                  <a:srgbClr val="FFFFFF"/>
-                </a:solidFill>
-                <a:latin typeface="Arial"/>
-                <a:ea typeface="Arial"/>
-                <a:cs typeface="Arial"/>
-              </a:rPr>
-              <a:t>판단</a:t>
-            </a:r>
-          </a:p>
-        </p:txBody>
-      </p:sp>
-      <p:sp>
-        <p:nvSpPr>
-          <p:cNvPr id="27" name="">
-            <a:extLst xmlns:a="http://schemas.openxmlformats.org/drawingml/2006/main">
-              <a:ext uri="{FF2B5EF4-FFF2-40B4-BE49-F238E27FC236}">
-                <a16:creationId xmlns:a16="http://schemas.microsoft.com/office/drawing/2014/main" id="{2CFEA95E-754C-4267-B584-F2A2DE896896}"/>
-              </a:ext>
-            </a:extLst>
-          </p:cNvPr>
-          <p:cNvSpPr>
-            <a:spLocks xmlns:a="http://schemas.openxmlformats.org/drawingml/2006/main" noGrp="1"/>
-          </p:cNvSpPr>
-          <p:nvPr/>
-        </p:nvSpPr>
-        <p:spPr>
-          <a:xfrm xmlns:a="http://schemas.openxmlformats.org/drawingml/2006/main">
-            <a:off x="10801350" y="3467100"/>
-            <a:ext cx="590550" cy="438150"/>
-          </a:xfrm>
-          <a:prstGeom xmlns:a="http://schemas.openxmlformats.org/drawingml/2006/main" prst="rect">
-            <a:avLst/>
-          </a:prstGeom>
-          <a:solidFill xmlns:a="http://schemas.openxmlformats.org/drawingml/2006/main">
-            <a:srgbClr val="000000">
-              <a:alpha val="0"/>
-            </a:srgbClr>
-          </a:solidFill>
-          <a:ln xmlns:a="http://schemas.openxmlformats.org/drawingml/2006/main" w="0">
-            <a:solidFill>
-              <a:srgbClr val="000000">
-                <a:alpha val="0"/>
-              </a:srgbClr>
-            </a:solidFill>
-            <a:prstDash val="solid"/>
-          </a:ln>
-        </p:spPr>
-        <p:txBody>
-          <a:bodyPr xmlns:a="http://schemas.openxmlformats.org/drawingml/2006/main" lIns="0" tIns="0" rIns="76200" bIns="0" anchor="t"/>
-          <a:lstStyle xmlns:a="http://schemas.openxmlformats.org/drawingml/2006/main"/>
-          <a:p xmlns:a="http://schemas.openxmlformats.org/drawingml/2006/main">
-            <a:pPr algn="l">
-              <a:defRPr sz="2400" b="0">
-                <a:solidFill>
-                  <a:srgbClr val="F4F0FF"/>
-                </a:solidFill>
-                <a:latin typeface="Arial"/>
-                <a:ea typeface="Arial"/>
-                <a:cs typeface="Arial"/>
-              </a:defRPr>
-            </a:pPr>
-            <a:r>
-              <a:rPr sz="2400" b="0">
-                <a:solidFill>
-                  <a:srgbClr val="F4F0FF"/>
-                </a:solidFill>
-                <a:latin typeface="Arial"/>
-                <a:ea typeface="Arial"/>
-                <a:cs typeface="Arial"/>
-              </a:rPr>
-              <a:t>05</a:t>
-            </a:r>
-          </a:p>
-        </p:txBody>
-      </p:sp>
-      <p:sp>
-        <p:nvSpPr>
-          <p:cNvPr id="28" name="">
-            <a:extLst xmlns:a="http://schemas.openxmlformats.org/drawingml/2006/main">
-              <a:ext uri="{FF2B5EF4-FFF2-40B4-BE49-F238E27FC236}">
-                <a16:creationId xmlns:a16="http://schemas.microsoft.com/office/drawing/2014/main" id="{328B4A5F-4CBC-44C2-8EDB-A4B8AA151B88}"/>
-              </a:ext>
-            </a:extLst>
-          </p:cNvPr>
-          <p:cNvSpPr>
-            <a:spLocks xmlns:a="http://schemas.openxmlformats.org/drawingml/2006/main" noGrp="1"/>
-          </p:cNvSpPr>
-          <p:nvPr/>
-        </p:nvSpPr>
-        <p:spPr>
-          <a:xfrm xmlns:a="http://schemas.openxmlformats.org/drawingml/2006/main">
-            <a:off x="6762750" y="4572000"/>
-            <a:ext cx="4286250" cy="800100"/>
-          </a:xfrm>
-          <a:prstGeom xmlns:a="http://schemas.openxmlformats.org/drawingml/2006/main" prst="rect">
-            <a:avLst/>
-          </a:prstGeom>
-          <a:solidFill xmlns:a="http://schemas.openxmlformats.org/drawingml/2006/main">
-            <a:srgbClr val="111111">
-              <a:alpha val="80000"/>
-            </a:srgbClr>
-          </a:solidFill>
-          <a:ln xmlns:a="http://schemas.openxmlformats.org/drawingml/2006/main" w="9525">
-            <a:solidFill>
-              <a:srgbClr val="FFFFFF">
-                <a:alpha val="20000"/>
-              </a:srgbClr>
-            </a:solidFill>
-            <a:prstDash val="solid"/>
-          </a:ln>
-        </p:spPr>
-      </p:sp>
-      <p:sp>
-        <p:nvSpPr>
-          <p:cNvPr id="29" name="">
-            <a:extLst xmlns:a="http://schemas.openxmlformats.org/drawingml/2006/main">
-              <a:ext uri="{FF2B5EF4-FFF2-40B4-BE49-F238E27FC236}">
-                <a16:creationId xmlns:a16="http://schemas.microsoft.com/office/drawing/2014/main" id="{9F8D7BE2-EDE4-488D-B842-9FCEEB52FBBE}"/>
-              </a:ext>
-            </a:extLst>
-          </p:cNvPr>
-          <p:cNvSpPr>
-            <a:spLocks xmlns:a="http://schemas.openxmlformats.org/drawingml/2006/main" noGrp="1"/>
-          </p:cNvSpPr>
-          <p:nvPr/>
-        </p:nvSpPr>
-        <p:spPr>
-          <a:xfrm xmlns:a="http://schemas.openxmlformats.org/drawingml/2006/main">
-            <a:off x="6953250" y="4743450"/>
-            <a:ext cx="3905250" cy="323850"/>
-          </a:xfrm>
-          <a:prstGeom xmlns:a="http://schemas.openxmlformats.org/drawingml/2006/main" prst="rect">
-            <a:avLst/>
-          </a:prstGeom>
-          <a:solidFill xmlns:a="http://schemas.openxmlformats.org/drawingml/2006/main">
-            <a:srgbClr val="000000">
-              <a:alpha val="0"/>
-            </a:srgbClr>
-          </a:solidFill>
-          <a:ln xmlns:a="http://schemas.openxmlformats.org/drawingml/2006/main" w="0">
-            <a:solidFill>
-              <a:srgbClr val="000000">
-                <a:alpha val="0"/>
-              </a:srgbClr>
-            </a:solidFill>
-            <a:prstDash val="solid"/>
-          </a:ln>
-        </p:spPr>
-        <p:txBody>
-          <a:bodyPr xmlns:a="http://schemas.openxmlformats.org/drawingml/2006/main" lIns="0" tIns="0" rIns="0" bIns="0" anchor="t"/>
-          <a:lstStyle xmlns:a="http://schemas.openxmlformats.org/drawingml/2006/main"/>
-          <a:p xmlns:a="http://schemas.openxmlformats.org/drawingml/2006/main">
-            <a:pPr algn="l">
-              <a:defRPr sz="1500" b="1">
-                <a:solidFill>
-                  <a:srgbClr val="FFFFFF"/>
-                </a:solidFill>
-                <a:latin typeface="Arial"/>
-                <a:ea typeface="Arial"/>
-                <a:cs typeface="Arial"/>
-              </a:defRPr>
-            </a:pPr>
-            <a:r>
-              <a:rPr sz="1500" b="1">
-                <a:solidFill>
-                  <a:srgbClr val="FFFFFF"/>
-                </a:solidFill>
-                <a:latin typeface="Arial"/>
-                <a:ea typeface="Arial"/>
-                <a:cs typeface="Arial"/>
-              </a:rPr>
-              <a:t>흐름의 조건</a:t>
-            </a:r>
-          </a:p>
-        </p:txBody>
-      </p:sp>
-      <p:sp>
-        <p:nvSpPr>
-          <p:cNvPr id="30" name="">
-            <a:extLst xmlns:a="http://schemas.openxmlformats.org/drawingml/2006/main">
-              <a:ext uri="{FF2B5EF4-FFF2-40B4-BE49-F238E27FC236}">
-                <a16:creationId xmlns:a16="http://schemas.microsoft.com/office/drawing/2014/main" id="{D826FA7C-4F7D-4748-A5FB-1C81D8A5FA67}"/>
-              </a:ext>
-            </a:extLst>
-          </p:cNvPr>
-          <p:cNvSpPr>
-            <a:spLocks xmlns:a="http://schemas.openxmlformats.org/drawingml/2006/main" noGrp="1"/>
-          </p:cNvSpPr>
-          <p:nvPr/>
-        </p:nvSpPr>
-        <p:spPr>
-          <a:xfrm xmlns:a="http://schemas.openxmlformats.org/drawingml/2006/main">
-            <a:off x="6953250" y="5181600"/>
-            <a:ext cx="3905250" cy="228600"/>
-          </a:xfrm>
-          <a:prstGeom xmlns:a="http://schemas.openxmlformats.org/drawingml/2006/main" prst="rect">
-            <a:avLst/>
-          </a:prstGeom>
-          <a:solidFill xmlns:a="http://schemas.openxmlformats.org/drawingml/2006/main">
-            <a:srgbClr val="000000">
-              <a:alpha val="0"/>
-            </a:srgbClr>
-          </a:solidFill>
-          <a:ln xmlns:a="http://schemas.openxmlformats.org/drawingml/2006/main" w="0">
-            <a:solidFill>
-              <a:srgbClr val="000000">
-                <a:alpha val="0"/>
-              </a:srgbClr>
-            </a:solidFill>
-            <a:prstDash val="solid"/>
-          </a:ln>
-        </p:spPr>
-        <p:txBody>
-          <a:bodyPr xmlns:a="http://schemas.openxmlformats.org/drawingml/2006/main" lIns="0" tIns="0" rIns="76200" bIns="0" anchor="t"/>
-          <a:lstStyle xmlns:a="http://schemas.openxmlformats.org/drawingml/2006/main"/>
-          <a:p xmlns:a="http://schemas.openxmlformats.org/drawingml/2006/main">
-            <a:pPr algn="l">
-              <a:defRPr sz="1350" b="0">
-                <a:solidFill>
-                  <a:srgbClr val="F4F0FF"/>
-                </a:solidFill>
-                <a:latin typeface="Arial"/>
-                <a:ea typeface="Arial"/>
-                <a:cs typeface="Arial"/>
-              </a:defRPr>
-            </a:pPr>
-            <a:r>
-              <a:rPr sz="1350" b="0">
-                <a:solidFill>
-                  <a:srgbClr val="F4F0FF"/>
-                </a:solidFill>
-                <a:latin typeface="Arial"/>
-                <a:ea typeface="Arial"/>
-                <a:cs typeface="Arial"/>
-              </a:rPr>
-              <a:t>요청, 변경, 검증, 판단이 한 줄로 연결되어야 한다.</a:t>
-            </a:r>
-          </a:p>
-        </p:txBody>
-      </p:sp>
-      <p:sp>
-        <p:nvSpPr>
-          <p:cNvPr id="31" name="footer-note">
-            <a:extLst xmlns:a="http://schemas.openxmlformats.org/drawingml/2006/main">
-              <a:ext uri="{FF2B5EF4-FFF2-40B4-BE49-F238E27FC236}">
-                <a16:creationId xmlns:a16="http://schemas.microsoft.com/office/drawing/2014/main" id="{5A2A2F9E-AECD-4C2B-8BD9-31B3E12E451E}"/>
+            <a:pPr algn="ctr">
+              <a:defRPr sz="2250" b="1">
+                <a:solidFill>
+                  <a:srgbClr val="FFFFFF"/>
+                </a:solidFill>
+                <a:latin typeface="Arial"/>
+                <a:ea typeface="Arial"/>
+                <a:cs typeface="Arial"/>
+              </a:defRPr>
+            </a:pPr>
+            <a:r>
+              <a:rPr sz="2250" b="1">
+                <a:solidFill>
+                  <a:srgbClr val="FFFFFF"/>
+                </a:solidFill>
+                <a:latin typeface="Arial"/>
+                <a:ea typeface="Arial"/>
+                <a:cs typeface="Arial"/>
+              </a:rPr>
+              <a:t>description은 주장, diff는 증거다</a:t>
+            </a:r>
+          </a:p>
+        </p:txBody>
+      </p:sp>
+      <p:sp>
+        <p:nvSpPr>
+          <p:cNvPr id="22" name="footer-note">
+            <a:extLst xmlns:a="http://schemas.openxmlformats.org/drawingml/2006/main">
+              <a:ext uri="{FF2B5EF4-FFF2-40B4-BE49-F238E27FC236}">
+                <a16:creationId xmlns:a16="http://schemas.microsoft.com/office/drawing/2014/main" id="{C7A40A39-53AD-4331-88E3-802208756088}"/>
               </a:ext>
             </a:extLst>
           </p:cNvPr>
@@ -10983,7 +10953,7 @@
     </p:spTree>
     <p:extLst>
       <p:ext uri="{BB962C8B-B14F-4D97-AF65-F5344CB8AC3E}">
-        <p14:creationId xmlns:p14="http://schemas.microsoft.com/office/powerpoint/2010/main" val="1363239573"/>
+        <p14:creationId xmlns:p14="http://schemas.microsoft.com/office/powerpoint/2010/main" val="75610145"/>
       </p:ext>
     </p:extLst>
   </p:cSld>
@@ -11007,7 +10977,7 @@
           <p:cNvPr id="1" name="">
             <a:extLst xmlns:a="http://schemas.openxmlformats.org/drawingml/2006/main">
               <a:ext uri="{FF2B5EF4-FFF2-40B4-BE49-F238E27FC236}">
-                <a16:creationId xmlns:a16="http://schemas.microsoft.com/office/drawing/2014/main" id="{EE4D5D3B-3488-4882-B11D-BFA2000C7DDA}"/>
+                <a16:creationId xmlns:a16="http://schemas.microsoft.com/office/drawing/2014/main" id="{B76D3BE4-36B1-427A-8490-FAC5BAF14866}"/>
               </a:ext>
             </a:extLst>
           </p:cNvPr>
@@ -11056,7 +11026,7 @@
           <p:cNvPr id="2" name="">
             <a:extLst xmlns:a="http://schemas.openxmlformats.org/drawingml/2006/main">
               <a:ext uri="{FF2B5EF4-FFF2-40B4-BE49-F238E27FC236}">
-                <a16:creationId xmlns:a16="http://schemas.microsoft.com/office/drawing/2014/main" id="{F3289B47-0491-4442-A683-E6C446A14245}"/>
+                <a16:creationId xmlns:a16="http://schemas.microsoft.com/office/drawing/2014/main" id="{9E4898FF-6688-46D6-8496-FC75E7B50F55}"/>
               </a:ext>
             </a:extLst>
           </p:cNvPr>
@@ -11093,7 +11063,7 @@
           <p:cNvPr id="3" name="kicker-marker">
             <a:extLst xmlns:a="http://schemas.openxmlformats.org/drawingml/2006/main">
               <a:ext uri="{FF2B5EF4-FFF2-40B4-BE49-F238E27FC236}">
-                <a16:creationId xmlns:a16="http://schemas.microsoft.com/office/drawing/2014/main" id="{D4B8C756-1855-4312-9E9F-B3960D734805}"/>
+                <a16:creationId xmlns:a16="http://schemas.microsoft.com/office/drawing/2014/main" id="{9495DC65-3A38-4F32-A275-94BAAB500260}"/>
               </a:ext>
             </a:extLst>
           </p:cNvPr>
@@ -11128,7 +11098,7 @@
           <p:cNvPr id="4" name="kicker-label">
             <a:extLst xmlns:a="http://schemas.openxmlformats.org/drawingml/2006/main">
               <a:ext uri="{FF2B5EF4-FFF2-40B4-BE49-F238E27FC236}">
-                <a16:creationId xmlns:a16="http://schemas.microsoft.com/office/drawing/2014/main" id="{E342EEC4-17C0-4EE3-8D8F-4D78CACA8517}"/>
+                <a16:creationId xmlns:a16="http://schemas.microsoft.com/office/drawing/2014/main" id="{B1A96376-E606-44C8-BF76-9DE1E2148E11}"/>
               </a:ext>
             </a:extLst>
           </p:cNvPr>
@@ -11182,7 +11152,7 @@
                 <a:ea typeface="Courier New"/>
                 <a:cs typeface="Courier New"/>
               </a:rPr>
-              <a:t>READ ORDER</a:t>
+              <a:t>DEMO</a:t>
             </a:r>
           </a:p>
         </p:txBody>
@@ -11192,7 +11162,7 @@
           <p:cNvPr id="5" name="">
             <a:extLst xmlns:a="http://schemas.openxmlformats.org/drawingml/2006/main">
               <a:ext uri="{FF2B5EF4-FFF2-40B4-BE49-F238E27FC236}">
-                <a16:creationId xmlns:a16="http://schemas.microsoft.com/office/drawing/2014/main" id="{3614475A-ADB4-44E8-9268-B6CDF58237C0}"/>
+                <a16:creationId xmlns:a16="http://schemas.microsoft.com/office/drawing/2014/main" id="{02299DE8-6D1F-4087-9E86-7FB58DDA8A26}"/>
               </a:ext>
             </a:extLst>
           </p:cNvPr>
@@ -11227,7 +11197,7 @@
           <p:cNvPr id="6" name="claim-title">
             <a:extLst xmlns:a="http://schemas.openxmlformats.org/drawingml/2006/main">
               <a:ext uri="{FF2B5EF4-FFF2-40B4-BE49-F238E27FC236}">
-                <a16:creationId xmlns:a16="http://schemas.microsoft.com/office/drawing/2014/main" id="{3C133AEE-79CF-4607-A8E3-5D99FD954370}"/>
+                <a16:creationId xmlns:a16="http://schemas.microsoft.com/office/drawing/2014/main" id="{C2337614-FE3A-4697-883F-FD52CFB32471}"/>
               </a:ext>
             </a:extLst>
           </p:cNvPr>
@@ -11281,7 +11251,7 @@
                 <a:ea typeface="Arial"/>
                 <a:cs typeface="Arial"/>
               </a:rPr>
-              <a:t>Files changed -&gt; Diff -&gt; Checks 순서로 본다</a:t>
+              <a:t>강사 데모는 클릭 순서와 판단 근거를 같이 보여준다</a:t>
             </a:r>
           </a:p>
         </p:txBody>
@@ -11291,7 +11261,7 @@
           <p:cNvPr id="7" name="support-note">
             <a:extLst xmlns:a="http://schemas.openxmlformats.org/drawingml/2006/main">
               <a:ext uri="{FF2B5EF4-FFF2-40B4-BE49-F238E27FC236}">
-                <a16:creationId xmlns:a16="http://schemas.microsoft.com/office/drawing/2014/main" id="{FF611EA0-87CC-4AE9-9D1C-6DF3ED0A2997}"/>
+                <a16:creationId xmlns:a16="http://schemas.microsoft.com/office/drawing/2014/main" id="{F7A509C8-FF93-49D9-8C53-D95C1B0777D8}"/>
               </a:ext>
             </a:extLst>
           </p:cNvPr>
@@ -11345,7 +11315,7 @@
                 <a:ea typeface="Arial"/>
                 <a:cs typeface="Arial"/>
               </a:rPr>
-              <a:t>agent 설명보다 실제 변경 파일과 diff, CI 결과를 먼저 본다.</a:t>
+              <a:t>issue 한 문장, Files changed, Diff, Checks, decision을 한 번에 연결한다.</a:t>
             </a:r>
           </a:p>
         </p:txBody>
@@ -11355,7 +11325,7 @@
           <p:cNvPr id="8" name="page-marker">
             <a:extLst xmlns:a="http://schemas.openxmlformats.org/drawingml/2006/main">
               <a:ext uri="{FF2B5EF4-FFF2-40B4-BE49-F238E27FC236}">
-                <a16:creationId xmlns:a16="http://schemas.microsoft.com/office/drawing/2014/main" id="{33224D05-208E-4CF0-9A5E-F878A4FEDCCA}"/>
+                <a16:creationId xmlns:a16="http://schemas.microsoft.com/office/drawing/2014/main" id="{0DE842ED-A3D0-48B1-9D79-702D0D3397A1}"/>
               </a:ext>
             </a:extLst>
           </p:cNvPr>
@@ -11419,19 +11389,19 @@
           <p:cNvPr id="9" name="">
             <a:extLst xmlns:a="http://schemas.openxmlformats.org/drawingml/2006/main">
               <a:ext uri="{FF2B5EF4-FFF2-40B4-BE49-F238E27FC236}">
-                <a16:creationId xmlns:a16="http://schemas.microsoft.com/office/drawing/2014/main" id="{C573F764-3E07-4639-9951-1C5811DD32BF}"/>
-              </a:ext>
-            </a:extLst>
-          </p:cNvPr>
-          <p:cNvSpPr>
-            <a:spLocks xmlns:a="http://schemas.openxmlformats.org/drawingml/2006/main" noGrp="1"/>
-          </p:cNvSpPr>
-          <p:nvPr/>
-        </p:nvSpPr>
-        <p:spPr>
-          <a:xfrm xmlns:a="http://schemas.openxmlformats.org/drawingml/2006/main">
-            <a:off x="6477000" y="819150"/>
-            <a:ext cx="1524000" cy="4095750"/>
+                <a16:creationId xmlns:a16="http://schemas.microsoft.com/office/drawing/2014/main" id="{EC7967AB-971C-4AD3-BC02-EB9C65F01763}"/>
+              </a:ext>
+            </a:extLst>
+          </p:cNvPr>
+          <p:cNvSpPr>
+            <a:spLocks xmlns:a="http://schemas.openxmlformats.org/drawingml/2006/main" noGrp="1"/>
+          </p:cNvSpPr>
+          <p:nvPr/>
+        </p:nvSpPr>
+        <p:spPr>
+          <a:xfrm xmlns:a="http://schemas.openxmlformats.org/drawingml/2006/main">
+            <a:off x="6286500" y="1123950"/>
+            <a:ext cx="1504950" cy="1200150"/>
           </a:xfrm>
           <a:prstGeom xmlns:a="http://schemas.openxmlformats.org/drawingml/2006/main" prst="rect">
             <a:avLst/>
@@ -11456,19 +11426,19 @@
           <p:cNvPr id="10" name="">
             <a:extLst xmlns:a="http://schemas.openxmlformats.org/drawingml/2006/main">
               <a:ext uri="{FF2B5EF4-FFF2-40B4-BE49-F238E27FC236}">
-                <a16:creationId xmlns:a16="http://schemas.microsoft.com/office/drawing/2014/main" id="{9301E14E-E7BE-4EDB-AAFF-71D2466083B2}"/>
-              </a:ext>
-            </a:extLst>
-          </p:cNvPr>
-          <p:cNvSpPr>
-            <a:spLocks xmlns:a="http://schemas.openxmlformats.org/drawingml/2006/main" noGrp="1"/>
-          </p:cNvSpPr>
-          <p:nvPr/>
-        </p:nvSpPr>
-        <p:spPr>
-          <a:xfrm xmlns:a="http://schemas.openxmlformats.org/drawingml/2006/main">
-            <a:off x="6667500" y="990600"/>
-            <a:ext cx="1143000" cy="323850"/>
+                <a16:creationId xmlns:a16="http://schemas.microsoft.com/office/drawing/2014/main" id="{DCCEC02B-DD48-4554-A628-05BF1D31AEEE}"/>
+              </a:ext>
+            </a:extLst>
+          </p:cNvPr>
+          <p:cNvSpPr>
+            <a:spLocks xmlns:a="http://schemas.openxmlformats.org/drawingml/2006/main" noGrp="1"/>
+          </p:cNvSpPr>
+          <p:nvPr/>
+        </p:nvSpPr>
+        <p:spPr>
+          <a:xfrm xmlns:a="http://schemas.openxmlformats.org/drawingml/2006/main">
+            <a:off x="6477000" y="1295400"/>
+            <a:ext cx="1123950" cy="323850"/>
           </a:xfrm>
           <a:prstGeom xmlns:a="http://schemas.openxmlformats.org/drawingml/2006/main" prst="rect">
             <a:avLst/>
@@ -11510,7 +11480,7 @@
                 <a:ea typeface="Arial"/>
                 <a:cs typeface="Arial"/>
               </a:rPr>
-              <a:t>01 Files</a:t>
+              <a:t>Issue</a:t>
             </a:r>
           </a:p>
         </p:txBody>
@@ -11520,19 +11490,19 @@
           <p:cNvPr id="11" name="">
             <a:extLst xmlns:a="http://schemas.openxmlformats.org/drawingml/2006/main">
               <a:ext uri="{FF2B5EF4-FFF2-40B4-BE49-F238E27FC236}">
-                <a16:creationId xmlns:a16="http://schemas.microsoft.com/office/drawing/2014/main" id="{FE3A22C6-F46A-4C6F-A10B-FF0AC8B48DD0}"/>
-              </a:ext>
-            </a:extLst>
-          </p:cNvPr>
-          <p:cNvSpPr>
-            <a:spLocks xmlns:a="http://schemas.openxmlformats.org/drawingml/2006/main" noGrp="1"/>
-          </p:cNvSpPr>
-          <p:nvPr/>
-        </p:nvSpPr>
-        <p:spPr>
-          <a:xfrm xmlns:a="http://schemas.openxmlformats.org/drawingml/2006/main">
-            <a:off x="6667500" y="1428750"/>
-            <a:ext cx="1143000" cy="3314700"/>
+                <a16:creationId xmlns:a16="http://schemas.microsoft.com/office/drawing/2014/main" id="{AC0FEAF7-CA72-4B59-ABBC-20B597166B7C}"/>
+              </a:ext>
+            </a:extLst>
+          </p:cNvPr>
+          <p:cNvSpPr>
+            <a:spLocks xmlns:a="http://schemas.openxmlformats.org/drawingml/2006/main" noGrp="1"/>
+          </p:cNvSpPr>
+          <p:nvPr/>
+        </p:nvSpPr>
+        <p:spPr>
+          <a:xfrm xmlns:a="http://schemas.openxmlformats.org/drawingml/2006/main">
+            <a:off x="6477000" y="1733550"/>
+            <a:ext cx="1123950" cy="419100"/>
           </a:xfrm>
           <a:prstGeom xmlns:a="http://schemas.openxmlformats.org/drawingml/2006/main" prst="rect">
             <a:avLst/>
@@ -11556,71 +11526,25 @@
           <a:lstStyle xmlns:a="http://schemas.openxmlformats.org/drawingml/2006/main"/>
           <a:p xmlns:a="http://schemas.openxmlformats.org/drawingml/2006/main">
             <a:pPr algn="l">
-              <a:defRPr sz="1350" b="0">
-                <a:solidFill>
-                  <a:srgbClr val="F4F0FF"/>
-                </a:solidFill>
-                <a:latin typeface="Arial"/>
-                <a:ea typeface="Arial"/>
-                <a:cs typeface="Arial"/>
-              </a:defRPr>
-            </a:pPr>
-            <a:r>
-              <a:rPr sz="1350" b="0">
-                <a:solidFill>
-                  <a:srgbClr val="F4F0FF"/>
-                </a:solidFill>
-                <a:latin typeface="Arial"/>
-                <a:ea typeface="Arial"/>
-                <a:cs typeface="Arial"/>
-              </a:rPr>
-              <a:t>변경 파일 수</a:t>
-            </a:r>
-          </a:p>
-          <a:p xmlns:a="http://schemas.openxmlformats.org/drawingml/2006/main">
-            <a:pPr algn="l">
-              <a:defRPr sz="1350" b="0">
-                <a:solidFill>
-                  <a:srgbClr val="F4F0FF"/>
-                </a:solidFill>
-                <a:latin typeface="Arial"/>
-                <a:ea typeface="Arial"/>
-                <a:cs typeface="Arial"/>
-              </a:defRPr>
-            </a:pPr>
-            <a:r>
-              <a:rPr sz="1350" b="0">
-                <a:solidFill>
-                  <a:srgbClr val="F4F0FF"/>
-                </a:solidFill>
-                <a:latin typeface="Arial"/>
-                <a:ea typeface="Arial"/>
-                <a:cs typeface="Arial"/>
-              </a:rPr>
-              <a:t>관련 없는 파일</a:t>
-            </a:r>
-          </a:p>
-          <a:p xmlns:a="http://schemas.openxmlformats.org/drawingml/2006/main">
-            <a:pPr algn="l">
-              <a:defRPr sz="1350" b="0">
-                <a:solidFill>
-                  <a:srgbClr val="F4F0FF"/>
-                </a:solidFill>
-                <a:latin typeface="Arial"/>
-                <a:ea typeface="Arial"/>
-                <a:cs typeface="Arial"/>
-              </a:defRPr>
-            </a:pPr>
-            <a:r>
-              <a:rPr sz="1350" b="0">
-                <a:solidFill>
-                  <a:srgbClr val="F4F0FF"/>
-                </a:solidFill>
-                <a:latin typeface="Arial"/>
-                <a:ea typeface="Arial"/>
-                <a:cs typeface="Arial"/>
-              </a:rPr>
-              <a:t>설정 삭제</a:t>
+              <a:defRPr sz="2550" b="0">
+                <a:solidFill>
+                  <a:srgbClr val="F4F0FF"/>
+                </a:solidFill>
+                <a:latin typeface="Arial"/>
+                <a:ea typeface="Arial"/>
+                <a:cs typeface="Arial"/>
+              </a:defRPr>
+            </a:pPr>
+            <a:r>
+              <a:rPr sz="2550" b="0">
+                <a:solidFill>
+                  <a:srgbClr val="F4F0FF"/>
+                </a:solidFill>
+                <a:latin typeface="Arial"/>
+                <a:ea typeface="Arial"/>
+                <a:cs typeface="Arial"/>
+              </a:rPr>
+              <a:t>1</a:t>
             </a:r>
           </a:p>
         </p:txBody>
@@ -11630,19 +11554,19 @@
           <p:cNvPr id="12" name="">
             <a:extLst xmlns:a="http://schemas.openxmlformats.org/drawingml/2006/main">
               <a:ext uri="{FF2B5EF4-FFF2-40B4-BE49-F238E27FC236}">
-                <a16:creationId xmlns:a16="http://schemas.microsoft.com/office/drawing/2014/main" id="{6C691893-E6B0-49A7-B345-4BA3C286BECC}"/>
-              </a:ext>
-            </a:extLst>
-          </p:cNvPr>
-          <p:cNvSpPr>
-            <a:spLocks xmlns:a="http://schemas.openxmlformats.org/drawingml/2006/main" noGrp="1"/>
-          </p:cNvSpPr>
-          <p:nvPr/>
-        </p:nvSpPr>
-        <p:spPr>
-          <a:xfrm xmlns:a="http://schemas.openxmlformats.org/drawingml/2006/main">
-            <a:off x="8305800" y="1295400"/>
-            <a:ext cx="1524000" cy="3619500"/>
+                <a16:creationId xmlns:a16="http://schemas.microsoft.com/office/drawing/2014/main" id="{3E816EBD-EE6F-4A0D-9C40-5315257CD648}"/>
+              </a:ext>
+            </a:extLst>
+          </p:cNvPr>
+          <p:cNvSpPr>
+            <a:spLocks xmlns:a="http://schemas.openxmlformats.org/drawingml/2006/main" noGrp="1"/>
+          </p:cNvSpPr>
+          <p:nvPr/>
+        </p:nvSpPr>
+        <p:spPr>
+          <a:xfrm xmlns:a="http://schemas.openxmlformats.org/drawingml/2006/main">
+            <a:off x="8039100" y="1123950"/>
+            <a:ext cx="1504950" cy="1200150"/>
           </a:xfrm>
           <a:prstGeom xmlns:a="http://schemas.openxmlformats.org/drawingml/2006/main" prst="rect">
             <a:avLst/>
@@ -11667,19 +11591,19 @@
           <p:cNvPr id="13" name="">
             <a:extLst xmlns:a="http://schemas.openxmlformats.org/drawingml/2006/main">
               <a:ext uri="{FF2B5EF4-FFF2-40B4-BE49-F238E27FC236}">
-                <a16:creationId xmlns:a16="http://schemas.microsoft.com/office/drawing/2014/main" id="{8F959928-2807-4A18-9AFC-CCC8BCFC6C03}"/>
-              </a:ext>
-            </a:extLst>
-          </p:cNvPr>
-          <p:cNvSpPr>
-            <a:spLocks xmlns:a="http://schemas.openxmlformats.org/drawingml/2006/main" noGrp="1"/>
-          </p:cNvSpPr>
-          <p:nvPr/>
-        </p:nvSpPr>
-        <p:spPr>
-          <a:xfrm xmlns:a="http://schemas.openxmlformats.org/drawingml/2006/main">
-            <a:off x="8496300" y="1466850"/>
-            <a:ext cx="1143000" cy="323850"/>
+                <a16:creationId xmlns:a16="http://schemas.microsoft.com/office/drawing/2014/main" id="{D0656AD3-EBD9-4D04-A1EC-238CF6D3116F}"/>
+              </a:ext>
+            </a:extLst>
+          </p:cNvPr>
+          <p:cNvSpPr>
+            <a:spLocks xmlns:a="http://schemas.openxmlformats.org/drawingml/2006/main" noGrp="1"/>
+          </p:cNvSpPr>
+          <p:nvPr/>
+        </p:nvSpPr>
+        <p:spPr>
+          <a:xfrm xmlns:a="http://schemas.openxmlformats.org/drawingml/2006/main">
+            <a:off x="8229600" y="1295400"/>
+            <a:ext cx="1123950" cy="323850"/>
           </a:xfrm>
           <a:prstGeom xmlns:a="http://schemas.openxmlformats.org/drawingml/2006/main" prst="rect">
             <a:avLst/>
@@ -11721,7 +11645,7 @@
                 <a:ea typeface="Arial"/>
                 <a:cs typeface="Arial"/>
               </a:rPr>
-              <a:t>02 Diff</a:t>
+              <a:t>PR</a:t>
             </a:r>
           </a:p>
         </p:txBody>
@@ -11731,19 +11655,19 @@
           <p:cNvPr id="14" name="">
             <a:extLst xmlns:a="http://schemas.openxmlformats.org/drawingml/2006/main">
               <a:ext uri="{FF2B5EF4-FFF2-40B4-BE49-F238E27FC236}">
-                <a16:creationId xmlns:a16="http://schemas.microsoft.com/office/drawing/2014/main" id="{CAE553BC-B45D-467A-9062-14A6CAFAF2D6}"/>
-              </a:ext>
-            </a:extLst>
-          </p:cNvPr>
-          <p:cNvSpPr>
-            <a:spLocks xmlns:a="http://schemas.openxmlformats.org/drawingml/2006/main" noGrp="1"/>
-          </p:cNvSpPr>
-          <p:nvPr/>
-        </p:nvSpPr>
-        <p:spPr>
-          <a:xfrm xmlns:a="http://schemas.openxmlformats.org/drawingml/2006/main">
-            <a:off x="8496300" y="1905000"/>
-            <a:ext cx="1143000" cy="2838450"/>
+                <a16:creationId xmlns:a16="http://schemas.microsoft.com/office/drawing/2014/main" id="{C70E0EF4-B351-485D-90E1-FC3FC6DB63B2}"/>
+              </a:ext>
+            </a:extLst>
+          </p:cNvPr>
+          <p:cNvSpPr>
+            <a:spLocks xmlns:a="http://schemas.openxmlformats.org/drawingml/2006/main" noGrp="1"/>
+          </p:cNvSpPr>
+          <p:nvPr/>
+        </p:nvSpPr>
+        <p:spPr>
+          <a:xfrm xmlns:a="http://schemas.openxmlformats.org/drawingml/2006/main">
+            <a:off x="8229600" y="1733550"/>
+            <a:ext cx="1123950" cy="419100"/>
           </a:xfrm>
           <a:prstGeom xmlns:a="http://schemas.openxmlformats.org/drawingml/2006/main" prst="rect">
             <a:avLst/>
@@ -11767,71 +11691,25 @@
           <a:lstStyle xmlns:a="http://schemas.openxmlformats.org/drawingml/2006/main"/>
           <a:p xmlns:a="http://schemas.openxmlformats.org/drawingml/2006/main">
             <a:pPr algn="l">
-              <a:defRPr sz="1350" b="0">
-                <a:solidFill>
-                  <a:srgbClr val="F4F0FF"/>
-                </a:solidFill>
-                <a:latin typeface="Arial"/>
-                <a:ea typeface="Arial"/>
-                <a:cs typeface="Arial"/>
-              </a:defRPr>
-            </a:pPr>
-            <a:r>
-              <a:rPr sz="1350" b="0">
-                <a:solidFill>
-                  <a:srgbClr val="F4F0FF"/>
-                </a:solidFill>
-                <a:latin typeface="Arial"/>
-                <a:ea typeface="Arial"/>
-                <a:cs typeface="Arial"/>
-              </a:rPr>
-              <a:t>설명과 일치</a:t>
-            </a:r>
-          </a:p>
-          <a:p xmlns:a="http://schemas.openxmlformats.org/drawingml/2006/main">
-            <a:pPr algn="l">
-              <a:defRPr sz="1350" b="0">
-                <a:solidFill>
-                  <a:srgbClr val="F4F0FF"/>
-                </a:solidFill>
-                <a:latin typeface="Arial"/>
-                <a:ea typeface="Arial"/>
-                <a:cs typeface="Arial"/>
-              </a:defRPr>
-            </a:pPr>
-            <a:r>
-              <a:rPr sz="1350" b="0">
-                <a:solidFill>
-                  <a:srgbClr val="F4F0FF"/>
-                </a:solidFill>
-                <a:latin typeface="Arial"/>
-                <a:ea typeface="Arial"/>
-                <a:cs typeface="Arial"/>
-              </a:rPr>
-              <a:t>삭제된 기능</a:t>
-            </a:r>
-          </a:p>
-          <a:p xmlns:a="http://schemas.openxmlformats.org/drawingml/2006/main">
-            <a:pPr algn="l">
-              <a:defRPr sz="1350" b="0">
-                <a:solidFill>
-                  <a:srgbClr val="F4F0FF"/>
-                </a:solidFill>
-                <a:latin typeface="Arial"/>
-                <a:ea typeface="Arial"/>
-                <a:cs typeface="Arial"/>
-              </a:defRPr>
-            </a:pPr>
-            <a:r>
-              <a:rPr sz="1350" b="0">
-                <a:solidFill>
-                  <a:srgbClr val="F4F0FF"/>
-                </a:solidFill>
-                <a:latin typeface="Arial"/>
-                <a:ea typeface="Arial"/>
-                <a:cs typeface="Arial"/>
-              </a:rPr>
-              <a:t>큰 diff 분리</a:t>
+              <a:defRPr sz="2550" b="0">
+                <a:solidFill>
+                  <a:srgbClr val="F4F0FF"/>
+                </a:solidFill>
+                <a:latin typeface="Arial"/>
+                <a:ea typeface="Arial"/>
+                <a:cs typeface="Arial"/>
+              </a:defRPr>
+            </a:pPr>
+            <a:r>
+              <a:rPr sz="2550" b="0">
+                <a:solidFill>
+                  <a:srgbClr val="F4F0FF"/>
+                </a:solidFill>
+                <a:latin typeface="Arial"/>
+                <a:ea typeface="Arial"/>
+                <a:cs typeface="Arial"/>
+              </a:rPr>
+              <a:t>2</a:t>
             </a:r>
           </a:p>
         </p:txBody>
@@ -11841,19 +11719,19 @@
           <p:cNvPr id="15" name="">
             <a:extLst xmlns:a="http://schemas.openxmlformats.org/drawingml/2006/main">
               <a:ext uri="{FF2B5EF4-FFF2-40B4-BE49-F238E27FC236}">
-                <a16:creationId xmlns:a16="http://schemas.microsoft.com/office/drawing/2014/main" id="{C5AA45B2-5FB4-43C3-AA77-1D049C1A142B}"/>
-              </a:ext>
-            </a:extLst>
-          </p:cNvPr>
-          <p:cNvSpPr>
-            <a:spLocks xmlns:a="http://schemas.openxmlformats.org/drawingml/2006/main" noGrp="1"/>
-          </p:cNvSpPr>
-          <p:nvPr/>
-        </p:nvSpPr>
-        <p:spPr>
-          <a:xfrm xmlns:a="http://schemas.openxmlformats.org/drawingml/2006/main">
-            <a:off x="10134600" y="1771650"/>
-            <a:ext cx="1524000" cy="3143250"/>
+                <a16:creationId xmlns:a16="http://schemas.microsoft.com/office/drawing/2014/main" id="{DFF948A1-3276-4C87-8AA1-6A01838A2C30}"/>
+              </a:ext>
+            </a:extLst>
+          </p:cNvPr>
+          <p:cNvSpPr>
+            <a:spLocks xmlns:a="http://schemas.openxmlformats.org/drawingml/2006/main" noGrp="1"/>
+          </p:cNvSpPr>
+          <p:nvPr/>
+        </p:nvSpPr>
+        <p:spPr>
+          <a:xfrm xmlns:a="http://schemas.openxmlformats.org/drawingml/2006/main">
+            <a:off x="9791700" y="1123950"/>
+            <a:ext cx="1504950" cy="1200150"/>
           </a:xfrm>
           <a:prstGeom xmlns:a="http://schemas.openxmlformats.org/drawingml/2006/main" prst="rect">
             <a:avLst/>
@@ -11878,19 +11756,19 @@
           <p:cNvPr id="16" name="">
             <a:extLst xmlns:a="http://schemas.openxmlformats.org/drawingml/2006/main">
               <a:ext uri="{FF2B5EF4-FFF2-40B4-BE49-F238E27FC236}">
-                <a16:creationId xmlns:a16="http://schemas.microsoft.com/office/drawing/2014/main" id="{F5262E24-F02B-4E4A-AAB6-DB39EDB10671}"/>
-              </a:ext>
-            </a:extLst>
-          </p:cNvPr>
-          <p:cNvSpPr>
-            <a:spLocks xmlns:a="http://schemas.openxmlformats.org/drawingml/2006/main" noGrp="1"/>
-          </p:cNvSpPr>
-          <p:nvPr/>
-        </p:nvSpPr>
-        <p:spPr>
-          <a:xfrm xmlns:a="http://schemas.openxmlformats.org/drawingml/2006/main">
-            <a:off x="10325100" y="1943100"/>
-            <a:ext cx="1143000" cy="323850"/>
+                <a16:creationId xmlns:a16="http://schemas.microsoft.com/office/drawing/2014/main" id="{8EF8761A-0FA3-4DA4-A22C-D73C69CCD62B}"/>
+              </a:ext>
+            </a:extLst>
+          </p:cNvPr>
+          <p:cNvSpPr>
+            <a:spLocks xmlns:a="http://schemas.openxmlformats.org/drawingml/2006/main" noGrp="1"/>
+          </p:cNvSpPr>
+          <p:nvPr/>
+        </p:nvSpPr>
+        <p:spPr>
+          <a:xfrm xmlns:a="http://schemas.openxmlformats.org/drawingml/2006/main">
+            <a:off x="9982200" y="1295400"/>
+            <a:ext cx="1123950" cy="323850"/>
           </a:xfrm>
           <a:prstGeom xmlns:a="http://schemas.openxmlformats.org/drawingml/2006/main" prst="rect">
             <a:avLst/>
@@ -11932,7 +11810,7 @@
                 <a:ea typeface="Arial"/>
                 <a:cs typeface="Arial"/>
               </a:rPr>
-              <a:t>03 Checks</a:t>
+              <a:t>Files</a:t>
             </a:r>
           </a:p>
         </p:txBody>
@@ -11942,19 +11820,19 @@
           <p:cNvPr id="17" name="">
             <a:extLst xmlns:a="http://schemas.openxmlformats.org/drawingml/2006/main">
               <a:ext uri="{FF2B5EF4-FFF2-40B4-BE49-F238E27FC236}">
-                <a16:creationId xmlns:a16="http://schemas.microsoft.com/office/drawing/2014/main" id="{1EB47E72-6A3A-4F54-9011-B20F3C218B4D}"/>
-              </a:ext>
-            </a:extLst>
-          </p:cNvPr>
-          <p:cNvSpPr>
-            <a:spLocks xmlns:a="http://schemas.openxmlformats.org/drawingml/2006/main" noGrp="1"/>
-          </p:cNvSpPr>
-          <p:nvPr/>
-        </p:nvSpPr>
-        <p:spPr>
-          <a:xfrm xmlns:a="http://schemas.openxmlformats.org/drawingml/2006/main">
-            <a:off x="10325100" y="2381250"/>
-            <a:ext cx="1143000" cy="2362200"/>
+                <a16:creationId xmlns:a16="http://schemas.microsoft.com/office/drawing/2014/main" id="{D5A99C81-F372-42C9-B565-5CEE09597224}"/>
+              </a:ext>
+            </a:extLst>
+          </p:cNvPr>
+          <p:cNvSpPr>
+            <a:spLocks xmlns:a="http://schemas.openxmlformats.org/drawingml/2006/main" noGrp="1"/>
+          </p:cNvSpPr>
+          <p:nvPr/>
+        </p:nvSpPr>
+        <p:spPr>
+          <a:xfrm xmlns:a="http://schemas.openxmlformats.org/drawingml/2006/main">
+            <a:off x="9982200" y="1733550"/>
+            <a:ext cx="1123950" cy="419100"/>
           </a:xfrm>
           <a:prstGeom xmlns:a="http://schemas.openxmlformats.org/drawingml/2006/main" prst="rect">
             <a:avLst/>
@@ -11978,6 +11856,501 @@
           <a:lstStyle xmlns:a="http://schemas.openxmlformats.org/drawingml/2006/main"/>
           <a:p xmlns:a="http://schemas.openxmlformats.org/drawingml/2006/main">
             <a:pPr algn="l">
+              <a:defRPr sz="2550" b="0">
+                <a:solidFill>
+                  <a:srgbClr val="F4F0FF"/>
+                </a:solidFill>
+                <a:latin typeface="Arial"/>
+                <a:ea typeface="Arial"/>
+                <a:cs typeface="Arial"/>
+              </a:defRPr>
+            </a:pPr>
+            <a:r>
+              <a:rPr sz="2550" b="0">
+                <a:solidFill>
+                  <a:srgbClr val="F4F0FF"/>
+                </a:solidFill>
+                <a:latin typeface="Arial"/>
+                <a:ea typeface="Arial"/>
+                <a:cs typeface="Arial"/>
+              </a:rPr>
+              <a:t>3</a:t>
+            </a:r>
+          </a:p>
+        </p:txBody>
+      </p:sp>
+      <p:sp>
+        <p:nvSpPr>
+          <p:cNvPr id="18" name="">
+            <a:extLst xmlns:a="http://schemas.openxmlformats.org/drawingml/2006/main">
+              <a:ext uri="{FF2B5EF4-FFF2-40B4-BE49-F238E27FC236}">
+                <a16:creationId xmlns:a16="http://schemas.microsoft.com/office/drawing/2014/main" id="{A60653AC-7391-46D5-8E8A-006146A19A76}"/>
+              </a:ext>
+            </a:extLst>
+          </p:cNvPr>
+          <p:cNvSpPr>
+            <a:spLocks xmlns:a="http://schemas.openxmlformats.org/drawingml/2006/main" noGrp="1"/>
+          </p:cNvSpPr>
+          <p:nvPr/>
+        </p:nvSpPr>
+        <p:spPr>
+          <a:xfrm xmlns:a="http://schemas.openxmlformats.org/drawingml/2006/main">
+            <a:off x="6286500" y="3333750"/>
+            <a:ext cx="1504950" cy="1200150"/>
+          </a:xfrm>
+          <a:prstGeom xmlns:a="http://schemas.openxmlformats.org/drawingml/2006/main" prst="rect">
+            <a:avLst/>
+          </a:prstGeom>
+          <a:solidFill xmlns:a="http://schemas.openxmlformats.org/drawingml/2006/main">
+            <a:srgbClr val="111111">
+              <a:alpha val="80000"/>
+            </a:srgbClr>
+          </a:solidFill>
+          <a:ln xmlns:a="http://schemas.openxmlformats.org/drawingml/2006/main" w="9525">
+            <a:solidFill>
+              <a:srgbClr val="FFFFFF">
+                <a:alpha val="20000"/>
+              </a:srgbClr>
+            </a:solidFill>
+            <a:prstDash val="solid"/>
+          </a:ln>
+        </p:spPr>
+      </p:sp>
+      <p:sp>
+        <p:nvSpPr>
+          <p:cNvPr id="19" name="">
+            <a:extLst xmlns:a="http://schemas.openxmlformats.org/drawingml/2006/main">
+              <a:ext uri="{FF2B5EF4-FFF2-40B4-BE49-F238E27FC236}">
+                <a16:creationId xmlns:a16="http://schemas.microsoft.com/office/drawing/2014/main" id="{E91A2677-2A2B-4237-8BBC-25B9113E878C}"/>
+              </a:ext>
+            </a:extLst>
+          </p:cNvPr>
+          <p:cNvSpPr>
+            <a:spLocks xmlns:a="http://schemas.openxmlformats.org/drawingml/2006/main" noGrp="1"/>
+          </p:cNvSpPr>
+          <p:nvPr/>
+        </p:nvSpPr>
+        <p:spPr>
+          <a:xfrm xmlns:a="http://schemas.openxmlformats.org/drawingml/2006/main">
+            <a:off x="6477000" y="3505200"/>
+            <a:ext cx="1123950" cy="323850"/>
+          </a:xfrm>
+          <a:prstGeom xmlns:a="http://schemas.openxmlformats.org/drawingml/2006/main" prst="rect">
+            <a:avLst/>
+          </a:prstGeom>
+          <a:solidFill xmlns:a="http://schemas.openxmlformats.org/drawingml/2006/main">
+            <a:srgbClr val="000000">
+              <a:alpha val="0"/>
+            </a:srgbClr>
+          </a:solidFill>
+          <a:ln xmlns:a="http://schemas.openxmlformats.org/drawingml/2006/main" w="0">
+            <a:solidFill>
+              <a:srgbClr val="000000">
+                <a:alpha val="0"/>
+              </a:srgbClr>
+            </a:solidFill>
+            <a:prstDash val="solid"/>
+          </a:ln>
+        </p:spPr>
+        <p:txBody>
+          <a:bodyPr xmlns:a="http://schemas.openxmlformats.org/drawingml/2006/main" lIns="0" tIns="0" rIns="0" bIns="0" anchor="t"/>
+          <a:lstStyle xmlns:a="http://schemas.openxmlformats.org/drawingml/2006/main"/>
+          <a:p xmlns:a="http://schemas.openxmlformats.org/drawingml/2006/main">
+            <a:pPr algn="l">
+              <a:defRPr sz="1500" b="1">
+                <a:solidFill>
+                  <a:srgbClr val="FFFFFF"/>
+                </a:solidFill>
+                <a:latin typeface="Arial"/>
+                <a:ea typeface="Arial"/>
+                <a:cs typeface="Arial"/>
+              </a:defRPr>
+            </a:pPr>
+            <a:r>
+              <a:rPr sz="1500" b="1">
+                <a:solidFill>
+                  <a:srgbClr val="FFFFFF"/>
+                </a:solidFill>
+                <a:latin typeface="Arial"/>
+                <a:ea typeface="Arial"/>
+                <a:cs typeface="Arial"/>
+              </a:rPr>
+              <a:t>Diff</a:t>
+            </a:r>
+          </a:p>
+        </p:txBody>
+      </p:sp>
+      <p:sp>
+        <p:nvSpPr>
+          <p:cNvPr id="20" name="">
+            <a:extLst xmlns:a="http://schemas.openxmlformats.org/drawingml/2006/main">
+              <a:ext uri="{FF2B5EF4-FFF2-40B4-BE49-F238E27FC236}">
+                <a16:creationId xmlns:a16="http://schemas.microsoft.com/office/drawing/2014/main" id="{216C6A71-F109-4E73-9CC0-28565D008180}"/>
+              </a:ext>
+            </a:extLst>
+          </p:cNvPr>
+          <p:cNvSpPr>
+            <a:spLocks xmlns:a="http://schemas.openxmlformats.org/drawingml/2006/main" noGrp="1"/>
+          </p:cNvSpPr>
+          <p:nvPr/>
+        </p:nvSpPr>
+        <p:spPr>
+          <a:xfrm xmlns:a="http://schemas.openxmlformats.org/drawingml/2006/main">
+            <a:off x="6477000" y="3943350"/>
+            <a:ext cx="1123950" cy="419100"/>
+          </a:xfrm>
+          <a:prstGeom xmlns:a="http://schemas.openxmlformats.org/drawingml/2006/main" prst="rect">
+            <a:avLst/>
+          </a:prstGeom>
+          <a:solidFill xmlns:a="http://schemas.openxmlformats.org/drawingml/2006/main">
+            <a:srgbClr val="000000">
+              <a:alpha val="0"/>
+            </a:srgbClr>
+          </a:solidFill>
+          <a:ln xmlns:a="http://schemas.openxmlformats.org/drawingml/2006/main" w="0">
+            <a:solidFill>
+              <a:srgbClr val="000000">
+                <a:alpha val="0"/>
+              </a:srgbClr>
+            </a:solidFill>
+            <a:prstDash val="solid"/>
+          </a:ln>
+        </p:spPr>
+        <p:txBody>
+          <a:bodyPr xmlns:a="http://schemas.openxmlformats.org/drawingml/2006/main" lIns="0" tIns="0" rIns="76200" bIns="0" anchor="t"/>
+          <a:lstStyle xmlns:a="http://schemas.openxmlformats.org/drawingml/2006/main"/>
+          <a:p xmlns:a="http://schemas.openxmlformats.org/drawingml/2006/main">
+            <a:pPr algn="l">
+              <a:defRPr sz="2550" b="0">
+                <a:solidFill>
+                  <a:srgbClr val="F4F0FF"/>
+                </a:solidFill>
+                <a:latin typeface="Arial"/>
+                <a:ea typeface="Arial"/>
+                <a:cs typeface="Arial"/>
+              </a:defRPr>
+            </a:pPr>
+            <a:r>
+              <a:rPr sz="2550" b="0">
+                <a:solidFill>
+                  <a:srgbClr val="F4F0FF"/>
+                </a:solidFill>
+                <a:latin typeface="Arial"/>
+                <a:ea typeface="Arial"/>
+                <a:cs typeface="Arial"/>
+              </a:rPr>
+              <a:t>4</a:t>
+            </a:r>
+          </a:p>
+        </p:txBody>
+      </p:sp>
+      <p:sp>
+        <p:nvSpPr>
+          <p:cNvPr id="21" name="">
+            <a:extLst xmlns:a="http://schemas.openxmlformats.org/drawingml/2006/main">
+              <a:ext uri="{FF2B5EF4-FFF2-40B4-BE49-F238E27FC236}">
+                <a16:creationId xmlns:a16="http://schemas.microsoft.com/office/drawing/2014/main" id="{82FEFA10-F53A-4F91-B93B-A9354BBF3FDD}"/>
+              </a:ext>
+            </a:extLst>
+          </p:cNvPr>
+          <p:cNvSpPr>
+            <a:spLocks xmlns:a="http://schemas.openxmlformats.org/drawingml/2006/main" noGrp="1"/>
+          </p:cNvSpPr>
+          <p:nvPr/>
+        </p:nvSpPr>
+        <p:spPr>
+          <a:xfrm xmlns:a="http://schemas.openxmlformats.org/drawingml/2006/main">
+            <a:off x="8039100" y="3333750"/>
+            <a:ext cx="1504950" cy="1200150"/>
+          </a:xfrm>
+          <a:prstGeom xmlns:a="http://schemas.openxmlformats.org/drawingml/2006/main" prst="rect">
+            <a:avLst/>
+          </a:prstGeom>
+          <a:solidFill xmlns:a="http://schemas.openxmlformats.org/drawingml/2006/main">
+            <a:srgbClr val="111111">
+              <a:alpha val="80000"/>
+            </a:srgbClr>
+          </a:solidFill>
+          <a:ln xmlns:a="http://schemas.openxmlformats.org/drawingml/2006/main" w="9525">
+            <a:solidFill>
+              <a:srgbClr val="FFFFFF">
+                <a:alpha val="20000"/>
+              </a:srgbClr>
+            </a:solidFill>
+            <a:prstDash val="solid"/>
+          </a:ln>
+        </p:spPr>
+      </p:sp>
+      <p:sp>
+        <p:nvSpPr>
+          <p:cNvPr id="22" name="">
+            <a:extLst xmlns:a="http://schemas.openxmlformats.org/drawingml/2006/main">
+              <a:ext uri="{FF2B5EF4-FFF2-40B4-BE49-F238E27FC236}">
+                <a16:creationId xmlns:a16="http://schemas.microsoft.com/office/drawing/2014/main" id="{2D698265-429D-41D2-B7F4-7F620345F35E}"/>
+              </a:ext>
+            </a:extLst>
+          </p:cNvPr>
+          <p:cNvSpPr>
+            <a:spLocks xmlns:a="http://schemas.openxmlformats.org/drawingml/2006/main" noGrp="1"/>
+          </p:cNvSpPr>
+          <p:nvPr/>
+        </p:nvSpPr>
+        <p:spPr>
+          <a:xfrm xmlns:a="http://schemas.openxmlformats.org/drawingml/2006/main">
+            <a:off x="8229600" y="3505200"/>
+            <a:ext cx="1123950" cy="323850"/>
+          </a:xfrm>
+          <a:prstGeom xmlns:a="http://schemas.openxmlformats.org/drawingml/2006/main" prst="rect">
+            <a:avLst/>
+          </a:prstGeom>
+          <a:solidFill xmlns:a="http://schemas.openxmlformats.org/drawingml/2006/main">
+            <a:srgbClr val="000000">
+              <a:alpha val="0"/>
+            </a:srgbClr>
+          </a:solidFill>
+          <a:ln xmlns:a="http://schemas.openxmlformats.org/drawingml/2006/main" w="0">
+            <a:solidFill>
+              <a:srgbClr val="000000">
+                <a:alpha val="0"/>
+              </a:srgbClr>
+            </a:solidFill>
+            <a:prstDash val="solid"/>
+          </a:ln>
+        </p:spPr>
+        <p:txBody>
+          <a:bodyPr xmlns:a="http://schemas.openxmlformats.org/drawingml/2006/main" lIns="0" tIns="0" rIns="0" bIns="0" anchor="t"/>
+          <a:lstStyle xmlns:a="http://schemas.openxmlformats.org/drawingml/2006/main"/>
+          <a:p xmlns:a="http://schemas.openxmlformats.org/drawingml/2006/main">
+            <a:pPr algn="l">
+              <a:defRPr sz="1500" b="1">
+                <a:solidFill>
+                  <a:srgbClr val="FFFFFF"/>
+                </a:solidFill>
+                <a:latin typeface="Arial"/>
+                <a:ea typeface="Arial"/>
+                <a:cs typeface="Arial"/>
+              </a:defRPr>
+            </a:pPr>
+            <a:r>
+              <a:rPr sz="1500" b="1">
+                <a:solidFill>
+                  <a:srgbClr val="FFFFFF"/>
+                </a:solidFill>
+                <a:latin typeface="Arial"/>
+                <a:ea typeface="Arial"/>
+                <a:cs typeface="Arial"/>
+              </a:rPr>
+              <a:t>Checks</a:t>
+            </a:r>
+          </a:p>
+        </p:txBody>
+      </p:sp>
+      <p:sp>
+        <p:nvSpPr>
+          <p:cNvPr id="23" name="">
+            <a:extLst xmlns:a="http://schemas.openxmlformats.org/drawingml/2006/main">
+              <a:ext uri="{FF2B5EF4-FFF2-40B4-BE49-F238E27FC236}">
+                <a16:creationId xmlns:a16="http://schemas.microsoft.com/office/drawing/2014/main" id="{D313D7B3-FF17-48C7-BD07-7B17064FDFD6}"/>
+              </a:ext>
+            </a:extLst>
+          </p:cNvPr>
+          <p:cNvSpPr>
+            <a:spLocks xmlns:a="http://schemas.openxmlformats.org/drawingml/2006/main" noGrp="1"/>
+          </p:cNvSpPr>
+          <p:nvPr/>
+        </p:nvSpPr>
+        <p:spPr>
+          <a:xfrm xmlns:a="http://schemas.openxmlformats.org/drawingml/2006/main">
+            <a:off x="8229600" y="3943350"/>
+            <a:ext cx="1123950" cy="419100"/>
+          </a:xfrm>
+          <a:prstGeom xmlns:a="http://schemas.openxmlformats.org/drawingml/2006/main" prst="rect">
+            <a:avLst/>
+          </a:prstGeom>
+          <a:solidFill xmlns:a="http://schemas.openxmlformats.org/drawingml/2006/main">
+            <a:srgbClr val="000000">
+              <a:alpha val="0"/>
+            </a:srgbClr>
+          </a:solidFill>
+          <a:ln xmlns:a="http://schemas.openxmlformats.org/drawingml/2006/main" w="0">
+            <a:solidFill>
+              <a:srgbClr val="000000">
+                <a:alpha val="0"/>
+              </a:srgbClr>
+            </a:solidFill>
+            <a:prstDash val="solid"/>
+          </a:ln>
+        </p:spPr>
+        <p:txBody>
+          <a:bodyPr xmlns:a="http://schemas.openxmlformats.org/drawingml/2006/main" lIns="0" tIns="0" rIns="76200" bIns="0" anchor="t"/>
+          <a:lstStyle xmlns:a="http://schemas.openxmlformats.org/drawingml/2006/main"/>
+          <a:p xmlns:a="http://schemas.openxmlformats.org/drawingml/2006/main">
+            <a:pPr algn="l">
+              <a:defRPr sz="2550" b="0">
+                <a:solidFill>
+                  <a:srgbClr val="F4F0FF"/>
+                </a:solidFill>
+                <a:latin typeface="Arial"/>
+                <a:ea typeface="Arial"/>
+                <a:cs typeface="Arial"/>
+              </a:defRPr>
+            </a:pPr>
+            <a:r>
+              <a:rPr sz="2550" b="0">
+                <a:solidFill>
+                  <a:srgbClr val="F4F0FF"/>
+                </a:solidFill>
+                <a:latin typeface="Arial"/>
+                <a:ea typeface="Arial"/>
+                <a:cs typeface="Arial"/>
+              </a:rPr>
+              <a:t>5</a:t>
+            </a:r>
+          </a:p>
+        </p:txBody>
+      </p:sp>
+      <p:sp>
+        <p:nvSpPr>
+          <p:cNvPr id="24" name="">
+            <a:extLst xmlns:a="http://schemas.openxmlformats.org/drawingml/2006/main">
+              <a:ext uri="{FF2B5EF4-FFF2-40B4-BE49-F238E27FC236}">
+                <a16:creationId xmlns:a16="http://schemas.microsoft.com/office/drawing/2014/main" id="{4DDFF6B6-522D-45F2-BEF6-4D566D4EBD9D}"/>
+              </a:ext>
+            </a:extLst>
+          </p:cNvPr>
+          <p:cNvSpPr>
+            <a:spLocks xmlns:a="http://schemas.openxmlformats.org/drawingml/2006/main" noGrp="1"/>
+          </p:cNvSpPr>
+          <p:nvPr/>
+        </p:nvSpPr>
+        <p:spPr>
+          <a:xfrm xmlns:a="http://schemas.openxmlformats.org/drawingml/2006/main">
+            <a:off x="6858000" y="5067300"/>
+            <a:ext cx="4286250" cy="819150"/>
+          </a:xfrm>
+          <a:prstGeom xmlns:a="http://schemas.openxmlformats.org/drawingml/2006/main" prst="rect">
+            <a:avLst/>
+          </a:prstGeom>
+          <a:solidFill xmlns:a="http://schemas.openxmlformats.org/drawingml/2006/main">
+            <a:srgbClr val="111111">
+              <a:alpha val="80000"/>
+            </a:srgbClr>
+          </a:solidFill>
+          <a:ln xmlns:a="http://schemas.openxmlformats.org/drawingml/2006/main" w="9525">
+            <a:solidFill>
+              <a:srgbClr val="FFFFFF">
+                <a:alpha val="20000"/>
+              </a:srgbClr>
+            </a:solidFill>
+            <a:prstDash val="solid"/>
+          </a:ln>
+        </p:spPr>
+      </p:sp>
+      <p:sp>
+        <p:nvSpPr>
+          <p:cNvPr id="25" name="">
+            <a:extLst xmlns:a="http://schemas.openxmlformats.org/drawingml/2006/main">
+              <a:ext uri="{FF2B5EF4-FFF2-40B4-BE49-F238E27FC236}">
+                <a16:creationId xmlns:a16="http://schemas.microsoft.com/office/drawing/2014/main" id="{E8F2F9D7-BE17-49F7-972F-C286FB7143CE}"/>
+              </a:ext>
+            </a:extLst>
+          </p:cNvPr>
+          <p:cNvSpPr>
+            <a:spLocks xmlns:a="http://schemas.openxmlformats.org/drawingml/2006/main" noGrp="1"/>
+          </p:cNvSpPr>
+          <p:nvPr/>
+        </p:nvSpPr>
+        <p:spPr>
+          <a:xfrm xmlns:a="http://schemas.openxmlformats.org/drawingml/2006/main">
+            <a:off x="7048500" y="5238750"/>
+            <a:ext cx="3905250" cy="323850"/>
+          </a:xfrm>
+          <a:prstGeom xmlns:a="http://schemas.openxmlformats.org/drawingml/2006/main" prst="rect">
+            <a:avLst/>
+          </a:prstGeom>
+          <a:solidFill xmlns:a="http://schemas.openxmlformats.org/drawingml/2006/main">
+            <a:srgbClr val="000000">
+              <a:alpha val="0"/>
+            </a:srgbClr>
+          </a:solidFill>
+          <a:ln xmlns:a="http://schemas.openxmlformats.org/drawingml/2006/main" w="0">
+            <a:solidFill>
+              <a:srgbClr val="000000">
+                <a:alpha val="0"/>
+              </a:srgbClr>
+            </a:solidFill>
+            <a:prstDash val="solid"/>
+          </a:ln>
+        </p:spPr>
+        <p:txBody>
+          <a:bodyPr xmlns:a="http://schemas.openxmlformats.org/drawingml/2006/main" lIns="0" tIns="0" rIns="0" bIns="0" anchor="t"/>
+          <a:lstStyle xmlns:a="http://schemas.openxmlformats.org/drawingml/2006/main"/>
+          <a:p xmlns:a="http://schemas.openxmlformats.org/drawingml/2006/main">
+            <a:pPr algn="l">
+              <a:defRPr sz="1500" b="1">
+                <a:solidFill>
+                  <a:srgbClr val="FFFFFF"/>
+                </a:solidFill>
+                <a:latin typeface="Arial"/>
+                <a:ea typeface="Arial"/>
+                <a:cs typeface="Arial"/>
+              </a:defRPr>
+            </a:pPr>
+            <a:r>
+              <a:rPr sz="1500" b="1">
+                <a:solidFill>
+                  <a:srgbClr val="FFFFFF"/>
+                </a:solidFill>
+                <a:latin typeface="Arial"/>
+                <a:ea typeface="Arial"/>
+                <a:cs typeface="Arial"/>
+              </a:rPr>
+              <a:t>마지막 질문</a:t>
+            </a:r>
+          </a:p>
+        </p:txBody>
+      </p:sp>
+      <p:sp>
+        <p:nvSpPr>
+          <p:cNvPr id="26" name="">
+            <a:extLst xmlns:a="http://schemas.openxmlformats.org/drawingml/2006/main">
+              <a:ext uri="{FF2B5EF4-FFF2-40B4-BE49-F238E27FC236}">
+                <a16:creationId xmlns:a16="http://schemas.microsoft.com/office/drawing/2014/main" id="{12BDB011-9494-469B-B909-09F71469D9AD}"/>
+              </a:ext>
+            </a:extLst>
+          </p:cNvPr>
+          <p:cNvSpPr>
+            <a:spLocks xmlns:a="http://schemas.openxmlformats.org/drawingml/2006/main" noGrp="1"/>
+          </p:cNvSpPr>
+          <p:nvPr/>
+        </p:nvSpPr>
+        <p:spPr>
+          <a:xfrm xmlns:a="http://schemas.openxmlformats.org/drawingml/2006/main">
+            <a:off x="7048500" y="5676900"/>
+            <a:ext cx="3905250" cy="228600"/>
+          </a:xfrm>
+          <a:prstGeom xmlns:a="http://schemas.openxmlformats.org/drawingml/2006/main" prst="rect">
+            <a:avLst/>
+          </a:prstGeom>
+          <a:solidFill xmlns:a="http://schemas.openxmlformats.org/drawingml/2006/main">
+            <a:srgbClr val="000000">
+              <a:alpha val="0"/>
+            </a:srgbClr>
+          </a:solidFill>
+          <a:ln xmlns:a="http://schemas.openxmlformats.org/drawingml/2006/main" w="0">
+            <a:solidFill>
+              <a:srgbClr val="000000">
+                <a:alpha val="0"/>
+              </a:srgbClr>
+            </a:solidFill>
+            <a:prstDash val="solid"/>
+          </a:ln>
+        </p:spPr>
+        <p:txBody>
+          <a:bodyPr xmlns:a="http://schemas.openxmlformats.org/drawingml/2006/main" lIns="0" tIns="0" rIns="76200" bIns="0" anchor="t"/>
+          <a:lstStyle xmlns:a="http://schemas.openxmlformats.org/drawingml/2006/main"/>
+          <a:p xmlns:a="http://schemas.openxmlformats.org/drawingml/2006/main">
+            <a:pPr algn="l">
               <a:defRPr sz="1350" b="0">
                 <a:solidFill>
                   <a:srgbClr val="F4F0FF"/>
@@ -11996,63 +12369,17 @@
                 <a:ea typeface="Arial"/>
                 <a:cs typeface="Arial"/>
               </a:rPr>
-              <a:t>CI 결과</a:t>
-            </a:r>
-          </a:p>
-          <a:p xmlns:a="http://schemas.openxmlformats.org/drawingml/2006/main">
-            <a:pPr algn="l">
-              <a:defRPr sz="1350" b="0">
-                <a:solidFill>
-                  <a:srgbClr val="F4F0FF"/>
-                </a:solidFill>
-                <a:latin typeface="Arial"/>
-                <a:ea typeface="Arial"/>
-                <a:cs typeface="Arial"/>
-              </a:defRPr>
-            </a:pPr>
-            <a:r>
-              <a:rPr sz="1350" b="0">
-                <a:solidFill>
-                  <a:srgbClr val="F4F0FF"/>
-                </a:solidFill>
-                <a:latin typeface="Arial"/>
-                <a:ea typeface="Arial"/>
-                <a:cs typeface="Arial"/>
-              </a:rPr>
-              <a:t>실패 로그</a:t>
-            </a:r>
-          </a:p>
-          <a:p xmlns:a="http://schemas.openxmlformats.org/drawingml/2006/main">
-            <a:pPr algn="l">
-              <a:defRPr sz="1350" b="0">
-                <a:solidFill>
-                  <a:srgbClr val="F4F0FF"/>
-                </a:solidFill>
-                <a:latin typeface="Arial"/>
-                <a:ea typeface="Arial"/>
-                <a:cs typeface="Arial"/>
-              </a:defRPr>
-            </a:pPr>
-            <a:r>
-              <a:rPr sz="1350" b="0">
-                <a:solidFill>
-                  <a:srgbClr val="F4F0FF"/>
-                </a:solidFill>
-                <a:latin typeface="Arial"/>
-                <a:ea typeface="Arial"/>
-                <a:cs typeface="Arial"/>
-              </a:rPr>
-              <a:t>merge 중단</a:t>
-            </a:r>
-          </a:p>
-        </p:txBody>
-      </p:sp>
-      <p:sp>
-        <p:nvSpPr>
-          <p:cNvPr id="18" name="footer-note">
-            <a:extLst xmlns:a="http://schemas.openxmlformats.org/drawingml/2006/main">
-              <a:ext uri="{FF2B5EF4-FFF2-40B4-BE49-F238E27FC236}">
-                <a16:creationId xmlns:a16="http://schemas.microsoft.com/office/drawing/2014/main" id="{DA24EF4D-A7F3-44A7-A6AB-A3A9490CE477}"/>
+              <a:t>이 PR을 지금 main에 합쳐도 되는가?</a:t>
+            </a:r>
+          </a:p>
+        </p:txBody>
+      </p:sp>
+      <p:sp>
+        <p:nvSpPr>
+          <p:cNvPr id="27" name="footer-note">
+            <a:extLst xmlns:a="http://schemas.openxmlformats.org/drawingml/2006/main">
+              <a:ext uri="{FF2B5EF4-FFF2-40B4-BE49-F238E27FC236}">
+                <a16:creationId xmlns:a16="http://schemas.microsoft.com/office/drawing/2014/main" id="{044C5138-5EE0-4ACB-88D1-8E709494D727}"/>
               </a:ext>
             </a:extLst>
           </p:cNvPr>
@@ -12114,7 +12441,7 @@
     </p:spTree>
     <p:extLst>
       <p:ext uri="{BB962C8B-B14F-4D97-AF65-F5344CB8AC3E}">
-        <p14:creationId xmlns:p14="http://schemas.microsoft.com/office/powerpoint/2010/main" val="11610170"/>
+        <p14:creationId xmlns:p14="http://schemas.microsoft.com/office/powerpoint/2010/main" val="470157805"/>
       </p:ext>
     </p:extLst>
   </p:cSld>
@@ -12138,7 +12465,7 @@
           <p:cNvPr id="1" name="">
             <a:extLst xmlns:a="http://schemas.openxmlformats.org/drawingml/2006/main">
               <a:ext uri="{FF2B5EF4-FFF2-40B4-BE49-F238E27FC236}">
-                <a16:creationId xmlns:a16="http://schemas.microsoft.com/office/drawing/2014/main" id="{1451687A-FF4D-4CE1-B497-47DE90BA1CE1}"/>
+                <a16:creationId xmlns:a16="http://schemas.microsoft.com/office/drawing/2014/main" id="{9E38422F-43EE-4E1C-997D-F3968D89834B}"/>
               </a:ext>
             </a:extLst>
           </p:cNvPr>
@@ -12187,7 +12514,7 @@
           <p:cNvPr id="2" name="">
             <a:extLst xmlns:a="http://schemas.openxmlformats.org/drawingml/2006/main">
               <a:ext uri="{FF2B5EF4-FFF2-40B4-BE49-F238E27FC236}">
-                <a16:creationId xmlns:a16="http://schemas.microsoft.com/office/drawing/2014/main" id="{5168B360-07C6-4962-BB92-AB8579DEF343}"/>
+                <a16:creationId xmlns:a16="http://schemas.microsoft.com/office/drawing/2014/main" id="{DD99A967-2368-4E2D-A7E0-9FFB4BE2C8C9}"/>
               </a:ext>
             </a:extLst>
           </p:cNvPr>
@@ -12224,7 +12551,7 @@
           <p:cNvPr id="3" name="kicker-marker">
             <a:extLst xmlns:a="http://schemas.openxmlformats.org/drawingml/2006/main">
               <a:ext uri="{FF2B5EF4-FFF2-40B4-BE49-F238E27FC236}">
-                <a16:creationId xmlns:a16="http://schemas.microsoft.com/office/drawing/2014/main" id="{C244A692-BF97-4CE5-A064-D52B1DE0407E}"/>
+                <a16:creationId xmlns:a16="http://schemas.microsoft.com/office/drawing/2014/main" id="{430089FB-11EC-4243-8E25-8F7BCF34D4F5}"/>
               </a:ext>
             </a:extLst>
           </p:cNvPr>
@@ -12259,7 +12586,7 @@
           <p:cNvPr id="4" name="kicker-label">
             <a:extLst xmlns:a="http://schemas.openxmlformats.org/drawingml/2006/main">
               <a:ext uri="{FF2B5EF4-FFF2-40B4-BE49-F238E27FC236}">
-                <a16:creationId xmlns:a16="http://schemas.microsoft.com/office/drawing/2014/main" id="{E18BEC89-22AC-44F7-8A03-8CD176ABB1D1}"/>
+                <a16:creationId xmlns:a16="http://schemas.microsoft.com/office/drawing/2014/main" id="{7CCE8CFB-FAE0-4D0E-A484-214755474797}"/>
               </a:ext>
             </a:extLst>
           </p:cNvPr>
@@ -12323,7 +12650,7 @@
           <p:cNvPr id="5" name="">
             <a:extLst xmlns:a="http://schemas.openxmlformats.org/drawingml/2006/main">
               <a:ext uri="{FF2B5EF4-FFF2-40B4-BE49-F238E27FC236}">
-                <a16:creationId xmlns:a16="http://schemas.microsoft.com/office/drawing/2014/main" id="{BEC1C7D4-CB53-44FC-A90C-A2A634484F05}"/>
+                <a16:creationId xmlns:a16="http://schemas.microsoft.com/office/drawing/2014/main" id="{BF1A8EDE-0A0B-4293-BADD-F3FEDDD80B63}"/>
               </a:ext>
             </a:extLst>
           </p:cNvPr>
@@ -12358,7 +12685,7 @@
           <p:cNvPr id="6" name="claim-title">
             <a:extLst xmlns:a="http://schemas.openxmlformats.org/drawingml/2006/main">
               <a:ext uri="{FF2B5EF4-FFF2-40B4-BE49-F238E27FC236}">
-                <a16:creationId xmlns:a16="http://schemas.microsoft.com/office/drawing/2014/main" id="{1751ADC6-5703-4A66-A924-F95B7020265C}"/>
+                <a16:creationId xmlns:a16="http://schemas.microsoft.com/office/drawing/2014/main" id="{497772AF-A050-474E-8ECC-2C1FF81F6336}"/>
               </a:ext>
             </a:extLst>
           </p:cNvPr>
@@ -12422,7 +12749,7 @@
           <p:cNvPr id="7" name="support-note">
             <a:extLst xmlns:a="http://schemas.openxmlformats.org/drawingml/2006/main">
               <a:ext uri="{FF2B5EF4-FFF2-40B4-BE49-F238E27FC236}">
-                <a16:creationId xmlns:a16="http://schemas.microsoft.com/office/drawing/2014/main" id="{8C37BD3B-D6CA-4C8F-ADC8-5DFE559DF47F}"/>
+                <a16:creationId xmlns:a16="http://schemas.microsoft.com/office/drawing/2014/main" id="{7241C542-B032-4059-82AF-9993B5424AC7}"/>
               </a:ext>
             </a:extLst>
           </p:cNvPr>
@@ -12486,7 +12813,7 @@
           <p:cNvPr id="8" name="page-marker">
             <a:extLst xmlns:a="http://schemas.openxmlformats.org/drawingml/2006/main">
               <a:ext uri="{FF2B5EF4-FFF2-40B4-BE49-F238E27FC236}">
-                <a16:creationId xmlns:a16="http://schemas.microsoft.com/office/drawing/2014/main" id="{F321FF2B-76C8-4389-905F-00F23605B451}"/>
+                <a16:creationId xmlns:a16="http://schemas.microsoft.com/office/drawing/2014/main" id="{83CA8C31-0F98-479E-9220-199F03F894DA}"/>
               </a:ext>
             </a:extLst>
           </p:cNvPr>
@@ -12550,7 +12877,7 @@
           <p:cNvPr id="9" name="">
             <a:extLst xmlns:a="http://schemas.openxmlformats.org/drawingml/2006/main">
               <a:ext uri="{FF2B5EF4-FFF2-40B4-BE49-F238E27FC236}">
-                <a16:creationId xmlns:a16="http://schemas.microsoft.com/office/drawing/2014/main" id="{759929D5-4702-48A0-B54E-6E001A107516}"/>
+                <a16:creationId xmlns:a16="http://schemas.microsoft.com/office/drawing/2014/main" id="{E76ABD19-3A27-4C91-A8FE-BC62F1577AB8}"/>
               </a:ext>
             </a:extLst>
           </p:cNvPr>
@@ -12587,7 +12914,7 @@
           <p:cNvPr id="10" name="">
             <a:extLst xmlns:a="http://schemas.openxmlformats.org/drawingml/2006/main">
               <a:ext uri="{FF2B5EF4-FFF2-40B4-BE49-F238E27FC236}">
-                <a16:creationId xmlns:a16="http://schemas.microsoft.com/office/drawing/2014/main" id="{F67BFB2E-064B-476F-B0F4-ACEB5F955969}"/>
+                <a16:creationId xmlns:a16="http://schemas.microsoft.com/office/drawing/2014/main" id="{128C56A9-6D86-43DB-817D-156622763581}"/>
               </a:ext>
             </a:extLst>
           </p:cNvPr>
@@ -12651,7 +12978,7 @@
           <p:cNvPr id="11" name="">
             <a:extLst xmlns:a="http://schemas.openxmlformats.org/drawingml/2006/main">
               <a:ext uri="{FF2B5EF4-FFF2-40B4-BE49-F238E27FC236}">
-                <a16:creationId xmlns:a16="http://schemas.microsoft.com/office/drawing/2014/main" id="{F940C231-9140-4824-A9DE-E9D7FB6A7028}"/>
+                <a16:creationId xmlns:a16="http://schemas.microsoft.com/office/drawing/2014/main" id="{FC48494A-F4F4-4CFA-925F-A4469C1B82A0}"/>
               </a:ext>
             </a:extLst>
           </p:cNvPr>
@@ -12715,7 +13042,7 @@
           <p:cNvPr id="12" name="">
             <a:extLst xmlns:a="http://schemas.openxmlformats.org/drawingml/2006/main">
               <a:ext uri="{FF2B5EF4-FFF2-40B4-BE49-F238E27FC236}">
-                <a16:creationId xmlns:a16="http://schemas.microsoft.com/office/drawing/2014/main" id="{97AE8E48-A8DC-4EDA-B970-1B19A46A485A}"/>
+                <a16:creationId xmlns:a16="http://schemas.microsoft.com/office/drawing/2014/main" id="{657A8E50-EFDC-4452-A119-120B0CFC1000}"/>
               </a:ext>
             </a:extLst>
           </p:cNvPr>
@@ -12752,7 +13079,7 @@
           <p:cNvPr id="13" name="">
             <a:extLst xmlns:a="http://schemas.openxmlformats.org/drawingml/2006/main">
               <a:ext uri="{FF2B5EF4-FFF2-40B4-BE49-F238E27FC236}">
-                <a16:creationId xmlns:a16="http://schemas.microsoft.com/office/drawing/2014/main" id="{AEA942B1-A163-49FD-A319-E6B1DCD0E982}"/>
+                <a16:creationId xmlns:a16="http://schemas.microsoft.com/office/drawing/2014/main" id="{D052B3B1-60F8-403A-9526-94485EBEDE7E}"/>
               </a:ext>
             </a:extLst>
           </p:cNvPr>
@@ -12816,7 +13143,7 @@
           <p:cNvPr id="14" name="">
             <a:extLst xmlns:a="http://schemas.openxmlformats.org/drawingml/2006/main">
               <a:ext uri="{FF2B5EF4-FFF2-40B4-BE49-F238E27FC236}">
-                <a16:creationId xmlns:a16="http://schemas.microsoft.com/office/drawing/2014/main" id="{CC4AA35C-4F65-45B7-9CCB-3D519E29670F}"/>
+                <a16:creationId xmlns:a16="http://schemas.microsoft.com/office/drawing/2014/main" id="{345E5B49-CF61-4FEB-A037-FD52BE79D75F}"/>
               </a:ext>
             </a:extLst>
           </p:cNvPr>
@@ -12903,7 +13230,7 @@
           <p:cNvPr id="15" name="">
             <a:extLst xmlns:a="http://schemas.openxmlformats.org/drawingml/2006/main">
               <a:ext uri="{FF2B5EF4-FFF2-40B4-BE49-F238E27FC236}">
-                <a16:creationId xmlns:a16="http://schemas.microsoft.com/office/drawing/2014/main" id="{EF3C1CEB-CF60-4FCF-B252-D99FA9EC9F07}"/>
+                <a16:creationId xmlns:a16="http://schemas.microsoft.com/office/drawing/2014/main" id="{92D1D9A0-F13F-431F-B46A-DBF80E5EB74C}"/>
               </a:ext>
             </a:extLst>
           </p:cNvPr>
@@ -12940,7 +13267,7 @@
           <p:cNvPr id="16" name="">
             <a:extLst xmlns:a="http://schemas.openxmlformats.org/drawingml/2006/main">
               <a:ext uri="{FF2B5EF4-FFF2-40B4-BE49-F238E27FC236}">
-                <a16:creationId xmlns:a16="http://schemas.microsoft.com/office/drawing/2014/main" id="{01A08BDB-56CF-4DB2-9693-E13304AFD3BC}"/>
+                <a16:creationId xmlns:a16="http://schemas.microsoft.com/office/drawing/2014/main" id="{9DB4AF02-BB7A-4E68-9853-01327C6C391D}"/>
               </a:ext>
             </a:extLst>
           </p:cNvPr>
@@ -13004,7 +13331,7 @@
           <p:cNvPr id="17" name="">
             <a:extLst xmlns:a="http://schemas.openxmlformats.org/drawingml/2006/main">
               <a:ext uri="{FF2B5EF4-FFF2-40B4-BE49-F238E27FC236}">
-                <a16:creationId xmlns:a16="http://schemas.microsoft.com/office/drawing/2014/main" id="{1D9F1FF4-F465-40DE-8B3D-64423141C66B}"/>
+                <a16:creationId xmlns:a16="http://schemas.microsoft.com/office/drawing/2014/main" id="{B8989B7C-7382-4541-87A0-A78A7075AD63}"/>
               </a:ext>
             </a:extLst>
           </p:cNvPr>
@@ -13068,7 +13395,7 @@
           <p:cNvPr id="18" name="">
             <a:extLst xmlns:a="http://schemas.openxmlformats.org/drawingml/2006/main">
               <a:ext uri="{FF2B5EF4-FFF2-40B4-BE49-F238E27FC236}">
-                <a16:creationId xmlns:a16="http://schemas.microsoft.com/office/drawing/2014/main" id="{9F5AADAE-4120-4639-9174-46ABFDEF9734}"/>
+                <a16:creationId xmlns:a16="http://schemas.microsoft.com/office/drawing/2014/main" id="{AC3E2C99-0178-4EA0-9C48-C718AB50A756}"/>
               </a:ext>
             </a:extLst>
           </p:cNvPr>
@@ -13105,7 +13432,7 @@
           <p:cNvPr id="19" name="">
             <a:extLst xmlns:a="http://schemas.openxmlformats.org/drawingml/2006/main">
               <a:ext uri="{FF2B5EF4-FFF2-40B4-BE49-F238E27FC236}">
-                <a16:creationId xmlns:a16="http://schemas.microsoft.com/office/drawing/2014/main" id="{629C502B-82C8-4950-AA2B-8B56E63D36CE}"/>
+                <a16:creationId xmlns:a16="http://schemas.microsoft.com/office/drawing/2014/main" id="{20E4701F-48F5-4366-A172-8E4043506B98}"/>
               </a:ext>
             </a:extLst>
           </p:cNvPr>
@@ -13169,7 +13496,7 @@
           <p:cNvPr id="20" name="">
             <a:extLst xmlns:a="http://schemas.openxmlformats.org/drawingml/2006/main">
               <a:ext uri="{FF2B5EF4-FFF2-40B4-BE49-F238E27FC236}">
-                <a16:creationId xmlns:a16="http://schemas.microsoft.com/office/drawing/2014/main" id="{C0BAE62C-9E35-44F6-A607-0F512D85B89C}"/>
+                <a16:creationId xmlns:a16="http://schemas.microsoft.com/office/drawing/2014/main" id="{B0BD6C40-E135-467E-822E-B5C995261509}"/>
               </a:ext>
             </a:extLst>
           </p:cNvPr>
@@ -13233,7 +13560,7 @@
           <p:cNvPr id="21" name="">
             <a:extLst xmlns:a="http://schemas.openxmlformats.org/drawingml/2006/main">
               <a:ext uri="{FF2B5EF4-FFF2-40B4-BE49-F238E27FC236}">
-                <a16:creationId xmlns:a16="http://schemas.microsoft.com/office/drawing/2014/main" id="{452EECBD-00D8-4AD2-A8FB-33B8FD183F28}"/>
+                <a16:creationId xmlns:a16="http://schemas.microsoft.com/office/drawing/2014/main" id="{10195EFA-99A8-4BBE-BF51-E23F144F2186}"/>
               </a:ext>
             </a:extLst>
           </p:cNvPr>
@@ -13297,7 +13624,7 @@
           <p:cNvPr id="22" name="footer-note">
             <a:extLst xmlns:a="http://schemas.openxmlformats.org/drawingml/2006/main">
               <a:ext uri="{FF2B5EF4-FFF2-40B4-BE49-F238E27FC236}">
-                <a16:creationId xmlns:a16="http://schemas.microsoft.com/office/drawing/2014/main" id="{0FF0F7F5-F0D8-4A25-B9B0-D8CE354D314E}"/>
+                <a16:creationId xmlns:a16="http://schemas.microsoft.com/office/drawing/2014/main" id="{67962CF3-8651-479A-BB5C-8FC008011897}"/>
               </a:ext>
             </a:extLst>
           </p:cNvPr>
@@ -13359,7 +13686,7 @@
     </p:spTree>
     <p:extLst>
       <p:ext uri="{BB962C8B-B14F-4D97-AF65-F5344CB8AC3E}">
-        <p14:creationId xmlns:p14="http://schemas.microsoft.com/office/powerpoint/2010/main" val="1695841384"/>
+        <p14:creationId xmlns:p14="http://schemas.microsoft.com/office/powerpoint/2010/main" val="1822917863"/>
       </p:ext>
     </p:extLst>
   </p:cSld>
@@ -13383,7 +13710,7 @@
           <p:cNvPr id="1" name="">
             <a:extLst xmlns:a="http://schemas.openxmlformats.org/drawingml/2006/main">
               <a:ext uri="{FF2B5EF4-FFF2-40B4-BE49-F238E27FC236}">
-                <a16:creationId xmlns:a16="http://schemas.microsoft.com/office/drawing/2014/main" id="{B01FB25C-68E6-4741-B2C7-5E00EFA151E3}"/>
+                <a16:creationId xmlns:a16="http://schemas.microsoft.com/office/drawing/2014/main" id="{61E89205-71CC-4493-A3CE-DDBD1F75050A}"/>
               </a:ext>
             </a:extLst>
           </p:cNvPr>
@@ -13432,7 +13759,7 @@
           <p:cNvPr id="2" name="">
             <a:extLst xmlns:a="http://schemas.openxmlformats.org/drawingml/2006/main">
               <a:ext uri="{FF2B5EF4-FFF2-40B4-BE49-F238E27FC236}">
-                <a16:creationId xmlns:a16="http://schemas.microsoft.com/office/drawing/2014/main" id="{4365BEE4-A96E-4F45-ADD3-7288986BC697}"/>
+                <a16:creationId xmlns:a16="http://schemas.microsoft.com/office/drawing/2014/main" id="{A5527606-49FF-4A5E-8157-AB484F306766}"/>
               </a:ext>
             </a:extLst>
           </p:cNvPr>
@@ -13469,7 +13796,7 @@
           <p:cNvPr id="3" name="kicker-marker">
             <a:extLst xmlns:a="http://schemas.openxmlformats.org/drawingml/2006/main">
               <a:ext uri="{FF2B5EF4-FFF2-40B4-BE49-F238E27FC236}">
-                <a16:creationId xmlns:a16="http://schemas.microsoft.com/office/drawing/2014/main" id="{0780376A-B6F2-49B8-8C99-594F2DB356CD}"/>
+                <a16:creationId xmlns:a16="http://schemas.microsoft.com/office/drawing/2014/main" id="{7BF0D7F6-9A59-4BEB-A8B7-6FB3AA97430F}"/>
               </a:ext>
             </a:extLst>
           </p:cNvPr>
@@ -13504,7 +13831,7 @@
           <p:cNvPr id="4" name="kicker-label">
             <a:extLst xmlns:a="http://schemas.openxmlformats.org/drawingml/2006/main">
               <a:ext uri="{FF2B5EF4-FFF2-40B4-BE49-F238E27FC236}">
-                <a16:creationId xmlns:a16="http://schemas.microsoft.com/office/drawing/2014/main" id="{0633913F-58EC-41D6-B1D6-FBAE97DECD36}"/>
+                <a16:creationId xmlns:a16="http://schemas.microsoft.com/office/drawing/2014/main" id="{83B6C034-4B7D-4EA2-8AC5-72CC3B25ADD0}"/>
               </a:ext>
             </a:extLst>
           </p:cNvPr>
@@ -13568,7 +13895,7 @@
           <p:cNvPr id="5" name="">
             <a:extLst xmlns:a="http://schemas.openxmlformats.org/drawingml/2006/main">
               <a:ext uri="{FF2B5EF4-FFF2-40B4-BE49-F238E27FC236}">
-                <a16:creationId xmlns:a16="http://schemas.microsoft.com/office/drawing/2014/main" id="{FF27C011-FE55-40FF-B018-F2D4991FD860}"/>
+                <a16:creationId xmlns:a16="http://schemas.microsoft.com/office/drawing/2014/main" id="{31EA99FC-868F-4283-B9C2-2073BD7E50AF}"/>
               </a:ext>
             </a:extLst>
           </p:cNvPr>
@@ -13603,7 +13930,7 @@
           <p:cNvPr id="6" name="claim-title">
             <a:extLst xmlns:a="http://schemas.openxmlformats.org/drawingml/2006/main">
               <a:ext uri="{FF2B5EF4-FFF2-40B4-BE49-F238E27FC236}">
-                <a16:creationId xmlns:a16="http://schemas.microsoft.com/office/drawing/2014/main" id="{EB0DCEDA-8643-463E-8CE3-B4B91489F5E8}"/>
+                <a16:creationId xmlns:a16="http://schemas.microsoft.com/office/drawing/2014/main" id="{D3E1CEFF-0D91-40A7-9C96-4DFEF923F263}"/>
               </a:ext>
             </a:extLst>
           </p:cNvPr>
@@ -13667,7 +13994,7 @@
           <p:cNvPr id="7" name="support-note">
             <a:extLst xmlns:a="http://schemas.openxmlformats.org/drawingml/2006/main">
               <a:ext uri="{FF2B5EF4-FFF2-40B4-BE49-F238E27FC236}">
-                <a16:creationId xmlns:a16="http://schemas.microsoft.com/office/drawing/2014/main" id="{19F9D829-3F39-4A45-814C-1B20C420B846}"/>
+                <a16:creationId xmlns:a16="http://schemas.microsoft.com/office/drawing/2014/main" id="{A2133BB4-5E9F-4B4F-AFC0-8F2DCCEB79BF}"/>
               </a:ext>
             </a:extLst>
           </p:cNvPr>
@@ -13731,7 +14058,7 @@
           <p:cNvPr id="8" name="page-marker">
             <a:extLst xmlns:a="http://schemas.openxmlformats.org/drawingml/2006/main">
               <a:ext uri="{FF2B5EF4-FFF2-40B4-BE49-F238E27FC236}">
-                <a16:creationId xmlns:a16="http://schemas.microsoft.com/office/drawing/2014/main" id="{1129E6D9-EE17-4525-9D7D-BEC9D515F04F}"/>
+                <a16:creationId xmlns:a16="http://schemas.microsoft.com/office/drawing/2014/main" id="{9F7FC482-EAA7-42AD-B560-2E6FFD287BA3}"/>
               </a:ext>
             </a:extLst>
           </p:cNvPr>
@@ -13795,7 +14122,7 @@
           <p:cNvPr id="9" name="">
             <a:extLst xmlns:a="http://schemas.openxmlformats.org/drawingml/2006/main">
               <a:ext uri="{FF2B5EF4-FFF2-40B4-BE49-F238E27FC236}">
-                <a16:creationId xmlns:a16="http://schemas.microsoft.com/office/drawing/2014/main" id="{B3E5D88C-8BBB-4D90-8C70-5F255B5AECC6}"/>
+                <a16:creationId xmlns:a16="http://schemas.microsoft.com/office/drawing/2014/main" id="{E5711B65-3C15-4676-95AA-5EBB0ABE44C9}"/>
               </a:ext>
             </a:extLst>
           </p:cNvPr>
@@ -13832,7 +14159,7 @@
           <p:cNvPr id="10" name="">
             <a:extLst xmlns:a="http://schemas.openxmlformats.org/drawingml/2006/main">
               <a:ext uri="{FF2B5EF4-FFF2-40B4-BE49-F238E27FC236}">
-                <a16:creationId xmlns:a16="http://schemas.microsoft.com/office/drawing/2014/main" id="{4FC99F6C-0A98-4D32-9D70-C5CBE4DFAD39}"/>
+                <a16:creationId xmlns:a16="http://schemas.microsoft.com/office/drawing/2014/main" id="{6B7002AD-20B3-4450-B977-FE41DCE817E0}"/>
               </a:ext>
             </a:extLst>
           </p:cNvPr>
@@ -13896,7 +14223,7 @@
           <p:cNvPr id="11" name="">
             <a:extLst xmlns:a="http://schemas.openxmlformats.org/drawingml/2006/main">
               <a:ext uri="{FF2B5EF4-FFF2-40B4-BE49-F238E27FC236}">
-                <a16:creationId xmlns:a16="http://schemas.microsoft.com/office/drawing/2014/main" id="{1A82B056-B9EF-4372-A12F-E3D6B01874E5}"/>
+                <a16:creationId xmlns:a16="http://schemas.microsoft.com/office/drawing/2014/main" id="{8455050C-2E21-4479-8900-70855B26C926}"/>
               </a:ext>
             </a:extLst>
           </p:cNvPr>
@@ -13983,7 +14310,7 @@
           <p:cNvPr id="12" name="">
             <a:extLst xmlns:a="http://schemas.openxmlformats.org/drawingml/2006/main">
               <a:ext uri="{FF2B5EF4-FFF2-40B4-BE49-F238E27FC236}">
-                <a16:creationId xmlns:a16="http://schemas.microsoft.com/office/drawing/2014/main" id="{2F1291C7-94C1-4B29-850C-FBE3B9D2A1C0}"/>
+                <a16:creationId xmlns:a16="http://schemas.microsoft.com/office/drawing/2014/main" id="{BC14CA78-5435-4FCC-A67A-29AE196DA715}"/>
               </a:ext>
             </a:extLst>
           </p:cNvPr>
@@ -14020,7 +14347,7 @@
           <p:cNvPr id="13" name="">
             <a:extLst xmlns:a="http://schemas.openxmlformats.org/drawingml/2006/main">
               <a:ext uri="{FF2B5EF4-FFF2-40B4-BE49-F238E27FC236}">
-                <a16:creationId xmlns:a16="http://schemas.microsoft.com/office/drawing/2014/main" id="{48660688-86E6-4F58-85DA-CEA21461990F}"/>
+                <a16:creationId xmlns:a16="http://schemas.microsoft.com/office/drawing/2014/main" id="{8BF3EF67-97D1-4A1E-B20D-F5382E3C1249}"/>
               </a:ext>
             </a:extLst>
           </p:cNvPr>
@@ -14084,7 +14411,7 @@
           <p:cNvPr id="14" name="">
             <a:extLst xmlns:a="http://schemas.openxmlformats.org/drawingml/2006/main">
               <a:ext uri="{FF2B5EF4-FFF2-40B4-BE49-F238E27FC236}">
-                <a16:creationId xmlns:a16="http://schemas.microsoft.com/office/drawing/2014/main" id="{8F1B1CE1-02E0-4B37-BA5F-958AA70F9272}"/>
+                <a16:creationId xmlns:a16="http://schemas.microsoft.com/office/drawing/2014/main" id="{98FDD32E-0B89-41BA-B7F2-F449454C481C}"/>
               </a:ext>
             </a:extLst>
           </p:cNvPr>
@@ -14217,7 +14544,7 @@
           <p:cNvPr id="15" name="">
             <a:extLst xmlns:a="http://schemas.openxmlformats.org/drawingml/2006/main">
               <a:ext uri="{FF2B5EF4-FFF2-40B4-BE49-F238E27FC236}">
-                <a16:creationId xmlns:a16="http://schemas.microsoft.com/office/drawing/2014/main" id="{A5451093-968E-4152-9AD5-56EF5BED12A8}"/>
+                <a16:creationId xmlns:a16="http://schemas.microsoft.com/office/drawing/2014/main" id="{1293E921-B86B-4F4F-824C-EC1AF899426C}"/>
               </a:ext>
             </a:extLst>
           </p:cNvPr>
@@ -14281,7 +14608,7 @@
           <p:cNvPr id="16" name="footer-note">
             <a:extLst xmlns:a="http://schemas.openxmlformats.org/drawingml/2006/main">
               <a:ext uri="{FF2B5EF4-FFF2-40B4-BE49-F238E27FC236}">
-                <a16:creationId xmlns:a16="http://schemas.microsoft.com/office/drawing/2014/main" id="{100B2D04-7C71-4E78-A450-FC5E1A556DB0}"/>
+                <a16:creationId xmlns:a16="http://schemas.microsoft.com/office/drawing/2014/main" id="{AB6E734C-FC22-4EDB-9835-0529E4D85BA5}"/>
               </a:ext>
             </a:extLst>
           </p:cNvPr>
@@ -14343,7 +14670,7 @@
     </p:spTree>
     <p:extLst>
       <p:ext uri="{BB962C8B-B14F-4D97-AF65-F5344CB8AC3E}">
-        <p14:creationId xmlns:p14="http://schemas.microsoft.com/office/powerpoint/2010/main" val="1304182095"/>
+        <p14:creationId xmlns:p14="http://schemas.microsoft.com/office/powerpoint/2010/main" val="888648328"/>
       </p:ext>
     </p:extLst>
   </p:cSld>
@@ -14367,7 +14694,7 @@
           <p:cNvPr id="1" name="">
             <a:extLst xmlns:a="http://schemas.openxmlformats.org/drawingml/2006/main">
               <a:ext uri="{FF2B5EF4-FFF2-40B4-BE49-F238E27FC236}">
-                <a16:creationId xmlns:a16="http://schemas.microsoft.com/office/drawing/2014/main" id="{637496E5-61B0-438A-BB9E-B4D930FD2D75}"/>
+                <a16:creationId xmlns:a16="http://schemas.microsoft.com/office/drawing/2014/main" id="{C9CE8879-9BD7-4DF6-BB73-2903B1137B70}"/>
               </a:ext>
             </a:extLst>
           </p:cNvPr>
@@ -14416,7 +14743,7 @@
           <p:cNvPr id="2" name="">
             <a:extLst xmlns:a="http://schemas.openxmlformats.org/drawingml/2006/main">
               <a:ext uri="{FF2B5EF4-FFF2-40B4-BE49-F238E27FC236}">
-                <a16:creationId xmlns:a16="http://schemas.microsoft.com/office/drawing/2014/main" id="{7771CED9-9133-4438-869E-ADA6C7485A43}"/>
+                <a16:creationId xmlns:a16="http://schemas.microsoft.com/office/drawing/2014/main" id="{433D5AB5-4561-4390-9406-C76D6D6642C9}"/>
               </a:ext>
             </a:extLst>
           </p:cNvPr>
@@ -14453,7 +14780,7 @@
           <p:cNvPr id="3" name="kicker-marker">
             <a:extLst xmlns:a="http://schemas.openxmlformats.org/drawingml/2006/main">
               <a:ext uri="{FF2B5EF4-FFF2-40B4-BE49-F238E27FC236}">
-                <a16:creationId xmlns:a16="http://schemas.microsoft.com/office/drawing/2014/main" id="{8FD361EB-B650-416B-98D6-C6B2FC665F3F}"/>
+                <a16:creationId xmlns:a16="http://schemas.microsoft.com/office/drawing/2014/main" id="{447DFDAD-3856-4CF5-A229-5DF5A5577549}"/>
               </a:ext>
             </a:extLst>
           </p:cNvPr>
@@ -14488,7 +14815,7 @@
           <p:cNvPr id="4" name="kicker-label">
             <a:extLst xmlns:a="http://schemas.openxmlformats.org/drawingml/2006/main">
               <a:ext uri="{FF2B5EF4-FFF2-40B4-BE49-F238E27FC236}">
-                <a16:creationId xmlns:a16="http://schemas.microsoft.com/office/drawing/2014/main" id="{EA2BC7F5-72C3-4A7C-BED9-72DCA7745CC2}"/>
+                <a16:creationId xmlns:a16="http://schemas.microsoft.com/office/drawing/2014/main" id="{45CCD563-3253-4087-9552-6D4BF69AF9F8}"/>
               </a:ext>
             </a:extLst>
           </p:cNvPr>
@@ -14552,7 +14879,7 @@
           <p:cNvPr id="5" name="">
             <a:extLst xmlns:a="http://schemas.openxmlformats.org/drawingml/2006/main">
               <a:ext uri="{FF2B5EF4-FFF2-40B4-BE49-F238E27FC236}">
-                <a16:creationId xmlns:a16="http://schemas.microsoft.com/office/drawing/2014/main" id="{897E25A3-5BC3-4FFC-8C38-2C1A97E10DEC}"/>
+                <a16:creationId xmlns:a16="http://schemas.microsoft.com/office/drawing/2014/main" id="{DF485DA2-EFCE-49D5-A6CF-15BF31829283}"/>
               </a:ext>
             </a:extLst>
           </p:cNvPr>
@@ -14587,7 +14914,7 @@
           <p:cNvPr id="6" name="claim-title">
             <a:extLst xmlns:a="http://schemas.openxmlformats.org/drawingml/2006/main">
               <a:ext uri="{FF2B5EF4-FFF2-40B4-BE49-F238E27FC236}">
-                <a16:creationId xmlns:a16="http://schemas.microsoft.com/office/drawing/2014/main" id="{FD4C76CF-2FC7-4058-AC0C-081E24A444A0}"/>
+                <a16:creationId xmlns:a16="http://schemas.microsoft.com/office/drawing/2014/main" id="{75BD7209-56A8-4D81-B684-ED20457FFC95}"/>
               </a:ext>
             </a:extLst>
           </p:cNvPr>
@@ -14651,7 +14978,7 @@
           <p:cNvPr id="7" name="support-note">
             <a:extLst xmlns:a="http://schemas.openxmlformats.org/drawingml/2006/main">
               <a:ext uri="{FF2B5EF4-FFF2-40B4-BE49-F238E27FC236}">
-                <a16:creationId xmlns:a16="http://schemas.microsoft.com/office/drawing/2014/main" id="{01A9BC0E-DBDC-46B5-A46C-59EB4F48D5A1}"/>
+                <a16:creationId xmlns:a16="http://schemas.microsoft.com/office/drawing/2014/main" id="{CBD041CB-5F83-4C03-80AB-0E960DEAED15}"/>
               </a:ext>
             </a:extLst>
           </p:cNvPr>
@@ -14715,7 +15042,7 @@
           <p:cNvPr id="8" name="page-marker">
             <a:extLst xmlns:a="http://schemas.openxmlformats.org/drawingml/2006/main">
               <a:ext uri="{FF2B5EF4-FFF2-40B4-BE49-F238E27FC236}">
-                <a16:creationId xmlns:a16="http://schemas.microsoft.com/office/drawing/2014/main" id="{48EF2EBD-3AEF-4966-B13A-61C6D8DFF073}"/>
+                <a16:creationId xmlns:a16="http://schemas.microsoft.com/office/drawing/2014/main" id="{E8FD50A8-ED44-45F5-A9C5-987BD7FBC374}"/>
               </a:ext>
             </a:extLst>
           </p:cNvPr>
@@ -14779,7 +15106,7 @@
           <p:cNvPr id="9" name="">
             <a:extLst xmlns:a="http://schemas.openxmlformats.org/drawingml/2006/main">
               <a:ext uri="{FF2B5EF4-FFF2-40B4-BE49-F238E27FC236}">
-                <a16:creationId xmlns:a16="http://schemas.microsoft.com/office/drawing/2014/main" id="{81DF39C5-58BE-4646-82C3-3A30AAD8FE42}"/>
+                <a16:creationId xmlns:a16="http://schemas.microsoft.com/office/drawing/2014/main" id="{BF6A41AF-CD80-4D3D-813F-94AF4B6257FB}"/>
               </a:ext>
             </a:extLst>
           </p:cNvPr>
@@ -14816,7 +15143,7 @@
           <p:cNvPr id="10" name="">
             <a:extLst xmlns:a="http://schemas.openxmlformats.org/drawingml/2006/main">
               <a:ext uri="{FF2B5EF4-FFF2-40B4-BE49-F238E27FC236}">
-                <a16:creationId xmlns:a16="http://schemas.microsoft.com/office/drawing/2014/main" id="{60685E5D-9C19-4B33-9103-4EF83FAEAB56}"/>
+                <a16:creationId xmlns:a16="http://schemas.microsoft.com/office/drawing/2014/main" id="{8031C17F-2034-47F9-8C4C-7E4CD45BA61C}"/>
               </a:ext>
             </a:extLst>
           </p:cNvPr>
@@ -14880,7 +15207,7 @@
           <p:cNvPr id="11" name="">
             <a:extLst xmlns:a="http://schemas.openxmlformats.org/drawingml/2006/main">
               <a:ext uri="{FF2B5EF4-FFF2-40B4-BE49-F238E27FC236}">
-                <a16:creationId xmlns:a16="http://schemas.microsoft.com/office/drawing/2014/main" id="{02EE70E8-38B2-4726-B55E-EA8C968097DB}"/>
+                <a16:creationId xmlns:a16="http://schemas.microsoft.com/office/drawing/2014/main" id="{1EA26E4E-78D0-48B5-A618-D808B8FD07A9}"/>
               </a:ext>
             </a:extLst>
           </p:cNvPr>
@@ -14967,7 +15294,7 @@
           <p:cNvPr id="12" name="">
             <a:extLst xmlns:a="http://schemas.openxmlformats.org/drawingml/2006/main">
               <a:ext uri="{FF2B5EF4-FFF2-40B4-BE49-F238E27FC236}">
-                <a16:creationId xmlns:a16="http://schemas.microsoft.com/office/drawing/2014/main" id="{1A9F992D-1736-4A6F-953F-AB15E1E08B2D}"/>
+                <a16:creationId xmlns:a16="http://schemas.microsoft.com/office/drawing/2014/main" id="{BB63479D-9BD3-4CD7-A351-7AC59B90DA94}"/>
               </a:ext>
             </a:extLst>
           </p:cNvPr>
@@ -15004,7 +15331,7 @@
           <p:cNvPr id="13" name="">
             <a:extLst xmlns:a="http://schemas.openxmlformats.org/drawingml/2006/main">
               <a:ext uri="{FF2B5EF4-FFF2-40B4-BE49-F238E27FC236}">
-                <a16:creationId xmlns:a16="http://schemas.microsoft.com/office/drawing/2014/main" id="{5CCE8F82-E41C-491A-8FA8-670D4364CB08}"/>
+                <a16:creationId xmlns:a16="http://schemas.microsoft.com/office/drawing/2014/main" id="{AED480AD-8BAE-4C42-A21A-151C5F55E204}"/>
               </a:ext>
             </a:extLst>
           </p:cNvPr>
@@ -15068,7 +15395,7 @@
           <p:cNvPr id="14" name="">
             <a:extLst xmlns:a="http://schemas.openxmlformats.org/drawingml/2006/main">
               <a:ext uri="{FF2B5EF4-FFF2-40B4-BE49-F238E27FC236}">
-                <a16:creationId xmlns:a16="http://schemas.microsoft.com/office/drawing/2014/main" id="{CCC93DF4-8351-4C5C-9147-1FABD173E1F1}"/>
+                <a16:creationId xmlns:a16="http://schemas.microsoft.com/office/drawing/2014/main" id="{7490B6B6-A578-40D3-B14C-8678F35A6313}"/>
               </a:ext>
             </a:extLst>
           </p:cNvPr>
@@ -15155,7 +15482,7 @@
           <p:cNvPr id="15" name="">
             <a:extLst xmlns:a="http://schemas.openxmlformats.org/drawingml/2006/main">
               <a:ext uri="{FF2B5EF4-FFF2-40B4-BE49-F238E27FC236}">
-                <a16:creationId xmlns:a16="http://schemas.microsoft.com/office/drawing/2014/main" id="{4D765A52-907E-46F4-A3AF-56A14A38FD4A}"/>
+                <a16:creationId xmlns:a16="http://schemas.microsoft.com/office/drawing/2014/main" id="{BC75E1D4-E65D-47D9-9A56-F9B12746BECD}"/>
               </a:ext>
             </a:extLst>
           </p:cNvPr>
@@ -15192,7 +15519,7 @@
           <p:cNvPr id="16" name="">
             <a:extLst xmlns:a="http://schemas.openxmlformats.org/drawingml/2006/main">
               <a:ext uri="{FF2B5EF4-FFF2-40B4-BE49-F238E27FC236}">
-                <a16:creationId xmlns:a16="http://schemas.microsoft.com/office/drawing/2014/main" id="{6071F517-4C6A-464E-856B-D541E93DBD27}"/>
+                <a16:creationId xmlns:a16="http://schemas.microsoft.com/office/drawing/2014/main" id="{748EA299-D54B-4CDD-BFF0-8D2B15B1DFB3}"/>
               </a:ext>
             </a:extLst>
           </p:cNvPr>
@@ -15256,7 +15583,7 @@
           <p:cNvPr id="17" name="">
             <a:extLst xmlns:a="http://schemas.openxmlformats.org/drawingml/2006/main">
               <a:ext uri="{FF2B5EF4-FFF2-40B4-BE49-F238E27FC236}">
-                <a16:creationId xmlns:a16="http://schemas.microsoft.com/office/drawing/2014/main" id="{D1260947-8AD9-411F-A930-B30B719B5DAD}"/>
+                <a16:creationId xmlns:a16="http://schemas.microsoft.com/office/drawing/2014/main" id="{C5557005-6CE9-4217-8336-D958C5C92CD7}"/>
               </a:ext>
             </a:extLst>
           </p:cNvPr>
@@ -15366,7 +15693,7 @@
           <p:cNvPr id="18" name="">
             <a:extLst xmlns:a="http://schemas.openxmlformats.org/drawingml/2006/main">
               <a:ext uri="{FF2B5EF4-FFF2-40B4-BE49-F238E27FC236}">
-                <a16:creationId xmlns:a16="http://schemas.microsoft.com/office/drawing/2014/main" id="{DAD1696F-D5DF-4E22-9A1C-8152C11D6714}"/>
+                <a16:creationId xmlns:a16="http://schemas.microsoft.com/office/drawing/2014/main" id="{5BE50697-8A60-4F26-A2ED-AFABC9100666}"/>
               </a:ext>
             </a:extLst>
           </p:cNvPr>
@@ -15430,7 +15757,7 @@
           <p:cNvPr id="19" name="footer-note">
             <a:extLst xmlns:a="http://schemas.openxmlformats.org/drawingml/2006/main">
               <a:ext uri="{FF2B5EF4-FFF2-40B4-BE49-F238E27FC236}">
-                <a16:creationId xmlns:a16="http://schemas.microsoft.com/office/drawing/2014/main" id="{8863B4A9-DD4B-47E7-B8C3-63802EFA7342}"/>
+                <a16:creationId xmlns:a16="http://schemas.microsoft.com/office/drawing/2014/main" id="{45A960DE-8EDA-4003-99DC-35687A5164EE}"/>
               </a:ext>
             </a:extLst>
           </p:cNvPr>
@@ -15492,7 +15819,7 @@
     </p:spTree>
     <p:extLst>
       <p:ext uri="{BB962C8B-B14F-4D97-AF65-F5344CB8AC3E}">
-        <p14:creationId xmlns:p14="http://schemas.microsoft.com/office/powerpoint/2010/main" val="1874552973"/>
+        <p14:creationId xmlns:p14="http://schemas.microsoft.com/office/powerpoint/2010/main" val="981754821"/>
       </p:ext>
     </p:extLst>
   </p:cSld>
